--- a/public/documents/countries/egypte.pptx
+++ b/public/documents/countries/egypte.pptx
@@ -117,7 +117,7 @@
 </p:presentation>
 </file>
 
-<file path=ppt/charts/chart16.xml><?xml version="1.0" encoding="utf-8"?>
+<file path=ppt/charts/chart13.xml><?xml version="1.0" encoding="utf-8"?>
 <c:chartSpace xmlns:c="http://schemas.openxmlformats.org/drawingml/2006/chart" xmlns:a="http://schemas.openxmlformats.org/drawingml/2006/main" xmlns:r="http://schemas.openxmlformats.org/officeDocument/2006/relationships">
   <c:date1904 val="0"/>
   <c:roundedCorners val="1"/>
@@ -362,7 +362,7 @@
 </c:chartSpace>
 </file>
 
-<file path=ppt/charts/chart17.xml><?xml version="1.0" encoding="utf-8"?>
+<file path=ppt/charts/chart14.xml><?xml version="1.0" encoding="utf-8"?>
 <c:chartSpace xmlns:c="http://schemas.openxmlformats.org/drawingml/2006/chart" xmlns:a="http://schemas.openxmlformats.org/drawingml/2006/main" xmlns:r="http://schemas.openxmlformats.org/officeDocument/2006/relationships">
   <c:date1904 val="0"/>
   <c:roundedCorners val="1"/>
@@ -670,7 +670,7 @@
 </c:chartSpace>
 </file>
 
-<file path=ppt/charts/chart18.xml><?xml version="1.0" encoding="utf-8"?>
+<file path=ppt/charts/chart15.xml><?xml version="1.0" encoding="utf-8"?>
 <c:chartSpace xmlns:c="http://schemas.openxmlformats.org/drawingml/2006/chart" xmlns:a="http://schemas.openxmlformats.org/drawingml/2006/main" xmlns:r="http://schemas.openxmlformats.org/officeDocument/2006/relationships">
   <c:date1904 val="0"/>
   <c:roundedCorners val="1"/>
@@ -3360,7 +3360,7 @@
                 <a:ea typeface="Arial" pitchFamily="34" charset="-122"/>
                 <a:cs typeface="Arial" pitchFamily="34" charset="-120"/>
               </a:rPr>
-              <a:t>تحليل الأكريلاميد (مختبر Polymex، ISO 9001) وفحص REACH / SVHC (SGS) متاحان عند الطلب، إضافة إلى شهادة SOHISCERT السارية المفعول.</a:t>
+              <a:t>تحليل الأكريلاميد (مختبر Polymex، ISO 9001، بتركيز أقل من 3,0 ميكروغرام/غرام) وفحص REACH / SVHC (SGS) وشهادة SOHISCERT السارية حتى 4 سبتمبر 2027: متاحة جميعها عند الطلب.</a:t>
             </a:r>
             <a:endParaRPr lang="en-US" sz="1100" dirty="0"/>
           </a:p>

--- a/public/documents/countries/egypte.pptx
+++ b/public/documents/countries/egypte.pptx
@@ -117,7 +117,7 @@
 </p:presentation>
 </file>
 
-<file path=ppt/charts/chart13.xml><?xml version="1.0" encoding="utf-8"?>
+<file path=ppt/charts/chart16.xml><?xml version="1.0" encoding="utf-8"?>
 <c:chartSpace xmlns:c="http://schemas.openxmlformats.org/drawingml/2006/chart" xmlns:a="http://schemas.openxmlformats.org/drawingml/2006/main" xmlns:r="http://schemas.openxmlformats.org/officeDocument/2006/relationships">
   <c:date1904 val="0"/>
   <c:roundedCorners val="1"/>
@@ -362,7 +362,7 @@
 </c:chartSpace>
 </file>
 
-<file path=ppt/charts/chart14.xml><?xml version="1.0" encoding="utf-8"?>
+<file path=ppt/charts/chart17.xml><?xml version="1.0" encoding="utf-8"?>
 <c:chartSpace xmlns:c="http://schemas.openxmlformats.org/drawingml/2006/chart" xmlns:a="http://schemas.openxmlformats.org/drawingml/2006/main" xmlns:r="http://schemas.openxmlformats.org/officeDocument/2006/relationships">
   <c:date1904 val="0"/>
   <c:roundedCorners val="1"/>
@@ -670,7 +670,7 @@
 </c:chartSpace>
 </file>
 
-<file path=ppt/charts/chart15.xml><?xml version="1.0" encoding="utf-8"?>
+<file path=ppt/charts/chart18.xml><?xml version="1.0" encoding="utf-8"?>
 <c:chartSpace xmlns:c="http://schemas.openxmlformats.org/drawingml/2006/chart" xmlns:a="http://schemas.openxmlformats.org/drawingml/2006/main" xmlns:r="http://schemas.openxmlformats.org/officeDocument/2006/relationships">
   <c:date1904 val="0"/>
   <c:roundedCorners val="1"/>
@@ -2650,6 +2650,13 @@
 <file path=ppt/slides/slide1.xml><?xml version="1.0" encoding="utf-8"?>
 <p:sld xmlns:a="http://schemas.openxmlformats.org/drawingml/2006/main" xmlns:r="http://schemas.openxmlformats.org/officeDocument/2006/relationships" xmlns:p="http://schemas.openxmlformats.org/presentationml/2006/main">
   <p:cSld name="Slide 1">
+    <p:bg>
+      <p:bgPr>
+        <a:solidFill>
+          <a:srgbClr val="0D0D0D"/>
+        </a:solidFill>
+      </p:bgPr>
+    </p:bg>
     <p:spTree>
       <p:nvGrpSpPr>
         <p:cNvPr id="1" name=""/>
@@ -2681,7 +2688,7 @@
         <p:spPr>
           <a:xfrm>
             <a:off x="0" y="0"/>
-            <a:ext cx="12191695" cy="6858000"/>
+            <a:ext cx="5918911" cy="6858000"/>
           </a:xfrm>
           <a:prstGeom prst="rect">
             <a:avLst/>
@@ -2690,14 +2697,34 @@
       </p:pic>
       <p:sp>
         <p:nvSpPr>
-          <p:cNvPr id="3" name="Text 0"/>
-          <p:cNvSpPr txBox="1"/>
-          <p:nvPr/>
-        </p:nvSpPr>
-        <p:spPr>
-          <a:xfrm>
-            <a:off x="777240" y="1965960"/>
-            <a:ext cx="10058400" cy="320040"/>
+          <p:cNvPr id="3" name="Shape 0"/>
+          <p:cNvSpPr/>
+          <p:nvPr/>
+        </p:nvSpPr>
+        <p:spPr>
+          <a:xfrm>
+            <a:off x="5918911" y="0"/>
+            <a:ext cx="6272784" cy="6858000"/>
+          </a:xfrm>
+          <a:prstGeom prst="rect">
+            <a:avLst/>
+          </a:prstGeom>
+          <a:solidFill>
+            <a:srgbClr val="0D0D0D"/>
+          </a:solidFill>
+          <a:ln/>
+        </p:spPr>
+      </p:sp>
+      <p:sp>
+        <p:nvSpPr>
+          <p:cNvPr id="4" name="Text 1"/>
+          <p:cNvSpPr txBox="1"/>
+          <p:nvPr/>
+        </p:nvSpPr>
+        <p:spPr>
+          <a:xfrm>
+            <a:off x="6577279" y="566928"/>
+            <a:ext cx="4041648" cy="292608"/>
           </a:xfrm>
           <a:prstGeom prst="rect">
             <a:avLst/>
@@ -2713,114 +2740,242 @@
               <a:buNone/>
             </a:pPr>
             <a:r>
-              <a:rPr lang="en-US" sz="1300" b="1" spc="250" kern="0" dirty="0">
-                <a:solidFill>
-                  <a:srgbClr val="E0A33E"/>
-                </a:solidFill>
-                <a:latin typeface="Arial" pitchFamily="34" charset="0"/>
-                <a:ea typeface="Arial" pitchFamily="34" charset="-122"/>
-                <a:cs typeface="Arial" pitchFamily="34" charset="-120"/>
-              </a:rPr>
-              <a:t>دراسة سوق</a:t>
-            </a:r>
-            <a:endParaRPr lang="en-US" sz="1300" dirty="0"/>
-          </a:p>
-        </p:txBody>
-      </p:sp>
-      <p:sp>
-        <p:nvSpPr>
-          <p:cNvPr id="4" name="Text 1"/>
-          <p:cNvSpPr txBox="1"/>
-          <p:nvPr/>
-        </p:nvSpPr>
-        <p:spPr>
-          <a:xfrm>
-            <a:off x="777240" y="2377440"/>
-            <a:ext cx="10241280" cy="1371600"/>
-          </a:xfrm>
-          <a:prstGeom prst="rect">
-            <a:avLst/>
-          </a:prstGeom>
-          <a:noFill/>
-          <a:ln/>
-        </p:spPr>
-        <p:txBody>
-          <a:bodyPr wrap="square" lIns="0" tIns="0" rIns="0" bIns="0" rtlCol="0" anchor="ctr"/>
-          <a:lstStyle/>
-          <a:p>
-            <a:pPr rtl="1" algn="r" indent="0" marL="0">
-              <a:buNone/>
-            </a:pPr>
-            <a:r>
-              <a:rPr lang="en-US" sz="4200" b="1" dirty="0">
-                <a:solidFill>
-                  <a:srgbClr val="FFFFFF"/>
-                </a:solidFill>
-                <a:latin typeface="Arial" pitchFamily="34" charset="0"/>
-                <a:ea typeface="Arial" pitchFamily="34" charset="-122"/>
-                <a:cs typeface="Arial" pitchFamily="34" charset="-120"/>
-              </a:rPr>
-              <a:t>مصر</a:t>
-            </a:r>
-            <a:endParaRPr lang="en-US" sz="4200" dirty="0"/>
-          </a:p>
-        </p:txBody>
-      </p:sp>
-      <p:sp>
-        <p:nvSpPr>
-          <p:cNvPr id="5" name="Text 2"/>
-          <p:cNvSpPr txBox="1"/>
-          <p:nvPr/>
-        </p:nvSpPr>
-        <p:spPr>
-          <a:xfrm>
-            <a:off x="777240" y="3840480"/>
-            <a:ext cx="8686800" cy="822960"/>
-          </a:xfrm>
-          <a:prstGeom prst="rect">
-            <a:avLst/>
-          </a:prstGeom>
-          <a:noFill/>
-          <a:ln/>
-        </p:spPr>
-        <p:txBody>
-          <a:bodyPr wrap="square" lIns="0" tIns="0" rIns="0" bIns="0" rtlCol="0" anchor="ctr"/>
+              <a:rPr lang="en-US" sz="1100" b="1" spc="80" kern="0" dirty="0">
+                <a:solidFill>
+                  <a:srgbClr val="8BC34A"/>
+                </a:solidFill>
+                <a:latin typeface="Arial" pitchFamily="34" charset="0"/>
+                <a:ea typeface="Arial" pitchFamily="34" charset="-122"/>
+                <a:cs typeface="Arial" pitchFamily="34" charset="-120"/>
+              </a:rPr>
+              <a:t>GREEN SOLUTIONS GROUP</a:t>
+            </a:r>
+            <a:endParaRPr lang="en-US" sz="1100" dirty="0"/>
+          </a:p>
+        </p:txBody>
+      </p:sp>
+      <p:pic>
+        <p:nvPicPr>
+          <p:cNvPr id="5" name="Image 1" descr="C:\Users\Utilisateur\dev\green-solutions-web\public\images\logo-icon.png">    </p:cNvPr>
+          <p:cNvPicPr>
+            <a:picLocks noChangeAspect="1"/>
+          </p:cNvPicPr>
+          <p:nvPr/>
+        </p:nvPicPr>
+        <p:blipFill>
+          <a:blip r:embed="rId2"/>
+          <a:stretch>
+            <a:fillRect/>
+          </a:stretch>
+        </p:blipFill>
+        <p:spPr>
+          <a:xfrm>
+            <a:off x="6577279" y="457200"/>
+            <a:ext cx="603504" cy="603504"/>
+          </a:xfrm>
+          <a:prstGeom prst="rect">
+            <a:avLst/>
+          </a:prstGeom>
+        </p:spPr>
+      </p:pic>
+      <p:pic>
+        <p:nvPicPr>
+          <p:cNvPr id="6" name="Image 2" descr="C:\Users\Utilisateur\dev\green-solutions-web\scripts\dossiers\drapeaux\egypte.png">    </p:cNvPr>
+          <p:cNvPicPr>
+            <a:picLocks noChangeAspect="1"/>
+          </p:cNvPicPr>
+          <p:nvPr/>
+        </p:nvPicPr>
+        <p:blipFill>
+          <a:blip r:embed="rId3"/>
+          <a:stretch>
+            <a:fillRect/>
+          </a:stretch>
+        </p:blipFill>
+        <p:spPr>
+          <a:xfrm>
+            <a:off x="6577279" y="1389888"/>
+            <a:ext cx="1965960" cy="1310640"/>
+          </a:xfrm>
+          <a:prstGeom prst="rect">
+            <a:avLst/>
+          </a:prstGeom>
+        </p:spPr>
+      </p:pic>
+      <p:sp>
+        <p:nvSpPr>
+          <p:cNvPr id="7" name="Shape 2"/>
+          <p:cNvSpPr/>
+          <p:nvPr/>
+        </p:nvSpPr>
+        <p:spPr>
+          <a:xfrm>
+            <a:off x="6577279" y="1389888"/>
+            <a:ext cx="1965960" cy="1310640"/>
+          </a:xfrm>
+          <a:prstGeom prst="rect">
+            <a:avLst/>
+          </a:prstGeom>
+          <a:ln w="9525">
+            <a:solidFill>
+              <a:srgbClr val="3A3A3A"/>
+            </a:solidFill>
+            <a:prstDash val="solid"/>
+          </a:ln>
+        </p:spPr>
+      </p:sp>
+      <p:sp>
+        <p:nvSpPr>
+          <p:cNvPr id="8" name="Text 3"/>
+          <p:cNvSpPr txBox="1"/>
+          <p:nvPr/>
+        </p:nvSpPr>
+        <p:spPr>
+          <a:xfrm>
+            <a:off x="8771839" y="1298448"/>
+            <a:ext cx="2761488" cy="1234440"/>
+          </a:xfrm>
+          <a:prstGeom prst="rect">
+            <a:avLst/>
+          </a:prstGeom>
+          <a:noFill/>
+          <a:ln/>
+        </p:spPr>
+        <p:txBody>
+          <a:bodyPr wrap="square" lIns="0" tIns="0" rIns="0" bIns="0" rtlCol="0" anchor="t"/>
           <a:lstStyle/>
           <a:p>
             <a:pPr rtl="1" algn="r" indent="0" marL="0">
               <a:lnSpc>
-                <a:spcPct val="125000"/>
+                <a:spcPct val="110000"/>
               </a:lnSpc>
               <a:buNone/>
             </a:pPr>
             <a:r>
-              <a:rPr lang="en-US" sz="1600" dirty="0">
-                <a:solidFill>
-                  <a:srgbClr val="FFFFFF">
-                    <a:alpha val="88000"/>
-                  </a:srgbClr>
-                </a:solidFill>
-                <a:latin typeface="Arial" pitchFamily="34" charset="0"/>
-                <a:ea typeface="Arial" pitchFamily="34" charset="-122"/>
-                <a:cs typeface="Arial" pitchFamily="34" charset="-120"/>
-              </a:rPr>
-              <a:t>زراعة مروية بالكامل تعتمد على نهر واحد وحصة مائية ثابتة.</a:t>
+              <a:rPr lang="en-US" sz="2800" b="1" dirty="0">
+                <a:solidFill>
+                  <a:srgbClr val="FFFFFF"/>
+                </a:solidFill>
+                <a:latin typeface="Arial" pitchFamily="34" charset="0"/>
+                <a:ea typeface="Arial" pitchFamily="34" charset="-122"/>
+                <a:cs typeface="Arial" pitchFamily="34" charset="-120"/>
+              </a:rPr>
+              <a:t>جمهورية مصر العربية</a:t>
+            </a:r>
+            <a:endParaRPr lang="en-US" sz="2800" dirty="0"/>
+          </a:p>
+        </p:txBody>
+      </p:sp>
+      <p:sp>
+        <p:nvSpPr>
+          <p:cNvPr id="9" name="Shape 4"/>
+          <p:cNvSpPr/>
+          <p:nvPr/>
+        </p:nvSpPr>
+        <p:spPr>
+          <a:xfrm>
+            <a:off x="8744407" y="2889504"/>
+            <a:ext cx="2788920" cy="45720"/>
+          </a:xfrm>
+          <a:prstGeom prst="rect">
+            <a:avLst/>
+          </a:prstGeom>
+          <a:solidFill>
+            <a:srgbClr val="E0A33E"/>
+          </a:solidFill>
+          <a:ln/>
+        </p:spPr>
+      </p:sp>
+      <p:sp>
+        <p:nvSpPr>
+          <p:cNvPr id="10" name="Text 5"/>
+          <p:cNvSpPr txBox="1"/>
+          <p:nvPr/>
+        </p:nvSpPr>
+        <p:spPr>
+          <a:xfrm>
+            <a:off x="6577279" y="3163824"/>
+            <a:ext cx="4956048" cy="384048"/>
+          </a:xfrm>
+          <a:prstGeom prst="rect">
+            <a:avLst/>
+          </a:prstGeom>
+          <a:noFill/>
+          <a:ln/>
+        </p:spPr>
+        <p:txBody>
+          <a:bodyPr wrap="square" lIns="0" tIns="0" rIns="0" bIns="0" rtlCol="0" anchor="ctr"/>
+          <a:lstStyle/>
+          <a:p>
+            <a:pPr rtl="1" algn="r" indent="0" marL="0">
+              <a:buNone/>
+            </a:pPr>
+            <a:r>
+              <a:rPr lang="en-US" sz="1600" b="1" dirty="0">
+                <a:solidFill>
+                  <a:srgbClr val="E0A33E"/>
+                </a:solidFill>
+                <a:latin typeface="Arial" pitchFamily="34" charset="0"/>
+                <a:ea typeface="Arial" pitchFamily="34" charset="-122"/>
+                <a:cs typeface="Arial" pitchFamily="34" charset="-120"/>
+              </a:rPr>
+              <a:t>القاهرة · 2026</a:t>
             </a:r>
             <a:endParaRPr lang="en-US" sz="1600" dirty="0"/>
           </a:p>
+        </p:txBody>
+      </p:sp>
+      <p:sp>
+        <p:nvSpPr>
+          <p:cNvPr id="11" name="Text 6"/>
+          <p:cNvSpPr txBox="1"/>
+          <p:nvPr/>
+        </p:nvSpPr>
+        <p:spPr>
+          <a:xfrm>
+            <a:off x="6577279" y="3767328"/>
+            <a:ext cx="4956048" cy="914400"/>
+          </a:xfrm>
+          <a:prstGeom prst="rect">
+            <a:avLst/>
+          </a:prstGeom>
+          <a:noFill/>
+          <a:ln/>
+        </p:spPr>
+        <p:txBody>
+          <a:bodyPr wrap="square" lIns="0" tIns="0" rIns="0" bIns="0" rtlCol="0" anchor="t"/>
+          <a:lstStyle/>
           <a:p>
             <a:pPr rtl="1" algn="r" indent="0" marL="0">
               <a:lnSpc>
-                <a:spcPct val="125000"/>
+                <a:spcPct val="128000"/>
               </a:lnSpc>
               <a:buNone/>
             </a:pPr>
             <a:r>
-              <a:rPr lang="en-US" sz="1600" dirty="0">
-                <a:solidFill>
-                  <a:srgbClr val="FFFFFF">
-                    <a:alpha val="88000"/>
-                  </a:srgbClr>
+              <a:rPr lang="en-US" sz="1450" dirty="0">
+                <a:solidFill>
+                  <a:srgbClr val="FFFFFF"/>
+                </a:solidFill>
+                <a:latin typeface="Arial" pitchFamily="34" charset="0"/>
+                <a:ea typeface="Arial" pitchFamily="34" charset="-122"/>
+                <a:cs typeface="Arial" pitchFamily="34" charset="-120"/>
+              </a:rPr>
+              <a:t>زراعة مروية بالكامل تعتمد على نهر واحد وحصة مائية ثابتة.</a:t>
+            </a:r>
+            <a:endParaRPr lang="en-US" sz="1450" dirty="0"/>
+          </a:p>
+          <a:p>
+            <a:pPr rtl="1" algn="r" indent="0" marL="0">
+              <a:lnSpc>
+                <a:spcPct val="128000"/>
+              </a:lnSpc>
+              <a:buNone/>
+            </a:pPr>
+            <a:r>
+              <a:rPr lang="en-US" sz="1450" dirty="0">
+                <a:solidFill>
+                  <a:srgbClr val="FFFFFF"/>
                 </a:solidFill>
                 <a:latin typeface="Arial" pitchFamily="34" charset="0"/>
                 <a:ea typeface="Arial" pitchFamily="34" charset="-122"/>
@@ -2828,20 +2983,20 @@
               </a:rPr>
               <a:t>ما الذي يغيّره احتباس الماء في التربة لمنتج يصدّر إلى أوروبا والخليج.</a:t>
             </a:r>
-            <a:endParaRPr lang="en-US" sz="1600" dirty="0"/>
-          </a:p>
-        </p:txBody>
-      </p:sp>
-      <p:sp>
-        <p:nvSpPr>
-          <p:cNvPr id="6" name="Text 3"/>
-          <p:cNvSpPr txBox="1"/>
-          <p:nvPr/>
-        </p:nvSpPr>
-        <p:spPr>
-          <a:xfrm>
-            <a:off x="777240" y="5989320"/>
-            <a:ext cx="10058400" cy="320040"/>
+            <a:endParaRPr lang="en-US" sz="1450" dirty="0"/>
+          </a:p>
+        </p:txBody>
+      </p:sp>
+      <p:sp>
+        <p:nvSpPr>
+          <p:cNvPr id="12" name="Text 7"/>
+          <p:cNvSpPr txBox="1"/>
+          <p:nvPr/>
+        </p:nvSpPr>
+        <p:spPr>
+          <a:xfrm>
+            <a:off x="6577279" y="4892040"/>
+            <a:ext cx="4956048" cy="347472"/>
           </a:xfrm>
           <a:prstGeom prst="rect">
             <a:avLst/>
@@ -2857,19 +3012,56 @@
               <a:buNone/>
             </a:pPr>
             <a:r>
-              <a:rPr lang="en-US" sz="1100" dirty="0">
-                <a:solidFill>
-                  <a:srgbClr val="FFFFFF">
-                    <a:alpha val="65000"/>
-                  </a:srgbClr>
-                </a:solidFill>
-                <a:latin typeface="Arial" pitchFamily="34" charset="0"/>
-                <a:ea typeface="Arial" pitchFamily="34" charset="-122"/>
-                <a:cs typeface="Arial" pitchFamily="34" charset="-120"/>
-              </a:rPr>
-              <a:t>Green Solutions · contact@evergreen-ecosorb.com</a:t>
+              <a:rPr lang="en-US" sz="1100" b="1" dirty="0">
+                <a:solidFill>
+                  <a:srgbClr val="8BC34A"/>
+                </a:solidFill>
+                <a:latin typeface="Arial" pitchFamily="34" charset="0"/>
+                <a:ea typeface="Arial" pitchFamily="34" charset="-122"/>
+                <a:cs typeface="Arial" pitchFamily="34" charset="-120"/>
+              </a:rPr>
+              <a:t>ECOSORB® · ECOFERT® · NAPEMA® · PAULOWNIA</a:t>
             </a:r>
             <a:endParaRPr lang="en-US" sz="1100" dirty="0"/>
+          </a:p>
+        </p:txBody>
+      </p:sp>
+      <p:sp>
+        <p:nvSpPr>
+          <p:cNvPr id="13" name="Text 8"/>
+          <p:cNvSpPr txBox="1"/>
+          <p:nvPr/>
+        </p:nvSpPr>
+        <p:spPr>
+          <a:xfrm>
+            <a:off x="6577279" y="6053328"/>
+            <a:ext cx="4956048" cy="310896"/>
+          </a:xfrm>
+          <a:prstGeom prst="rect">
+            <a:avLst/>
+          </a:prstGeom>
+          <a:noFill/>
+          <a:ln/>
+        </p:spPr>
+        <p:txBody>
+          <a:bodyPr wrap="square" lIns="0" tIns="0" rIns="0" bIns="0" rtlCol="0" anchor="ctr"/>
+          <a:lstStyle/>
+          <a:p>
+            <a:pPr rtl="1" algn="r" indent="0" marL="0">
+              <a:buNone/>
+            </a:pPr>
+            <a:r>
+              <a:rPr lang="en-US" sz="850" dirty="0">
+                <a:solidFill>
+                  <a:srgbClr val="9A9A9A"/>
+                </a:solidFill>
+                <a:latin typeface="Arial" pitchFamily="34" charset="0"/>
+                <a:ea typeface="Arial" pitchFamily="34" charset="-122"/>
+                <a:cs typeface="Arial" pitchFamily="34" charset="-120"/>
+              </a:rPr>
+              <a:t>سبتمبر 2026 · وثيقة سرية · للاستخدام الحصري للمرسل إليه</a:t>
+            </a:r>
+            <a:endParaRPr lang="en-US" sz="850" dirty="0"/>
           </a:p>
         </p:txBody>
       </p:sp>

--- a/public/documents/countries/egypte.pptx
+++ b/public/documents/countries/egypte.pptx
@@ -117,7 +117,7 @@
 </p:presentation>
 </file>
 
-<file path=ppt/charts/chart16.xml><?xml version="1.0" encoding="utf-8"?>
+<file path=ppt/charts/chart19.xml><?xml version="1.0" encoding="utf-8"?>
 <c:chartSpace xmlns:c="http://schemas.openxmlformats.org/drawingml/2006/chart" xmlns:a="http://schemas.openxmlformats.org/drawingml/2006/main" xmlns:r="http://schemas.openxmlformats.org/officeDocument/2006/relationships">
   <c:date1904 val="0"/>
   <c:roundedCorners val="1"/>
@@ -362,7 +362,7 @@
 </c:chartSpace>
 </file>
 
-<file path=ppt/charts/chart17.xml><?xml version="1.0" encoding="utf-8"?>
+<file path=ppt/charts/chart20.xml><?xml version="1.0" encoding="utf-8"?>
 <c:chartSpace xmlns:c="http://schemas.openxmlformats.org/drawingml/2006/chart" xmlns:a="http://schemas.openxmlformats.org/drawingml/2006/main" xmlns:r="http://schemas.openxmlformats.org/officeDocument/2006/relationships">
   <c:date1904 val="0"/>
   <c:roundedCorners val="1"/>
@@ -670,7 +670,7 @@
 </c:chartSpace>
 </file>
 
-<file path=ppt/charts/chart18.xml><?xml version="1.0" encoding="utf-8"?>
+<file path=ppt/charts/chart21.xml><?xml version="1.0" encoding="utf-8"?>
 <c:chartSpace xmlns:c="http://schemas.openxmlformats.org/drawingml/2006/chart" xmlns:a="http://schemas.openxmlformats.org/drawingml/2006/main" xmlns:r="http://schemas.openxmlformats.org/officeDocument/2006/relationships">
   <c:date1904 val="0"/>
   <c:roundedCorners val="1"/>
@@ -3842,9 +3842,35 @@
           </a:p>
         </p:txBody>
       </p:sp>
-      <p:sp>
-        <p:nvSpPr>
-          <p:cNvPr id="6" name="Text 3"/>
+      <p:pic>
+        <p:nvPicPr>
+          <p:cNvPr id="6" name="Image 1" descr="C:\Users\Utilisateur\dev\green-solutions-web\scripts\dossiers\sceau-aim-clair.png">    </p:cNvPr>
+          <p:cNvPicPr>
+            <a:picLocks noChangeAspect="1"/>
+          </p:cNvPicPr>
+          <p:nvPr/>
+        </p:nvPicPr>
+        <p:blipFill>
+          <a:blip r:embed="rId2">
+            <a:alphaModFix amt="85000"/>
+          </a:blip>
+          <a:stretch>
+            <a:fillRect/>
+          </a:stretch>
+        </p:blipFill>
+        <p:spPr>
+          <a:xfrm>
+            <a:off x="502920" y="5193792"/>
+            <a:ext cx="1051560" cy="1051560"/>
+          </a:xfrm>
+          <a:prstGeom prst="rect">
+            <a:avLst/>
+          </a:prstGeom>
+        </p:spPr>
+      </p:pic>
+      <p:sp>
+        <p:nvSpPr>
+          <p:cNvPr id="7" name="Text 3"/>
           <p:cNvSpPr txBox="1"/>
           <p:nvPr/>
         </p:nvSpPr>
@@ -3885,7 +3911,7 @@
       </p:sp>
       <p:sp>
         <p:nvSpPr>
-          <p:cNvPr id="7" name="Text 4"/>
+          <p:cNvPr id="8" name="Text 4"/>
           <p:cNvSpPr txBox="1"/>
           <p:nvPr/>
         </p:nvSpPr>

--- a/public/documents/countries/egypte.pptx
+++ b/public/documents/countries/egypte.pptx
@@ -16,9 +16,16 @@
     <p:sldId id="264" r:id="rId10"/>
     <p:sldId id="265" r:id="rId11"/>
     <p:sldId id="266" r:id="rId12"/>
+    <p:sldId id="267" r:id="rId13"/>
+    <p:sldId id="268" r:id="rId14"/>
+    <p:sldId id="269" r:id="rId15"/>
+    <p:sldId id="270" r:id="rId16"/>
+    <p:sldId id="271" r:id="rId17"/>
+    <p:sldId id="272" r:id="rId18"/>
+    <p:sldId id="273" r:id="rId19"/>
   </p:sldIdLst>
   <p:notesMasterIdLst>
-    <p:notesMasterId r:id="rId13"/>
+    <p:notesMasterId r:id="rId20"/>
   </p:notesMasterIdLst>
   <p:sldSz cx="12192000" cy="6858000"/>
   <p:notesSz cx="6858000" cy="12192000"/>
@@ -117,7 +124,7 @@
 </p:presentation>
 </file>
 
-<file path=ppt/charts/chart19.xml><?xml version="1.0" encoding="utf-8"?>
+<file path=ppt/charts/chart25.xml><?xml version="1.0" encoding="utf-8"?>
 <c:chartSpace xmlns:c="http://schemas.openxmlformats.org/drawingml/2006/chart" xmlns:a="http://schemas.openxmlformats.org/drawingml/2006/main" xmlns:r="http://schemas.openxmlformats.org/officeDocument/2006/relationships">
   <c:date1904 val="0"/>
   <c:roundedCorners val="1"/>
@@ -362,7 +369,7 @@
 </c:chartSpace>
 </file>
 
-<file path=ppt/charts/chart20.xml><?xml version="1.0" encoding="utf-8"?>
+<file path=ppt/charts/chart26.xml><?xml version="1.0" encoding="utf-8"?>
 <c:chartSpace xmlns:c="http://schemas.openxmlformats.org/drawingml/2006/chart" xmlns:a="http://schemas.openxmlformats.org/drawingml/2006/main" xmlns:r="http://schemas.openxmlformats.org/officeDocument/2006/relationships">
   <c:date1904 val="0"/>
   <c:roundedCorners val="1"/>
@@ -670,7 +677,372 @@
 </c:chartSpace>
 </file>
 
-<file path=ppt/charts/chart21.xml><?xml version="1.0" encoding="utf-8"?>
+<file path=ppt/charts/chart27.xml><?xml version="1.0" encoding="utf-8"?>
+<c:chartSpace xmlns:c="http://schemas.openxmlformats.org/drawingml/2006/chart" xmlns:a="http://schemas.openxmlformats.org/drawingml/2006/main" xmlns:r="http://schemas.openxmlformats.org/officeDocument/2006/relationships">
+  <c:date1904 val="0"/>
+  <c:roundedCorners val="1"/>
+  <c:chart>
+    <c:autoTitleDeleted val="1"/>
+    <c:plotArea>
+      <c:layout/>
+      <c:barChart>
+        <c:barDir val="col"/>
+        <c:grouping val="clustered"/>
+        <c:varyColors val="0"/>
+        <c:ser>
+          <c:idx val="0"/>
+          <c:order val="0"/>
+          <c:tx>
+            <c:strRef>
+              <c:f>Sheet1!$B$1</c:f>
+              <c:strCache>
+                <c:ptCount val="1"/>
+                <c:pt idx="0">
+                  <c:v>الحد الأدنى (%)</c:v>
+                </c:pt>
+              </c:strCache>
+            </c:strRef>
+          </c:tx>
+          <c:spPr>
+            <a:solidFill>
+              <a:srgbClr val="1C5A73"/>
+            </a:solidFill>
+            <a:effectLst/>
+          </c:spPr>
+          <c:invertIfNegative val="0"/>
+          <c:dLbls>
+            <c:numFmt formatCode="[$-401]0&quot;%&quot;" sourceLinked="0"/>
+            <c:txPr>
+              <a:bodyPr/>
+              <a:lstStyle/>
+              <a:p>
+                <a:pPr>
+                  <a:defRPr b="0" i="0" strike="noStrike" sz="1100" u="none">
+                    <a:solidFill>
+                      <a:srgbClr val="0E3546"/>
+                    </a:solidFill>
+                    <a:latin typeface="Arial"/>
+                  </a:defRPr>
+                </a:pPr>
+              </a:p>
+            </c:txPr>
+            <c:showLegendKey val="0"/>
+            <c:showVal val="1"/>
+            <c:showCatName val="0"/>
+            <c:showSerName val="0"/>
+            <c:showPercent val="0"/>
+            <c:showBubbleSize val="0"/>
+            <c:showLeaderLines val="0"/>
+          </c:dLbls>
+          <c:cat>
+            <c:multiLvlStrRef>
+              <c:f>Sheet1!$A$2:$A$6</c:f>
+              <c:multiLvlStrCache>
+                <c:ptCount val="5"/>
+                <c:lvl>
+                  <c:pt idx="0">
+                    <c:v>الطماطم</c:v>
+                  </c:pt>
+                  <c:pt idx="1">
+                    <c:v>البطاطس</c:v>
+                  </c:pt>
+                  <c:pt idx="2">
+                    <c:v>الحمضيات</c:v>
+                  </c:pt>
+                  <c:pt idx="3">
+                    <c:v>العنب</c:v>
+                  </c:pt>
+                  <c:pt idx="4">
+                    <c:v>قصب السكر</c:v>
+                  </c:pt>
+                </c:lvl>
+              </c:multiLvlStrCache>
+            </c:multiLvlStrRef>
+          </c:cat>
+          <c:val>
+            <c:numRef>
+              <c:f>Sheet1!$B$2:$B$6</c:f>
+              <c:numCache>
+                <c:formatCode>General</c:formatCode>
+                <c:ptCount val="5"/>
+                <c:pt idx="0">
+                  <c:v>30</c:v>
+                </c:pt>
+                <c:pt idx="1">
+                  <c:v>20</c:v>
+                </c:pt>
+                <c:pt idx="2">
+                  <c:v>20</c:v>
+                </c:pt>
+                <c:pt idx="3">
+                  <c:v>20</c:v>
+                </c:pt>
+                <c:pt idx="4">
+                  <c:v>10</c:v>
+                </c:pt>
+              </c:numCache>
+            </c:numRef>
+          </c:val>
+        </c:ser>
+        <c:ser>
+          <c:idx val="1"/>
+          <c:order val="1"/>
+          <c:tx>
+            <c:strRef>
+              <c:f>Sheet1!$C$1</c:f>
+              <c:strCache>
+                <c:ptCount val="1"/>
+                <c:pt idx="0">
+                  <c:v>الحد الأعلى (%)</c:v>
+                </c:pt>
+              </c:strCache>
+            </c:strRef>
+          </c:tx>
+          <c:spPr>
+            <a:solidFill>
+              <a:srgbClr val="E0A33E"/>
+            </a:solidFill>
+            <a:effectLst/>
+          </c:spPr>
+          <c:invertIfNegative val="0"/>
+          <c:dLbls>
+            <c:numFmt formatCode="[$-401]0&quot;%&quot;" sourceLinked="0"/>
+            <c:txPr>
+              <a:bodyPr/>
+              <a:lstStyle/>
+              <a:p>
+                <a:pPr>
+                  <a:defRPr b="0" i="0" strike="noStrike" sz="1100" u="none">
+                    <a:solidFill>
+                      <a:srgbClr val="0E3546"/>
+                    </a:solidFill>
+                    <a:latin typeface="Arial"/>
+                  </a:defRPr>
+                </a:pPr>
+              </a:p>
+            </c:txPr>
+            <c:showLegendKey val="0"/>
+            <c:showVal val="1"/>
+            <c:showCatName val="0"/>
+            <c:showSerName val="0"/>
+            <c:showPercent val="0"/>
+            <c:showBubbleSize val="0"/>
+            <c:showLeaderLines val="0"/>
+          </c:dLbls>
+          <c:cat>
+            <c:multiLvlStrRef>
+              <c:f>Sheet1!$A$2:$A$6</c:f>
+              <c:multiLvlStrCache>
+                <c:ptCount val="5"/>
+                <c:lvl>
+                  <c:pt idx="0">
+                    <c:v>الطماطم</c:v>
+                  </c:pt>
+                  <c:pt idx="1">
+                    <c:v>البطاطس</c:v>
+                  </c:pt>
+                  <c:pt idx="2">
+                    <c:v>الحمضيات</c:v>
+                  </c:pt>
+                  <c:pt idx="3">
+                    <c:v>العنب</c:v>
+                  </c:pt>
+                  <c:pt idx="4">
+                    <c:v>قصب السكر</c:v>
+                  </c:pt>
+                </c:lvl>
+              </c:multiLvlStrCache>
+            </c:multiLvlStrRef>
+          </c:cat>
+          <c:val>
+            <c:numRef>
+              <c:f>Sheet1!$C$2:$C$6</c:f>
+              <c:numCache>
+                <c:formatCode>General</c:formatCode>
+                <c:ptCount val="5"/>
+                <c:pt idx="0">
+                  <c:v>50</c:v>
+                </c:pt>
+                <c:pt idx="1">
+                  <c:v>40</c:v>
+                </c:pt>
+                <c:pt idx="2">
+                  <c:v>40</c:v>
+                </c:pt>
+                <c:pt idx="3">
+                  <c:v>40</c:v>
+                </c:pt>
+                <c:pt idx="4">
+                  <c:v>20</c:v>
+                </c:pt>
+              </c:numCache>
+            </c:numRef>
+          </c:val>
+        </c:ser>
+        <c:dLbls>
+          <c:numFmt formatCode="[$-401]0&quot;%&quot;" sourceLinked="0"/>
+          <c:txPr>
+            <a:bodyPr/>
+            <a:lstStyle/>
+            <a:p>
+              <a:pPr>
+                <a:defRPr b="0" i="0" strike="noStrike" sz="1100" u="none">
+                  <a:solidFill>
+                    <a:srgbClr val="0E3546"/>
+                  </a:solidFill>
+                  <a:latin typeface="Arial"/>
+                </a:defRPr>
+              </a:pPr>
+            </a:p>
+          </c:txPr>
+          <c:showLegendKey val="0"/>
+          <c:showVal val="1"/>
+          <c:showCatName val="0"/>
+          <c:showSerName val="0"/>
+          <c:showPercent val="0"/>
+          <c:showBubbleSize val="0"/>
+          <c:showLeaderLines val="0"/>
+        </c:dLbls>
+        <c:gapWidth val="150"/>
+        <c:overlap val="0"/>
+        <c:axId val="2094734554"/>
+        <c:axId val="2094734552"/>
+        <c:axId val="2094734556"/>
+      </c:barChart>
+      <c:catAx>
+        <c:axId val="2094734554"/>
+        <c:scaling>
+          <c:orientation val="minMax"/>
+        </c:scaling>
+        <c:delete val="0"/>
+        <c:axPos val="b"/>
+        <c:numFmt formatCode="General" sourceLinked="1"/>
+        <c:majorTickMark val="out"/>
+        <c:minorTickMark val="none"/>
+        <c:tickLblPos val="low"/>
+        <c:spPr>
+          <a:ln w="12700" cap="flat">
+            <a:solidFill>
+              <a:srgbClr val="888888"/>
+            </a:solidFill>
+            <a:prstDash val="solid"/>
+            <a:round/>
+          </a:ln>
+        </c:spPr>
+        <c:txPr>
+          <a:bodyPr/>
+          <a:lstStyle/>
+          <a:p>
+            <a:pPr>
+              <a:defRPr sz="1100" b="0" i="0" u="none" strike="noStrike">
+                <a:solidFill>
+                  <a:srgbClr val="6C8089"/>
+                </a:solidFill>
+                <a:latin typeface="Arial"/>
+              </a:defRPr>
+            </a:pPr>
+            <a:endParaRPr lang="en-US"/>
+          </a:p>
+        </c:txPr>
+        <c:crossAx val="2094734552"/>
+        <c:crosses val="autoZero"/>
+        <c:auto val="1"/>
+        <c:lblAlgn val="ctr"/>
+        <c:noMultiLvlLbl val="1"/>
+      </c:catAx>
+      <c:valAx>
+        <c:axId val="2094734552"/>
+        <c:scaling>
+          <c:orientation val="minMax"/>
+          <c:min val="0"/>
+        </c:scaling>
+        <c:delete val="0"/>
+        <c:axPos val="l"/>
+        <c:majorGridlines>
+          <c:spPr>
+            <a:ln w="9525" cap="flat">
+              <a:solidFill>
+                <a:srgbClr val="D6E2E7"/>
+              </a:solidFill>
+              <a:prstDash val="solid"/>
+              <a:round/>
+            </a:ln>
+          </c:spPr>
+        </c:majorGridlines>
+        <c:numFmt formatCode="General" sourceLinked="0"/>
+        <c:majorTickMark val="out"/>
+        <c:minorTickMark val="none"/>
+        <c:tickLblPos val="nextTo"/>
+        <c:spPr>
+          <a:ln w="12700" cap="flat">
+            <a:solidFill>
+              <a:srgbClr val="888888"/>
+            </a:solidFill>
+            <a:prstDash val="solid"/>
+            <a:round/>
+          </a:ln>
+        </c:spPr>
+        <c:txPr>
+          <a:bodyPr/>
+          <a:lstStyle/>
+          <a:p>
+            <a:pPr>
+              <a:defRPr sz="1100" b="0" i="0" u="none" strike="noStrike">
+                <a:solidFill>
+                  <a:srgbClr val="6C8089"/>
+                </a:solidFill>
+                <a:latin typeface="Arial"/>
+              </a:defRPr>
+            </a:pPr>
+            <a:endParaRPr lang="en-US"/>
+          </a:p>
+        </c:txPr>
+        <c:crossAx val="2094734554"/>
+        <c:crosses val="autoZero"/>
+        <c:crossBetween val="between"/>
+      </c:valAx>
+      <c:spPr>
+        <a:noFill/>
+        <a:ln>
+          <a:noFill/>
+        </a:ln>
+        <a:effectLst/>
+      </c:spPr>
+    </c:plotArea>
+    <c:legend>
+      <c:legendPos val="b"/>
+      <c:overlay val="0"/>
+      <c:txPr>
+        <a:bodyPr/>
+        <a:lstStyle/>
+        <a:p>
+          <a:pPr>
+            <a:defRPr sz="1100">
+              <a:latin typeface="Arial"/>
+              <a:cs typeface="Arial"/>
+            </a:defRPr>
+          </a:pPr>
+          <a:endParaRPr lang="en-US"/>
+        </a:p>
+      </c:txPr>
+    </c:legend>
+    <c:plotVisOnly val="1"/>
+    <c:dispBlanksAs val="span"/>
+  </c:chart>
+  <c:spPr>
+    <a:noFill/>
+    <a:ln>
+      <a:noFill/>
+    </a:ln>
+    <a:effectLst/>
+  </c:spPr>
+  <c:externalData r:id="rId1">
+    <c:autoUpdate val="0"/>
+  </c:externalData>
+</c:chartSpace>
+</file>
+
+<file path=ppt/charts/chart28.xml><?xml version="1.0" encoding="utf-8"?>
 <c:chartSpace xmlns:c="http://schemas.openxmlformats.org/drawingml/2006/chart" xmlns:a="http://schemas.openxmlformats.org/drawingml/2006/main" xmlns:r="http://schemas.openxmlformats.org/officeDocument/2006/relationships">
   <c:date1904 val="0"/>
   <c:roundedCorners val="1"/>
@@ -1618,6 +1990,622 @@
             <a:fld id="{F7021451-1387-4CA6-816F-3879F97B5CBC}" type="slidenum">
               <a:rPr lang="en-US"/>
               <a:t>11</a:t>
+            </a:fld>
+            <a:endParaRPr lang="en-US"/>
+          </a:p>
+        </p:txBody>
+      </p:sp>
+    </p:spTree>
+    <p:extLst>
+      <p:ext uri="{BB962C8B-B14F-4D97-AF65-F5344CB8AC3E}">
+        <p14:creationId xmlns:p14="http://schemas.microsoft.com/office/powerpoint/2010/main" val="1024086991"/>
+      </p:ext>
+    </p:extLst>
+  </p:cSld>
+  <p:clrMapOvr>
+    <a:masterClrMapping/>
+  </p:clrMapOvr>
+</p:notes>
+</file>
+
+<file path=ppt/notesSlides/notesSlide12.xml><?xml version="1.0" encoding="utf-8"?>
+<p:notes xmlns:a="http://schemas.openxmlformats.org/drawingml/2006/main" xmlns:r="http://schemas.openxmlformats.org/officeDocument/2006/relationships" xmlns:p="http://schemas.openxmlformats.org/presentationml/2006/main">
+  <p:cSld>
+    <p:spTree>
+      <p:nvGrpSpPr>
+        <p:cNvPr id="1" name=""/>
+        <p:cNvGrpSpPr/>
+        <p:nvPr/>
+      </p:nvGrpSpPr>
+      <p:grpSpPr>
+        <a:xfrm>
+          <a:off x="0" y="0"/>
+          <a:ext cx="0" cy="0"/>
+          <a:chOff x="0" y="0"/>
+          <a:chExt cx="0" cy="0"/>
+        </a:xfrm>
+      </p:grpSpPr>
+      <p:sp>
+        <p:nvSpPr>
+          <p:cNvPr id="2" name="Slide Image Placeholder 1"/>
+          <p:cNvSpPr>
+            <a:spLocks noGrp="1" noRot="1" noChangeAspect="1"/>
+          </p:cNvSpPr>
+          <p:nvPr>
+            <p:ph type="sldImg"/>
+          </p:nvPr>
+        </p:nvSpPr>
+        <p:spPr/>
+      </p:sp>
+      <p:sp>
+        <p:nvSpPr>
+          <p:cNvPr id="3" name="Notes Placeholder 2"/>
+          <p:cNvSpPr>
+            <a:spLocks noGrp="1"/>
+          </p:cNvSpPr>
+          <p:nvPr>
+            <p:ph type="body" idx="1"/>
+          </p:nvPr>
+        </p:nvSpPr>
+        <p:spPr/>
+        <p:txBody>
+          <a:bodyPr/>
+          <a:lstStyle/>
+          <a:p>
+            <a:r>
+              <a:rPr lang="en-US" dirty="0"/>
+              <a:t/>
+            </a:r>
+            <a:endParaRPr lang="en-US" dirty="0"/>
+          </a:p>
+        </p:txBody>
+      </p:sp>
+      <p:sp>
+        <p:nvSpPr>
+          <p:cNvPr id="4" name="Slide Number Placeholder 3"/>
+          <p:cNvSpPr>
+            <a:spLocks noGrp="1"/>
+          </p:cNvSpPr>
+          <p:nvPr>
+            <p:ph type="sldNum" sz="quarter" idx="10"/>
+          </p:nvPr>
+        </p:nvSpPr>
+        <p:spPr/>
+        <p:txBody>
+          <a:bodyPr/>
+          <a:lstStyle/>
+          <a:p>
+            <a:fld id="{F7021451-1387-4CA6-816F-3879F97B5CBC}" type="slidenum">
+              <a:rPr lang="en-US"/>
+              <a:t>12</a:t>
+            </a:fld>
+            <a:endParaRPr lang="en-US"/>
+          </a:p>
+        </p:txBody>
+      </p:sp>
+    </p:spTree>
+    <p:extLst>
+      <p:ext uri="{BB962C8B-B14F-4D97-AF65-F5344CB8AC3E}">
+        <p14:creationId xmlns:p14="http://schemas.microsoft.com/office/powerpoint/2010/main" val="1024086991"/>
+      </p:ext>
+    </p:extLst>
+  </p:cSld>
+  <p:clrMapOvr>
+    <a:masterClrMapping/>
+  </p:clrMapOvr>
+</p:notes>
+</file>
+
+<file path=ppt/notesSlides/notesSlide13.xml><?xml version="1.0" encoding="utf-8"?>
+<p:notes xmlns:a="http://schemas.openxmlformats.org/drawingml/2006/main" xmlns:r="http://schemas.openxmlformats.org/officeDocument/2006/relationships" xmlns:p="http://schemas.openxmlformats.org/presentationml/2006/main">
+  <p:cSld>
+    <p:spTree>
+      <p:nvGrpSpPr>
+        <p:cNvPr id="1" name=""/>
+        <p:cNvGrpSpPr/>
+        <p:nvPr/>
+      </p:nvGrpSpPr>
+      <p:grpSpPr>
+        <a:xfrm>
+          <a:off x="0" y="0"/>
+          <a:ext cx="0" cy="0"/>
+          <a:chOff x="0" y="0"/>
+          <a:chExt cx="0" cy="0"/>
+        </a:xfrm>
+      </p:grpSpPr>
+      <p:sp>
+        <p:nvSpPr>
+          <p:cNvPr id="2" name="Slide Image Placeholder 1"/>
+          <p:cNvSpPr>
+            <a:spLocks noGrp="1" noRot="1" noChangeAspect="1"/>
+          </p:cNvSpPr>
+          <p:nvPr>
+            <p:ph type="sldImg"/>
+          </p:nvPr>
+        </p:nvSpPr>
+        <p:spPr/>
+      </p:sp>
+      <p:sp>
+        <p:nvSpPr>
+          <p:cNvPr id="3" name="Notes Placeholder 2"/>
+          <p:cNvSpPr>
+            <a:spLocks noGrp="1"/>
+          </p:cNvSpPr>
+          <p:nvPr>
+            <p:ph type="body" idx="1"/>
+          </p:nvPr>
+        </p:nvSpPr>
+        <p:spPr/>
+        <p:txBody>
+          <a:bodyPr/>
+          <a:lstStyle/>
+          <a:p>
+            <a:r>
+              <a:rPr lang="en-US" dirty="0"/>
+              <a:t/>
+            </a:r>
+            <a:endParaRPr lang="en-US" dirty="0"/>
+          </a:p>
+        </p:txBody>
+      </p:sp>
+      <p:sp>
+        <p:nvSpPr>
+          <p:cNvPr id="4" name="Slide Number Placeholder 3"/>
+          <p:cNvSpPr>
+            <a:spLocks noGrp="1"/>
+          </p:cNvSpPr>
+          <p:nvPr>
+            <p:ph type="sldNum" sz="quarter" idx="10"/>
+          </p:nvPr>
+        </p:nvSpPr>
+        <p:spPr/>
+        <p:txBody>
+          <a:bodyPr/>
+          <a:lstStyle/>
+          <a:p>
+            <a:fld id="{F7021451-1387-4CA6-816F-3879F97B5CBC}" type="slidenum">
+              <a:rPr lang="en-US"/>
+              <a:t>13</a:t>
+            </a:fld>
+            <a:endParaRPr lang="en-US"/>
+          </a:p>
+        </p:txBody>
+      </p:sp>
+    </p:spTree>
+    <p:extLst>
+      <p:ext uri="{BB962C8B-B14F-4D97-AF65-F5344CB8AC3E}">
+        <p14:creationId xmlns:p14="http://schemas.microsoft.com/office/powerpoint/2010/main" val="1024086991"/>
+      </p:ext>
+    </p:extLst>
+  </p:cSld>
+  <p:clrMapOvr>
+    <a:masterClrMapping/>
+  </p:clrMapOvr>
+</p:notes>
+</file>
+
+<file path=ppt/notesSlides/notesSlide14.xml><?xml version="1.0" encoding="utf-8"?>
+<p:notes xmlns:a="http://schemas.openxmlformats.org/drawingml/2006/main" xmlns:r="http://schemas.openxmlformats.org/officeDocument/2006/relationships" xmlns:p="http://schemas.openxmlformats.org/presentationml/2006/main">
+  <p:cSld>
+    <p:spTree>
+      <p:nvGrpSpPr>
+        <p:cNvPr id="1" name=""/>
+        <p:cNvGrpSpPr/>
+        <p:nvPr/>
+      </p:nvGrpSpPr>
+      <p:grpSpPr>
+        <a:xfrm>
+          <a:off x="0" y="0"/>
+          <a:ext cx="0" cy="0"/>
+          <a:chOff x="0" y="0"/>
+          <a:chExt cx="0" cy="0"/>
+        </a:xfrm>
+      </p:grpSpPr>
+      <p:sp>
+        <p:nvSpPr>
+          <p:cNvPr id="2" name="Slide Image Placeholder 1"/>
+          <p:cNvSpPr>
+            <a:spLocks noGrp="1" noRot="1" noChangeAspect="1"/>
+          </p:cNvSpPr>
+          <p:nvPr>
+            <p:ph type="sldImg"/>
+          </p:nvPr>
+        </p:nvSpPr>
+        <p:spPr/>
+      </p:sp>
+      <p:sp>
+        <p:nvSpPr>
+          <p:cNvPr id="3" name="Notes Placeholder 2"/>
+          <p:cNvSpPr>
+            <a:spLocks noGrp="1"/>
+          </p:cNvSpPr>
+          <p:nvPr>
+            <p:ph type="body" idx="1"/>
+          </p:nvPr>
+        </p:nvSpPr>
+        <p:spPr/>
+        <p:txBody>
+          <a:bodyPr/>
+          <a:lstStyle/>
+          <a:p>
+            <a:r>
+              <a:rPr lang="en-US" dirty="0"/>
+              <a:t/>
+            </a:r>
+            <a:endParaRPr lang="en-US" dirty="0"/>
+          </a:p>
+        </p:txBody>
+      </p:sp>
+      <p:sp>
+        <p:nvSpPr>
+          <p:cNvPr id="4" name="Slide Number Placeholder 3"/>
+          <p:cNvSpPr>
+            <a:spLocks noGrp="1"/>
+          </p:cNvSpPr>
+          <p:nvPr>
+            <p:ph type="sldNum" sz="quarter" idx="10"/>
+          </p:nvPr>
+        </p:nvSpPr>
+        <p:spPr/>
+        <p:txBody>
+          <a:bodyPr/>
+          <a:lstStyle/>
+          <a:p>
+            <a:fld id="{F7021451-1387-4CA6-816F-3879F97B5CBC}" type="slidenum">
+              <a:rPr lang="en-US"/>
+              <a:t>14</a:t>
+            </a:fld>
+            <a:endParaRPr lang="en-US"/>
+          </a:p>
+        </p:txBody>
+      </p:sp>
+    </p:spTree>
+    <p:extLst>
+      <p:ext uri="{BB962C8B-B14F-4D97-AF65-F5344CB8AC3E}">
+        <p14:creationId xmlns:p14="http://schemas.microsoft.com/office/powerpoint/2010/main" val="1024086991"/>
+      </p:ext>
+    </p:extLst>
+  </p:cSld>
+  <p:clrMapOvr>
+    <a:masterClrMapping/>
+  </p:clrMapOvr>
+</p:notes>
+</file>
+
+<file path=ppt/notesSlides/notesSlide15.xml><?xml version="1.0" encoding="utf-8"?>
+<p:notes xmlns:a="http://schemas.openxmlformats.org/drawingml/2006/main" xmlns:r="http://schemas.openxmlformats.org/officeDocument/2006/relationships" xmlns:p="http://schemas.openxmlformats.org/presentationml/2006/main">
+  <p:cSld>
+    <p:spTree>
+      <p:nvGrpSpPr>
+        <p:cNvPr id="1" name=""/>
+        <p:cNvGrpSpPr/>
+        <p:nvPr/>
+      </p:nvGrpSpPr>
+      <p:grpSpPr>
+        <a:xfrm>
+          <a:off x="0" y="0"/>
+          <a:ext cx="0" cy="0"/>
+          <a:chOff x="0" y="0"/>
+          <a:chExt cx="0" cy="0"/>
+        </a:xfrm>
+      </p:grpSpPr>
+      <p:sp>
+        <p:nvSpPr>
+          <p:cNvPr id="2" name="Slide Image Placeholder 1"/>
+          <p:cNvSpPr>
+            <a:spLocks noGrp="1" noRot="1" noChangeAspect="1"/>
+          </p:cNvSpPr>
+          <p:nvPr>
+            <p:ph type="sldImg"/>
+          </p:nvPr>
+        </p:nvSpPr>
+        <p:spPr/>
+      </p:sp>
+      <p:sp>
+        <p:nvSpPr>
+          <p:cNvPr id="3" name="Notes Placeholder 2"/>
+          <p:cNvSpPr>
+            <a:spLocks noGrp="1"/>
+          </p:cNvSpPr>
+          <p:nvPr>
+            <p:ph type="body" idx="1"/>
+          </p:nvPr>
+        </p:nvSpPr>
+        <p:spPr/>
+        <p:txBody>
+          <a:bodyPr/>
+          <a:lstStyle/>
+          <a:p>
+            <a:r>
+              <a:rPr lang="en-US" dirty="0"/>
+              <a:t/>
+            </a:r>
+            <a:endParaRPr lang="en-US" dirty="0"/>
+          </a:p>
+        </p:txBody>
+      </p:sp>
+      <p:sp>
+        <p:nvSpPr>
+          <p:cNvPr id="4" name="Slide Number Placeholder 3"/>
+          <p:cNvSpPr>
+            <a:spLocks noGrp="1"/>
+          </p:cNvSpPr>
+          <p:nvPr>
+            <p:ph type="sldNum" sz="quarter" idx="10"/>
+          </p:nvPr>
+        </p:nvSpPr>
+        <p:spPr/>
+        <p:txBody>
+          <a:bodyPr/>
+          <a:lstStyle/>
+          <a:p>
+            <a:fld id="{F7021451-1387-4CA6-816F-3879F97B5CBC}" type="slidenum">
+              <a:rPr lang="en-US"/>
+              <a:t>15</a:t>
+            </a:fld>
+            <a:endParaRPr lang="en-US"/>
+          </a:p>
+        </p:txBody>
+      </p:sp>
+    </p:spTree>
+    <p:extLst>
+      <p:ext uri="{BB962C8B-B14F-4D97-AF65-F5344CB8AC3E}">
+        <p14:creationId xmlns:p14="http://schemas.microsoft.com/office/powerpoint/2010/main" val="1024086991"/>
+      </p:ext>
+    </p:extLst>
+  </p:cSld>
+  <p:clrMapOvr>
+    <a:masterClrMapping/>
+  </p:clrMapOvr>
+</p:notes>
+</file>
+
+<file path=ppt/notesSlides/notesSlide16.xml><?xml version="1.0" encoding="utf-8"?>
+<p:notes xmlns:a="http://schemas.openxmlformats.org/drawingml/2006/main" xmlns:r="http://schemas.openxmlformats.org/officeDocument/2006/relationships" xmlns:p="http://schemas.openxmlformats.org/presentationml/2006/main">
+  <p:cSld>
+    <p:spTree>
+      <p:nvGrpSpPr>
+        <p:cNvPr id="1" name=""/>
+        <p:cNvGrpSpPr/>
+        <p:nvPr/>
+      </p:nvGrpSpPr>
+      <p:grpSpPr>
+        <a:xfrm>
+          <a:off x="0" y="0"/>
+          <a:ext cx="0" cy="0"/>
+          <a:chOff x="0" y="0"/>
+          <a:chExt cx="0" cy="0"/>
+        </a:xfrm>
+      </p:grpSpPr>
+      <p:sp>
+        <p:nvSpPr>
+          <p:cNvPr id="2" name="Slide Image Placeholder 1"/>
+          <p:cNvSpPr>
+            <a:spLocks noGrp="1" noRot="1" noChangeAspect="1"/>
+          </p:cNvSpPr>
+          <p:nvPr>
+            <p:ph type="sldImg"/>
+          </p:nvPr>
+        </p:nvSpPr>
+        <p:spPr/>
+      </p:sp>
+      <p:sp>
+        <p:nvSpPr>
+          <p:cNvPr id="3" name="Notes Placeholder 2"/>
+          <p:cNvSpPr>
+            <a:spLocks noGrp="1"/>
+          </p:cNvSpPr>
+          <p:nvPr>
+            <p:ph type="body" idx="1"/>
+          </p:nvPr>
+        </p:nvSpPr>
+        <p:spPr/>
+        <p:txBody>
+          <a:bodyPr/>
+          <a:lstStyle/>
+          <a:p>
+            <a:r>
+              <a:rPr lang="en-US" dirty="0"/>
+              <a:t/>
+            </a:r>
+            <a:endParaRPr lang="en-US" dirty="0"/>
+          </a:p>
+        </p:txBody>
+      </p:sp>
+      <p:sp>
+        <p:nvSpPr>
+          <p:cNvPr id="4" name="Slide Number Placeholder 3"/>
+          <p:cNvSpPr>
+            <a:spLocks noGrp="1"/>
+          </p:cNvSpPr>
+          <p:nvPr>
+            <p:ph type="sldNum" sz="quarter" idx="10"/>
+          </p:nvPr>
+        </p:nvSpPr>
+        <p:spPr/>
+        <p:txBody>
+          <a:bodyPr/>
+          <a:lstStyle/>
+          <a:p>
+            <a:fld id="{F7021451-1387-4CA6-816F-3879F97B5CBC}" type="slidenum">
+              <a:rPr lang="en-US"/>
+              <a:t>16</a:t>
+            </a:fld>
+            <a:endParaRPr lang="en-US"/>
+          </a:p>
+        </p:txBody>
+      </p:sp>
+    </p:spTree>
+    <p:extLst>
+      <p:ext uri="{BB962C8B-B14F-4D97-AF65-F5344CB8AC3E}">
+        <p14:creationId xmlns:p14="http://schemas.microsoft.com/office/powerpoint/2010/main" val="1024086991"/>
+      </p:ext>
+    </p:extLst>
+  </p:cSld>
+  <p:clrMapOvr>
+    <a:masterClrMapping/>
+  </p:clrMapOvr>
+</p:notes>
+</file>
+
+<file path=ppt/notesSlides/notesSlide17.xml><?xml version="1.0" encoding="utf-8"?>
+<p:notes xmlns:a="http://schemas.openxmlformats.org/drawingml/2006/main" xmlns:r="http://schemas.openxmlformats.org/officeDocument/2006/relationships" xmlns:p="http://schemas.openxmlformats.org/presentationml/2006/main">
+  <p:cSld>
+    <p:spTree>
+      <p:nvGrpSpPr>
+        <p:cNvPr id="1" name=""/>
+        <p:cNvGrpSpPr/>
+        <p:nvPr/>
+      </p:nvGrpSpPr>
+      <p:grpSpPr>
+        <a:xfrm>
+          <a:off x="0" y="0"/>
+          <a:ext cx="0" cy="0"/>
+          <a:chOff x="0" y="0"/>
+          <a:chExt cx="0" cy="0"/>
+        </a:xfrm>
+      </p:grpSpPr>
+      <p:sp>
+        <p:nvSpPr>
+          <p:cNvPr id="2" name="Slide Image Placeholder 1"/>
+          <p:cNvSpPr>
+            <a:spLocks noGrp="1" noRot="1" noChangeAspect="1"/>
+          </p:cNvSpPr>
+          <p:nvPr>
+            <p:ph type="sldImg"/>
+          </p:nvPr>
+        </p:nvSpPr>
+        <p:spPr/>
+      </p:sp>
+      <p:sp>
+        <p:nvSpPr>
+          <p:cNvPr id="3" name="Notes Placeholder 2"/>
+          <p:cNvSpPr>
+            <a:spLocks noGrp="1"/>
+          </p:cNvSpPr>
+          <p:nvPr>
+            <p:ph type="body" idx="1"/>
+          </p:nvPr>
+        </p:nvSpPr>
+        <p:spPr/>
+        <p:txBody>
+          <a:bodyPr/>
+          <a:lstStyle/>
+          <a:p>
+            <a:r>
+              <a:rPr lang="en-US" dirty="0"/>
+              <a:t/>
+            </a:r>
+            <a:endParaRPr lang="en-US" dirty="0"/>
+          </a:p>
+        </p:txBody>
+      </p:sp>
+      <p:sp>
+        <p:nvSpPr>
+          <p:cNvPr id="4" name="Slide Number Placeholder 3"/>
+          <p:cNvSpPr>
+            <a:spLocks noGrp="1"/>
+          </p:cNvSpPr>
+          <p:nvPr>
+            <p:ph type="sldNum" sz="quarter" idx="10"/>
+          </p:nvPr>
+        </p:nvSpPr>
+        <p:spPr/>
+        <p:txBody>
+          <a:bodyPr/>
+          <a:lstStyle/>
+          <a:p>
+            <a:fld id="{F7021451-1387-4CA6-816F-3879F97B5CBC}" type="slidenum">
+              <a:rPr lang="en-US"/>
+              <a:t>17</a:t>
+            </a:fld>
+            <a:endParaRPr lang="en-US"/>
+          </a:p>
+        </p:txBody>
+      </p:sp>
+    </p:spTree>
+    <p:extLst>
+      <p:ext uri="{BB962C8B-B14F-4D97-AF65-F5344CB8AC3E}">
+        <p14:creationId xmlns:p14="http://schemas.microsoft.com/office/powerpoint/2010/main" val="1024086991"/>
+      </p:ext>
+    </p:extLst>
+  </p:cSld>
+  <p:clrMapOvr>
+    <a:masterClrMapping/>
+  </p:clrMapOvr>
+</p:notes>
+</file>
+
+<file path=ppt/notesSlides/notesSlide18.xml><?xml version="1.0" encoding="utf-8"?>
+<p:notes xmlns:a="http://schemas.openxmlformats.org/drawingml/2006/main" xmlns:r="http://schemas.openxmlformats.org/officeDocument/2006/relationships" xmlns:p="http://schemas.openxmlformats.org/presentationml/2006/main">
+  <p:cSld>
+    <p:spTree>
+      <p:nvGrpSpPr>
+        <p:cNvPr id="1" name=""/>
+        <p:cNvGrpSpPr/>
+        <p:nvPr/>
+      </p:nvGrpSpPr>
+      <p:grpSpPr>
+        <a:xfrm>
+          <a:off x="0" y="0"/>
+          <a:ext cx="0" cy="0"/>
+          <a:chOff x="0" y="0"/>
+          <a:chExt cx="0" cy="0"/>
+        </a:xfrm>
+      </p:grpSpPr>
+      <p:sp>
+        <p:nvSpPr>
+          <p:cNvPr id="2" name="Slide Image Placeholder 1"/>
+          <p:cNvSpPr>
+            <a:spLocks noGrp="1" noRot="1" noChangeAspect="1"/>
+          </p:cNvSpPr>
+          <p:nvPr>
+            <p:ph type="sldImg"/>
+          </p:nvPr>
+        </p:nvSpPr>
+        <p:spPr/>
+      </p:sp>
+      <p:sp>
+        <p:nvSpPr>
+          <p:cNvPr id="3" name="Notes Placeholder 2"/>
+          <p:cNvSpPr>
+            <a:spLocks noGrp="1"/>
+          </p:cNvSpPr>
+          <p:nvPr>
+            <p:ph type="body" idx="1"/>
+          </p:nvPr>
+        </p:nvSpPr>
+        <p:spPr/>
+        <p:txBody>
+          <a:bodyPr/>
+          <a:lstStyle/>
+          <a:p>
+            <a:r>
+              <a:rPr lang="en-US" dirty="0"/>
+              <a:t/>
+            </a:r>
+            <a:endParaRPr lang="en-US" dirty="0"/>
+          </a:p>
+        </p:txBody>
+      </p:sp>
+      <p:sp>
+        <p:nvSpPr>
+          <p:cNvPr id="4" name="Slide Number Placeholder 3"/>
+          <p:cNvSpPr>
+            <a:spLocks noGrp="1"/>
+          </p:cNvSpPr>
+          <p:nvPr>
+            <p:ph type="sldNum" sz="quarter" idx="10"/>
+          </p:nvPr>
+        </p:nvSpPr>
+        <p:spPr/>
+        <p:txBody>
+          <a:bodyPr/>
+          <a:lstStyle/>
+          <a:p>
+            <a:fld id="{F7021451-1387-4CA6-816F-3879F97B5CBC}" type="slidenum">
+              <a:rPr lang="en-US"/>
+              <a:t>18</a:t>
             </a:fld>
             <a:endParaRPr lang="en-US"/>
           </a:p>
@@ -3130,7 +4118,7 @@
                 <a:ea typeface="Arial" pitchFamily="34" charset="-122"/>
                 <a:cs typeface="Arial" pitchFamily="34" charset="-120"/>
               </a:rPr>
-              <a:t>ما ينبغي توقّعه</a:t>
+              <a:t>ما نقترحه</a:t>
             </a:r>
             <a:endParaRPr lang="en-US" sz="1150" dirty="0"/>
           </a:p>
@@ -3169,7 +4157,7 @@
                 <a:ea typeface="Arial" pitchFamily="34" charset="-122"/>
                 <a:cs typeface="Arial" pitchFamily="34" charset="-120"/>
               </a:rPr>
-              <a:t>مخاطر محدّدة وردود عليها</a:t>
+              <a:t>تقنيتان لقيدين مختلفين</a:t>
             </a:r>
             <a:endParaRPr lang="en-US" sz="3000" dirty="0"/>
           </a:p>
@@ -3208,7 +4196,7 @@
                 <a:ea typeface="Arial" pitchFamily="34" charset="-122"/>
                 <a:cs typeface="Arial" pitchFamily="34" charset="-120"/>
               </a:rPr>
-              <a:t>المخاطر</a:t>
+              <a:t>EVERGREEN® — الاحتفاظ بالماء</a:t>
             </a:r>
             <a:endParaRPr lang="en-US" sz="1600" dirty="0"/>
           </a:p>
@@ -3254,7 +4242,7 @@
                 <a:ea typeface="Arial" pitchFamily="34" charset="-122"/>
                 <a:cs typeface="Arial" pitchFamily="34" charset="-120"/>
               </a:rPr>
-              <a:t>تفتّت الحيازات في الوادي والدلتا: متوسط الحيازة أقل من فدانين، وقرار الشراء مشتّت.</a:t>
+              <a:t>مادة حابسة للماء أساسها البوتاسيوم، تُوضع في منطقة الجذور عند الزراعة أو عند تجديد الغرس.</a:t>
             </a:r>
             <a:endParaRPr lang="en-US" sz="1350" dirty="0"/>
           </a:p>
@@ -3278,7 +4266,7 @@
                 <a:ea typeface="Arial" pitchFamily="34" charset="-122"/>
                 <a:cs typeface="Arial" pitchFamily="34" charset="-120"/>
               </a:rPr>
-              <a:t>ماء الري متاح بتكلفة منخفضة جدًا للمزارع، ما يضعف الحافز المالي المباشر للتوفير.</a:t>
+              <a:t>تلتقط ماء الري وتعيده إلى النبات تدريجيًا، فتلغي الإجهاد المائي في المراحل الحرجة بين ريّتين.</a:t>
             </a:r>
             <a:endParaRPr lang="en-US" sz="1350" dirty="0"/>
           </a:p>
@@ -3302,7 +4290,7 @@
                 <a:ea typeface="Arial" pitchFamily="34" charset="-122"/>
                 <a:cs typeface="Arial" pitchFamily="34" charset="-120"/>
               </a:rPr>
-              <a:t>منافسة مواد رخيصة أساسها الصوديوم تركت انطباعًا سيئًا وأضرّت بتربة مالحة أصلًا.</a:t>
+              <a:t>قدرة امتصاص تبلغ نحو 300 ضعف وزنها، ومفعول مفيد يمتد من 3 إلى 4 سنوات في التربة.</a:t>
             </a:r>
             <a:endParaRPr lang="en-US" sz="1350" dirty="0"/>
           </a:p>
@@ -3326,7 +4314,7 @@
                 <a:ea typeface="Arial" pitchFamily="34" charset="-122"/>
                 <a:cs typeface="Arial" pitchFamily="34" charset="-120"/>
               </a:rPr>
-              <a:t>سيولة المزارع محدودة وتكلفة المستلزمات المستوردة مرتفعة بفعل تقلبات سعر الصرف.</a:t>
+              <a:t>تتحلل بنسبة 20 إلى 25 % سنويًا، دون تراكم في التربة ودون خطر جرعة زائدة.</a:t>
             </a:r>
             <a:endParaRPr lang="en-US" sz="1350" dirty="0"/>
           </a:p>
@@ -3365,7 +4353,7 @@
                 <a:ea typeface="Arial" pitchFamily="34" charset="-122"/>
                 <a:cs typeface="Arial" pitchFamily="34" charset="-120"/>
               </a:rPr>
-              <a:t>الردود</a:t>
+              <a:t>ECOFERT® — التغذية دون إنهاك التربة</a:t>
             </a:r>
             <a:endParaRPr lang="en-US" sz="1600" dirty="0"/>
           </a:p>
@@ -3411,7 +4399,7 @@
                 <a:ea typeface="Arial" pitchFamily="34" charset="-122"/>
                 <a:cs typeface="Arial" pitchFamily="34" charset="-120"/>
               </a:rPr>
-              <a:t>المرور عبر الجمعيات التعاونية ومصانع السكر ومصدّري الموالح، لا عبر الحيازة الفردية.</a:t>
+              <a:t>سماد بجرعات دقيقة من الأحماض الأمينية والنيتروجين والفوسفور والبوتاسيوم، من موارد متجددة.</a:t>
             </a:r>
             <a:endParaRPr lang="en-US" sz="1350" dirty="0"/>
           </a:p>
@@ -3435,7 +4423,7 @@
                 <a:ea typeface="Arial" pitchFamily="34" charset="-122"/>
                 <a:cs typeface="Arial" pitchFamily="34" charset="-120"/>
               </a:rPr>
-              <a:t>عرض المكسب على المحصول والجودة، لا على فاتورة الماء وحدها: الماء المتاح باستمرار يرفع الإنتاج.</a:t>
+              <a:t>غير مخلّب: لا يستنزف المركّب الطيني الدبالي ولا يرفع الملوحة ولا نسبة النترات — نقطة حاسمة في شمال الدلتا.</a:t>
             </a:r>
             <a:endParaRPr lang="en-US" sz="1350" dirty="0"/>
           </a:p>
@@ -3459,7 +4447,7 @@
                 <a:ea typeface="Arial" pitchFamily="34" charset="-122"/>
                 <a:cs typeface="Arial" pitchFamily="34" charset="-120"/>
               </a:rPr>
-              <a:t>توثيق فارق التركيبة: بوتاسيوم لا صوديوم، ملائم للمحاصيل الغذائية وللتربة المالحة.</a:t>
+              <a:t>حاصل على شهادتي SOHISCERT والعضوية الأوروبية، وهو شرط دخول دفاتر شروط المشترين الأوروبيين.</a:t>
             </a:r>
             <a:endParaRPr lang="en-US" sz="1350" dirty="0"/>
           </a:p>
@@ -3483,7 +4471,7 @@
                 <a:ea typeface="Arial" pitchFamily="34" charset="-122"/>
                 <a:cs typeface="Arial" pitchFamily="34" charset="-120"/>
               </a:rPr>
-              <a:t>توزيع الالتزام: مفعول يمتد 3 إلى 4 سنوات يوزّع التكلفة على عدة مواسم.</a:t>
+              <a:t>من 1 إلى 4 عبوات سعة 140 مل للهكتار، متوافق مع معدات التسميد بالري القائمة.</a:t>
             </a:r>
             <a:endParaRPr lang="en-US" sz="1350" dirty="0"/>
           </a:p>
@@ -3552,7 +4540,7 @@
                 <a:ea typeface="Arial" pitchFamily="34" charset="-122"/>
                 <a:cs typeface="Arial" pitchFamily="34" charset="-120"/>
               </a:rPr>
-              <a:t>تحليل الأكريلاميد (مختبر Polymex، ISO 9001، بتركيز أقل من 3,0 ميكروغرام/غرام) وفحص REACH / SVHC (SGS) وشهادة SOHISCERT السارية حتى 4 سبتمبر 2027: متاحة جميعها عند الطلب.</a:t>
+              <a:t>المنتجان يُباعان منفصلين لكنهما صُمّما ليعزّز كل منهما الآخر: المادة الحابسة تطيل بقاء الماء متاحًا، والسماد يثمّر هذا الماء المتاح دون إضعاف التربة.</a:t>
             </a:r>
             <a:endParaRPr lang="en-US" sz="1100" dirty="0"/>
           </a:p>
@@ -3651,6 +4639,4717 @@
 <file path=ppt/slides/slide11.xml><?xml version="1.0" encoding="utf-8"?>
 <p:sld xmlns:a="http://schemas.openxmlformats.org/drawingml/2006/main" xmlns:r="http://schemas.openxmlformats.org/officeDocument/2006/relationships" xmlns:p="http://schemas.openxmlformats.org/presentationml/2006/main">
   <p:cSld name="Slide 11">
+    <p:bg>
+      <p:bgPr>
+        <a:solidFill>
+          <a:srgbClr val="FAFBFB"/>
+        </a:solidFill>
+      </p:bgPr>
+    </p:bg>
+    <p:spTree>
+      <p:nvGrpSpPr>
+        <p:cNvPr id="1" name=""/>
+        <p:cNvGrpSpPr/>
+        <p:nvPr/>
+      </p:nvGrpSpPr>
+      <p:grpSpPr>
+        <a:xfrm>
+          <a:off x="0" y="0"/>
+          <a:ext cx="0" cy="0"/>
+          <a:chOff x="0" y="0"/>
+          <a:chExt cx="0" cy="0"/>
+        </a:xfrm>
+      </p:grpSpPr>
+      <p:sp>
+        <p:nvSpPr>
+          <p:cNvPr id="2" name="Text 0"/>
+          <p:cNvSpPr txBox="1"/>
+          <p:nvPr/>
+        </p:nvSpPr>
+        <p:spPr>
+          <a:xfrm>
+            <a:off x="594360" y="411480"/>
+            <a:ext cx="10515600" cy="274320"/>
+          </a:xfrm>
+          <a:prstGeom prst="rect">
+            <a:avLst/>
+          </a:prstGeom>
+          <a:noFill/>
+          <a:ln/>
+        </p:spPr>
+        <p:txBody>
+          <a:bodyPr wrap="square" lIns="0" tIns="0" rIns="0" bIns="0" rtlCol="0" anchor="ctr"/>
+          <a:lstStyle/>
+          <a:p>
+            <a:pPr rtl="1" algn="r" indent="0" marL="0">
+              <a:buNone/>
+            </a:pPr>
+            <a:r>
+              <a:rPr lang="en-US" sz="1150" b="1" spc="200" kern="0" dirty="0">
+                <a:solidFill>
+                  <a:srgbClr val="E0A33E"/>
+                </a:solidFill>
+                <a:latin typeface="Arial" pitchFamily="34" charset="0"/>
+                <a:ea typeface="Arial" pitchFamily="34" charset="-122"/>
+                <a:cs typeface="Arial" pitchFamily="34" charset="-120"/>
+              </a:rPr>
+              <a:t>بقية المنتجات</a:t>
+            </a:r>
+            <a:endParaRPr lang="en-US" sz="1150" dirty="0"/>
+          </a:p>
+        </p:txBody>
+      </p:sp>
+      <p:sp>
+        <p:nvSpPr>
+          <p:cNvPr id="3" name="Text 1"/>
+          <p:cNvSpPr txBox="1"/>
+          <p:nvPr/>
+        </p:nvSpPr>
+        <p:spPr>
+          <a:xfrm>
+            <a:off x="594360" y="731520"/>
+            <a:ext cx="10881360" cy="731520"/>
+          </a:xfrm>
+          <a:prstGeom prst="rect">
+            <a:avLst/>
+          </a:prstGeom>
+          <a:noFill/>
+          <a:ln/>
+        </p:spPr>
+        <p:txBody>
+          <a:bodyPr wrap="square" lIns="0" tIns="0" rIns="0" bIns="0" rtlCol="0" anchor="ctr"/>
+          <a:lstStyle/>
+          <a:p>
+            <a:pPr rtl="1" algn="r" indent="0" marL="0">
+              <a:buNone/>
+            </a:pPr>
+            <a:r>
+              <a:rPr lang="en-US" sz="3000" b="1" dirty="0">
+                <a:solidFill>
+                  <a:srgbClr val="0E3546"/>
+                </a:solidFill>
+                <a:latin typeface="Arial" pitchFamily="34" charset="0"/>
+                <a:ea typeface="Arial" pitchFamily="34" charset="-122"/>
+                <a:cs typeface="Arial" pitchFamily="34" charset="-120"/>
+              </a:rPr>
+              <a:t>حماية المحاصيل وتثبيت التربة</a:t>
+            </a:r>
+            <a:endParaRPr lang="en-US" sz="3000" dirty="0"/>
+          </a:p>
+        </p:txBody>
+      </p:sp>
+      <p:sp>
+        <p:nvSpPr>
+          <p:cNvPr id="4" name="Text 2"/>
+          <p:cNvSpPr txBox="1"/>
+          <p:nvPr/>
+        </p:nvSpPr>
+        <p:spPr>
+          <a:xfrm>
+            <a:off x="594360" y="1783080"/>
+            <a:ext cx="5227168" cy="411480"/>
+          </a:xfrm>
+          <a:prstGeom prst="rect">
+            <a:avLst/>
+          </a:prstGeom>
+          <a:noFill/>
+          <a:ln/>
+        </p:spPr>
+        <p:txBody>
+          <a:bodyPr wrap="square" lIns="0" tIns="0" rIns="0" bIns="0" rtlCol="0" anchor="ctr"/>
+          <a:lstStyle/>
+          <a:p>
+            <a:pPr rtl="1" algn="r" indent="0" marL="0">
+              <a:buNone/>
+            </a:pPr>
+            <a:r>
+              <a:rPr lang="en-US" sz="1600" b="1" dirty="0">
+                <a:solidFill>
+                  <a:srgbClr val="1C5A73"/>
+                </a:solidFill>
+                <a:latin typeface="Arial" pitchFamily="34" charset="0"/>
+                <a:ea typeface="Arial" pitchFamily="34" charset="-122"/>
+                <a:cs typeface="Arial" pitchFamily="34" charset="-120"/>
+              </a:rPr>
+              <a:t>NAPEMA® — حماية دون متبقيات</a:t>
+            </a:r>
+            <a:endParaRPr lang="en-US" sz="1600" dirty="0"/>
+          </a:p>
+        </p:txBody>
+      </p:sp>
+      <p:sp>
+        <p:nvSpPr>
+          <p:cNvPr id="5" name="Text 3"/>
+          <p:cNvSpPr txBox="1"/>
+          <p:nvPr/>
+        </p:nvSpPr>
+        <p:spPr>
+          <a:xfrm>
+            <a:off x="594360" y="2286000"/>
+            <a:ext cx="5227168" cy="2468880"/>
+          </a:xfrm>
+          <a:prstGeom prst="rect">
+            <a:avLst/>
+          </a:prstGeom>
+          <a:noFill/>
+          <a:ln/>
+        </p:spPr>
+        <p:txBody>
+          <a:bodyPr wrap="square" lIns="0" tIns="0" rIns="0" bIns="0" rtlCol="0" anchor="t"/>
+          <a:lstStyle/>
+          <a:p>
+            <a:pPr algn="r" marL="342900" indent="-342900">
+              <a:lnSpc>
+                <a:spcPct val="122000"/>
+              </a:lnSpc>
+              <a:spcAft>
+                <a:spcPts val="1000"/>
+              </a:spcAft>
+              <a:buSzPct val="100000"/>
+              <a:buChar char="•"/>
+            </a:pPr>
+            <a:r>
+              <a:rPr lang="en-US" sz="1350" dirty="0">
+                <a:solidFill>
+                  <a:srgbClr val="31424A"/>
+                </a:solidFill>
+                <a:latin typeface="Arial" pitchFamily="34" charset="0"/>
+                <a:ea typeface="Arial" pitchFamily="34" charset="-122"/>
+                <a:cs typeface="Arial" pitchFamily="34" charset="-120"/>
+              </a:rPr>
+              <a:t>مكافحة الأمراض والطفيليات والفطريات والآفات، دون أي جزيء كيميائي مُصنَّع.</a:t>
+            </a:r>
+            <a:endParaRPr lang="en-US" sz="1350" dirty="0"/>
+          </a:p>
+          <a:p>
+            <a:pPr algn="r" marL="342900" indent="-342900">
+              <a:lnSpc>
+                <a:spcPct val="122000"/>
+              </a:lnSpc>
+              <a:spcAft>
+                <a:spcPts val="1000"/>
+              </a:spcAft>
+              <a:buSzPct val="100000"/>
+              <a:buChar char="•"/>
+            </a:pPr>
+            <a:r>
+              <a:rPr lang="en-US" sz="1350" dirty="0">
+                <a:solidFill>
+                  <a:srgbClr val="31424A"/>
+                </a:solidFill>
+                <a:latin typeface="Arial" pitchFamily="34" charset="0"/>
+                <a:ea typeface="Arial" pitchFamily="34" charset="-122"/>
+                <a:cs typeface="Arial" pitchFamily="34" charset="-120"/>
+              </a:rPr>
+              <a:t>رشّ على الأوراق والجذور، بمفعول وقائي وعلاجي في آن واحد.</a:t>
+            </a:r>
+            <a:endParaRPr lang="en-US" sz="1350" dirty="0"/>
+          </a:p>
+          <a:p>
+            <a:pPr algn="r" marL="342900" indent="-342900">
+              <a:lnSpc>
+                <a:spcPct val="122000"/>
+              </a:lnSpc>
+              <a:spcAft>
+                <a:spcPts val="1000"/>
+              </a:spcAft>
+              <a:buSzPct val="100000"/>
+              <a:buChar char="•"/>
+            </a:pPr>
+            <a:r>
+              <a:rPr lang="en-US" sz="1350" dirty="0">
+                <a:solidFill>
+                  <a:srgbClr val="31424A"/>
+                </a:solidFill>
+                <a:latin typeface="Arial" pitchFamily="34" charset="0"/>
+                <a:ea typeface="Arial" pitchFamily="34" charset="-122"/>
+                <a:cs typeface="Arial" pitchFamily="34" charset="-120"/>
+              </a:rPr>
+              <a:t>لا متبقيات في التربة ولا في النبات ولا في الهواء، مع الحفاظ على الملقِّحات والحشرات النافعة.</a:t>
+            </a:r>
+            <a:endParaRPr lang="en-US" sz="1350" dirty="0"/>
+          </a:p>
+          <a:p>
+            <a:pPr algn="r" marL="342900" indent="-342900">
+              <a:lnSpc>
+                <a:spcPct val="122000"/>
+              </a:lnSpc>
+              <a:spcAft>
+                <a:spcPts val="1000"/>
+              </a:spcAft>
+              <a:buSzPct val="100000"/>
+              <a:buChar char="•"/>
+            </a:pPr>
+            <a:r>
+              <a:rPr lang="en-US" sz="1350" dirty="0">
+                <a:solidFill>
+                  <a:srgbClr val="31424A"/>
+                </a:solidFill>
+                <a:latin typeface="Arial" pitchFamily="34" charset="0"/>
+                <a:ea typeface="Arial" pitchFamily="34" charset="-122"/>
+                <a:cs typeface="Arial" pitchFamily="34" charset="-120"/>
+              </a:rPr>
+              <a:t>تركيبة مصمَّمة لمشكلة محددة: البق الدقيقي، واخضرار الحمضيات (HLB)، والنيماتودا.</a:t>
+            </a:r>
+            <a:endParaRPr lang="en-US" sz="1350" dirty="0"/>
+          </a:p>
+        </p:txBody>
+      </p:sp>
+      <p:sp>
+        <p:nvSpPr>
+          <p:cNvPr id="6" name="Text 4"/>
+          <p:cNvSpPr txBox="1"/>
+          <p:nvPr/>
+        </p:nvSpPr>
+        <p:spPr>
+          <a:xfrm>
+            <a:off x="6370168" y="1783080"/>
+            <a:ext cx="5227168" cy="411480"/>
+          </a:xfrm>
+          <a:prstGeom prst="rect">
+            <a:avLst/>
+          </a:prstGeom>
+          <a:noFill/>
+          <a:ln/>
+        </p:spPr>
+        <p:txBody>
+          <a:bodyPr wrap="square" lIns="0" tIns="0" rIns="0" bIns="0" rtlCol="0" anchor="ctr"/>
+          <a:lstStyle/>
+          <a:p>
+            <a:pPr rtl="1" algn="r" indent="0" marL="0">
+              <a:buNone/>
+            </a:pPr>
+            <a:r>
+              <a:rPr lang="en-US" sz="1600" b="1" dirty="0">
+                <a:solidFill>
+                  <a:srgbClr val="1C5A73"/>
+                </a:solidFill>
+                <a:latin typeface="Arial" pitchFamily="34" charset="0"/>
+                <a:ea typeface="Arial" pitchFamily="34" charset="-122"/>
+                <a:cs typeface="Arial" pitchFamily="34" charset="-120"/>
+              </a:rPr>
+              <a:t>Paulownia ALTIFOLIA® — شجرة المناطق الحارة</a:t>
+            </a:r>
+            <a:endParaRPr lang="en-US" sz="1600" dirty="0"/>
+          </a:p>
+        </p:txBody>
+      </p:sp>
+      <p:sp>
+        <p:nvSpPr>
+          <p:cNvPr id="7" name="Text 5"/>
+          <p:cNvSpPr txBox="1"/>
+          <p:nvPr/>
+        </p:nvSpPr>
+        <p:spPr>
+          <a:xfrm>
+            <a:off x="6370168" y="2286000"/>
+            <a:ext cx="5227168" cy="2468880"/>
+          </a:xfrm>
+          <a:prstGeom prst="rect">
+            <a:avLst/>
+          </a:prstGeom>
+          <a:noFill/>
+          <a:ln/>
+        </p:spPr>
+        <p:txBody>
+          <a:bodyPr wrap="square" lIns="0" tIns="0" rIns="0" bIns="0" rtlCol="0" anchor="t"/>
+          <a:lstStyle/>
+          <a:p>
+            <a:pPr algn="r" marL="342900" indent="-342900">
+              <a:lnSpc>
+                <a:spcPct val="122000"/>
+              </a:lnSpc>
+              <a:spcAft>
+                <a:spcPts val="1000"/>
+              </a:spcAft>
+              <a:buSzPct val="100000"/>
+              <a:buChar char="•"/>
+            </a:pPr>
+            <a:r>
+              <a:rPr lang="en-US" sz="1350" dirty="0">
+                <a:solidFill>
+                  <a:srgbClr val="31424A"/>
+                </a:solidFill>
+                <a:latin typeface="Arial" pitchFamily="34" charset="0"/>
+                <a:ea typeface="Arial" pitchFamily="34" charset="-122"/>
+                <a:cs typeface="Arial" pitchFamily="34" charset="-120"/>
+              </a:rPr>
+              <a:t>من 13 إلى 15 متراً خلال ست إلى ثماني سنوات، بجذع كبير القطر.</a:t>
+            </a:r>
+            <a:endParaRPr lang="en-US" sz="1350" dirty="0"/>
+          </a:p>
+          <a:p>
+            <a:pPr algn="r" marL="342900" indent="-342900">
+              <a:lnSpc>
+                <a:spcPct val="122000"/>
+              </a:lnSpc>
+              <a:spcAft>
+                <a:spcPts val="1000"/>
+              </a:spcAft>
+              <a:buSzPct val="100000"/>
+              <a:buChar char="•"/>
+            </a:pPr>
+            <a:r>
+              <a:rPr lang="en-US" sz="1350" dirty="0">
+                <a:solidFill>
+                  <a:srgbClr val="31424A"/>
+                </a:solidFill>
+                <a:latin typeface="Arial" pitchFamily="34" charset="0"/>
+                <a:ea typeface="Arial" pitchFamily="34" charset="-122"/>
+                <a:cs typeface="Arial" pitchFamily="34" charset="-120"/>
+              </a:rPr>
+              <a:t>مع 100 غرام من EVERGREEN® لكل شتلة، تنخفض حاجة الري بنسبة 50 %.</a:t>
+            </a:r>
+            <a:endParaRPr lang="en-US" sz="1350" dirty="0"/>
+          </a:p>
+          <a:p>
+            <a:pPr algn="r" marL="342900" indent="-342900">
+              <a:lnSpc>
+                <a:spcPct val="122000"/>
+              </a:lnSpc>
+              <a:spcAft>
+                <a:spcPts val="1000"/>
+              </a:spcAft>
+              <a:buSzPct val="100000"/>
+              <a:buChar char="•"/>
+            </a:pPr>
+            <a:r>
+              <a:rPr lang="en-US" sz="1350" dirty="0">
+                <a:solidFill>
+                  <a:srgbClr val="31424A"/>
+                </a:solidFill>
+                <a:latin typeface="Arial" pitchFamily="34" charset="0"/>
+                <a:ea typeface="Arial" pitchFamily="34" charset="-122"/>
+                <a:cs typeface="Arial" pitchFamily="34" charset="-120"/>
+              </a:rPr>
+              <a:t>تتحمّل من −25 إلى +45 درجة مئوية، ولا يشتعل خشبها قبل 426 درجة.</a:t>
+            </a:r>
+            <a:endParaRPr lang="en-US" sz="1350" dirty="0"/>
+          </a:p>
+          <a:p>
+            <a:pPr algn="r" marL="342900" indent="-342900">
+              <a:lnSpc>
+                <a:spcPct val="122000"/>
+              </a:lnSpc>
+              <a:spcAft>
+                <a:spcPts val="1000"/>
+              </a:spcAft>
+              <a:buSzPct val="100000"/>
+              <a:buChar char="•"/>
+            </a:pPr>
+            <a:r>
+              <a:rPr lang="en-US" sz="1350" dirty="0">
+                <a:solidFill>
+                  <a:srgbClr val="31424A"/>
+                </a:solidFill>
+                <a:latin typeface="Arial" pitchFamily="34" charset="0"/>
+                <a:ea typeface="Arial" pitchFamily="34" charset="-122"/>
+                <a:cs typeface="Arial" pitchFamily="34" charset="-120"/>
+              </a:rPr>
+              <a:t>مصدّ للرياح، وحماية للتربة من التعرية، و400 إلى 700 كغ من العسل للهكتار.</a:t>
+            </a:r>
+            <a:endParaRPr lang="en-US" sz="1350" dirty="0"/>
+          </a:p>
+        </p:txBody>
+      </p:sp>
+      <p:sp>
+        <p:nvSpPr>
+          <p:cNvPr id="8" name="Shape 6"/>
+          <p:cNvSpPr/>
+          <p:nvPr/>
+        </p:nvSpPr>
+        <p:spPr>
+          <a:xfrm>
+            <a:off x="594360" y="4846320"/>
+            <a:ext cx="11002975" cy="960120"/>
+          </a:xfrm>
+          <a:prstGeom prst="roundRect">
+            <a:avLst>
+              <a:gd name="adj" fmla="val 7619"/>
+            </a:avLst>
+          </a:prstGeom>
+          <a:solidFill>
+            <a:srgbClr val="EDF3F5"/>
+          </a:solidFill>
+          <a:ln w="9525">
+            <a:solidFill>
+              <a:srgbClr val="D6E2E7"/>
+            </a:solidFill>
+            <a:prstDash val="solid"/>
+          </a:ln>
+        </p:spPr>
+      </p:sp>
+      <p:sp>
+        <p:nvSpPr>
+          <p:cNvPr id="9" name="Text 7"/>
+          <p:cNvSpPr txBox="1"/>
+          <p:nvPr/>
+        </p:nvSpPr>
+        <p:spPr>
+          <a:xfrm>
+            <a:off x="822960" y="4983480"/>
+            <a:ext cx="10545775" cy="713232"/>
+          </a:xfrm>
+          <a:prstGeom prst="rect">
+            <a:avLst/>
+          </a:prstGeom>
+          <a:noFill/>
+          <a:ln/>
+        </p:spPr>
+        <p:txBody>
+          <a:bodyPr wrap="square" lIns="0" tIns="0" rIns="0" bIns="0" rtlCol="0" anchor="t"/>
+          <a:lstStyle/>
+          <a:p>
+            <a:pPr rtl="1" algn="r" indent="0" marL="0">
+              <a:lnSpc>
+                <a:spcPct val="118000"/>
+              </a:lnSpc>
+              <a:buNone/>
+            </a:pPr>
+            <a:r>
+              <a:rPr lang="en-US" sz="1100" dirty="0">
+                <a:solidFill>
+                  <a:srgbClr val="6C8089"/>
+                </a:solidFill>
+                <a:latin typeface="Arial" pitchFamily="34" charset="0"/>
+                <a:ea typeface="Arial" pitchFamily="34" charset="-122"/>
+                <a:cs typeface="Arial" pitchFamily="34" charset="-120"/>
+              </a:rPr>
+              <a:t>تُسلَّم الشتلات في أصص (25 إلى 30 سم)، معتمدة خالية من الأمراض، وتُستبدل بالضمان عند تلفها. أول قطع في نهاية السنة السادسة، ويُقدَّر الخشب بنحو 400 إلى 450 يورو للمتر المكعب.</a:t>
+            </a:r>
+            <a:endParaRPr lang="en-US" sz="1100" dirty="0"/>
+          </a:p>
+        </p:txBody>
+      </p:sp>
+      <p:sp>
+        <p:nvSpPr>
+          <p:cNvPr id="10" name="Text 8"/>
+          <p:cNvSpPr txBox="1"/>
+          <p:nvPr/>
+        </p:nvSpPr>
+        <p:spPr>
+          <a:xfrm>
+            <a:off x="502920" y="6382512"/>
+            <a:ext cx="8229600" cy="274320"/>
+          </a:xfrm>
+          <a:prstGeom prst="rect">
+            <a:avLst/>
+          </a:prstGeom>
+          <a:noFill/>
+          <a:ln/>
+        </p:spPr>
+        <p:txBody>
+          <a:bodyPr wrap="square" lIns="0" tIns="0" rIns="0" bIns="0" rtlCol="0" anchor="ctr"/>
+          <a:lstStyle/>
+          <a:p>
+            <a:pPr rtl="1" algn="r" indent="0" marL="0">
+              <a:buNone/>
+            </a:pPr>
+            <a:r>
+              <a:rPr lang="en-US" sz="950" dirty="0">
+                <a:solidFill>
+                  <a:srgbClr val="6C8089">
+                    <a:alpha val="80000"/>
+                  </a:srgbClr>
+                </a:solidFill>
+                <a:latin typeface="Arial" pitchFamily="34" charset="0"/>
+                <a:ea typeface="Arial" pitchFamily="34" charset="-122"/>
+                <a:cs typeface="Arial" pitchFamily="34" charset="-120"/>
+              </a:rPr>
+              <a:t>Green Solutions · دراسة سوق مصر</a:t>
+            </a:r>
+            <a:endParaRPr lang="en-US" sz="950" dirty="0"/>
+          </a:p>
+        </p:txBody>
+      </p:sp>
+      <p:sp>
+        <p:nvSpPr>
+          <p:cNvPr id="11" name="Text 9"/>
+          <p:cNvSpPr txBox="1"/>
+          <p:nvPr/>
+        </p:nvSpPr>
+        <p:spPr>
+          <a:xfrm>
+            <a:off x="11140135" y="6382512"/>
+            <a:ext cx="548640" cy="274320"/>
+          </a:xfrm>
+          <a:prstGeom prst="rect">
+            <a:avLst/>
+          </a:prstGeom>
+          <a:noFill/>
+          <a:ln/>
+        </p:spPr>
+        <p:txBody>
+          <a:bodyPr wrap="square" lIns="0" tIns="0" rIns="0" bIns="0" rtlCol="0" anchor="ctr"/>
+          <a:lstStyle/>
+          <a:p>
+            <a:pPr rtl="1" algn="r" indent="0" marL="0">
+              <a:buNone/>
+            </a:pPr>
+            <a:r>
+              <a:rPr lang="en-US" sz="950" dirty="0">
+                <a:solidFill>
+                  <a:srgbClr val="6C8089">
+                    <a:alpha val="80000"/>
+                  </a:srgbClr>
+                </a:solidFill>
+                <a:latin typeface="Arial" pitchFamily="34" charset="0"/>
+                <a:ea typeface="Arial" pitchFamily="34" charset="-122"/>
+                <a:cs typeface="Arial" pitchFamily="34" charset="-120"/>
+              </a:rPr>
+              <a:t>10</a:t>
+            </a:r>
+            <a:endParaRPr lang="en-US" sz="950" dirty="0"/>
+          </a:p>
+        </p:txBody>
+      </p:sp>
+    </p:spTree>
+  </p:cSld>
+  <p:clrMapOvr>
+    <a:masterClrMapping/>
+  </p:clrMapOvr>
+</p:sld>
+</file>
+
+<file path=ppt/slides/slide12.xml><?xml version="1.0" encoding="utf-8"?>
+<p:sld xmlns:a="http://schemas.openxmlformats.org/drawingml/2006/main" xmlns:r="http://schemas.openxmlformats.org/officeDocument/2006/relationships" xmlns:p="http://schemas.openxmlformats.org/presentationml/2006/main">
+  <p:cSld name="Slide 12">
+    <p:bg>
+      <p:bgPr>
+        <a:solidFill>
+          <a:srgbClr val="FAFBFB"/>
+        </a:solidFill>
+      </p:bgPr>
+    </p:bg>
+    <p:spTree>
+      <p:nvGrpSpPr>
+        <p:cNvPr id="1" name=""/>
+        <p:cNvGrpSpPr/>
+        <p:nvPr/>
+      </p:nvGrpSpPr>
+      <p:grpSpPr>
+        <a:xfrm>
+          <a:off x="0" y="0"/>
+          <a:ext cx="0" cy="0"/>
+          <a:chOff x="0" y="0"/>
+          <a:chExt cx="0" cy="0"/>
+        </a:xfrm>
+      </p:grpSpPr>
+      <p:sp>
+        <p:nvSpPr>
+          <p:cNvPr id="2" name="Text 0"/>
+          <p:cNvSpPr txBox="1"/>
+          <p:nvPr/>
+        </p:nvSpPr>
+        <p:spPr>
+          <a:xfrm>
+            <a:off x="594360" y="411480"/>
+            <a:ext cx="10515600" cy="274320"/>
+          </a:xfrm>
+          <a:prstGeom prst="rect">
+            <a:avLst/>
+          </a:prstGeom>
+          <a:noFill/>
+          <a:ln/>
+        </p:spPr>
+        <p:txBody>
+          <a:bodyPr wrap="square" lIns="0" tIns="0" rIns="0" bIns="0" rtlCol="0" anchor="ctr"/>
+          <a:lstStyle/>
+          <a:p>
+            <a:pPr rtl="1" algn="r" indent="0" marL="0">
+              <a:buNone/>
+            </a:pPr>
+            <a:r>
+              <a:rPr lang="en-US" sz="1150" b="1" spc="200" kern="0" dirty="0">
+                <a:solidFill>
+                  <a:srgbClr val="E0A33E"/>
+                </a:solidFill>
+                <a:latin typeface="Arial" pitchFamily="34" charset="0"/>
+                <a:ea typeface="Arial" pitchFamily="34" charset="-122"/>
+                <a:cs typeface="Arial" pitchFamily="34" charset="-120"/>
+              </a:rPr>
+              <a:t>ترتيب الحجم المتوقع</a:t>
+            </a:r>
+            <a:endParaRPr lang="en-US" sz="1150" dirty="0"/>
+          </a:p>
+        </p:txBody>
+      </p:sp>
+      <p:sp>
+        <p:nvSpPr>
+          <p:cNvPr id="3" name="Text 1"/>
+          <p:cNvSpPr txBox="1"/>
+          <p:nvPr/>
+        </p:nvSpPr>
+        <p:spPr>
+          <a:xfrm>
+            <a:off x="594360" y="731520"/>
+            <a:ext cx="10881360" cy="731520"/>
+          </a:xfrm>
+          <a:prstGeom prst="rect">
+            <a:avLst/>
+          </a:prstGeom>
+          <a:noFill/>
+          <a:ln/>
+        </p:spPr>
+        <p:txBody>
+          <a:bodyPr wrap="square" lIns="0" tIns="0" rIns="0" bIns="0" rtlCol="0" anchor="ctr"/>
+          <a:lstStyle/>
+          <a:p>
+            <a:pPr rtl="1" algn="r" indent="0" marL="0">
+              <a:buNone/>
+            </a:pPr>
+            <a:r>
+              <a:rPr lang="en-US" sz="3000" b="1" dirty="0">
+                <a:solidFill>
+                  <a:srgbClr val="0E3546"/>
+                </a:solidFill>
+                <a:latin typeface="Arial" pitchFamily="34" charset="0"/>
+                <a:ea typeface="Arial" pitchFamily="34" charset="-122"/>
+                <a:cs typeface="Arial" pitchFamily="34" charset="-120"/>
+              </a:rPr>
+              <a:t>توفير الماء المتوقع حسب أسلوب الري</a:t>
+            </a:r>
+            <a:endParaRPr lang="en-US" sz="3000" dirty="0"/>
+          </a:p>
+        </p:txBody>
+      </p:sp>
+      <p:graphicFrame>
+        <p:nvGraphicFramePr>
+          <p:cNvPr id="4" name="Chart 0" descr=""/>
+          <p:cNvGraphicFramePr/>
+          <p:nvPr/>
+        </p:nvGraphicFramePr>
+        <p:xfrm>
+          <a:off x="594360" y="1783080"/>
+          <a:ext cx="7360920" cy="3977640"/>
+        </p:xfrm>
+        <a:graphic xmlns:a="http://schemas.openxmlformats.org/drawingml/2006/main">
+          <a:graphicData uri="http://schemas.openxmlformats.org/drawingml/2006/chart">
+            <c:chart xmlns:c="http://schemas.openxmlformats.org/drawingml/2006/chart" r:id="rId1"/>
+          </a:graphicData>
+        </a:graphic>
+      </p:graphicFrame>
+      <p:sp>
+        <p:nvSpPr>
+          <p:cNvPr id="5" name="Shape 2"/>
+          <p:cNvSpPr/>
+          <p:nvPr/>
+        </p:nvSpPr>
+        <p:spPr>
+          <a:xfrm>
+            <a:off x="8275320" y="1783080"/>
+            <a:ext cx="3291840" cy="3977640"/>
+          </a:xfrm>
+          <a:prstGeom prst="roundRect">
+            <a:avLst>
+              <a:gd name="adj" fmla="val 2778"/>
+            </a:avLst>
+          </a:prstGeom>
+          <a:solidFill>
+            <a:srgbClr val="EDF3F5"/>
+          </a:solidFill>
+          <a:ln w="9525">
+            <a:solidFill>
+              <a:srgbClr val="D6E2E7"/>
+            </a:solidFill>
+            <a:prstDash val="solid"/>
+          </a:ln>
+        </p:spPr>
+      </p:sp>
+      <p:sp>
+        <p:nvSpPr>
+          <p:cNvPr id="6" name="Text 3"/>
+          <p:cNvSpPr txBox="1"/>
+          <p:nvPr/>
+        </p:nvSpPr>
+        <p:spPr>
+          <a:xfrm>
+            <a:off x="8503920" y="2011680"/>
+            <a:ext cx="2834640" cy="457200"/>
+          </a:xfrm>
+          <a:prstGeom prst="rect">
+            <a:avLst/>
+          </a:prstGeom>
+          <a:noFill/>
+          <a:ln/>
+        </p:spPr>
+        <p:txBody>
+          <a:bodyPr wrap="square" lIns="0" tIns="0" rIns="0" bIns="0" rtlCol="0" anchor="ctr"/>
+          <a:lstStyle/>
+          <a:p>
+            <a:pPr rtl="1" algn="r" indent="0" marL="0">
+              <a:buNone/>
+            </a:pPr>
+            <a:r>
+              <a:rPr lang="en-US" sz="1300" b="1" dirty="0">
+                <a:solidFill>
+                  <a:srgbClr val="1C5A73"/>
+                </a:solidFill>
+                <a:latin typeface="Arial" pitchFamily="34" charset="0"/>
+                <a:ea typeface="Arial" pitchFamily="34" charset="-122"/>
+                <a:cs typeface="Arial" pitchFamily="34" charset="-120"/>
+              </a:rPr>
+              <a:t>تُقرأ بتحفّظ</a:t>
+            </a:r>
+            <a:endParaRPr lang="en-US" sz="1300" dirty="0"/>
+          </a:p>
+        </p:txBody>
+      </p:sp>
+      <p:sp>
+        <p:nvSpPr>
+          <p:cNvPr id="7" name="Text 4"/>
+          <p:cNvSpPr txBox="1"/>
+          <p:nvPr/>
+        </p:nvSpPr>
+        <p:spPr>
+          <a:xfrm>
+            <a:off x="8503920" y="2560320"/>
+            <a:ext cx="2834640" cy="3017520"/>
+          </a:xfrm>
+          <a:prstGeom prst="rect">
+            <a:avLst/>
+          </a:prstGeom>
+          <a:noFill/>
+          <a:ln/>
+        </p:spPr>
+        <p:txBody>
+          <a:bodyPr wrap="square" lIns="0" tIns="0" rIns="0" bIns="0" rtlCol="0" anchor="t"/>
+          <a:lstStyle/>
+          <a:p>
+            <a:pPr rtl="1" algn="r" indent="0" marL="0">
+              <a:lnSpc>
+                <a:spcPct val="125000"/>
+              </a:lnSpc>
+              <a:buNone/>
+            </a:pPr>
+            <a:r>
+              <a:rPr lang="en-US" sz="1200" dirty="0">
+                <a:solidFill>
+                  <a:srgbClr val="31424A"/>
+                </a:solidFill>
+                <a:latin typeface="Arial" pitchFamily="34" charset="0"/>
+                <a:ea typeface="Arial" pitchFamily="34" charset="-122"/>
+                <a:cs typeface="Arial" pitchFamily="34" charset="-120"/>
+              </a:rPr>
+              <a:t>هذه النطاقات تقديرية إرشادية، مبنية على المكاسب الموثقة لموادنا الحابسة للماء.</a:t>
+            </a:r>
+            <a:endParaRPr lang="en-US" sz="1200" dirty="0"/>
+          </a:p>
+          <a:p>
+            <a:pPr rtl="1" algn="r" indent="0" marL="0">
+              <a:lnSpc>
+                <a:spcPct val="125000"/>
+              </a:lnSpc>
+              <a:buNone/>
+            </a:pPr>
+            <a:endParaRPr lang="en-US" sz="1200" dirty="0"/>
+          </a:p>
+          <a:p>
+            <a:pPr rtl="1" algn="r" indent="0" marL="0">
+              <a:lnSpc>
+                <a:spcPct val="125000"/>
+              </a:lnSpc>
+              <a:buNone/>
+            </a:pPr>
+            <a:r>
+              <a:rPr lang="en-US" sz="1200" dirty="0">
+                <a:solidFill>
+                  <a:srgbClr val="31424A"/>
+                </a:solidFill>
+                <a:latin typeface="Arial" pitchFamily="34" charset="0"/>
+                <a:ea typeface="Arial" pitchFamily="34" charset="-122"/>
+                <a:cs typeface="Arial" pitchFamily="34" charset="-120"/>
+              </a:rPr>
+              <a:t>النتيجة الفعلية تتوقف على التربة والمناخ والمحصول. الأرقام تعطي ترتيب حجم فقط، وهي ليست بأي حال قيمة مضمونة أو تعاقدية أو مطلقة.</a:t>
+            </a:r>
+            <a:endParaRPr lang="en-US" sz="1200" dirty="0"/>
+          </a:p>
+        </p:txBody>
+      </p:sp>
+      <p:sp>
+        <p:nvSpPr>
+          <p:cNvPr id="8" name="Text 5"/>
+          <p:cNvSpPr txBox="1"/>
+          <p:nvPr/>
+        </p:nvSpPr>
+        <p:spPr>
+          <a:xfrm>
+            <a:off x="502920" y="6382512"/>
+            <a:ext cx="8229600" cy="274320"/>
+          </a:xfrm>
+          <a:prstGeom prst="rect">
+            <a:avLst/>
+          </a:prstGeom>
+          <a:noFill/>
+          <a:ln/>
+        </p:spPr>
+        <p:txBody>
+          <a:bodyPr wrap="square" lIns="0" tIns="0" rIns="0" bIns="0" rtlCol="0" anchor="ctr"/>
+          <a:lstStyle/>
+          <a:p>
+            <a:pPr rtl="1" algn="r" indent="0" marL="0">
+              <a:buNone/>
+            </a:pPr>
+            <a:r>
+              <a:rPr lang="en-US" sz="950" dirty="0">
+                <a:solidFill>
+                  <a:srgbClr val="6C8089">
+                    <a:alpha val="80000"/>
+                  </a:srgbClr>
+                </a:solidFill>
+                <a:latin typeface="Arial" pitchFamily="34" charset="0"/>
+                <a:ea typeface="Arial" pitchFamily="34" charset="-122"/>
+                <a:cs typeface="Arial" pitchFamily="34" charset="-120"/>
+              </a:rPr>
+              <a:t>Green Solutions · دراسة سوق مصر</a:t>
+            </a:r>
+            <a:endParaRPr lang="en-US" sz="950" dirty="0"/>
+          </a:p>
+        </p:txBody>
+      </p:sp>
+      <p:sp>
+        <p:nvSpPr>
+          <p:cNvPr id="9" name="Text 6"/>
+          <p:cNvSpPr txBox="1"/>
+          <p:nvPr/>
+        </p:nvSpPr>
+        <p:spPr>
+          <a:xfrm>
+            <a:off x="11140135" y="6382512"/>
+            <a:ext cx="548640" cy="274320"/>
+          </a:xfrm>
+          <a:prstGeom prst="rect">
+            <a:avLst/>
+          </a:prstGeom>
+          <a:noFill/>
+          <a:ln/>
+        </p:spPr>
+        <p:txBody>
+          <a:bodyPr wrap="square" lIns="0" tIns="0" rIns="0" bIns="0" rtlCol="0" anchor="ctr"/>
+          <a:lstStyle/>
+          <a:p>
+            <a:pPr rtl="1" algn="r" indent="0" marL="0">
+              <a:buNone/>
+            </a:pPr>
+            <a:r>
+              <a:rPr lang="en-US" sz="950" dirty="0">
+                <a:solidFill>
+                  <a:srgbClr val="6C8089">
+                    <a:alpha val="80000"/>
+                  </a:srgbClr>
+                </a:solidFill>
+                <a:latin typeface="Arial" pitchFamily="34" charset="0"/>
+                <a:ea typeface="Arial" pitchFamily="34" charset="-122"/>
+                <a:cs typeface="Arial" pitchFamily="34" charset="-120"/>
+              </a:rPr>
+              <a:t>11</a:t>
+            </a:r>
+            <a:endParaRPr lang="en-US" sz="950" dirty="0"/>
+          </a:p>
+        </p:txBody>
+      </p:sp>
+    </p:spTree>
+  </p:cSld>
+  <p:clrMapOvr>
+    <a:masterClrMapping/>
+  </p:clrMapOvr>
+</p:sld>
+</file>
+
+<file path=ppt/slides/slide13.xml><?xml version="1.0" encoding="utf-8"?>
+<p:sld xmlns:a="http://schemas.openxmlformats.org/drawingml/2006/main" xmlns:r="http://schemas.openxmlformats.org/officeDocument/2006/relationships" xmlns:p="http://schemas.openxmlformats.org/presentationml/2006/main">
+  <p:cSld name="Slide 13">
+    <p:bg>
+      <p:bgPr>
+        <a:solidFill>
+          <a:srgbClr val="FAFBFB"/>
+        </a:solidFill>
+      </p:bgPr>
+    </p:bg>
+    <p:spTree>
+      <p:nvGrpSpPr>
+        <p:cNvPr id="1" name=""/>
+        <p:cNvGrpSpPr/>
+        <p:nvPr/>
+      </p:nvGrpSpPr>
+      <p:grpSpPr>
+        <a:xfrm>
+          <a:off x="0" y="0"/>
+          <a:ext cx="0" cy="0"/>
+          <a:chOff x="0" y="0"/>
+          <a:chExt cx="0" cy="0"/>
+        </a:xfrm>
+      </p:grpSpPr>
+      <p:sp>
+        <p:nvSpPr>
+          <p:cNvPr id="2" name="Text 0"/>
+          <p:cNvSpPr txBox="1"/>
+          <p:nvPr/>
+        </p:nvSpPr>
+        <p:spPr>
+          <a:xfrm>
+            <a:off x="594360" y="411480"/>
+            <a:ext cx="10515600" cy="274320"/>
+          </a:xfrm>
+          <a:prstGeom prst="rect">
+            <a:avLst/>
+          </a:prstGeom>
+          <a:noFill/>
+          <a:ln/>
+        </p:spPr>
+        <p:txBody>
+          <a:bodyPr wrap="square" lIns="0" tIns="0" rIns="0" bIns="0" rtlCol="0" anchor="ctr"/>
+          <a:lstStyle/>
+          <a:p>
+            <a:pPr rtl="1" algn="r" indent="0" marL="0">
+              <a:buNone/>
+            </a:pPr>
+            <a:r>
+              <a:rPr lang="en-US" sz="1150" b="1" spc="200" kern="0" dirty="0">
+                <a:solidFill>
+                  <a:srgbClr val="E0A33E"/>
+                </a:solidFill>
+                <a:latin typeface="Arial" pitchFamily="34" charset="0"/>
+                <a:ea typeface="Arial" pitchFamily="34" charset="-122"/>
+                <a:cs typeface="Arial" pitchFamily="34" charset="-120"/>
+              </a:rPr>
+              <a:t>ثلاثة ميادين أولوية</a:t>
+            </a:r>
+            <a:endParaRPr lang="en-US" sz="1150" dirty="0"/>
+          </a:p>
+        </p:txBody>
+      </p:sp>
+      <p:sp>
+        <p:nvSpPr>
+          <p:cNvPr id="3" name="Text 1"/>
+          <p:cNvSpPr txBox="1"/>
+          <p:nvPr/>
+        </p:nvSpPr>
+        <p:spPr>
+          <a:xfrm>
+            <a:off x="594360" y="731520"/>
+            <a:ext cx="10881360" cy="731520"/>
+          </a:xfrm>
+          <a:prstGeom prst="rect">
+            <a:avLst/>
+          </a:prstGeom>
+          <a:noFill/>
+          <a:ln/>
+        </p:spPr>
+        <p:txBody>
+          <a:bodyPr wrap="square" lIns="0" tIns="0" rIns="0" bIns="0" rtlCol="0" anchor="ctr"/>
+          <a:lstStyle/>
+          <a:p>
+            <a:pPr rtl="1" algn="r" indent="0" marL="0">
+              <a:buNone/>
+            </a:pPr>
+            <a:r>
+              <a:rPr lang="en-US" sz="3000" b="1" dirty="0">
+                <a:solidFill>
+                  <a:srgbClr val="0E3546"/>
+                </a:solidFill>
+                <a:latin typeface="Arial" pitchFamily="34" charset="0"/>
+                <a:ea typeface="Arial" pitchFamily="34" charset="-122"/>
+                <a:cs typeface="Arial" pitchFamily="34" charset="-120"/>
+              </a:rPr>
+              <a:t>أين نبدأ التجارب الأولى</a:t>
+            </a:r>
+            <a:endParaRPr lang="en-US" sz="3000" dirty="0"/>
+          </a:p>
+        </p:txBody>
+      </p:sp>
+      <p:sp>
+        <p:nvSpPr>
+          <p:cNvPr id="4" name="Shape 2"/>
+          <p:cNvSpPr/>
+          <p:nvPr/>
+        </p:nvSpPr>
+        <p:spPr>
+          <a:xfrm>
+            <a:off x="594360" y="1783080"/>
+            <a:ext cx="3472586" cy="4069080"/>
+          </a:xfrm>
+          <a:prstGeom prst="roundRect">
+            <a:avLst>
+              <a:gd name="adj" fmla="val 2633"/>
+            </a:avLst>
+          </a:prstGeom>
+          <a:solidFill>
+            <a:srgbClr val="EDF3F5"/>
+          </a:solidFill>
+          <a:ln w="9525">
+            <a:solidFill>
+              <a:srgbClr val="D6E2E7"/>
+            </a:solidFill>
+            <a:prstDash val="solid"/>
+          </a:ln>
+        </p:spPr>
+      </p:sp>
+      <p:pic>
+        <p:nvPicPr>
+          <p:cNvPr id="5" name="Image 0" descr="preencoded.png">    </p:cNvPr>
+          <p:cNvPicPr>
+            <a:picLocks noChangeAspect="1"/>
+          </p:cNvPicPr>
+          <p:nvPr/>
+        </p:nvPicPr>
+        <p:blipFill>
+          <a:blip r:embed="rId1"/>
+          <a:stretch>
+            <a:fillRect/>
+          </a:stretch>
+        </p:blipFill>
+        <p:spPr>
+          <a:xfrm>
+            <a:off x="594360" y="1783080"/>
+            <a:ext cx="3472586" cy="1691640"/>
+          </a:xfrm>
+          <a:prstGeom prst="rect">
+            <a:avLst/>
+          </a:prstGeom>
+        </p:spPr>
+      </p:pic>
+      <p:sp>
+        <p:nvSpPr>
+          <p:cNvPr id="6" name="Text 3"/>
+          <p:cNvSpPr txBox="1"/>
+          <p:nvPr/>
+        </p:nvSpPr>
+        <p:spPr>
+          <a:xfrm>
+            <a:off x="795528" y="3639312"/>
+            <a:ext cx="3070250" cy="384048"/>
+          </a:xfrm>
+          <a:prstGeom prst="rect">
+            <a:avLst/>
+          </a:prstGeom>
+          <a:noFill/>
+          <a:ln/>
+        </p:spPr>
+        <p:txBody>
+          <a:bodyPr wrap="square" lIns="0" tIns="0" rIns="0" bIns="0" rtlCol="0" anchor="ctr"/>
+          <a:lstStyle/>
+          <a:p>
+            <a:pPr rtl="1" algn="r" indent="0" marL="0">
+              <a:buNone/>
+            </a:pPr>
+            <a:r>
+              <a:rPr lang="en-US" sz="1500" b="1" dirty="0">
+                <a:solidFill>
+                  <a:srgbClr val="1C5A73"/>
+                </a:solidFill>
+                <a:latin typeface="Arial" pitchFamily="34" charset="0"/>
+                <a:ea typeface="Arial" pitchFamily="34" charset="-122"/>
+                <a:cs typeface="Arial" pitchFamily="34" charset="-120"/>
+              </a:rPr>
+              <a:t>شمال الدلتا</a:t>
+            </a:r>
+            <a:endParaRPr lang="en-US" sz="1500" dirty="0"/>
+          </a:p>
+        </p:txBody>
+      </p:sp>
+      <p:sp>
+        <p:nvSpPr>
+          <p:cNvPr id="7" name="Text 4"/>
+          <p:cNvSpPr txBox="1"/>
+          <p:nvPr/>
+        </p:nvSpPr>
+        <p:spPr>
+          <a:xfrm>
+            <a:off x="795528" y="4041648"/>
+            <a:ext cx="3070250" cy="329184"/>
+          </a:xfrm>
+          <a:prstGeom prst="rect">
+            <a:avLst/>
+          </a:prstGeom>
+          <a:noFill/>
+          <a:ln/>
+        </p:spPr>
+        <p:txBody>
+          <a:bodyPr wrap="square" lIns="0" tIns="0" rIns="0" bIns="0" rtlCol="0" anchor="ctr"/>
+          <a:lstStyle/>
+          <a:p>
+            <a:pPr rtl="1" algn="r" indent="0" marL="0">
+              <a:buNone/>
+            </a:pPr>
+            <a:r>
+              <a:rPr lang="en-US" sz="1250" b="1" dirty="0">
+                <a:solidFill>
+                  <a:srgbClr val="A3701A"/>
+                </a:solidFill>
+                <a:latin typeface="Arial" pitchFamily="34" charset="0"/>
+                <a:ea typeface="Arial" pitchFamily="34" charset="-122"/>
+                <a:cs typeface="Arial" pitchFamily="34" charset="-120"/>
+              </a:rPr>
+              <a:t>أرز وخضر وموالح على أرض قديمة</a:t>
+            </a:r>
+            <a:endParaRPr lang="en-US" sz="1250" dirty="0"/>
+          </a:p>
+        </p:txBody>
+      </p:sp>
+      <p:sp>
+        <p:nvSpPr>
+          <p:cNvPr id="8" name="Text 5"/>
+          <p:cNvSpPr txBox="1"/>
+          <p:nvPr/>
+        </p:nvSpPr>
+        <p:spPr>
+          <a:xfrm>
+            <a:off x="795528" y="4407408"/>
+            <a:ext cx="3070250" cy="1280160"/>
+          </a:xfrm>
+          <a:prstGeom prst="rect">
+            <a:avLst/>
+          </a:prstGeom>
+          <a:noFill/>
+          <a:ln/>
+        </p:spPr>
+        <p:txBody>
+          <a:bodyPr wrap="square" lIns="0" tIns="0" rIns="0" bIns="0" rtlCol="0" anchor="t"/>
+          <a:lstStyle/>
+          <a:p>
+            <a:pPr algn="r" marL="342900" indent="-342900">
+              <a:lnSpc>
+                <a:spcPct val="116000"/>
+              </a:lnSpc>
+              <a:spcAft>
+                <a:spcPts val="700"/>
+              </a:spcAft>
+              <a:buSzPct val="100000"/>
+              <a:buChar char="•"/>
+            </a:pPr>
+            <a:r>
+              <a:rPr lang="en-US" sz="1150" dirty="0">
+                <a:solidFill>
+                  <a:srgbClr val="31424A"/>
+                </a:solidFill>
+                <a:latin typeface="Arial" pitchFamily="34" charset="0"/>
+                <a:ea typeface="Arial" pitchFamily="34" charset="-122"/>
+                <a:cs typeface="Arial" pitchFamily="34" charset="-120"/>
+              </a:rPr>
+              <a:t>خضر وأرز وموالح على أراضٍ قديمة خصبة، لكن الري بالغمر ما زال هو السائد.</a:t>
+            </a:r>
+            <a:endParaRPr lang="en-US" sz="1150" dirty="0"/>
+          </a:p>
+          <a:p>
+            <a:pPr algn="r" marL="342900" indent="-342900">
+              <a:lnSpc>
+                <a:spcPct val="116000"/>
+              </a:lnSpc>
+              <a:spcAft>
+                <a:spcPts val="700"/>
+              </a:spcAft>
+              <a:buSzPct val="100000"/>
+              <a:buChar char="•"/>
+            </a:pPr>
+            <a:r>
+              <a:rPr lang="en-US" sz="1150" dirty="0">
+                <a:solidFill>
+                  <a:srgbClr val="31424A"/>
+                </a:solidFill>
+                <a:latin typeface="Arial" pitchFamily="34" charset="0"/>
+                <a:ea typeface="Arial" pitchFamily="34" charset="-122"/>
+                <a:cs typeface="Arial" pitchFamily="34" charset="-120"/>
+              </a:rPr>
+              <a:t>تداخل مياه البحر يرفع الملوحة: سماد غير مخلّب ميزة مباشرة هنا.</a:t>
+            </a:r>
+            <a:endParaRPr lang="en-US" sz="1150" dirty="0"/>
+          </a:p>
+          <a:p>
+            <a:pPr algn="r" marL="342900" indent="-342900">
+              <a:lnSpc>
+                <a:spcPct val="116000"/>
+              </a:lnSpc>
+              <a:spcAft>
+                <a:spcPts val="700"/>
+              </a:spcAft>
+              <a:buSzPct val="100000"/>
+              <a:buChar char="•"/>
+            </a:pPr>
+            <a:r>
+              <a:rPr lang="en-US" sz="1150" dirty="0">
+                <a:solidFill>
+                  <a:srgbClr val="31424A"/>
+                </a:solidFill>
+                <a:latin typeface="Arial" pitchFamily="34" charset="0"/>
+                <a:ea typeface="Arial" pitchFamily="34" charset="-122"/>
+                <a:cs typeface="Arial" pitchFamily="34" charset="-120"/>
+              </a:rPr>
+              <a:t>كثافة عالية من الجمعيات التعاونية تسمح بالوصول إلى عدد كبير من المزارعين.</a:t>
+            </a:r>
+            <a:endParaRPr lang="en-US" sz="1150" dirty="0"/>
+          </a:p>
+        </p:txBody>
+      </p:sp>
+      <p:sp>
+        <p:nvSpPr>
+          <p:cNvPr id="9" name="Shape 6"/>
+          <p:cNvSpPr/>
+          <p:nvPr/>
+        </p:nvSpPr>
+        <p:spPr>
+          <a:xfrm>
+            <a:off x="4359554" y="1783080"/>
+            <a:ext cx="3472586" cy="4069080"/>
+          </a:xfrm>
+          <a:prstGeom prst="roundRect">
+            <a:avLst>
+              <a:gd name="adj" fmla="val 2633"/>
+            </a:avLst>
+          </a:prstGeom>
+          <a:solidFill>
+            <a:srgbClr val="EDF3F5"/>
+          </a:solidFill>
+          <a:ln w="9525">
+            <a:solidFill>
+              <a:srgbClr val="D6E2E7"/>
+            </a:solidFill>
+            <a:prstDash val="solid"/>
+          </a:ln>
+        </p:spPr>
+      </p:sp>
+      <p:pic>
+        <p:nvPicPr>
+          <p:cNvPr id="10" name="Image 1" descr="preencoded.png">    </p:cNvPr>
+          <p:cNvPicPr>
+            <a:picLocks noChangeAspect="1"/>
+          </p:cNvPicPr>
+          <p:nvPr/>
+        </p:nvPicPr>
+        <p:blipFill>
+          <a:blip r:embed="rId2"/>
+          <a:stretch>
+            <a:fillRect/>
+          </a:stretch>
+        </p:blipFill>
+        <p:spPr>
+          <a:xfrm>
+            <a:off x="4359554" y="1783080"/>
+            <a:ext cx="3472586" cy="1691640"/>
+          </a:xfrm>
+          <a:prstGeom prst="rect">
+            <a:avLst/>
+          </a:prstGeom>
+        </p:spPr>
+      </p:pic>
+      <p:sp>
+        <p:nvSpPr>
+          <p:cNvPr id="11" name="Text 7"/>
+          <p:cNvSpPr txBox="1"/>
+          <p:nvPr/>
+        </p:nvSpPr>
+        <p:spPr>
+          <a:xfrm>
+            <a:off x="4560722" y="3639312"/>
+            <a:ext cx="3070250" cy="384048"/>
+          </a:xfrm>
+          <a:prstGeom prst="rect">
+            <a:avLst/>
+          </a:prstGeom>
+          <a:noFill/>
+          <a:ln/>
+        </p:spPr>
+        <p:txBody>
+          <a:bodyPr wrap="square" lIns="0" tIns="0" rIns="0" bIns="0" rtlCol="0" anchor="ctr"/>
+          <a:lstStyle/>
+          <a:p>
+            <a:pPr rtl="1" algn="r" indent="0" marL="0">
+              <a:buNone/>
+            </a:pPr>
+            <a:r>
+              <a:rPr lang="en-US" sz="1500" b="1" dirty="0">
+                <a:solidFill>
+                  <a:srgbClr val="1C5A73"/>
+                </a:solidFill>
+                <a:latin typeface="Arial" pitchFamily="34" charset="0"/>
+                <a:ea typeface="Arial" pitchFamily="34" charset="-122"/>
+                <a:cs typeface="Arial" pitchFamily="34" charset="-120"/>
+              </a:rPr>
+              <a:t>صعيد مصر</a:t>
+            </a:r>
+            <a:endParaRPr lang="en-US" sz="1500" dirty="0"/>
+          </a:p>
+        </p:txBody>
+      </p:sp>
+      <p:sp>
+        <p:nvSpPr>
+          <p:cNvPr id="12" name="Text 8"/>
+          <p:cNvSpPr txBox="1"/>
+          <p:nvPr/>
+        </p:nvSpPr>
+        <p:spPr>
+          <a:xfrm>
+            <a:off x="4560722" y="4041648"/>
+            <a:ext cx="3070250" cy="329184"/>
+          </a:xfrm>
+          <a:prstGeom prst="rect">
+            <a:avLst/>
+          </a:prstGeom>
+          <a:noFill/>
+          <a:ln/>
+        </p:spPr>
+        <p:txBody>
+          <a:bodyPr wrap="square" lIns="0" tIns="0" rIns="0" bIns="0" rtlCol="0" anchor="ctr"/>
+          <a:lstStyle/>
+          <a:p>
+            <a:pPr rtl="1" algn="r" indent="0" marL="0">
+              <a:buNone/>
+            </a:pPr>
+            <a:r>
+              <a:rPr lang="en-US" sz="1250" b="1" dirty="0">
+                <a:solidFill>
+                  <a:srgbClr val="A3701A"/>
+                </a:solidFill>
+                <a:latin typeface="Arial" pitchFamily="34" charset="0"/>
+                <a:ea typeface="Arial" pitchFamily="34" charset="-122"/>
+                <a:cs typeface="Arial" pitchFamily="34" charset="-120"/>
+              </a:rPr>
+              <a:t>≈ 16 مليون طن قصب سنويًا</a:t>
+            </a:r>
+            <a:endParaRPr lang="en-US" sz="1250" dirty="0"/>
+          </a:p>
+        </p:txBody>
+      </p:sp>
+      <p:sp>
+        <p:nvSpPr>
+          <p:cNvPr id="13" name="Text 9"/>
+          <p:cNvSpPr txBox="1"/>
+          <p:nvPr/>
+        </p:nvSpPr>
+        <p:spPr>
+          <a:xfrm>
+            <a:off x="4560722" y="4407408"/>
+            <a:ext cx="3070250" cy="1280160"/>
+          </a:xfrm>
+          <a:prstGeom prst="rect">
+            <a:avLst/>
+          </a:prstGeom>
+          <a:noFill/>
+          <a:ln/>
+        </p:spPr>
+        <p:txBody>
+          <a:bodyPr wrap="square" lIns="0" tIns="0" rIns="0" bIns="0" rtlCol="0" anchor="t"/>
+          <a:lstStyle/>
+          <a:p>
+            <a:pPr algn="r" marL="342900" indent="-342900">
+              <a:lnSpc>
+                <a:spcPct val="116000"/>
+              </a:lnSpc>
+              <a:spcAft>
+                <a:spcPts val="700"/>
+              </a:spcAft>
+              <a:buSzPct val="100000"/>
+              <a:buChar char="•"/>
+            </a:pPr>
+            <a:r>
+              <a:rPr lang="en-US" sz="1150" dirty="0">
+                <a:solidFill>
+                  <a:srgbClr val="31424A"/>
+                </a:solidFill>
+                <a:latin typeface="Arial" pitchFamily="34" charset="0"/>
+                <a:ea typeface="Arial" pitchFamily="34" charset="-122"/>
+                <a:cs typeface="Arial" pitchFamily="34" charset="-120"/>
+              </a:rPr>
+              <a:t>قصب السكر مركّز في المنيا وقنا وأسوان، وهو أعلى المحاصيل استهلاكًا للماء.</a:t>
+            </a:r>
+            <a:endParaRPr lang="en-US" sz="1150" dirty="0"/>
+          </a:p>
+          <a:p>
+            <a:pPr algn="r" marL="342900" indent="-342900">
+              <a:lnSpc>
+                <a:spcPct val="116000"/>
+              </a:lnSpc>
+              <a:spcAft>
+                <a:spcPts val="700"/>
+              </a:spcAft>
+              <a:buSzPct val="100000"/>
+              <a:buChar char="•"/>
+            </a:pPr>
+            <a:r>
+              <a:rPr lang="en-US" sz="1150" dirty="0">
+                <a:solidFill>
+                  <a:srgbClr val="31424A"/>
+                </a:solidFill>
+                <a:latin typeface="Arial" pitchFamily="34" charset="0"/>
+                <a:ea typeface="Arial" pitchFamily="34" charset="-122"/>
+                <a:cs typeface="Arial" pitchFamily="34" charset="-120"/>
+              </a:rPr>
+              <a:t>تبخر شديد وصيف يتجاوز 45 درجة: الفاقد بين ريّتين هو الأعلى في البلاد.</a:t>
+            </a:r>
+            <a:endParaRPr lang="en-US" sz="1150" dirty="0"/>
+          </a:p>
+          <a:p>
+            <a:pPr algn="r" marL="342900" indent="-342900">
+              <a:lnSpc>
+                <a:spcPct val="116000"/>
+              </a:lnSpc>
+              <a:spcAft>
+                <a:spcPts val="700"/>
+              </a:spcAft>
+              <a:buSzPct val="100000"/>
+              <a:buChar char="•"/>
+            </a:pPr>
+            <a:r>
+              <a:rPr lang="en-US" sz="1150" dirty="0">
+                <a:solidFill>
+                  <a:srgbClr val="31424A"/>
+                </a:solidFill>
+                <a:latin typeface="Arial" pitchFamily="34" charset="0"/>
+                <a:ea typeface="Arial" pitchFamily="34" charset="-122"/>
+                <a:cs typeface="Arial" pitchFamily="34" charset="-120"/>
+              </a:rPr>
+              <a:t>مصانع السكر مشترٍ منظَّم، يسهّل اتفاقًا على مستوى منطقة كاملة.</a:t>
+            </a:r>
+            <a:endParaRPr lang="en-US" sz="1150" dirty="0"/>
+          </a:p>
+        </p:txBody>
+      </p:sp>
+      <p:sp>
+        <p:nvSpPr>
+          <p:cNvPr id="14" name="Shape 10"/>
+          <p:cNvSpPr/>
+          <p:nvPr/>
+        </p:nvSpPr>
+        <p:spPr>
+          <a:xfrm>
+            <a:off x="8124749" y="1783080"/>
+            <a:ext cx="3472586" cy="4069080"/>
+          </a:xfrm>
+          <a:prstGeom prst="roundRect">
+            <a:avLst>
+              <a:gd name="adj" fmla="val 2633"/>
+            </a:avLst>
+          </a:prstGeom>
+          <a:solidFill>
+            <a:srgbClr val="EDF3F5"/>
+          </a:solidFill>
+          <a:ln w="9525">
+            <a:solidFill>
+              <a:srgbClr val="D6E2E7"/>
+            </a:solidFill>
+            <a:prstDash val="solid"/>
+          </a:ln>
+        </p:spPr>
+      </p:sp>
+      <p:pic>
+        <p:nvPicPr>
+          <p:cNvPr id="15" name="Image 2" descr="preencoded.png">    </p:cNvPr>
+          <p:cNvPicPr>
+            <a:picLocks noChangeAspect="1"/>
+          </p:cNvPicPr>
+          <p:nvPr/>
+        </p:nvPicPr>
+        <p:blipFill>
+          <a:blip r:embed="rId3"/>
+          <a:stretch>
+            <a:fillRect/>
+          </a:stretch>
+        </p:blipFill>
+        <p:spPr>
+          <a:xfrm>
+            <a:off x="8124749" y="1783080"/>
+            <a:ext cx="3472586" cy="1691640"/>
+          </a:xfrm>
+          <a:prstGeom prst="rect">
+            <a:avLst/>
+          </a:prstGeom>
+        </p:spPr>
+      </p:pic>
+      <p:sp>
+        <p:nvSpPr>
+          <p:cNvPr id="16" name="Text 11"/>
+          <p:cNvSpPr txBox="1"/>
+          <p:nvPr/>
+        </p:nvSpPr>
+        <p:spPr>
+          <a:xfrm>
+            <a:off x="8325917" y="3639312"/>
+            <a:ext cx="3070250" cy="384048"/>
+          </a:xfrm>
+          <a:prstGeom prst="rect">
+            <a:avLst/>
+          </a:prstGeom>
+          <a:noFill/>
+          <a:ln/>
+        </p:spPr>
+        <p:txBody>
+          <a:bodyPr wrap="square" lIns="0" tIns="0" rIns="0" bIns="0" rtlCol="0" anchor="ctr"/>
+          <a:lstStyle/>
+          <a:p>
+            <a:pPr rtl="1" algn="r" indent="0" marL="0">
+              <a:buNone/>
+            </a:pPr>
+            <a:r>
+              <a:rPr lang="en-US" sz="1500" b="1" dirty="0">
+                <a:solidFill>
+                  <a:srgbClr val="1C5A73"/>
+                </a:solidFill>
+                <a:latin typeface="Arial" pitchFamily="34" charset="0"/>
+                <a:ea typeface="Arial" pitchFamily="34" charset="-122"/>
+                <a:cs typeface="Arial" pitchFamily="34" charset="-120"/>
+              </a:rPr>
+              <a:t>النوبارية وغرب الدلتا</a:t>
+            </a:r>
+            <a:endParaRPr lang="en-US" sz="1500" dirty="0"/>
+          </a:p>
+        </p:txBody>
+      </p:sp>
+      <p:sp>
+        <p:nvSpPr>
+          <p:cNvPr id="17" name="Text 12"/>
+          <p:cNvSpPr txBox="1"/>
+          <p:nvPr/>
+        </p:nvSpPr>
+        <p:spPr>
+          <a:xfrm>
+            <a:off x="8325917" y="4041648"/>
+            <a:ext cx="3070250" cy="329184"/>
+          </a:xfrm>
+          <a:prstGeom prst="rect">
+            <a:avLst/>
+          </a:prstGeom>
+          <a:noFill/>
+          <a:ln/>
+        </p:spPr>
+        <p:txBody>
+          <a:bodyPr wrap="square" lIns="0" tIns="0" rIns="0" bIns="0" rtlCol="0" anchor="ctr"/>
+          <a:lstStyle/>
+          <a:p>
+            <a:pPr rtl="1" algn="r" indent="0" marL="0">
+              <a:buNone/>
+            </a:pPr>
+            <a:r>
+              <a:rPr lang="en-US" sz="1250" b="1" dirty="0">
+                <a:solidFill>
+                  <a:srgbClr val="A3701A"/>
+                </a:solidFill>
+                <a:latin typeface="Arial" pitchFamily="34" charset="0"/>
+                <a:ea typeface="Arial" pitchFamily="34" charset="-122"/>
+                <a:cs typeface="Arial" pitchFamily="34" charset="-120"/>
+              </a:rPr>
+              <a:t>قطب تصدير الموالح والعنب</a:t>
+            </a:r>
+            <a:endParaRPr lang="en-US" sz="1250" dirty="0"/>
+          </a:p>
+        </p:txBody>
+      </p:sp>
+      <p:sp>
+        <p:nvSpPr>
+          <p:cNvPr id="18" name="Text 13"/>
+          <p:cNvSpPr txBox="1"/>
+          <p:nvPr/>
+        </p:nvSpPr>
+        <p:spPr>
+          <a:xfrm>
+            <a:off x="8325917" y="4407408"/>
+            <a:ext cx="3070250" cy="1280160"/>
+          </a:xfrm>
+          <a:prstGeom prst="rect">
+            <a:avLst/>
+          </a:prstGeom>
+          <a:noFill/>
+          <a:ln/>
+        </p:spPr>
+        <p:txBody>
+          <a:bodyPr wrap="square" lIns="0" tIns="0" rIns="0" bIns="0" rtlCol="0" anchor="t"/>
+          <a:lstStyle/>
+          <a:p>
+            <a:pPr algn="r" marL="342900" indent="-342900">
+              <a:lnSpc>
+                <a:spcPct val="116000"/>
+              </a:lnSpc>
+              <a:spcAft>
+                <a:spcPts val="700"/>
+              </a:spcAft>
+              <a:buSzPct val="100000"/>
+              <a:buChar char="•"/>
+            </a:pPr>
+            <a:r>
+              <a:rPr lang="en-US" sz="1150" dirty="0">
+                <a:solidFill>
+                  <a:srgbClr val="31424A"/>
+                </a:solidFill>
+                <a:latin typeface="Arial" pitchFamily="34" charset="0"/>
+                <a:ea typeface="Arial" pitchFamily="34" charset="-122"/>
+                <a:cs typeface="Arial" pitchFamily="34" charset="-120"/>
+              </a:rPr>
+              <a:t>أراضٍ مستصلحة رملية: قدرة احتفاظ بالماء ضعيفة، وهي الحالة الأنسب لموادنا.</a:t>
+            </a:r>
+            <a:endParaRPr lang="en-US" sz="1150" dirty="0"/>
+          </a:p>
+          <a:p>
+            <a:pPr algn="r" marL="342900" indent="-342900">
+              <a:lnSpc>
+                <a:spcPct val="116000"/>
+              </a:lnSpc>
+              <a:spcAft>
+                <a:spcPts val="700"/>
+              </a:spcAft>
+              <a:buSzPct val="100000"/>
+              <a:buChar char="•"/>
+            </a:pPr>
+            <a:r>
+              <a:rPr lang="en-US" sz="1150" dirty="0">
+                <a:solidFill>
+                  <a:srgbClr val="31424A"/>
+                </a:solidFill>
+                <a:latin typeface="Arial" pitchFamily="34" charset="0"/>
+                <a:ea typeface="Arial" pitchFamily="34" charset="-122"/>
+                <a:cs typeface="Arial" pitchFamily="34" charset="-120"/>
+              </a:rPr>
+              <a:t>مزارع تصدير كبيرة مجهّزة بالتنقيط والمحاور، وقرار شراء مركزي وسريع.</a:t>
+            </a:r>
+            <a:endParaRPr lang="en-US" sz="1150" dirty="0"/>
+          </a:p>
+          <a:p>
+            <a:pPr algn="r" marL="342900" indent="-342900">
+              <a:lnSpc>
+                <a:spcPct val="116000"/>
+              </a:lnSpc>
+              <a:spcAft>
+                <a:spcPts val="700"/>
+              </a:spcAft>
+              <a:buSzPct val="100000"/>
+              <a:buChar char="•"/>
+            </a:pPr>
+            <a:r>
+              <a:rPr lang="en-US" sz="1150" dirty="0">
+                <a:solidFill>
+                  <a:srgbClr val="31424A"/>
+                </a:solidFill>
+                <a:latin typeface="Arial" pitchFamily="34" charset="0"/>
+                <a:ea typeface="Arial" pitchFamily="34" charset="-122"/>
+                <a:cs typeface="Arial" pitchFamily="34" charset="-120"/>
+              </a:rPr>
+              <a:t>المشترون الأوروبيون يطلبون شهادة عضوية سارية.</a:t>
+            </a:r>
+            <a:endParaRPr lang="en-US" sz="1150" dirty="0"/>
+          </a:p>
+        </p:txBody>
+      </p:sp>
+      <p:sp>
+        <p:nvSpPr>
+          <p:cNvPr id="19" name="Text 14"/>
+          <p:cNvSpPr txBox="1"/>
+          <p:nvPr/>
+        </p:nvSpPr>
+        <p:spPr>
+          <a:xfrm>
+            <a:off x="502920" y="6382512"/>
+            <a:ext cx="8229600" cy="274320"/>
+          </a:xfrm>
+          <a:prstGeom prst="rect">
+            <a:avLst/>
+          </a:prstGeom>
+          <a:noFill/>
+          <a:ln/>
+        </p:spPr>
+        <p:txBody>
+          <a:bodyPr wrap="square" lIns="0" tIns="0" rIns="0" bIns="0" rtlCol="0" anchor="ctr"/>
+          <a:lstStyle/>
+          <a:p>
+            <a:pPr rtl="1" algn="r" indent="0" marL="0">
+              <a:buNone/>
+            </a:pPr>
+            <a:r>
+              <a:rPr lang="en-US" sz="950" dirty="0">
+                <a:solidFill>
+                  <a:srgbClr val="6C8089">
+                    <a:alpha val="80000"/>
+                  </a:srgbClr>
+                </a:solidFill>
+                <a:latin typeface="Arial" pitchFamily="34" charset="0"/>
+                <a:ea typeface="Arial" pitchFamily="34" charset="-122"/>
+                <a:cs typeface="Arial" pitchFamily="34" charset="-120"/>
+              </a:rPr>
+              <a:t>Green Solutions · دراسة سوق مصر</a:t>
+            </a:r>
+            <a:endParaRPr lang="en-US" sz="950" dirty="0"/>
+          </a:p>
+        </p:txBody>
+      </p:sp>
+      <p:sp>
+        <p:nvSpPr>
+          <p:cNvPr id="20" name="Text 15"/>
+          <p:cNvSpPr txBox="1"/>
+          <p:nvPr/>
+        </p:nvSpPr>
+        <p:spPr>
+          <a:xfrm>
+            <a:off x="11140135" y="6382512"/>
+            <a:ext cx="548640" cy="274320"/>
+          </a:xfrm>
+          <a:prstGeom prst="rect">
+            <a:avLst/>
+          </a:prstGeom>
+          <a:noFill/>
+          <a:ln/>
+        </p:spPr>
+        <p:txBody>
+          <a:bodyPr wrap="square" lIns="0" tIns="0" rIns="0" bIns="0" rtlCol="0" anchor="ctr"/>
+          <a:lstStyle/>
+          <a:p>
+            <a:pPr rtl="1" algn="r" indent="0" marL="0">
+              <a:buNone/>
+            </a:pPr>
+            <a:r>
+              <a:rPr lang="en-US" sz="950" dirty="0">
+                <a:solidFill>
+                  <a:srgbClr val="6C8089">
+                    <a:alpha val="80000"/>
+                  </a:srgbClr>
+                </a:solidFill>
+                <a:latin typeface="Arial" pitchFamily="34" charset="0"/>
+                <a:ea typeface="Arial" pitchFamily="34" charset="-122"/>
+                <a:cs typeface="Arial" pitchFamily="34" charset="-120"/>
+              </a:rPr>
+              <a:t>12</a:t>
+            </a:r>
+            <a:endParaRPr lang="en-US" sz="950" dirty="0"/>
+          </a:p>
+        </p:txBody>
+      </p:sp>
+    </p:spTree>
+  </p:cSld>
+  <p:clrMapOvr>
+    <a:masterClrMapping/>
+  </p:clrMapOvr>
+</p:sld>
+</file>
+
+<file path=ppt/slides/slide14.xml><?xml version="1.0" encoding="utf-8"?>
+<p:sld xmlns:a="http://schemas.openxmlformats.org/drawingml/2006/main" xmlns:r="http://schemas.openxmlformats.org/officeDocument/2006/relationships" xmlns:p="http://schemas.openxmlformats.org/presentationml/2006/main">
+  <p:cSld name="Slide 14">
+    <p:bg>
+      <p:bgPr>
+        <a:solidFill>
+          <a:srgbClr val="FAFBFB"/>
+        </a:solidFill>
+      </p:bgPr>
+    </p:bg>
+    <p:spTree>
+      <p:nvGrpSpPr>
+        <p:cNvPr id="1" name=""/>
+        <p:cNvGrpSpPr/>
+        <p:nvPr/>
+      </p:nvGrpSpPr>
+      <p:grpSpPr>
+        <a:xfrm>
+          <a:off x="0" y="0"/>
+          <a:ext cx="0" cy="0"/>
+          <a:chOff x="0" y="0"/>
+          <a:chExt cx="0" cy="0"/>
+        </a:xfrm>
+      </p:grpSpPr>
+      <p:sp>
+        <p:nvSpPr>
+          <p:cNvPr id="2" name="Text 0"/>
+          <p:cNvSpPr txBox="1"/>
+          <p:nvPr/>
+        </p:nvSpPr>
+        <p:spPr>
+          <a:xfrm>
+            <a:off x="594360" y="411480"/>
+            <a:ext cx="10515600" cy="274320"/>
+          </a:xfrm>
+          <a:prstGeom prst="rect">
+            <a:avLst/>
+          </a:prstGeom>
+          <a:noFill/>
+          <a:ln/>
+        </p:spPr>
+        <p:txBody>
+          <a:bodyPr wrap="square" lIns="0" tIns="0" rIns="0" bIns="0" rtlCol="0" anchor="ctr"/>
+          <a:lstStyle/>
+          <a:p>
+            <a:pPr rtl="1" algn="r" indent="0" marL="0">
+              <a:buNone/>
+            </a:pPr>
+            <a:r>
+              <a:rPr lang="en-US" sz="1150" b="1" spc="200" kern="0" dirty="0">
+                <a:solidFill>
+                  <a:srgbClr val="E0A33E"/>
+                </a:solidFill>
+                <a:latin typeface="Arial" pitchFamily="34" charset="0"/>
+                <a:ea typeface="Arial" pitchFamily="34" charset="-122"/>
+                <a:cs typeface="Arial" pitchFamily="34" charset="-120"/>
+              </a:rPr>
+              <a:t>كيف نعمل</a:t>
+            </a:r>
+            <a:endParaRPr lang="en-US" sz="1150" dirty="0"/>
+          </a:p>
+        </p:txBody>
+      </p:sp>
+      <p:sp>
+        <p:nvSpPr>
+          <p:cNvPr id="3" name="Text 1"/>
+          <p:cNvSpPr txBox="1"/>
+          <p:nvPr/>
+        </p:nvSpPr>
+        <p:spPr>
+          <a:xfrm>
+            <a:off x="594360" y="731520"/>
+            <a:ext cx="10881360" cy="731520"/>
+          </a:xfrm>
+          <a:prstGeom prst="rect">
+            <a:avLst/>
+          </a:prstGeom>
+          <a:noFill/>
+          <a:ln/>
+        </p:spPr>
+        <p:txBody>
+          <a:bodyPr wrap="square" lIns="0" tIns="0" rIns="0" bIns="0" rtlCol="0" anchor="ctr"/>
+          <a:lstStyle/>
+          <a:p>
+            <a:pPr rtl="1" algn="r" indent="0" marL="0">
+              <a:buNone/>
+            </a:pPr>
+            <a:r>
+              <a:rPr lang="en-US" sz="3000" b="1" dirty="0">
+                <a:solidFill>
+                  <a:srgbClr val="0E3546"/>
+                </a:solidFill>
+                <a:latin typeface="Arial" pitchFamily="34" charset="0"/>
+                <a:ea typeface="Arial" pitchFamily="34" charset="-122"/>
+                <a:cs typeface="Arial" pitchFamily="34" charset="-120"/>
+              </a:rPr>
+              <a:t>انتشار على مراحل، مُقاس عند كل خطوة</a:t>
+            </a:r>
+            <a:endParaRPr lang="en-US" sz="3000" dirty="0"/>
+          </a:p>
+        </p:txBody>
+      </p:sp>
+      <p:sp>
+        <p:nvSpPr>
+          <p:cNvPr id="4" name="Shape 2"/>
+          <p:cNvSpPr/>
+          <p:nvPr/>
+        </p:nvSpPr>
+        <p:spPr>
+          <a:xfrm>
+            <a:off x="594360" y="1874520"/>
+            <a:ext cx="2545004" cy="2834640"/>
+          </a:xfrm>
+          <a:prstGeom prst="roundRect">
+            <a:avLst>
+              <a:gd name="adj" fmla="val 3593"/>
+            </a:avLst>
+          </a:prstGeom>
+          <a:solidFill>
+            <a:srgbClr val="EDF3F5"/>
+          </a:solidFill>
+          <a:ln w="9525">
+            <a:solidFill>
+              <a:srgbClr val="D6E2E7"/>
+            </a:solidFill>
+            <a:prstDash val="solid"/>
+          </a:ln>
+        </p:spPr>
+      </p:sp>
+      <p:sp>
+        <p:nvSpPr>
+          <p:cNvPr id="5" name="Shape 3"/>
+          <p:cNvSpPr/>
+          <p:nvPr/>
+        </p:nvSpPr>
+        <p:spPr>
+          <a:xfrm>
+            <a:off x="822960" y="2103120"/>
+            <a:ext cx="566928" cy="566928"/>
+          </a:xfrm>
+          <a:prstGeom prst="ellipse">
+            <a:avLst/>
+          </a:prstGeom>
+          <a:solidFill>
+            <a:srgbClr val="1C5A73"/>
+          </a:solidFill>
+          <a:ln/>
+        </p:spPr>
+      </p:sp>
+      <p:sp>
+        <p:nvSpPr>
+          <p:cNvPr id="6" name="Text 4"/>
+          <p:cNvSpPr txBox="1"/>
+          <p:nvPr/>
+        </p:nvSpPr>
+        <p:spPr>
+          <a:xfrm>
+            <a:off x="822960" y="2103120"/>
+            <a:ext cx="566928" cy="566928"/>
+          </a:xfrm>
+          <a:prstGeom prst="rect">
+            <a:avLst/>
+          </a:prstGeom>
+          <a:noFill/>
+          <a:ln/>
+        </p:spPr>
+        <p:txBody>
+          <a:bodyPr wrap="square" lIns="0" tIns="0" rIns="0" bIns="0" rtlCol="0" anchor="ctr"/>
+          <a:lstStyle/>
+          <a:p>
+            <a:pPr rtl="1" algn="ctr" indent="0" marL="0">
+              <a:buNone/>
+            </a:pPr>
+            <a:r>
+              <a:rPr lang="en-US" sz="1600" b="1" dirty="0">
+                <a:solidFill>
+                  <a:srgbClr val="FFFFFF"/>
+                </a:solidFill>
+                <a:latin typeface="Arial" pitchFamily="34" charset="0"/>
+                <a:ea typeface="Arial" pitchFamily="34" charset="-122"/>
+                <a:cs typeface="Arial" pitchFamily="34" charset="-120"/>
+              </a:rPr>
+              <a:t>1</a:t>
+            </a:r>
+            <a:endParaRPr lang="en-US" sz="1600" dirty="0"/>
+          </a:p>
+        </p:txBody>
+      </p:sp>
+      <p:sp>
+        <p:nvSpPr>
+          <p:cNvPr id="7" name="Text 5"/>
+          <p:cNvSpPr txBox="1"/>
+          <p:nvPr/>
+        </p:nvSpPr>
+        <p:spPr>
+          <a:xfrm>
+            <a:off x="822960" y="2788920"/>
+            <a:ext cx="2087804" cy="457200"/>
+          </a:xfrm>
+          <a:prstGeom prst="rect">
+            <a:avLst/>
+          </a:prstGeom>
+          <a:noFill/>
+          <a:ln/>
+        </p:spPr>
+        <p:txBody>
+          <a:bodyPr wrap="square" lIns="0" tIns="0" rIns="0" bIns="0" rtlCol="0" anchor="ctr"/>
+          <a:lstStyle/>
+          <a:p>
+            <a:pPr rtl="1" algn="r" indent="0" marL="0">
+              <a:buNone/>
+            </a:pPr>
+            <a:r>
+              <a:rPr lang="en-US" sz="1400" b="1" dirty="0">
+                <a:solidFill>
+                  <a:srgbClr val="1C5A73"/>
+                </a:solidFill>
+                <a:latin typeface="Arial" pitchFamily="34" charset="0"/>
+                <a:ea typeface="Arial" pitchFamily="34" charset="-122"/>
+                <a:cs typeface="Arial" pitchFamily="34" charset="-120"/>
+              </a:rPr>
+              <a:t>التشخيص</a:t>
+            </a:r>
+            <a:endParaRPr lang="en-US" sz="1400" dirty="0"/>
+          </a:p>
+        </p:txBody>
+      </p:sp>
+      <p:sp>
+        <p:nvSpPr>
+          <p:cNvPr id="8" name="Text 6"/>
+          <p:cNvSpPr txBox="1"/>
+          <p:nvPr/>
+        </p:nvSpPr>
+        <p:spPr>
+          <a:xfrm>
+            <a:off x="822960" y="3291840"/>
+            <a:ext cx="2087804" cy="1234440"/>
+          </a:xfrm>
+          <a:prstGeom prst="rect">
+            <a:avLst/>
+          </a:prstGeom>
+          <a:noFill/>
+          <a:ln/>
+        </p:spPr>
+        <p:txBody>
+          <a:bodyPr wrap="square" lIns="0" tIns="0" rIns="0" bIns="0" rtlCol="0" anchor="t"/>
+          <a:lstStyle/>
+          <a:p>
+            <a:pPr rtl="1" algn="r" indent="0" marL="0">
+              <a:lnSpc>
+                <a:spcPct val="120000"/>
+              </a:lnSpc>
+              <a:buNone/>
+            </a:pPr>
+            <a:r>
+              <a:rPr lang="en-US" sz="1200" dirty="0">
+                <a:solidFill>
+                  <a:srgbClr val="31424A"/>
+                </a:solidFill>
+                <a:latin typeface="Arial" pitchFamily="34" charset="0"/>
+                <a:ea typeface="Arial" pitchFamily="34" charset="-122"/>
+                <a:cs typeface="Arial" pitchFamily="34" charset="-120"/>
+              </a:rPr>
+              <a:t>تحليل التربة وأسلوب الري والمحصول. لا التزام على الإطلاق في هذه المرحلة.</a:t>
+            </a:r>
+            <a:endParaRPr lang="en-US" sz="1200" dirty="0"/>
+          </a:p>
+        </p:txBody>
+      </p:sp>
+      <p:sp>
+        <p:nvSpPr>
+          <p:cNvPr id="9" name="Shape 7"/>
+          <p:cNvSpPr/>
+          <p:nvPr/>
+        </p:nvSpPr>
+        <p:spPr>
+          <a:xfrm>
+            <a:off x="3413684" y="1874520"/>
+            <a:ext cx="2545004" cy="2834640"/>
+          </a:xfrm>
+          <a:prstGeom prst="roundRect">
+            <a:avLst>
+              <a:gd name="adj" fmla="val 3593"/>
+            </a:avLst>
+          </a:prstGeom>
+          <a:solidFill>
+            <a:srgbClr val="EDF3F5"/>
+          </a:solidFill>
+          <a:ln w="9525">
+            <a:solidFill>
+              <a:srgbClr val="D6E2E7"/>
+            </a:solidFill>
+            <a:prstDash val="solid"/>
+          </a:ln>
+        </p:spPr>
+      </p:sp>
+      <p:sp>
+        <p:nvSpPr>
+          <p:cNvPr id="10" name="Shape 8"/>
+          <p:cNvSpPr/>
+          <p:nvPr/>
+        </p:nvSpPr>
+        <p:spPr>
+          <a:xfrm>
+            <a:off x="3642284" y="2103120"/>
+            <a:ext cx="566928" cy="566928"/>
+          </a:xfrm>
+          <a:prstGeom prst="ellipse">
+            <a:avLst/>
+          </a:prstGeom>
+          <a:solidFill>
+            <a:srgbClr val="1C5A73"/>
+          </a:solidFill>
+          <a:ln/>
+        </p:spPr>
+      </p:sp>
+      <p:sp>
+        <p:nvSpPr>
+          <p:cNvPr id="11" name="Text 9"/>
+          <p:cNvSpPr txBox="1"/>
+          <p:nvPr/>
+        </p:nvSpPr>
+        <p:spPr>
+          <a:xfrm>
+            <a:off x="3642284" y="2103120"/>
+            <a:ext cx="566928" cy="566928"/>
+          </a:xfrm>
+          <a:prstGeom prst="rect">
+            <a:avLst/>
+          </a:prstGeom>
+          <a:noFill/>
+          <a:ln/>
+        </p:spPr>
+        <p:txBody>
+          <a:bodyPr wrap="square" lIns="0" tIns="0" rIns="0" bIns="0" rtlCol="0" anchor="ctr"/>
+          <a:lstStyle/>
+          <a:p>
+            <a:pPr rtl="1" algn="ctr" indent="0" marL="0">
+              <a:buNone/>
+            </a:pPr>
+            <a:r>
+              <a:rPr lang="en-US" sz="1600" b="1" dirty="0">
+                <a:solidFill>
+                  <a:srgbClr val="FFFFFF"/>
+                </a:solidFill>
+                <a:latin typeface="Arial" pitchFamily="34" charset="0"/>
+                <a:ea typeface="Arial" pitchFamily="34" charset="-122"/>
+                <a:cs typeface="Arial" pitchFamily="34" charset="-120"/>
+              </a:rPr>
+              <a:t>2</a:t>
+            </a:r>
+            <a:endParaRPr lang="en-US" sz="1600" dirty="0"/>
+          </a:p>
+        </p:txBody>
+      </p:sp>
+      <p:sp>
+        <p:nvSpPr>
+          <p:cNvPr id="12" name="Text 10"/>
+          <p:cNvSpPr txBox="1"/>
+          <p:nvPr/>
+        </p:nvSpPr>
+        <p:spPr>
+          <a:xfrm>
+            <a:off x="3642284" y="2788920"/>
+            <a:ext cx="2087804" cy="457200"/>
+          </a:xfrm>
+          <a:prstGeom prst="rect">
+            <a:avLst/>
+          </a:prstGeom>
+          <a:noFill/>
+          <a:ln/>
+        </p:spPr>
+        <p:txBody>
+          <a:bodyPr wrap="square" lIns="0" tIns="0" rIns="0" bIns="0" rtlCol="0" anchor="ctr"/>
+          <a:lstStyle/>
+          <a:p>
+            <a:pPr rtl="1" algn="r" indent="0" marL="0">
+              <a:buNone/>
+            </a:pPr>
+            <a:r>
+              <a:rPr lang="en-US" sz="1400" b="1" dirty="0">
+                <a:solidFill>
+                  <a:srgbClr val="1C5A73"/>
+                </a:solidFill>
+                <a:latin typeface="Arial" pitchFamily="34" charset="0"/>
+                <a:ea typeface="Arial" pitchFamily="34" charset="-122"/>
+                <a:cs typeface="Arial" pitchFamily="34" charset="-120"/>
+              </a:rPr>
+              <a:t>قطعة تجريبية</a:t>
+            </a:r>
+            <a:endParaRPr lang="en-US" sz="1400" dirty="0"/>
+          </a:p>
+        </p:txBody>
+      </p:sp>
+      <p:sp>
+        <p:nvSpPr>
+          <p:cNvPr id="13" name="Text 11"/>
+          <p:cNvSpPr txBox="1"/>
+          <p:nvPr/>
+        </p:nvSpPr>
+        <p:spPr>
+          <a:xfrm>
+            <a:off x="3642284" y="3291840"/>
+            <a:ext cx="2087804" cy="1234440"/>
+          </a:xfrm>
+          <a:prstGeom prst="rect">
+            <a:avLst/>
+          </a:prstGeom>
+          <a:noFill/>
+          <a:ln/>
+        </p:spPr>
+        <p:txBody>
+          <a:bodyPr wrap="square" lIns="0" tIns="0" rIns="0" bIns="0" rtlCol="0" anchor="t"/>
+          <a:lstStyle/>
+          <a:p>
+            <a:pPr rtl="1" algn="r" indent="0" marL="0">
+              <a:lnSpc>
+                <a:spcPct val="120000"/>
+              </a:lnSpc>
+              <a:buNone/>
+            </a:pPr>
+            <a:r>
+              <a:rPr lang="en-US" sz="1200" dirty="0">
+                <a:solidFill>
+                  <a:srgbClr val="31424A"/>
+                </a:solidFill>
+                <a:latin typeface="Arial" pitchFamily="34" charset="0"/>
+                <a:ea typeface="Arial" pitchFamily="34" charset="-122"/>
+                <a:cs typeface="Arial" pitchFamily="34" charset="-120"/>
+              </a:rPr>
+              <a:t>تجربة مقارنة على قطعة واحدة، مع قطعة شاهدة تُدار بالطريقة نفسها.</a:t>
+            </a:r>
+            <a:endParaRPr lang="en-US" sz="1200" dirty="0"/>
+          </a:p>
+        </p:txBody>
+      </p:sp>
+      <p:sp>
+        <p:nvSpPr>
+          <p:cNvPr id="14" name="Shape 12"/>
+          <p:cNvSpPr/>
+          <p:nvPr/>
+        </p:nvSpPr>
+        <p:spPr>
+          <a:xfrm>
+            <a:off x="6233008" y="1874520"/>
+            <a:ext cx="2545004" cy="2834640"/>
+          </a:xfrm>
+          <a:prstGeom prst="roundRect">
+            <a:avLst>
+              <a:gd name="adj" fmla="val 3593"/>
+            </a:avLst>
+          </a:prstGeom>
+          <a:solidFill>
+            <a:srgbClr val="EDF3F5"/>
+          </a:solidFill>
+          <a:ln w="9525">
+            <a:solidFill>
+              <a:srgbClr val="D6E2E7"/>
+            </a:solidFill>
+            <a:prstDash val="solid"/>
+          </a:ln>
+        </p:spPr>
+      </p:sp>
+      <p:sp>
+        <p:nvSpPr>
+          <p:cNvPr id="15" name="Shape 13"/>
+          <p:cNvSpPr/>
+          <p:nvPr/>
+        </p:nvSpPr>
+        <p:spPr>
+          <a:xfrm>
+            <a:off x="6461608" y="2103120"/>
+            <a:ext cx="566928" cy="566928"/>
+          </a:xfrm>
+          <a:prstGeom prst="ellipse">
+            <a:avLst/>
+          </a:prstGeom>
+          <a:solidFill>
+            <a:srgbClr val="1C5A73"/>
+          </a:solidFill>
+          <a:ln/>
+        </p:spPr>
+      </p:sp>
+      <p:sp>
+        <p:nvSpPr>
+          <p:cNvPr id="16" name="Text 14"/>
+          <p:cNvSpPr txBox="1"/>
+          <p:nvPr/>
+        </p:nvSpPr>
+        <p:spPr>
+          <a:xfrm>
+            <a:off x="6461608" y="2103120"/>
+            <a:ext cx="566928" cy="566928"/>
+          </a:xfrm>
+          <a:prstGeom prst="rect">
+            <a:avLst/>
+          </a:prstGeom>
+          <a:noFill/>
+          <a:ln/>
+        </p:spPr>
+        <p:txBody>
+          <a:bodyPr wrap="square" lIns="0" tIns="0" rIns="0" bIns="0" rtlCol="0" anchor="ctr"/>
+          <a:lstStyle/>
+          <a:p>
+            <a:pPr rtl="1" algn="ctr" indent="0" marL="0">
+              <a:buNone/>
+            </a:pPr>
+            <a:r>
+              <a:rPr lang="en-US" sz="1600" b="1" dirty="0">
+                <a:solidFill>
+                  <a:srgbClr val="FFFFFF"/>
+                </a:solidFill>
+                <a:latin typeface="Arial" pitchFamily="34" charset="0"/>
+                <a:ea typeface="Arial" pitchFamily="34" charset="-122"/>
+                <a:cs typeface="Arial" pitchFamily="34" charset="-120"/>
+              </a:rPr>
+              <a:t>3</a:t>
+            </a:r>
+            <a:endParaRPr lang="en-US" sz="1600" dirty="0"/>
+          </a:p>
+        </p:txBody>
+      </p:sp>
+      <p:sp>
+        <p:nvSpPr>
+          <p:cNvPr id="17" name="Text 15"/>
+          <p:cNvSpPr txBox="1"/>
+          <p:nvPr/>
+        </p:nvSpPr>
+        <p:spPr>
+          <a:xfrm>
+            <a:off x="6461608" y="2788920"/>
+            <a:ext cx="2087804" cy="457200"/>
+          </a:xfrm>
+          <a:prstGeom prst="rect">
+            <a:avLst/>
+          </a:prstGeom>
+          <a:noFill/>
+          <a:ln/>
+        </p:spPr>
+        <p:txBody>
+          <a:bodyPr wrap="square" lIns="0" tIns="0" rIns="0" bIns="0" rtlCol="0" anchor="ctr"/>
+          <a:lstStyle/>
+          <a:p>
+            <a:pPr rtl="1" algn="r" indent="0" marL="0">
+              <a:buNone/>
+            </a:pPr>
+            <a:r>
+              <a:rPr lang="en-US" sz="1400" b="1" dirty="0">
+                <a:solidFill>
+                  <a:srgbClr val="1C5A73"/>
+                </a:solidFill>
+                <a:latin typeface="Arial" pitchFamily="34" charset="0"/>
+                <a:ea typeface="Arial" pitchFamily="34" charset="-122"/>
+                <a:cs typeface="Arial" pitchFamily="34" charset="-120"/>
+              </a:rPr>
+              <a:t>القياس</a:t>
+            </a:r>
+            <a:endParaRPr lang="en-US" sz="1400" dirty="0"/>
+          </a:p>
+        </p:txBody>
+      </p:sp>
+      <p:sp>
+        <p:nvSpPr>
+          <p:cNvPr id="18" name="Text 16"/>
+          <p:cNvSpPr txBox="1"/>
+          <p:nvPr/>
+        </p:nvSpPr>
+        <p:spPr>
+          <a:xfrm>
+            <a:off x="6461608" y="3291840"/>
+            <a:ext cx="2087804" cy="1234440"/>
+          </a:xfrm>
+          <a:prstGeom prst="rect">
+            <a:avLst/>
+          </a:prstGeom>
+          <a:noFill/>
+          <a:ln/>
+        </p:spPr>
+        <p:txBody>
+          <a:bodyPr wrap="square" lIns="0" tIns="0" rIns="0" bIns="0" rtlCol="0" anchor="t"/>
+          <a:lstStyle/>
+          <a:p>
+            <a:pPr rtl="1" algn="r" indent="0" marL="0">
+              <a:lnSpc>
+                <a:spcPct val="120000"/>
+              </a:lnSpc>
+              <a:buNone/>
+            </a:pPr>
+            <a:r>
+              <a:rPr lang="en-US" sz="1200" dirty="0">
+                <a:solidFill>
+                  <a:srgbClr val="31424A"/>
+                </a:solidFill>
+                <a:latin typeface="Arial" pitchFamily="34" charset="0"/>
+                <a:ea typeface="Arial" pitchFamily="34" charset="-122"/>
+                <a:cs typeface="Arial" pitchFamily="34" charset="-120"/>
+              </a:rPr>
+              <a:t>تسجيل الاستهلاك المائي والمحصول على دورة زراعية كاملة.</a:t>
+            </a:r>
+            <a:endParaRPr lang="en-US" sz="1200" dirty="0"/>
+          </a:p>
+        </p:txBody>
+      </p:sp>
+      <p:sp>
+        <p:nvSpPr>
+          <p:cNvPr id="19" name="Shape 17"/>
+          <p:cNvSpPr/>
+          <p:nvPr/>
+        </p:nvSpPr>
+        <p:spPr>
+          <a:xfrm>
+            <a:off x="9052331" y="1874520"/>
+            <a:ext cx="2545004" cy="2834640"/>
+          </a:xfrm>
+          <a:prstGeom prst="roundRect">
+            <a:avLst>
+              <a:gd name="adj" fmla="val 3593"/>
+            </a:avLst>
+          </a:prstGeom>
+          <a:solidFill>
+            <a:srgbClr val="EDF3F5"/>
+          </a:solidFill>
+          <a:ln w="9525">
+            <a:solidFill>
+              <a:srgbClr val="D6E2E7"/>
+            </a:solidFill>
+            <a:prstDash val="solid"/>
+          </a:ln>
+        </p:spPr>
+      </p:sp>
+      <p:sp>
+        <p:nvSpPr>
+          <p:cNvPr id="20" name="Shape 18"/>
+          <p:cNvSpPr/>
+          <p:nvPr/>
+        </p:nvSpPr>
+        <p:spPr>
+          <a:xfrm>
+            <a:off x="9280931" y="2103120"/>
+            <a:ext cx="566928" cy="566928"/>
+          </a:xfrm>
+          <a:prstGeom prst="ellipse">
+            <a:avLst/>
+          </a:prstGeom>
+          <a:solidFill>
+            <a:srgbClr val="1C5A73"/>
+          </a:solidFill>
+          <a:ln/>
+        </p:spPr>
+      </p:sp>
+      <p:sp>
+        <p:nvSpPr>
+          <p:cNvPr id="21" name="Text 19"/>
+          <p:cNvSpPr txBox="1"/>
+          <p:nvPr/>
+        </p:nvSpPr>
+        <p:spPr>
+          <a:xfrm>
+            <a:off x="9280931" y="2103120"/>
+            <a:ext cx="566928" cy="566928"/>
+          </a:xfrm>
+          <a:prstGeom prst="rect">
+            <a:avLst/>
+          </a:prstGeom>
+          <a:noFill/>
+          <a:ln/>
+        </p:spPr>
+        <p:txBody>
+          <a:bodyPr wrap="square" lIns="0" tIns="0" rIns="0" bIns="0" rtlCol="0" anchor="ctr"/>
+          <a:lstStyle/>
+          <a:p>
+            <a:pPr rtl="1" algn="ctr" indent="0" marL="0">
+              <a:buNone/>
+            </a:pPr>
+            <a:r>
+              <a:rPr lang="en-US" sz="1600" b="1" dirty="0">
+                <a:solidFill>
+                  <a:srgbClr val="FFFFFF"/>
+                </a:solidFill>
+                <a:latin typeface="Arial" pitchFamily="34" charset="0"/>
+                <a:ea typeface="Arial" pitchFamily="34" charset="-122"/>
+                <a:cs typeface="Arial" pitchFamily="34" charset="-120"/>
+              </a:rPr>
+              <a:t>4</a:t>
+            </a:r>
+            <a:endParaRPr lang="en-US" sz="1600" dirty="0"/>
+          </a:p>
+        </p:txBody>
+      </p:sp>
+      <p:sp>
+        <p:nvSpPr>
+          <p:cNvPr id="22" name="Text 20"/>
+          <p:cNvSpPr txBox="1"/>
+          <p:nvPr/>
+        </p:nvSpPr>
+        <p:spPr>
+          <a:xfrm>
+            <a:off x="9280931" y="2788920"/>
+            <a:ext cx="2087804" cy="457200"/>
+          </a:xfrm>
+          <a:prstGeom prst="rect">
+            <a:avLst/>
+          </a:prstGeom>
+          <a:noFill/>
+          <a:ln/>
+        </p:spPr>
+        <p:txBody>
+          <a:bodyPr wrap="square" lIns="0" tIns="0" rIns="0" bIns="0" rtlCol="0" anchor="ctr"/>
+          <a:lstStyle/>
+          <a:p>
+            <a:pPr rtl="1" algn="r" indent="0" marL="0">
+              <a:buNone/>
+            </a:pPr>
+            <a:r>
+              <a:rPr lang="en-US" sz="1400" b="1" dirty="0">
+                <a:solidFill>
+                  <a:srgbClr val="1C5A73"/>
+                </a:solidFill>
+                <a:latin typeface="Arial" pitchFamily="34" charset="0"/>
+                <a:ea typeface="Arial" pitchFamily="34" charset="-122"/>
+                <a:cs typeface="Arial" pitchFamily="34" charset="-120"/>
+              </a:rPr>
+              <a:t>التوسيع</a:t>
+            </a:r>
+            <a:endParaRPr lang="en-US" sz="1400" dirty="0"/>
+          </a:p>
+        </p:txBody>
+      </p:sp>
+      <p:sp>
+        <p:nvSpPr>
+          <p:cNvPr id="23" name="Text 21"/>
+          <p:cNvSpPr txBox="1"/>
+          <p:nvPr/>
+        </p:nvSpPr>
+        <p:spPr>
+          <a:xfrm>
+            <a:off x="9280931" y="3291840"/>
+            <a:ext cx="2087804" cy="1234440"/>
+          </a:xfrm>
+          <a:prstGeom prst="rect">
+            <a:avLst/>
+          </a:prstGeom>
+          <a:noFill/>
+          <a:ln/>
+        </p:spPr>
+        <p:txBody>
+          <a:bodyPr wrap="square" lIns="0" tIns="0" rIns="0" bIns="0" rtlCol="0" anchor="t"/>
+          <a:lstStyle/>
+          <a:p>
+            <a:pPr rtl="1" algn="r" indent="0" marL="0">
+              <a:lnSpc>
+                <a:spcPct val="120000"/>
+              </a:lnSpc>
+              <a:buNone/>
+            </a:pPr>
+            <a:r>
+              <a:rPr lang="en-US" sz="1200" dirty="0">
+                <a:solidFill>
+                  <a:srgbClr val="31424A"/>
+                </a:solidFill>
+                <a:latin typeface="Arial" pitchFamily="34" charset="0"/>
+                <a:ea typeface="Arial" pitchFamily="34" charset="-122"/>
+                <a:cs typeface="Arial" pitchFamily="34" charset="-120"/>
+              </a:rPr>
+              <a:t>تعميم تدريجي على باقي القطع بناءً على النتائج المسجَّلة فعليًا.</a:t>
+            </a:r>
+            <a:endParaRPr lang="en-US" sz="1200" dirty="0"/>
+          </a:p>
+        </p:txBody>
+      </p:sp>
+      <p:sp>
+        <p:nvSpPr>
+          <p:cNvPr id="24" name="Text 22"/>
+          <p:cNvSpPr txBox="1"/>
+          <p:nvPr/>
+        </p:nvSpPr>
+        <p:spPr>
+          <a:xfrm>
+            <a:off x="594360" y="4983480"/>
+            <a:ext cx="11002975" cy="822960"/>
+          </a:xfrm>
+          <a:prstGeom prst="rect">
+            <a:avLst/>
+          </a:prstGeom>
+          <a:noFill/>
+          <a:ln/>
+        </p:spPr>
+        <p:txBody>
+          <a:bodyPr wrap="square" lIns="0" tIns="0" rIns="0" bIns="0" rtlCol="0" anchor="t"/>
+          <a:lstStyle/>
+          <a:p>
+            <a:pPr rtl="1" algn="r" indent="0" marL="0">
+              <a:lnSpc>
+                <a:spcPct val="125000"/>
+              </a:lnSpc>
+              <a:buNone/>
+            </a:pPr>
+            <a:r>
+              <a:rPr lang="en-US" sz="1250" dirty="0">
+                <a:solidFill>
+                  <a:srgbClr val="6C8089"/>
+                </a:solidFill>
+                <a:latin typeface="Arial" pitchFamily="34" charset="0"/>
+                <a:ea typeface="Arial" pitchFamily="34" charset="-122"/>
+                <a:cs typeface="Arial" pitchFamily="34" charset="-120"/>
+              </a:rPr>
+              <a:t>قاعدة الجرعة واحدة في كل مكان: 3 غرامات لكل لتر من التربة النافعة. ما يتغير من أرض إلى أخرى هو حجم التربة الذي تستكشفه الجذور فعليًا.</a:t>
+            </a:r>
+            <a:endParaRPr lang="en-US" sz="1250" dirty="0"/>
+          </a:p>
+        </p:txBody>
+      </p:sp>
+      <p:sp>
+        <p:nvSpPr>
+          <p:cNvPr id="25" name="Text 23"/>
+          <p:cNvSpPr txBox="1"/>
+          <p:nvPr/>
+        </p:nvSpPr>
+        <p:spPr>
+          <a:xfrm>
+            <a:off x="502920" y="6382512"/>
+            <a:ext cx="8229600" cy="274320"/>
+          </a:xfrm>
+          <a:prstGeom prst="rect">
+            <a:avLst/>
+          </a:prstGeom>
+          <a:noFill/>
+          <a:ln/>
+        </p:spPr>
+        <p:txBody>
+          <a:bodyPr wrap="square" lIns="0" tIns="0" rIns="0" bIns="0" rtlCol="0" anchor="ctr"/>
+          <a:lstStyle/>
+          <a:p>
+            <a:pPr rtl="1" algn="r" indent="0" marL="0">
+              <a:buNone/>
+            </a:pPr>
+            <a:r>
+              <a:rPr lang="en-US" sz="950" dirty="0">
+                <a:solidFill>
+                  <a:srgbClr val="6C8089">
+                    <a:alpha val="80000"/>
+                  </a:srgbClr>
+                </a:solidFill>
+                <a:latin typeface="Arial" pitchFamily="34" charset="0"/>
+                <a:ea typeface="Arial" pitchFamily="34" charset="-122"/>
+                <a:cs typeface="Arial" pitchFamily="34" charset="-120"/>
+              </a:rPr>
+              <a:t>Green Solutions · دراسة سوق مصر</a:t>
+            </a:r>
+            <a:endParaRPr lang="en-US" sz="950" dirty="0"/>
+          </a:p>
+        </p:txBody>
+      </p:sp>
+      <p:sp>
+        <p:nvSpPr>
+          <p:cNvPr id="26" name="Text 24"/>
+          <p:cNvSpPr txBox="1"/>
+          <p:nvPr/>
+        </p:nvSpPr>
+        <p:spPr>
+          <a:xfrm>
+            <a:off x="11140135" y="6382512"/>
+            <a:ext cx="548640" cy="274320"/>
+          </a:xfrm>
+          <a:prstGeom prst="rect">
+            <a:avLst/>
+          </a:prstGeom>
+          <a:noFill/>
+          <a:ln/>
+        </p:spPr>
+        <p:txBody>
+          <a:bodyPr wrap="square" lIns="0" tIns="0" rIns="0" bIns="0" rtlCol="0" anchor="ctr"/>
+          <a:lstStyle/>
+          <a:p>
+            <a:pPr rtl="1" algn="r" indent="0" marL="0">
+              <a:buNone/>
+            </a:pPr>
+            <a:r>
+              <a:rPr lang="en-US" sz="950" dirty="0">
+                <a:solidFill>
+                  <a:srgbClr val="6C8089">
+                    <a:alpha val="80000"/>
+                  </a:srgbClr>
+                </a:solidFill>
+                <a:latin typeface="Arial" pitchFamily="34" charset="0"/>
+                <a:ea typeface="Arial" pitchFamily="34" charset="-122"/>
+                <a:cs typeface="Arial" pitchFamily="34" charset="-120"/>
+              </a:rPr>
+              <a:t>13</a:t>
+            </a:r>
+            <a:endParaRPr lang="en-US" sz="950" dirty="0"/>
+          </a:p>
+        </p:txBody>
+      </p:sp>
+    </p:spTree>
+  </p:cSld>
+  <p:clrMapOvr>
+    <a:masterClrMapping/>
+  </p:clrMapOvr>
+</p:sld>
+</file>
+
+<file path=ppt/slides/slide15.xml><?xml version="1.0" encoding="utf-8"?>
+<p:sld xmlns:a="http://schemas.openxmlformats.org/drawingml/2006/main" xmlns:r="http://schemas.openxmlformats.org/officeDocument/2006/relationships" xmlns:p="http://schemas.openxmlformats.org/presentationml/2006/main">
+  <p:cSld name="Slide 15">
+    <p:bg>
+      <p:bgPr>
+        <a:solidFill>
+          <a:srgbClr val="FAFBFB"/>
+        </a:solidFill>
+      </p:bgPr>
+    </p:bg>
+    <p:spTree>
+      <p:nvGrpSpPr>
+        <p:cNvPr id="1" name=""/>
+        <p:cNvGrpSpPr/>
+        <p:nvPr/>
+      </p:nvGrpSpPr>
+      <p:grpSpPr>
+        <a:xfrm>
+          <a:off x="0" y="0"/>
+          <a:ext cx="0" cy="0"/>
+          <a:chOff x="0" y="0"/>
+          <a:chExt cx="0" cy="0"/>
+        </a:xfrm>
+      </p:grpSpPr>
+      <p:sp>
+        <p:nvSpPr>
+          <p:cNvPr id="2" name="Text 0"/>
+          <p:cNvSpPr txBox="1"/>
+          <p:nvPr/>
+        </p:nvSpPr>
+        <p:spPr>
+          <a:xfrm>
+            <a:off x="594360" y="411480"/>
+            <a:ext cx="10515600" cy="274320"/>
+          </a:xfrm>
+          <a:prstGeom prst="rect">
+            <a:avLst/>
+          </a:prstGeom>
+          <a:noFill/>
+          <a:ln/>
+        </p:spPr>
+        <p:txBody>
+          <a:bodyPr wrap="square" lIns="0" tIns="0" rIns="0" bIns="0" rtlCol="0" anchor="ctr"/>
+          <a:lstStyle/>
+          <a:p>
+            <a:pPr rtl="1" algn="r" indent="0" marL="0">
+              <a:buNone/>
+            </a:pPr>
+            <a:r>
+              <a:rPr lang="en-US" sz="1150" b="1" spc="200" kern="0" dirty="0">
+                <a:solidFill>
+                  <a:srgbClr val="E0A33E"/>
+                </a:solidFill>
+                <a:latin typeface="Arial" pitchFamily="34" charset="0"/>
+                <a:ea typeface="Arial" pitchFamily="34" charset="-122"/>
+                <a:cs typeface="Arial" pitchFamily="34" charset="-120"/>
+              </a:rPr>
+              <a:t>العمل معاً</a:t>
+            </a:r>
+            <a:endParaRPr lang="en-US" sz="1150" dirty="0"/>
+          </a:p>
+        </p:txBody>
+      </p:sp>
+      <p:sp>
+        <p:nvSpPr>
+          <p:cNvPr id="3" name="Text 1"/>
+          <p:cNvSpPr txBox="1"/>
+          <p:nvPr/>
+        </p:nvSpPr>
+        <p:spPr>
+          <a:xfrm>
+            <a:off x="594360" y="731520"/>
+            <a:ext cx="10881360" cy="731520"/>
+          </a:xfrm>
+          <a:prstGeom prst="rect">
+            <a:avLst/>
+          </a:prstGeom>
+          <a:noFill/>
+          <a:ln/>
+        </p:spPr>
+        <p:txBody>
+          <a:bodyPr wrap="square" lIns="0" tIns="0" rIns="0" bIns="0" rtlCol="0" anchor="ctr"/>
+          <a:lstStyle/>
+          <a:p>
+            <a:pPr rtl="1" algn="r" indent="0" marL="0">
+              <a:buNone/>
+            </a:pPr>
+            <a:r>
+              <a:rPr lang="en-US" sz="3000" b="1" dirty="0">
+                <a:solidFill>
+                  <a:srgbClr val="0E3546"/>
+                </a:solidFill>
+                <a:latin typeface="Arial" pitchFamily="34" charset="0"/>
+                <a:ea typeface="Arial" pitchFamily="34" charset="-122"/>
+                <a:cs typeface="Arial" pitchFamily="34" charset="-120"/>
+              </a:rPr>
+              <a:t>شريك محلي في مصر</a:t>
+            </a:r>
+            <a:endParaRPr lang="en-US" sz="3000" dirty="0"/>
+          </a:p>
+        </p:txBody>
+      </p:sp>
+      <p:sp>
+        <p:nvSpPr>
+          <p:cNvPr id="4" name="Shape 2"/>
+          <p:cNvSpPr/>
+          <p:nvPr/>
+        </p:nvSpPr>
+        <p:spPr>
+          <a:xfrm>
+            <a:off x="594360" y="1874520"/>
+            <a:ext cx="2545004" cy="2834640"/>
+          </a:xfrm>
+          <a:prstGeom prst="roundRect">
+            <a:avLst>
+              <a:gd name="adj" fmla="val 3593"/>
+            </a:avLst>
+          </a:prstGeom>
+          <a:solidFill>
+            <a:srgbClr val="EDF3F5"/>
+          </a:solidFill>
+          <a:ln w="9525">
+            <a:solidFill>
+              <a:srgbClr val="D6E2E7"/>
+            </a:solidFill>
+            <a:prstDash val="solid"/>
+          </a:ln>
+        </p:spPr>
+      </p:sp>
+      <p:sp>
+        <p:nvSpPr>
+          <p:cNvPr id="5" name="Shape 3"/>
+          <p:cNvSpPr/>
+          <p:nvPr/>
+        </p:nvSpPr>
+        <p:spPr>
+          <a:xfrm>
+            <a:off x="822960" y="2103120"/>
+            <a:ext cx="566928" cy="566928"/>
+          </a:xfrm>
+          <a:prstGeom prst="ellipse">
+            <a:avLst/>
+          </a:prstGeom>
+          <a:solidFill>
+            <a:srgbClr val="1C5A73"/>
+          </a:solidFill>
+          <a:ln/>
+        </p:spPr>
+      </p:sp>
+      <p:sp>
+        <p:nvSpPr>
+          <p:cNvPr id="6" name="Text 4"/>
+          <p:cNvSpPr txBox="1"/>
+          <p:nvPr/>
+        </p:nvSpPr>
+        <p:spPr>
+          <a:xfrm>
+            <a:off x="822960" y="2103120"/>
+            <a:ext cx="566928" cy="566928"/>
+          </a:xfrm>
+          <a:prstGeom prst="rect">
+            <a:avLst/>
+          </a:prstGeom>
+          <a:noFill/>
+          <a:ln/>
+        </p:spPr>
+        <p:txBody>
+          <a:bodyPr wrap="square" lIns="0" tIns="0" rIns="0" bIns="0" rtlCol="0" anchor="ctr"/>
+          <a:lstStyle/>
+          <a:p>
+            <a:pPr rtl="1" algn="ctr" indent="0" marL="0">
+              <a:buNone/>
+            </a:pPr>
+            <a:r>
+              <a:rPr lang="en-US" sz="1600" b="1" dirty="0">
+                <a:solidFill>
+                  <a:srgbClr val="FFFFFF"/>
+                </a:solidFill>
+                <a:latin typeface="Arial" pitchFamily="34" charset="0"/>
+                <a:ea typeface="Arial" pitchFamily="34" charset="-122"/>
+                <a:cs typeface="Arial" pitchFamily="34" charset="-120"/>
+              </a:rPr>
+              <a:t>1</a:t>
+            </a:r>
+            <a:endParaRPr lang="en-US" sz="1600" dirty="0"/>
+          </a:p>
+        </p:txBody>
+      </p:sp>
+      <p:sp>
+        <p:nvSpPr>
+          <p:cNvPr id="7" name="Text 5"/>
+          <p:cNvSpPr txBox="1"/>
+          <p:nvPr/>
+        </p:nvSpPr>
+        <p:spPr>
+          <a:xfrm>
+            <a:off x="822960" y="2788920"/>
+            <a:ext cx="2087804" cy="457200"/>
+          </a:xfrm>
+          <a:prstGeom prst="rect">
+            <a:avLst/>
+          </a:prstGeom>
+          <a:noFill/>
+          <a:ln/>
+        </p:spPr>
+        <p:txBody>
+          <a:bodyPr wrap="square" lIns="0" tIns="0" rIns="0" bIns="0" rtlCol="0" anchor="ctr"/>
+          <a:lstStyle/>
+          <a:p>
+            <a:pPr rtl="1" algn="r" indent="0" marL="0">
+              <a:buNone/>
+            </a:pPr>
+            <a:r>
+              <a:rPr lang="en-US" sz="1400" b="1" dirty="0">
+                <a:solidFill>
+                  <a:srgbClr val="1C5A73"/>
+                </a:solidFill>
+                <a:latin typeface="Arial" pitchFamily="34" charset="0"/>
+                <a:ea typeface="Arial" pitchFamily="34" charset="-122"/>
+                <a:cs typeface="Arial" pitchFamily="34" charset="-120"/>
+              </a:rPr>
+              <a:t>التوزيع</a:t>
+            </a:r>
+            <a:endParaRPr lang="en-US" sz="1400" dirty="0"/>
+          </a:p>
+        </p:txBody>
+      </p:sp>
+      <p:sp>
+        <p:nvSpPr>
+          <p:cNvPr id="8" name="Text 6"/>
+          <p:cNvSpPr txBox="1"/>
+          <p:nvPr/>
+        </p:nvSpPr>
+        <p:spPr>
+          <a:xfrm>
+            <a:off x="822960" y="3291840"/>
+            <a:ext cx="2087804" cy="1234440"/>
+          </a:xfrm>
+          <a:prstGeom prst="rect">
+            <a:avLst/>
+          </a:prstGeom>
+          <a:noFill/>
+          <a:ln/>
+        </p:spPr>
+        <p:txBody>
+          <a:bodyPr wrap="square" lIns="0" tIns="0" rIns="0" bIns="0" rtlCol="0" anchor="t"/>
+          <a:lstStyle/>
+          <a:p>
+            <a:pPr rtl="1" algn="r" indent="0" marL="0">
+              <a:lnSpc>
+                <a:spcPct val="120000"/>
+              </a:lnSpc>
+              <a:buNone/>
+            </a:pPr>
+            <a:r>
+              <a:rPr lang="en-US" sz="1200" dirty="0">
+                <a:solidFill>
+                  <a:srgbClr val="31424A"/>
+                </a:solidFill>
+                <a:latin typeface="Arial" pitchFamily="34" charset="0"/>
+                <a:ea typeface="Arial" pitchFamily="34" charset="-122"/>
+                <a:cs typeface="Arial" pitchFamily="34" charset="-120"/>
+              </a:rPr>
+              <a:t>حصرية على مستوى الإقليم ومخزون إطلاق للموسم التجاري الأول.</a:t>
+            </a:r>
+            <a:endParaRPr lang="en-US" sz="1200" dirty="0"/>
+          </a:p>
+        </p:txBody>
+      </p:sp>
+      <p:sp>
+        <p:nvSpPr>
+          <p:cNvPr id="9" name="Shape 7"/>
+          <p:cNvSpPr/>
+          <p:nvPr/>
+        </p:nvSpPr>
+        <p:spPr>
+          <a:xfrm>
+            <a:off x="3413684" y="1874520"/>
+            <a:ext cx="2545004" cy="2834640"/>
+          </a:xfrm>
+          <a:prstGeom prst="roundRect">
+            <a:avLst>
+              <a:gd name="adj" fmla="val 3593"/>
+            </a:avLst>
+          </a:prstGeom>
+          <a:solidFill>
+            <a:srgbClr val="EDF3F5"/>
+          </a:solidFill>
+          <a:ln w="9525">
+            <a:solidFill>
+              <a:srgbClr val="D6E2E7"/>
+            </a:solidFill>
+            <a:prstDash val="solid"/>
+          </a:ln>
+        </p:spPr>
+      </p:sp>
+      <p:sp>
+        <p:nvSpPr>
+          <p:cNvPr id="10" name="Shape 8"/>
+          <p:cNvSpPr/>
+          <p:nvPr/>
+        </p:nvSpPr>
+        <p:spPr>
+          <a:xfrm>
+            <a:off x="3642284" y="2103120"/>
+            <a:ext cx="566928" cy="566928"/>
+          </a:xfrm>
+          <a:prstGeom prst="ellipse">
+            <a:avLst/>
+          </a:prstGeom>
+          <a:solidFill>
+            <a:srgbClr val="1C5A73"/>
+          </a:solidFill>
+          <a:ln/>
+        </p:spPr>
+      </p:sp>
+      <p:sp>
+        <p:nvSpPr>
+          <p:cNvPr id="11" name="Text 9"/>
+          <p:cNvSpPr txBox="1"/>
+          <p:nvPr/>
+        </p:nvSpPr>
+        <p:spPr>
+          <a:xfrm>
+            <a:off x="3642284" y="2103120"/>
+            <a:ext cx="566928" cy="566928"/>
+          </a:xfrm>
+          <a:prstGeom prst="rect">
+            <a:avLst/>
+          </a:prstGeom>
+          <a:noFill/>
+          <a:ln/>
+        </p:spPr>
+        <p:txBody>
+          <a:bodyPr wrap="square" lIns="0" tIns="0" rIns="0" bIns="0" rtlCol="0" anchor="ctr"/>
+          <a:lstStyle/>
+          <a:p>
+            <a:pPr rtl="1" algn="ctr" indent="0" marL="0">
+              <a:buNone/>
+            </a:pPr>
+            <a:r>
+              <a:rPr lang="en-US" sz="1600" b="1" dirty="0">
+                <a:solidFill>
+                  <a:srgbClr val="FFFFFF"/>
+                </a:solidFill>
+                <a:latin typeface="Arial" pitchFamily="34" charset="0"/>
+                <a:ea typeface="Arial" pitchFamily="34" charset="-122"/>
+                <a:cs typeface="Arial" pitchFamily="34" charset="-120"/>
+              </a:rPr>
+              <a:t>2</a:t>
+            </a:r>
+            <a:endParaRPr lang="en-US" sz="1600" dirty="0"/>
+          </a:p>
+        </p:txBody>
+      </p:sp>
+      <p:sp>
+        <p:nvSpPr>
+          <p:cNvPr id="12" name="Text 10"/>
+          <p:cNvSpPr txBox="1"/>
+          <p:nvPr/>
+        </p:nvSpPr>
+        <p:spPr>
+          <a:xfrm>
+            <a:off x="3642284" y="2788920"/>
+            <a:ext cx="2087804" cy="457200"/>
+          </a:xfrm>
+          <a:prstGeom prst="rect">
+            <a:avLst/>
+          </a:prstGeom>
+          <a:noFill/>
+          <a:ln/>
+        </p:spPr>
+        <p:txBody>
+          <a:bodyPr wrap="square" lIns="0" tIns="0" rIns="0" bIns="0" rtlCol="0" anchor="ctr"/>
+          <a:lstStyle/>
+          <a:p>
+            <a:pPr rtl="1" algn="r" indent="0" marL="0">
+              <a:buNone/>
+            </a:pPr>
+            <a:r>
+              <a:rPr lang="en-US" sz="1400" b="1" dirty="0">
+                <a:solidFill>
+                  <a:srgbClr val="1C5A73"/>
+                </a:solidFill>
+                <a:latin typeface="Arial" pitchFamily="34" charset="0"/>
+                <a:ea typeface="Arial" pitchFamily="34" charset="-122"/>
+                <a:cs typeface="Arial" pitchFamily="34" charset="-120"/>
+              </a:rPr>
+              <a:t>التدريب</a:t>
+            </a:r>
+            <a:endParaRPr lang="en-US" sz="1400" dirty="0"/>
+          </a:p>
+        </p:txBody>
+      </p:sp>
+      <p:sp>
+        <p:nvSpPr>
+          <p:cNvPr id="13" name="Text 11"/>
+          <p:cNvSpPr txBox="1"/>
+          <p:nvPr/>
+        </p:nvSpPr>
+        <p:spPr>
+          <a:xfrm>
+            <a:off x="3642284" y="3291840"/>
+            <a:ext cx="2087804" cy="1234440"/>
+          </a:xfrm>
+          <a:prstGeom prst="rect">
+            <a:avLst/>
+          </a:prstGeom>
+          <a:noFill/>
+          <a:ln/>
+        </p:spPr>
+        <p:txBody>
+          <a:bodyPr wrap="square" lIns="0" tIns="0" rIns="0" bIns="0" rtlCol="0" anchor="t"/>
+          <a:lstStyle/>
+          <a:p>
+            <a:pPr rtl="1" algn="r" indent="0" marL="0">
+              <a:lnSpc>
+                <a:spcPct val="120000"/>
+              </a:lnSpc>
+              <a:buNone/>
+            </a:pPr>
+            <a:r>
+              <a:rPr lang="en-US" sz="1200" dirty="0">
+                <a:solidFill>
+                  <a:srgbClr val="31424A"/>
+                </a:solidFill>
+                <a:latin typeface="Arial" pitchFamily="34" charset="0"/>
+                <a:ea typeface="Arial" pitchFamily="34" charset="-122"/>
+                <a:cs typeface="Arial" pitchFamily="34" charset="-120"/>
+              </a:rPr>
+              <a:t>تدريب فني للفرق، وبروتوكولات الجرعات، وتحديثها في كل موسم.</a:t>
+            </a:r>
+            <a:endParaRPr lang="en-US" sz="1200" dirty="0"/>
+          </a:p>
+        </p:txBody>
+      </p:sp>
+      <p:sp>
+        <p:nvSpPr>
+          <p:cNvPr id="14" name="Shape 12"/>
+          <p:cNvSpPr/>
+          <p:nvPr/>
+        </p:nvSpPr>
+        <p:spPr>
+          <a:xfrm>
+            <a:off x="6233008" y="1874520"/>
+            <a:ext cx="2545004" cy="2834640"/>
+          </a:xfrm>
+          <a:prstGeom prst="roundRect">
+            <a:avLst>
+              <a:gd name="adj" fmla="val 3593"/>
+            </a:avLst>
+          </a:prstGeom>
+          <a:solidFill>
+            <a:srgbClr val="EDF3F5"/>
+          </a:solidFill>
+          <a:ln w="9525">
+            <a:solidFill>
+              <a:srgbClr val="D6E2E7"/>
+            </a:solidFill>
+            <a:prstDash val="solid"/>
+          </a:ln>
+        </p:spPr>
+      </p:sp>
+      <p:sp>
+        <p:nvSpPr>
+          <p:cNvPr id="15" name="Shape 13"/>
+          <p:cNvSpPr/>
+          <p:nvPr/>
+        </p:nvSpPr>
+        <p:spPr>
+          <a:xfrm>
+            <a:off x="6461608" y="2103120"/>
+            <a:ext cx="566928" cy="566928"/>
+          </a:xfrm>
+          <a:prstGeom prst="ellipse">
+            <a:avLst/>
+          </a:prstGeom>
+          <a:solidFill>
+            <a:srgbClr val="1C5A73"/>
+          </a:solidFill>
+          <a:ln/>
+        </p:spPr>
+      </p:sp>
+      <p:sp>
+        <p:nvSpPr>
+          <p:cNvPr id="16" name="Text 14"/>
+          <p:cNvSpPr txBox="1"/>
+          <p:nvPr/>
+        </p:nvSpPr>
+        <p:spPr>
+          <a:xfrm>
+            <a:off x="6461608" y="2103120"/>
+            <a:ext cx="566928" cy="566928"/>
+          </a:xfrm>
+          <a:prstGeom prst="rect">
+            <a:avLst/>
+          </a:prstGeom>
+          <a:noFill/>
+          <a:ln/>
+        </p:spPr>
+        <p:txBody>
+          <a:bodyPr wrap="square" lIns="0" tIns="0" rIns="0" bIns="0" rtlCol="0" anchor="ctr"/>
+          <a:lstStyle/>
+          <a:p>
+            <a:pPr rtl="1" algn="ctr" indent="0" marL="0">
+              <a:buNone/>
+            </a:pPr>
+            <a:r>
+              <a:rPr lang="en-US" sz="1600" b="1" dirty="0">
+                <a:solidFill>
+                  <a:srgbClr val="FFFFFF"/>
+                </a:solidFill>
+                <a:latin typeface="Arial" pitchFamily="34" charset="0"/>
+                <a:ea typeface="Arial" pitchFamily="34" charset="-122"/>
+                <a:cs typeface="Arial" pitchFamily="34" charset="-120"/>
+              </a:rPr>
+              <a:t>3</a:t>
+            </a:r>
+            <a:endParaRPr lang="en-US" sz="1600" dirty="0"/>
+          </a:p>
+        </p:txBody>
+      </p:sp>
+      <p:sp>
+        <p:nvSpPr>
+          <p:cNvPr id="17" name="Text 15"/>
+          <p:cNvSpPr txBox="1"/>
+          <p:nvPr/>
+        </p:nvSpPr>
+        <p:spPr>
+          <a:xfrm>
+            <a:off x="6461608" y="2788920"/>
+            <a:ext cx="2087804" cy="457200"/>
+          </a:xfrm>
+          <a:prstGeom prst="rect">
+            <a:avLst/>
+          </a:prstGeom>
+          <a:noFill/>
+          <a:ln/>
+        </p:spPr>
+        <p:txBody>
+          <a:bodyPr wrap="square" lIns="0" tIns="0" rIns="0" bIns="0" rtlCol="0" anchor="ctr"/>
+          <a:lstStyle/>
+          <a:p>
+            <a:pPr rtl="1" algn="r" indent="0" marL="0">
+              <a:buNone/>
+            </a:pPr>
+            <a:r>
+              <a:rPr lang="en-US" sz="1400" b="1" dirty="0">
+                <a:solidFill>
+                  <a:srgbClr val="1C5A73"/>
+                </a:solidFill>
+                <a:latin typeface="Arial" pitchFamily="34" charset="0"/>
+                <a:ea typeface="Arial" pitchFamily="34" charset="-122"/>
+                <a:cs typeface="Arial" pitchFamily="34" charset="-120"/>
+              </a:rPr>
+              <a:t>تجارب مشتركة</a:t>
+            </a:r>
+            <a:endParaRPr lang="en-US" sz="1400" dirty="0"/>
+          </a:p>
+        </p:txBody>
+      </p:sp>
+      <p:sp>
+        <p:nvSpPr>
+          <p:cNvPr id="18" name="Text 16"/>
+          <p:cNvSpPr txBox="1"/>
+          <p:nvPr/>
+        </p:nvSpPr>
+        <p:spPr>
+          <a:xfrm>
+            <a:off x="6461608" y="3291840"/>
+            <a:ext cx="2087804" cy="1234440"/>
+          </a:xfrm>
+          <a:prstGeom prst="rect">
+            <a:avLst/>
+          </a:prstGeom>
+          <a:noFill/>
+          <a:ln/>
+        </p:spPr>
+        <p:txBody>
+          <a:bodyPr wrap="square" lIns="0" tIns="0" rIns="0" bIns="0" rtlCol="0" anchor="t"/>
+          <a:lstStyle/>
+          <a:p>
+            <a:pPr rtl="1" algn="r" indent="0" marL="0">
+              <a:lnSpc>
+                <a:spcPct val="120000"/>
+              </a:lnSpc>
+              <a:buNone/>
+            </a:pPr>
+            <a:r>
+              <a:rPr lang="en-US" sz="1200" dirty="0">
+                <a:solidFill>
+                  <a:srgbClr val="31424A"/>
+                </a:solidFill>
+                <a:latin typeface="Arial" pitchFamily="34" charset="0"/>
+                <a:ea typeface="Arial" pitchFamily="34" charset="-122"/>
+                <a:cs typeface="Arial" pitchFamily="34" charset="-120"/>
+              </a:rPr>
+              <a:t>قطع إرشادية مع قطعة شاهد، ونتائج تُعرض على المزارعين.</a:t>
+            </a:r>
+            <a:endParaRPr lang="en-US" sz="1200" dirty="0"/>
+          </a:p>
+        </p:txBody>
+      </p:sp>
+      <p:sp>
+        <p:nvSpPr>
+          <p:cNvPr id="19" name="Shape 17"/>
+          <p:cNvSpPr/>
+          <p:nvPr/>
+        </p:nvSpPr>
+        <p:spPr>
+          <a:xfrm>
+            <a:off x="9052331" y="1874520"/>
+            <a:ext cx="2545004" cy="2834640"/>
+          </a:xfrm>
+          <a:prstGeom prst="roundRect">
+            <a:avLst>
+              <a:gd name="adj" fmla="val 3593"/>
+            </a:avLst>
+          </a:prstGeom>
+          <a:solidFill>
+            <a:srgbClr val="EDF3F5"/>
+          </a:solidFill>
+          <a:ln w="9525">
+            <a:solidFill>
+              <a:srgbClr val="D6E2E7"/>
+            </a:solidFill>
+            <a:prstDash val="solid"/>
+          </a:ln>
+        </p:spPr>
+      </p:sp>
+      <p:sp>
+        <p:nvSpPr>
+          <p:cNvPr id="20" name="Shape 18"/>
+          <p:cNvSpPr/>
+          <p:nvPr/>
+        </p:nvSpPr>
+        <p:spPr>
+          <a:xfrm>
+            <a:off x="9280931" y="2103120"/>
+            <a:ext cx="566928" cy="566928"/>
+          </a:xfrm>
+          <a:prstGeom prst="ellipse">
+            <a:avLst/>
+          </a:prstGeom>
+          <a:solidFill>
+            <a:srgbClr val="1C5A73"/>
+          </a:solidFill>
+          <a:ln/>
+        </p:spPr>
+      </p:sp>
+      <p:sp>
+        <p:nvSpPr>
+          <p:cNvPr id="21" name="Text 19"/>
+          <p:cNvSpPr txBox="1"/>
+          <p:nvPr/>
+        </p:nvSpPr>
+        <p:spPr>
+          <a:xfrm>
+            <a:off x="9280931" y="2103120"/>
+            <a:ext cx="566928" cy="566928"/>
+          </a:xfrm>
+          <a:prstGeom prst="rect">
+            <a:avLst/>
+          </a:prstGeom>
+          <a:noFill/>
+          <a:ln/>
+        </p:spPr>
+        <p:txBody>
+          <a:bodyPr wrap="square" lIns="0" tIns="0" rIns="0" bIns="0" rtlCol="0" anchor="ctr"/>
+          <a:lstStyle/>
+          <a:p>
+            <a:pPr rtl="1" algn="ctr" indent="0" marL="0">
+              <a:buNone/>
+            </a:pPr>
+            <a:r>
+              <a:rPr lang="en-US" sz="1600" b="1" dirty="0">
+                <a:solidFill>
+                  <a:srgbClr val="FFFFFF"/>
+                </a:solidFill>
+                <a:latin typeface="Arial" pitchFamily="34" charset="0"/>
+                <a:ea typeface="Arial" pitchFamily="34" charset="-122"/>
+                <a:cs typeface="Arial" pitchFamily="34" charset="-120"/>
+              </a:rPr>
+              <a:t>4</a:t>
+            </a:r>
+            <a:endParaRPr lang="en-US" sz="1600" dirty="0"/>
+          </a:p>
+        </p:txBody>
+      </p:sp>
+      <p:sp>
+        <p:nvSpPr>
+          <p:cNvPr id="22" name="Text 20"/>
+          <p:cNvSpPr txBox="1"/>
+          <p:nvPr/>
+        </p:nvSpPr>
+        <p:spPr>
+          <a:xfrm>
+            <a:off x="9280931" y="2788920"/>
+            <a:ext cx="2087804" cy="457200"/>
+          </a:xfrm>
+          <a:prstGeom prst="rect">
+            <a:avLst/>
+          </a:prstGeom>
+          <a:noFill/>
+          <a:ln/>
+        </p:spPr>
+        <p:txBody>
+          <a:bodyPr wrap="square" lIns="0" tIns="0" rIns="0" bIns="0" rtlCol="0" anchor="ctr"/>
+          <a:lstStyle/>
+          <a:p>
+            <a:pPr rtl="1" algn="r" indent="0" marL="0">
+              <a:buNone/>
+            </a:pPr>
+            <a:r>
+              <a:rPr lang="en-US" sz="1400" b="1" dirty="0">
+                <a:solidFill>
+                  <a:srgbClr val="1C5A73"/>
+                </a:solidFill>
+                <a:latin typeface="Arial" pitchFamily="34" charset="0"/>
+                <a:ea typeface="Arial" pitchFamily="34" charset="-122"/>
+                <a:cs typeface="Arial" pitchFamily="34" charset="-120"/>
+              </a:rPr>
+              <a:t>المؤسسات</a:t>
+            </a:r>
+            <a:endParaRPr lang="en-US" sz="1400" dirty="0"/>
+          </a:p>
+        </p:txBody>
+      </p:sp>
+      <p:sp>
+        <p:nvSpPr>
+          <p:cNvPr id="23" name="Text 21"/>
+          <p:cNvSpPr txBox="1"/>
+          <p:nvPr/>
+        </p:nvSpPr>
+        <p:spPr>
+          <a:xfrm>
+            <a:off x="9280931" y="3291840"/>
+            <a:ext cx="2087804" cy="1234440"/>
+          </a:xfrm>
+          <a:prstGeom prst="rect">
+            <a:avLst/>
+          </a:prstGeom>
+          <a:noFill/>
+          <a:ln/>
+        </p:spPr>
+        <p:txBody>
+          <a:bodyPr wrap="square" lIns="0" tIns="0" rIns="0" bIns="0" rtlCol="0" anchor="t"/>
+          <a:lstStyle/>
+          <a:p>
+            <a:pPr rtl="1" algn="r" indent="0" marL="0">
+              <a:lnSpc>
+                <a:spcPct val="120000"/>
+              </a:lnSpc>
+              <a:buNone/>
+            </a:pPr>
+            <a:r>
+              <a:rPr lang="en-US" sz="1200" dirty="0">
+                <a:solidFill>
+                  <a:srgbClr val="31424A"/>
+                </a:solidFill>
+                <a:latin typeface="Arial" pitchFamily="34" charset="0"/>
+                <a:ea typeface="Arial" pitchFamily="34" charset="-122"/>
+                <a:cs typeface="Arial" pitchFamily="34" charset="-120"/>
+              </a:rPr>
+              <a:t>حوار مع وزارة الزراعة وبرامج الأمن الغذائي.</a:t>
+            </a:r>
+            <a:endParaRPr lang="en-US" sz="1200" dirty="0"/>
+          </a:p>
+        </p:txBody>
+      </p:sp>
+      <p:sp>
+        <p:nvSpPr>
+          <p:cNvPr id="24" name="Text 22"/>
+          <p:cNvSpPr txBox="1"/>
+          <p:nvPr/>
+        </p:nvSpPr>
+        <p:spPr>
+          <a:xfrm>
+            <a:off x="594360" y="4983480"/>
+            <a:ext cx="11002975" cy="822960"/>
+          </a:xfrm>
+          <a:prstGeom prst="rect">
+            <a:avLst/>
+          </a:prstGeom>
+          <a:noFill/>
+          <a:ln/>
+        </p:spPr>
+        <p:txBody>
+          <a:bodyPr wrap="square" lIns="0" tIns="0" rIns="0" bIns="0" rtlCol="0" anchor="t"/>
+          <a:lstStyle/>
+          <a:p>
+            <a:pPr rtl="1" algn="r" indent="0" marL="0">
+              <a:lnSpc>
+                <a:spcPct val="125000"/>
+              </a:lnSpc>
+              <a:buNone/>
+            </a:pPr>
+            <a:r>
+              <a:rPr lang="en-US" sz="1250" dirty="0">
+                <a:solidFill>
+                  <a:srgbClr val="6C8089"/>
+                </a:solidFill>
+                <a:latin typeface="Arial" pitchFamily="34" charset="0"/>
+                <a:ea typeface="Arial" pitchFamily="34" charset="-122"/>
+                <a:cs typeface="Arial" pitchFamily="34" charset="-120"/>
+              </a:rPr>
+              <a:t>يتكيف الإطار مع الإقليم: يمكن أن يقود الشراكة مستورد أو موزّع مدخلات زراعية أو جمعية منتجين.</a:t>
+            </a:r>
+            <a:endParaRPr lang="en-US" sz="1250" dirty="0"/>
+          </a:p>
+        </p:txBody>
+      </p:sp>
+      <p:sp>
+        <p:nvSpPr>
+          <p:cNvPr id="25" name="Text 23"/>
+          <p:cNvSpPr txBox="1"/>
+          <p:nvPr/>
+        </p:nvSpPr>
+        <p:spPr>
+          <a:xfrm>
+            <a:off x="502920" y="6382512"/>
+            <a:ext cx="8229600" cy="274320"/>
+          </a:xfrm>
+          <a:prstGeom prst="rect">
+            <a:avLst/>
+          </a:prstGeom>
+          <a:noFill/>
+          <a:ln/>
+        </p:spPr>
+        <p:txBody>
+          <a:bodyPr wrap="square" lIns="0" tIns="0" rIns="0" bIns="0" rtlCol="0" anchor="ctr"/>
+          <a:lstStyle/>
+          <a:p>
+            <a:pPr rtl="1" algn="r" indent="0" marL="0">
+              <a:buNone/>
+            </a:pPr>
+            <a:r>
+              <a:rPr lang="en-US" sz="950" dirty="0">
+                <a:solidFill>
+                  <a:srgbClr val="6C8089">
+                    <a:alpha val="80000"/>
+                  </a:srgbClr>
+                </a:solidFill>
+                <a:latin typeface="Arial" pitchFamily="34" charset="0"/>
+                <a:ea typeface="Arial" pitchFamily="34" charset="-122"/>
+                <a:cs typeface="Arial" pitchFamily="34" charset="-120"/>
+              </a:rPr>
+              <a:t>Green Solutions · دراسة سوق مصر</a:t>
+            </a:r>
+            <a:endParaRPr lang="en-US" sz="950" dirty="0"/>
+          </a:p>
+        </p:txBody>
+      </p:sp>
+      <p:sp>
+        <p:nvSpPr>
+          <p:cNvPr id="26" name="Text 24"/>
+          <p:cNvSpPr txBox="1"/>
+          <p:nvPr/>
+        </p:nvSpPr>
+        <p:spPr>
+          <a:xfrm>
+            <a:off x="11140135" y="6382512"/>
+            <a:ext cx="548640" cy="274320"/>
+          </a:xfrm>
+          <a:prstGeom prst="rect">
+            <a:avLst/>
+          </a:prstGeom>
+          <a:noFill/>
+          <a:ln/>
+        </p:spPr>
+        <p:txBody>
+          <a:bodyPr wrap="square" lIns="0" tIns="0" rIns="0" bIns="0" rtlCol="0" anchor="ctr"/>
+          <a:lstStyle/>
+          <a:p>
+            <a:pPr rtl="1" algn="r" indent="0" marL="0">
+              <a:buNone/>
+            </a:pPr>
+            <a:r>
+              <a:rPr lang="en-US" sz="950" dirty="0">
+                <a:solidFill>
+                  <a:srgbClr val="6C8089">
+                    <a:alpha val="80000"/>
+                  </a:srgbClr>
+                </a:solidFill>
+                <a:latin typeface="Arial" pitchFamily="34" charset="0"/>
+                <a:ea typeface="Arial" pitchFamily="34" charset="-122"/>
+                <a:cs typeface="Arial" pitchFamily="34" charset="-120"/>
+              </a:rPr>
+              <a:t>14</a:t>
+            </a:r>
+            <a:endParaRPr lang="en-US" sz="950" dirty="0"/>
+          </a:p>
+        </p:txBody>
+      </p:sp>
+    </p:spTree>
+  </p:cSld>
+  <p:clrMapOvr>
+    <a:masterClrMapping/>
+  </p:clrMapOvr>
+</p:sld>
+</file>
+
+<file path=ppt/slides/slide16.xml><?xml version="1.0" encoding="utf-8"?>
+<p:sld xmlns:a="http://schemas.openxmlformats.org/drawingml/2006/main" xmlns:r="http://schemas.openxmlformats.org/officeDocument/2006/relationships" xmlns:p="http://schemas.openxmlformats.org/presentationml/2006/main">
+  <p:cSld name="Slide 16">
+    <p:bg>
+      <p:bgPr>
+        <a:solidFill>
+          <a:srgbClr val="FAFBFB"/>
+        </a:solidFill>
+      </p:bgPr>
+    </p:bg>
+    <p:spTree>
+      <p:nvGrpSpPr>
+        <p:cNvPr id="1" name=""/>
+        <p:cNvGrpSpPr/>
+        <p:nvPr/>
+      </p:nvGrpSpPr>
+      <p:grpSpPr>
+        <a:xfrm>
+          <a:off x="0" y="0"/>
+          <a:ext cx="0" cy="0"/>
+          <a:chOff x="0" y="0"/>
+          <a:chExt cx="0" cy="0"/>
+        </a:xfrm>
+      </p:grpSpPr>
+      <p:sp>
+        <p:nvSpPr>
+          <p:cNvPr id="2" name="Text 0"/>
+          <p:cNvSpPr txBox="1"/>
+          <p:nvPr/>
+        </p:nvSpPr>
+        <p:spPr>
+          <a:xfrm>
+            <a:off x="594360" y="411480"/>
+            <a:ext cx="10515600" cy="274320"/>
+          </a:xfrm>
+          <a:prstGeom prst="rect">
+            <a:avLst/>
+          </a:prstGeom>
+          <a:noFill/>
+          <a:ln/>
+        </p:spPr>
+        <p:txBody>
+          <a:bodyPr wrap="square" lIns="0" tIns="0" rIns="0" bIns="0" rtlCol="0" anchor="ctr"/>
+          <a:lstStyle/>
+          <a:p>
+            <a:pPr rtl="1" algn="r" indent="0" marL="0">
+              <a:buNone/>
+            </a:pPr>
+            <a:r>
+              <a:rPr lang="en-US" sz="1150" b="1" spc="200" kern="0" dirty="0">
+                <a:solidFill>
+                  <a:srgbClr val="E0A33E"/>
+                </a:solidFill>
+                <a:latin typeface="Arial" pitchFamily="34" charset="0"/>
+                <a:ea typeface="Arial" pitchFamily="34" charset="-122"/>
+                <a:cs typeface="Arial" pitchFamily="34" charset="-120"/>
+              </a:rPr>
+              <a:t>ما ينبغي توقّعه</a:t>
+            </a:r>
+            <a:endParaRPr lang="en-US" sz="1150" dirty="0"/>
+          </a:p>
+        </p:txBody>
+      </p:sp>
+      <p:sp>
+        <p:nvSpPr>
+          <p:cNvPr id="3" name="Text 1"/>
+          <p:cNvSpPr txBox="1"/>
+          <p:nvPr/>
+        </p:nvSpPr>
+        <p:spPr>
+          <a:xfrm>
+            <a:off x="594360" y="731520"/>
+            <a:ext cx="10881360" cy="731520"/>
+          </a:xfrm>
+          <a:prstGeom prst="rect">
+            <a:avLst/>
+          </a:prstGeom>
+          <a:noFill/>
+          <a:ln/>
+        </p:spPr>
+        <p:txBody>
+          <a:bodyPr wrap="square" lIns="0" tIns="0" rIns="0" bIns="0" rtlCol="0" anchor="ctr"/>
+          <a:lstStyle/>
+          <a:p>
+            <a:pPr rtl="1" algn="r" indent="0" marL="0">
+              <a:buNone/>
+            </a:pPr>
+            <a:r>
+              <a:rPr lang="en-US" sz="3000" b="1" dirty="0">
+                <a:solidFill>
+                  <a:srgbClr val="0E3546"/>
+                </a:solidFill>
+                <a:latin typeface="Arial" pitchFamily="34" charset="0"/>
+                <a:ea typeface="Arial" pitchFamily="34" charset="-122"/>
+                <a:cs typeface="Arial" pitchFamily="34" charset="-120"/>
+              </a:rPr>
+              <a:t>مخاطر محدّدة وردود عليها</a:t>
+            </a:r>
+            <a:endParaRPr lang="en-US" sz="3000" dirty="0"/>
+          </a:p>
+        </p:txBody>
+      </p:sp>
+      <p:sp>
+        <p:nvSpPr>
+          <p:cNvPr id="4" name="Text 2"/>
+          <p:cNvSpPr txBox="1"/>
+          <p:nvPr/>
+        </p:nvSpPr>
+        <p:spPr>
+          <a:xfrm>
+            <a:off x="594360" y="1783080"/>
+            <a:ext cx="5227168" cy="411480"/>
+          </a:xfrm>
+          <a:prstGeom prst="rect">
+            <a:avLst/>
+          </a:prstGeom>
+          <a:noFill/>
+          <a:ln/>
+        </p:spPr>
+        <p:txBody>
+          <a:bodyPr wrap="square" lIns="0" tIns="0" rIns="0" bIns="0" rtlCol="0" anchor="ctr"/>
+          <a:lstStyle/>
+          <a:p>
+            <a:pPr rtl="1" algn="r" indent="0" marL="0">
+              <a:buNone/>
+            </a:pPr>
+            <a:r>
+              <a:rPr lang="en-US" sz="1600" b="1" dirty="0">
+                <a:solidFill>
+                  <a:srgbClr val="1C5A73"/>
+                </a:solidFill>
+                <a:latin typeface="Arial" pitchFamily="34" charset="0"/>
+                <a:ea typeface="Arial" pitchFamily="34" charset="-122"/>
+                <a:cs typeface="Arial" pitchFamily="34" charset="-120"/>
+              </a:rPr>
+              <a:t>المخاطر</a:t>
+            </a:r>
+            <a:endParaRPr lang="en-US" sz="1600" dirty="0"/>
+          </a:p>
+        </p:txBody>
+      </p:sp>
+      <p:sp>
+        <p:nvSpPr>
+          <p:cNvPr id="5" name="Text 3"/>
+          <p:cNvSpPr txBox="1"/>
+          <p:nvPr/>
+        </p:nvSpPr>
+        <p:spPr>
+          <a:xfrm>
+            <a:off x="594360" y="2286000"/>
+            <a:ext cx="5227168" cy="2468880"/>
+          </a:xfrm>
+          <a:prstGeom prst="rect">
+            <a:avLst/>
+          </a:prstGeom>
+          <a:noFill/>
+          <a:ln/>
+        </p:spPr>
+        <p:txBody>
+          <a:bodyPr wrap="square" lIns="0" tIns="0" rIns="0" bIns="0" rtlCol="0" anchor="t"/>
+          <a:lstStyle/>
+          <a:p>
+            <a:pPr algn="r" marL="342900" indent="-342900">
+              <a:lnSpc>
+                <a:spcPct val="122000"/>
+              </a:lnSpc>
+              <a:spcAft>
+                <a:spcPts val="1000"/>
+              </a:spcAft>
+              <a:buSzPct val="100000"/>
+              <a:buChar char="•"/>
+            </a:pPr>
+            <a:r>
+              <a:rPr lang="en-US" sz="1350" dirty="0">
+                <a:solidFill>
+                  <a:srgbClr val="31424A"/>
+                </a:solidFill>
+                <a:latin typeface="Arial" pitchFamily="34" charset="0"/>
+                <a:ea typeface="Arial" pitchFamily="34" charset="-122"/>
+                <a:cs typeface="Arial" pitchFamily="34" charset="-120"/>
+              </a:rPr>
+              <a:t>تفتّت الحيازات في الوادي والدلتا: متوسط الحيازة أقل من فدانين، وقرار الشراء مشتّت.</a:t>
+            </a:r>
+            <a:endParaRPr lang="en-US" sz="1350" dirty="0"/>
+          </a:p>
+          <a:p>
+            <a:pPr algn="r" marL="342900" indent="-342900">
+              <a:lnSpc>
+                <a:spcPct val="122000"/>
+              </a:lnSpc>
+              <a:spcAft>
+                <a:spcPts val="1000"/>
+              </a:spcAft>
+              <a:buSzPct val="100000"/>
+              <a:buChar char="•"/>
+            </a:pPr>
+            <a:r>
+              <a:rPr lang="en-US" sz="1350" dirty="0">
+                <a:solidFill>
+                  <a:srgbClr val="31424A"/>
+                </a:solidFill>
+                <a:latin typeface="Arial" pitchFamily="34" charset="0"/>
+                <a:ea typeface="Arial" pitchFamily="34" charset="-122"/>
+                <a:cs typeface="Arial" pitchFamily="34" charset="-120"/>
+              </a:rPr>
+              <a:t>ماء الري متاح بتكلفة منخفضة جدًا للمزارع، ما يضعف الحافز المالي المباشر للتوفير.</a:t>
+            </a:r>
+            <a:endParaRPr lang="en-US" sz="1350" dirty="0"/>
+          </a:p>
+          <a:p>
+            <a:pPr algn="r" marL="342900" indent="-342900">
+              <a:lnSpc>
+                <a:spcPct val="122000"/>
+              </a:lnSpc>
+              <a:spcAft>
+                <a:spcPts val="1000"/>
+              </a:spcAft>
+              <a:buSzPct val="100000"/>
+              <a:buChar char="•"/>
+            </a:pPr>
+            <a:r>
+              <a:rPr lang="en-US" sz="1350" dirty="0">
+                <a:solidFill>
+                  <a:srgbClr val="31424A"/>
+                </a:solidFill>
+                <a:latin typeface="Arial" pitchFamily="34" charset="0"/>
+                <a:ea typeface="Arial" pitchFamily="34" charset="-122"/>
+                <a:cs typeface="Arial" pitchFamily="34" charset="-120"/>
+              </a:rPr>
+              <a:t>منافسة مواد رخيصة أساسها الصوديوم تركت انطباعًا سيئًا وأضرّت بتربة مالحة أصلًا.</a:t>
+            </a:r>
+            <a:endParaRPr lang="en-US" sz="1350" dirty="0"/>
+          </a:p>
+          <a:p>
+            <a:pPr algn="r" marL="342900" indent="-342900">
+              <a:lnSpc>
+                <a:spcPct val="122000"/>
+              </a:lnSpc>
+              <a:spcAft>
+                <a:spcPts val="1000"/>
+              </a:spcAft>
+              <a:buSzPct val="100000"/>
+              <a:buChar char="•"/>
+            </a:pPr>
+            <a:r>
+              <a:rPr lang="en-US" sz="1350" dirty="0">
+                <a:solidFill>
+                  <a:srgbClr val="31424A"/>
+                </a:solidFill>
+                <a:latin typeface="Arial" pitchFamily="34" charset="0"/>
+                <a:ea typeface="Arial" pitchFamily="34" charset="-122"/>
+                <a:cs typeface="Arial" pitchFamily="34" charset="-120"/>
+              </a:rPr>
+              <a:t>سيولة المزارع محدودة وتكلفة المستلزمات المستوردة مرتفعة بفعل تقلبات سعر الصرف.</a:t>
+            </a:r>
+            <a:endParaRPr lang="en-US" sz="1350" dirty="0"/>
+          </a:p>
+        </p:txBody>
+      </p:sp>
+      <p:sp>
+        <p:nvSpPr>
+          <p:cNvPr id="6" name="Text 4"/>
+          <p:cNvSpPr txBox="1"/>
+          <p:nvPr/>
+        </p:nvSpPr>
+        <p:spPr>
+          <a:xfrm>
+            <a:off x="6370168" y="1783080"/>
+            <a:ext cx="5227168" cy="411480"/>
+          </a:xfrm>
+          <a:prstGeom prst="rect">
+            <a:avLst/>
+          </a:prstGeom>
+          <a:noFill/>
+          <a:ln/>
+        </p:spPr>
+        <p:txBody>
+          <a:bodyPr wrap="square" lIns="0" tIns="0" rIns="0" bIns="0" rtlCol="0" anchor="ctr"/>
+          <a:lstStyle/>
+          <a:p>
+            <a:pPr rtl="1" algn="r" indent="0" marL="0">
+              <a:buNone/>
+            </a:pPr>
+            <a:r>
+              <a:rPr lang="en-US" sz="1600" b="1" dirty="0">
+                <a:solidFill>
+                  <a:srgbClr val="1C5A73"/>
+                </a:solidFill>
+                <a:latin typeface="Arial" pitchFamily="34" charset="0"/>
+                <a:ea typeface="Arial" pitchFamily="34" charset="-122"/>
+                <a:cs typeface="Arial" pitchFamily="34" charset="-120"/>
+              </a:rPr>
+              <a:t>الردود</a:t>
+            </a:r>
+            <a:endParaRPr lang="en-US" sz="1600" dirty="0"/>
+          </a:p>
+        </p:txBody>
+      </p:sp>
+      <p:sp>
+        <p:nvSpPr>
+          <p:cNvPr id="7" name="Text 5"/>
+          <p:cNvSpPr txBox="1"/>
+          <p:nvPr/>
+        </p:nvSpPr>
+        <p:spPr>
+          <a:xfrm>
+            <a:off x="6370168" y="2286000"/>
+            <a:ext cx="5227168" cy="2468880"/>
+          </a:xfrm>
+          <a:prstGeom prst="rect">
+            <a:avLst/>
+          </a:prstGeom>
+          <a:noFill/>
+          <a:ln/>
+        </p:spPr>
+        <p:txBody>
+          <a:bodyPr wrap="square" lIns="0" tIns="0" rIns="0" bIns="0" rtlCol="0" anchor="t"/>
+          <a:lstStyle/>
+          <a:p>
+            <a:pPr algn="r" marL="342900" indent="-342900">
+              <a:lnSpc>
+                <a:spcPct val="122000"/>
+              </a:lnSpc>
+              <a:spcAft>
+                <a:spcPts val="1000"/>
+              </a:spcAft>
+              <a:buSzPct val="100000"/>
+              <a:buChar char="•"/>
+            </a:pPr>
+            <a:r>
+              <a:rPr lang="en-US" sz="1350" dirty="0">
+                <a:solidFill>
+                  <a:srgbClr val="31424A"/>
+                </a:solidFill>
+                <a:latin typeface="Arial" pitchFamily="34" charset="0"/>
+                <a:ea typeface="Arial" pitchFamily="34" charset="-122"/>
+                <a:cs typeface="Arial" pitchFamily="34" charset="-120"/>
+              </a:rPr>
+              <a:t>المرور عبر الجمعيات التعاونية ومصانع السكر ومصدّري الموالح، لا عبر الحيازة الفردية.</a:t>
+            </a:r>
+            <a:endParaRPr lang="en-US" sz="1350" dirty="0"/>
+          </a:p>
+          <a:p>
+            <a:pPr algn="r" marL="342900" indent="-342900">
+              <a:lnSpc>
+                <a:spcPct val="122000"/>
+              </a:lnSpc>
+              <a:spcAft>
+                <a:spcPts val="1000"/>
+              </a:spcAft>
+              <a:buSzPct val="100000"/>
+              <a:buChar char="•"/>
+            </a:pPr>
+            <a:r>
+              <a:rPr lang="en-US" sz="1350" dirty="0">
+                <a:solidFill>
+                  <a:srgbClr val="31424A"/>
+                </a:solidFill>
+                <a:latin typeface="Arial" pitchFamily="34" charset="0"/>
+                <a:ea typeface="Arial" pitchFamily="34" charset="-122"/>
+                <a:cs typeface="Arial" pitchFamily="34" charset="-120"/>
+              </a:rPr>
+              <a:t>عرض المكسب على المحصول والجودة، لا على فاتورة الماء وحدها: الماء المتاح باستمرار يرفع الإنتاج.</a:t>
+            </a:r>
+            <a:endParaRPr lang="en-US" sz="1350" dirty="0"/>
+          </a:p>
+          <a:p>
+            <a:pPr algn="r" marL="342900" indent="-342900">
+              <a:lnSpc>
+                <a:spcPct val="122000"/>
+              </a:lnSpc>
+              <a:spcAft>
+                <a:spcPts val="1000"/>
+              </a:spcAft>
+              <a:buSzPct val="100000"/>
+              <a:buChar char="•"/>
+            </a:pPr>
+            <a:r>
+              <a:rPr lang="en-US" sz="1350" dirty="0">
+                <a:solidFill>
+                  <a:srgbClr val="31424A"/>
+                </a:solidFill>
+                <a:latin typeface="Arial" pitchFamily="34" charset="0"/>
+                <a:ea typeface="Arial" pitchFamily="34" charset="-122"/>
+                <a:cs typeface="Arial" pitchFamily="34" charset="-120"/>
+              </a:rPr>
+              <a:t>توثيق فارق التركيبة: بوتاسيوم لا صوديوم، ملائم للمحاصيل الغذائية وللتربة المالحة.</a:t>
+            </a:r>
+            <a:endParaRPr lang="en-US" sz="1350" dirty="0"/>
+          </a:p>
+          <a:p>
+            <a:pPr algn="r" marL="342900" indent="-342900">
+              <a:lnSpc>
+                <a:spcPct val="122000"/>
+              </a:lnSpc>
+              <a:spcAft>
+                <a:spcPts val="1000"/>
+              </a:spcAft>
+              <a:buSzPct val="100000"/>
+              <a:buChar char="•"/>
+            </a:pPr>
+            <a:r>
+              <a:rPr lang="en-US" sz="1350" dirty="0">
+                <a:solidFill>
+                  <a:srgbClr val="31424A"/>
+                </a:solidFill>
+                <a:latin typeface="Arial" pitchFamily="34" charset="0"/>
+                <a:ea typeface="Arial" pitchFamily="34" charset="-122"/>
+                <a:cs typeface="Arial" pitchFamily="34" charset="-120"/>
+              </a:rPr>
+              <a:t>توزيع الالتزام: مفعول يمتد 3 إلى 4 سنوات يوزّع التكلفة على عدة مواسم.</a:t>
+            </a:r>
+            <a:endParaRPr lang="en-US" sz="1350" dirty="0"/>
+          </a:p>
+        </p:txBody>
+      </p:sp>
+      <p:sp>
+        <p:nvSpPr>
+          <p:cNvPr id="8" name="Shape 6"/>
+          <p:cNvSpPr/>
+          <p:nvPr/>
+        </p:nvSpPr>
+        <p:spPr>
+          <a:xfrm>
+            <a:off x="594360" y="4846320"/>
+            <a:ext cx="11002975" cy="960120"/>
+          </a:xfrm>
+          <a:prstGeom prst="roundRect">
+            <a:avLst>
+              <a:gd name="adj" fmla="val 7619"/>
+            </a:avLst>
+          </a:prstGeom>
+          <a:solidFill>
+            <a:srgbClr val="EDF3F5"/>
+          </a:solidFill>
+          <a:ln w="9525">
+            <a:solidFill>
+              <a:srgbClr val="D6E2E7"/>
+            </a:solidFill>
+            <a:prstDash val="solid"/>
+          </a:ln>
+        </p:spPr>
+      </p:sp>
+      <p:sp>
+        <p:nvSpPr>
+          <p:cNvPr id="9" name="Text 7"/>
+          <p:cNvSpPr txBox="1"/>
+          <p:nvPr/>
+        </p:nvSpPr>
+        <p:spPr>
+          <a:xfrm>
+            <a:off x="822960" y="4983480"/>
+            <a:ext cx="10545775" cy="713232"/>
+          </a:xfrm>
+          <a:prstGeom prst="rect">
+            <a:avLst/>
+          </a:prstGeom>
+          <a:noFill/>
+          <a:ln/>
+        </p:spPr>
+        <p:txBody>
+          <a:bodyPr wrap="square" lIns="0" tIns="0" rIns="0" bIns="0" rtlCol="0" anchor="t"/>
+          <a:lstStyle/>
+          <a:p>
+            <a:pPr rtl="1" algn="r" indent="0" marL="0">
+              <a:lnSpc>
+                <a:spcPct val="118000"/>
+              </a:lnSpc>
+              <a:buNone/>
+            </a:pPr>
+            <a:r>
+              <a:rPr lang="en-US" sz="1100" dirty="0">
+                <a:solidFill>
+                  <a:srgbClr val="6C8089"/>
+                </a:solidFill>
+                <a:latin typeface="Arial" pitchFamily="34" charset="0"/>
+                <a:ea typeface="Arial" pitchFamily="34" charset="-122"/>
+                <a:cs typeface="Arial" pitchFamily="34" charset="-120"/>
+              </a:rPr>
+              <a:t>تحليل الأكريلاميد (مختبر Polymex، ISO 9001، بتركيز أقل من 3,0 ميكروغرام/غرام) وفحص REACH / SVHC (SGS) وشهادة SOHISCERT السارية حتى 4 سبتمبر 2027: متاحة جميعها عند الطلب.</a:t>
+            </a:r>
+            <a:endParaRPr lang="en-US" sz="1100" dirty="0"/>
+          </a:p>
+        </p:txBody>
+      </p:sp>
+      <p:sp>
+        <p:nvSpPr>
+          <p:cNvPr id="10" name="Text 8"/>
+          <p:cNvSpPr txBox="1"/>
+          <p:nvPr/>
+        </p:nvSpPr>
+        <p:spPr>
+          <a:xfrm>
+            <a:off x="502920" y="6382512"/>
+            <a:ext cx="8229600" cy="274320"/>
+          </a:xfrm>
+          <a:prstGeom prst="rect">
+            <a:avLst/>
+          </a:prstGeom>
+          <a:noFill/>
+          <a:ln/>
+        </p:spPr>
+        <p:txBody>
+          <a:bodyPr wrap="square" lIns="0" tIns="0" rIns="0" bIns="0" rtlCol="0" anchor="ctr"/>
+          <a:lstStyle/>
+          <a:p>
+            <a:pPr rtl="1" algn="r" indent="0" marL="0">
+              <a:buNone/>
+            </a:pPr>
+            <a:r>
+              <a:rPr lang="en-US" sz="950" dirty="0">
+                <a:solidFill>
+                  <a:srgbClr val="6C8089">
+                    <a:alpha val="80000"/>
+                  </a:srgbClr>
+                </a:solidFill>
+                <a:latin typeface="Arial" pitchFamily="34" charset="0"/>
+                <a:ea typeface="Arial" pitchFamily="34" charset="-122"/>
+                <a:cs typeface="Arial" pitchFamily="34" charset="-120"/>
+              </a:rPr>
+              <a:t>Green Solutions · دراسة سوق مصر</a:t>
+            </a:r>
+            <a:endParaRPr lang="en-US" sz="950" dirty="0"/>
+          </a:p>
+        </p:txBody>
+      </p:sp>
+      <p:sp>
+        <p:nvSpPr>
+          <p:cNvPr id="11" name="Text 9"/>
+          <p:cNvSpPr txBox="1"/>
+          <p:nvPr/>
+        </p:nvSpPr>
+        <p:spPr>
+          <a:xfrm>
+            <a:off x="11140135" y="6382512"/>
+            <a:ext cx="548640" cy="274320"/>
+          </a:xfrm>
+          <a:prstGeom prst="rect">
+            <a:avLst/>
+          </a:prstGeom>
+          <a:noFill/>
+          <a:ln/>
+        </p:spPr>
+        <p:txBody>
+          <a:bodyPr wrap="square" lIns="0" tIns="0" rIns="0" bIns="0" rtlCol="0" anchor="ctr"/>
+          <a:lstStyle/>
+          <a:p>
+            <a:pPr rtl="1" algn="r" indent="0" marL="0">
+              <a:buNone/>
+            </a:pPr>
+            <a:r>
+              <a:rPr lang="en-US" sz="950" dirty="0">
+                <a:solidFill>
+                  <a:srgbClr val="6C8089">
+                    <a:alpha val="80000"/>
+                  </a:srgbClr>
+                </a:solidFill>
+                <a:latin typeface="Arial" pitchFamily="34" charset="0"/>
+                <a:ea typeface="Arial" pitchFamily="34" charset="-122"/>
+                <a:cs typeface="Arial" pitchFamily="34" charset="-120"/>
+              </a:rPr>
+              <a:t>15</a:t>
+            </a:r>
+            <a:endParaRPr lang="en-US" sz="950" dirty="0"/>
+          </a:p>
+        </p:txBody>
+      </p:sp>
+    </p:spTree>
+  </p:cSld>
+  <p:clrMapOvr>
+    <a:masterClrMapping/>
+  </p:clrMapOvr>
+</p:sld>
+</file>
+
+<file path=ppt/slides/slide17.xml><?xml version="1.0" encoding="utf-8"?>
+<p:sld xmlns:a="http://schemas.openxmlformats.org/drawingml/2006/main" xmlns:r="http://schemas.openxmlformats.org/officeDocument/2006/relationships" xmlns:p="http://schemas.openxmlformats.org/presentationml/2006/main">
+  <p:cSld name="Slide 17">
+    <p:bg>
+      <p:bgPr>
+        <a:solidFill>
+          <a:srgbClr val="FAFBFB"/>
+        </a:solidFill>
+      </p:bgPr>
+    </p:bg>
+    <p:spTree>
+      <p:nvGrpSpPr>
+        <p:cNvPr id="1" name=""/>
+        <p:cNvGrpSpPr/>
+        <p:nvPr/>
+      </p:nvGrpSpPr>
+      <p:grpSpPr>
+        <a:xfrm>
+          <a:off x="0" y="0"/>
+          <a:ext cx="0" cy="0"/>
+          <a:chOff x="0" y="0"/>
+          <a:chExt cx="0" cy="0"/>
+        </a:xfrm>
+      </p:grpSpPr>
+      <p:sp>
+        <p:nvSpPr>
+          <p:cNvPr id="2" name="Text 0"/>
+          <p:cNvSpPr txBox="1"/>
+          <p:nvPr/>
+        </p:nvSpPr>
+        <p:spPr>
+          <a:xfrm>
+            <a:off x="594360" y="411480"/>
+            <a:ext cx="10515600" cy="274320"/>
+          </a:xfrm>
+          <a:prstGeom prst="rect">
+            <a:avLst/>
+          </a:prstGeom>
+          <a:noFill/>
+          <a:ln/>
+        </p:spPr>
+        <p:txBody>
+          <a:bodyPr wrap="square" lIns="0" tIns="0" rIns="0" bIns="0" rtlCol="0" anchor="ctr"/>
+          <a:lstStyle/>
+          <a:p>
+            <a:pPr rtl="1" algn="r" indent="0" marL="0">
+              <a:buNone/>
+            </a:pPr>
+            <a:r>
+              <a:rPr lang="en-US" sz="1150" b="1" spc="200" kern="0" dirty="0">
+                <a:solidFill>
+                  <a:srgbClr val="E0A33E"/>
+                </a:solidFill>
+                <a:latin typeface="Arial" pitchFamily="34" charset="0"/>
+                <a:ea typeface="Arial" pitchFamily="34" charset="-122"/>
+                <a:cs typeface="Arial" pitchFamily="34" charset="-120"/>
+              </a:rPr>
+              <a:t>المصادر</a:t>
+            </a:r>
+            <a:endParaRPr lang="en-US" sz="1150" dirty="0"/>
+          </a:p>
+        </p:txBody>
+      </p:sp>
+      <p:sp>
+        <p:nvSpPr>
+          <p:cNvPr id="3" name="Text 1"/>
+          <p:cNvSpPr txBox="1"/>
+          <p:nvPr/>
+        </p:nvSpPr>
+        <p:spPr>
+          <a:xfrm>
+            <a:off x="594360" y="731520"/>
+            <a:ext cx="10881360" cy="731520"/>
+          </a:xfrm>
+          <a:prstGeom prst="rect">
+            <a:avLst/>
+          </a:prstGeom>
+          <a:noFill/>
+          <a:ln/>
+        </p:spPr>
+        <p:txBody>
+          <a:bodyPr wrap="square" lIns="0" tIns="0" rIns="0" bIns="0" rtlCol="0" anchor="ctr"/>
+          <a:lstStyle/>
+          <a:p>
+            <a:pPr rtl="1" algn="r" indent="0" marL="0">
+              <a:buNone/>
+            </a:pPr>
+            <a:r>
+              <a:rPr lang="en-US" sz="3000" b="1" dirty="0">
+                <a:solidFill>
+                  <a:srgbClr val="0E3546"/>
+                </a:solidFill>
+                <a:latin typeface="Arial" pitchFamily="34" charset="0"/>
+                <a:ea typeface="Arial" pitchFamily="34" charset="-122"/>
+                <a:cs typeface="Arial" pitchFamily="34" charset="-120"/>
+              </a:rPr>
+              <a:t>المصادر وافتراضات العمل</a:t>
+            </a:r>
+            <a:endParaRPr lang="en-US" sz="3000" dirty="0"/>
+          </a:p>
+        </p:txBody>
+      </p:sp>
+      <p:sp>
+        <p:nvSpPr>
+          <p:cNvPr id="4" name="Text 2"/>
+          <p:cNvSpPr txBox="1"/>
+          <p:nvPr/>
+        </p:nvSpPr>
+        <p:spPr>
+          <a:xfrm>
+            <a:off x="594360" y="1783080"/>
+            <a:ext cx="5227168" cy="411480"/>
+          </a:xfrm>
+          <a:prstGeom prst="rect">
+            <a:avLst/>
+          </a:prstGeom>
+          <a:noFill/>
+          <a:ln/>
+        </p:spPr>
+        <p:txBody>
+          <a:bodyPr wrap="square" lIns="0" tIns="0" rIns="0" bIns="0" rtlCol="0" anchor="ctr"/>
+          <a:lstStyle/>
+          <a:p>
+            <a:pPr rtl="1" algn="r" indent="0" marL="0">
+              <a:buNone/>
+            </a:pPr>
+            <a:r>
+              <a:rPr lang="en-US" sz="1600" b="1" dirty="0">
+                <a:solidFill>
+                  <a:srgbClr val="1C5A73"/>
+                </a:solidFill>
+                <a:latin typeface="Arial" pitchFamily="34" charset="0"/>
+                <a:ea typeface="Arial" pitchFamily="34" charset="-122"/>
+                <a:cs typeface="Arial" pitchFamily="34" charset="-120"/>
+              </a:rPr>
+              <a:t>المصادر الرئيسية</a:t>
+            </a:r>
+            <a:endParaRPr lang="en-US" sz="1600" dirty="0"/>
+          </a:p>
+        </p:txBody>
+      </p:sp>
+      <p:sp>
+        <p:nvSpPr>
+          <p:cNvPr id="5" name="Text 3"/>
+          <p:cNvSpPr txBox="1"/>
+          <p:nvPr/>
+        </p:nvSpPr>
+        <p:spPr>
+          <a:xfrm>
+            <a:off x="594360" y="2286000"/>
+            <a:ext cx="5227168" cy="2468880"/>
+          </a:xfrm>
+          <a:prstGeom prst="rect">
+            <a:avLst/>
+          </a:prstGeom>
+          <a:noFill/>
+          <a:ln/>
+        </p:spPr>
+        <p:txBody>
+          <a:bodyPr wrap="square" lIns="0" tIns="0" rIns="0" bIns="0" rtlCol="0" anchor="t"/>
+          <a:lstStyle/>
+          <a:p>
+            <a:pPr algn="r" marL="342900" indent="-342900">
+              <a:lnSpc>
+                <a:spcPct val="122000"/>
+              </a:lnSpc>
+              <a:spcAft>
+                <a:spcPts val="1000"/>
+              </a:spcAft>
+              <a:buSzPct val="100000"/>
+              <a:buChar char="•"/>
+            </a:pPr>
+            <a:r>
+              <a:rPr lang="en-US" sz="1350" dirty="0">
+                <a:solidFill>
+                  <a:srgbClr val="31424A"/>
+                </a:solidFill>
+                <a:latin typeface="Arial" pitchFamily="34" charset="0"/>
+                <a:ea typeface="Arial" pitchFamily="34" charset="-122"/>
+                <a:cs typeface="Arial" pitchFamily="34" charset="-120"/>
+              </a:rPr>
+              <a:t>الجهاز المركزي للتعبئة العامة والإحصاء: السكان والإنتاج الزراعي والتجارة الخارجية.</a:t>
+            </a:r>
+            <a:endParaRPr lang="en-US" sz="1350" dirty="0"/>
+          </a:p>
+          <a:p>
+            <a:pPr algn="r" marL="342900" indent="-342900">
+              <a:lnSpc>
+                <a:spcPct val="122000"/>
+              </a:lnSpc>
+              <a:spcAft>
+                <a:spcPts val="1000"/>
+              </a:spcAft>
+              <a:buSzPct val="100000"/>
+              <a:buChar char="•"/>
+            </a:pPr>
+            <a:r>
+              <a:rPr lang="en-US" sz="1350" dirty="0">
+                <a:solidFill>
+                  <a:srgbClr val="31424A"/>
+                </a:solidFill>
+                <a:latin typeface="Arial" pitchFamily="34" charset="0"/>
+                <a:ea typeface="Arial" pitchFamily="34" charset="-122"/>
+                <a:cs typeface="Arial" pitchFamily="34" charset="-120"/>
+              </a:rPr>
+              <a:t>وزارة الزراعة واستصلاح الأراضي: إحصاءات الصادرات الزراعية.</a:t>
+            </a:r>
+            <a:endParaRPr lang="en-US" sz="1350" dirty="0"/>
+          </a:p>
+          <a:p>
+            <a:pPr algn="r" marL="342900" indent="-342900">
+              <a:lnSpc>
+                <a:spcPct val="122000"/>
+              </a:lnSpc>
+              <a:spcAft>
+                <a:spcPts val="1000"/>
+              </a:spcAft>
+              <a:buSzPct val="100000"/>
+              <a:buChar char="•"/>
+            </a:pPr>
+            <a:r>
+              <a:rPr lang="en-US" sz="1350" dirty="0">
+                <a:solidFill>
+                  <a:srgbClr val="31424A"/>
+                </a:solidFill>
+                <a:latin typeface="Arial" pitchFamily="34" charset="0"/>
+                <a:ea typeface="Arial" pitchFamily="34" charset="-122"/>
+                <a:cs typeface="Arial" pitchFamily="34" charset="-120"/>
+              </a:rPr>
+              <a:t>وزارة الموارد المائية والري: الخطة القومية للموارد المائية.</a:t>
+            </a:r>
+            <a:endParaRPr lang="en-US" sz="1350" dirty="0"/>
+          </a:p>
+          <a:p>
+            <a:pPr algn="r" marL="342900" indent="-342900">
+              <a:lnSpc>
+                <a:spcPct val="122000"/>
+              </a:lnSpc>
+              <a:spcAft>
+                <a:spcPts val="1000"/>
+              </a:spcAft>
+              <a:buSzPct val="100000"/>
+              <a:buChar char="•"/>
+            </a:pPr>
+            <a:r>
+              <a:rPr lang="en-US" sz="1350" dirty="0">
+                <a:solidFill>
+                  <a:srgbClr val="31424A"/>
+                </a:solidFill>
+                <a:latin typeface="Arial" pitchFamily="34" charset="0"/>
+                <a:ea typeface="Arial" pitchFamily="34" charset="-122"/>
+                <a:cs typeface="Arial" pitchFamily="34" charset="-120"/>
+              </a:rPr>
+              <a:t>منظمة الأغذية والزراعة (FAOSTAT وAQUASTAT) والبنك الدولي (WDI).</a:t>
+            </a:r>
+            <a:endParaRPr lang="en-US" sz="1350" dirty="0"/>
+          </a:p>
+        </p:txBody>
+      </p:sp>
+      <p:sp>
+        <p:nvSpPr>
+          <p:cNvPr id="6" name="Text 4"/>
+          <p:cNvSpPr txBox="1"/>
+          <p:nvPr/>
+        </p:nvSpPr>
+        <p:spPr>
+          <a:xfrm>
+            <a:off x="6370168" y="1783080"/>
+            <a:ext cx="5227168" cy="411480"/>
+          </a:xfrm>
+          <a:prstGeom prst="rect">
+            <a:avLst/>
+          </a:prstGeom>
+          <a:noFill/>
+          <a:ln/>
+        </p:spPr>
+        <p:txBody>
+          <a:bodyPr wrap="square" lIns="0" tIns="0" rIns="0" bIns="0" rtlCol="0" anchor="ctr"/>
+          <a:lstStyle/>
+          <a:p>
+            <a:pPr rtl="1" algn="r" indent="0" marL="0">
+              <a:buNone/>
+            </a:pPr>
+            <a:r>
+              <a:rPr lang="en-US" sz="1600" b="1" dirty="0">
+                <a:solidFill>
+                  <a:srgbClr val="1C5A73"/>
+                </a:solidFill>
+                <a:latin typeface="Arial" pitchFamily="34" charset="0"/>
+                <a:ea typeface="Arial" pitchFamily="34" charset="-122"/>
+                <a:cs typeface="Arial" pitchFamily="34" charset="-120"/>
+              </a:rPr>
+              <a:t>افتراضات العمل</a:t>
+            </a:r>
+            <a:endParaRPr lang="en-US" sz="1600" dirty="0"/>
+          </a:p>
+        </p:txBody>
+      </p:sp>
+      <p:sp>
+        <p:nvSpPr>
+          <p:cNvPr id="7" name="Text 5"/>
+          <p:cNvSpPr txBox="1"/>
+          <p:nvPr/>
+        </p:nvSpPr>
+        <p:spPr>
+          <a:xfrm>
+            <a:off x="6370168" y="2286000"/>
+            <a:ext cx="5227168" cy="2468880"/>
+          </a:xfrm>
+          <a:prstGeom prst="rect">
+            <a:avLst/>
+          </a:prstGeom>
+          <a:noFill/>
+          <a:ln/>
+        </p:spPr>
+        <p:txBody>
+          <a:bodyPr wrap="square" lIns="0" tIns="0" rIns="0" bIns="0" rtlCol="0" anchor="t"/>
+          <a:lstStyle/>
+          <a:p>
+            <a:pPr algn="r" marL="342900" indent="-342900">
+              <a:lnSpc>
+                <a:spcPct val="122000"/>
+              </a:lnSpc>
+              <a:spcAft>
+                <a:spcPts val="1000"/>
+              </a:spcAft>
+              <a:buSzPct val="100000"/>
+              <a:buChar char="•"/>
+            </a:pPr>
+            <a:r>
+              <a:rPr lang="en-US" sz="1350" dirty="0">
+                <a:solidFill>
+                  <a:srgbClr val="31424A"/>
+                </a:solidFill>
+                <a:latin typeface="Arial" pitchFamily="34" charset="0"/>
+                <a:ea typeface="Arial" pitchFamily="34" charset="-122"/>
+                <a:cs typeface="Arial" pitchFamily="34" charset="-120"/>
+              </a:rPr>
+              <a:t>الأرقام رتب حجم مقرّبة، مأخوذة من أحدث البيانات العامة المتاحة.</a:t>
+            </a:r>
+            <a:endParaRPr lang="en-US" sz="1350" dirty="0"/>
+          </a:p>
+          <a:p>
+            <a:pPr algn="r" marL="342900" indent="-342900">
+              <a:lnSpc>
+                <a:spcPct val="122000"/>
+              </a:lnSpc>
+              <a:spcAft>
+                <a:spcPts val="1000"/>
+              </a:spcAft>
+              <a:buSzPct val="100000"/>
+              <a:buChar char="•"/>
+            </a:pPr>
+            <a:r>
+              <a:rPr lang="en-US" sz="1350" dirty="0">
+                <a:solidFill>
+                  <a:srgbClr val="31424A"/>
+                </a:solidFill>
+                <a:latin typeface="Arial" pitchFamily="34" charset="0"/>
+                <a:ea typeface="Arial" pitchFamily="34" charset="-122"/>
+                <a:cs typeface="Arial" pitchFamily="34" charset="-120"/>
+              </a:rPr>
+              <a:t>توفير الماء وزيادة الإنتاج أرقام استرشادية تتغير بحسب التربة والمناخ والمحصول.</a:t>
+            </a:r>
+            <a:endParaRPr lang="en-US" sz="1350" dirty="0"/>
+          </a:p>
+          <a:p>
+            <a:pPr algn="r" marL="342900" indent="-342900">
+              <a:lnSpc>
+                <a:spcPct val="122000"/>
+              </a:lnSpc>
+              <a:spcAft>
+                <a:spcPts val="1000"/>
+              </a:spcAft>
+              <a:buSzPct val="100000"/>
+              <a:buChar char="•"/>
+            </a:pPr>
+            <a:r>
+              <a:rPr lang="en-US" sz="1350" dirty="0">
+                <a:solidFill>
+                  <a:srgbClr val="31424A"/>
+                </a:solidFill>
+                <a:latin typeface="Arial" pitchFamily="34" charset="0"/>
+                <a:ea typeface="Arial" pitchFamily="34" charset="-122"/>
+                <a:cs typeface="Arial" pitchFamily="34" charset="-120"/>
+              </a:rPr>
+              <a:t>وثيقة عمل تجارية: تُحدَّث الأرقام قبل أي تقديم رسمي.</a:t>
+            </a:r>
+            <a:endParaRPr lang="en-US" sz="1350" dirty="0"/>
+          </a:p>
+        </p:txBody>
+      </p:sp>
+      <p:sp>
+        <p:nvSpPr>
+          <p:cNvPr id="8" name="Shape 6"/>
+          <p:cNvSpPr/>
+          <p:nvPr/>
+        </p:nvSpPr>
+        <p:spPr>
+          <a:xfrm>
+            <a:off x="594360" y="4846320"/>
+            <a:ext cx="11002975" cy="960120"/>
+          </a:xfrm>
+          <a:prstGeom prst="roundRect">
+            <a:avLst>
+              <a:gd name="adj" fmla="val 7619"/>
+            </a:avLst>
+          </a:prstGeom>
+          <a:solidFill>
+            <a:srgbClr val="EDF3F5"/>
+          </a:solidFill>
+          <a:ln w="9525">
+            <a:solidFill>
+              <a:srgbClr val="D6E2E7"/>
+            </a:solidFill>
+            <a:prstDash val="solid"/>
+          </a:ln>
+        </p:spPr>
+      </p:sp>
+      <p:sp>
+        <p:nvSpPr>
+          <p:cNvPr id="9" name="Text 7"/>
+          <p:cNvSpPr txBox="1"/>
+          <p:nvPr/>
+        </p:nvSpPr>
+        <p:spPr>
+          <a:xfrm>
+            <a:off x="822960" y="4983480"/>
+            <a:ext cx="10545775" cy="713232"/>
+          </a:xfrm>
+          <a:prstGeom prst="rect">
+            <a:avLst/>
+          </a:prstGeom>
+          <a:noFill/>
+          <a:ln/>
+        </p:spPr>
+        <p:txBody>
+          <a:bodyPr wrap="square" lIns="0" tIns="0" rIns="0" bIns="0" rtlCol="0" anchor="t"/>
+          <a:lstStyle/>
+          <a:p>
+            <a:pPr rtl="1" algn="r" indent="0" marL="0">
+              <a:lnSpc>
+                <a:spcPct val="118000"/>
+              </a:lnSpc>
+              <a:buNone/>
+            </a:pPr>
+            <a:r>
+              <a:rPr lang="en-US" sz="1100" dirty="0">
+                <a:solidFill>
+                  <a:srgbClr val="6C8089"/>
+                </a:solidFill>
+                <a:latin typeface="Arial" pitchFamily="34" charset="0"/>
+                <a:ea typeface="Arial" pitchFamily="34" charset="-122"/>
+                <a:cs typeface="Arial" pitchFamily="34" charset="-120"/>
+              </a:rPr>
+              <a:t>تقارير التجارب والشهادات (SOHISCERT، وتحاليل Polymex وSGS) والنشرات الفنية متاحة عند الطلب.</a:t>
+            </a:r>
+            <a:endParaRPr lang="en-US" sz="1100" dirty="0"/>
+          </a:p>
+        </p:txBody>
+      </p:sp>
+      <p:sp>
+        <p:nvSpPr>
+          <p:cNvPr id="10" name="Text 8"/>
+          <p:cNvSpPr txBox="1"/>
+          <p:nvPr/>
+        </p:nvSpPr>
+        <p:spPr>
+          <a:xfrm>
+            <a:off x="502920" y="6382512"/>
+            <a:ext cx="8229600" cy="274320"/>
+          </a:xfrm>
+          <a:prstGeom prst="rect">
+            <a:avLst/>
+          </a:prstGeom>
+          <a:noFill/>
+          <a:ln/>
+        </p:spPr>
+        <p:txBody>
+          <a:bodyPr wrap="square" lIns="0" tIns="0" rIns="0" bIns="0" rtlCol="0" anchor="ctr"/>
+          <a:lstStyle/>
+          <a:p>
+            <a:pPr rtl="1" algn="r" indent="0" marL="0">
+              <a:buNone/>
+            </a:pPr>
+            <a:r>
+              <a:rPr lang="en-US" sz="950" dirty="0">
+                <a:solidFill>
+                  <a:srgbClr val="6C8089">
+                    <a:alpha val="80000"/>
+                  </a:srgbClr>
+                </a:solidFill>
+                <a:latin typeface="Arial" pitchFamily="34" charset="0"/>
+                <a:ea typeface="Arial" pitchFamily="34" charset="-122"/>
+                <a:cs typeface="Arial" pitchFamily="34" charset="-120"/>
+              </a:rPr>
+              <a:t>Green Solutions · دراسة سوق مصر</a:t>
+            </a:r>
+            <a:endParaRPr lang="en-US" sz="950" dirty="0"/>
+          </a:p>
+        </p:txBody>
+      </p:sp>
+      <p:sp>
+        <p:nvSpPr>
+          <p:cNvPr id="11" name="Text 9"/>
+          <p:cNvSpPr txBox="1"/>
+          <p:nvPr/>
+        </p:nvSpPr>
+        <p:spPr>
+          <a:xfrm>
+            <a:off x="11140135" y="6382512"/>
+            <a:ext cx="548640" cy="274320"/>
+          </a:xfrm>
+          <a:prstGeom prst="rect">
+            <a:avLst/>
+          </a:prstGeom>
+          <a:noFill/>
+          <a:ln/>
+        </p:spPr>
+        <p:txBody>
+          <a:bodyPr wrap="square" lIns="0" tIns="0" rIns="0" bIns="0" rtlCol="0" anchor="ctr"/>
+          <a:lstStyle/>
+          <a:p>
+            <a:pPr rtl="1" algn="r" indent="0" marL="0">
+              <a:buNone/>
+            </a:pPr>
+            <a:r>
+              <a:rPr lang="en-US" sz="950" dirty="0">
+                <a:solidFill>
+                  <a:srgbClr val="6C8089">
+                    <a:alpha val="80000"/>
+                  </a:srgbClr>
+                </a:solidFill>
+                <a:latin typeface="Arial" pitchFamily="34" charset="0"/>
+                <a:ea typeface="Arial" pitchFamily="34" charset="-122"/>
+                <a:cs typeface="Arial" pitchFamily="34" charset="-120"/>
+              </a:rPr>
+              <a:t>16</a:t>
+            </a:r>
+            <a:endParaRPr lang="en-US" sz="950" dirty="0"/>
+          </a:p>
+        </p:txBody>
+      </p:sp>
+    </p:spTree>
+  </p:cSld>
+  <p:clrMapOvr>
+    <a:masterClrMapping/>
+  </p:clrMapOvr>
+</p:sld>
+</file>
+
+<file path=ppt/slides/slide18.xml><?xml version="1.0" encoding="utf-8"?>
+<p:sld xmlns:a="http://schemas.openxmlformats.org/drawingml/2006/main" xmlns:r="http://schemas.openxmlformats.org/officeDocument/2006/relationships" xmlns:p="http://schemas.openxmlformats.org/presentationml/2006/main">
+  <p:cSld name="Slide 18">
     <p:spTree>
       <p:nvGrpSpPr>
         <p:cNvPr id="1" name=""/>
@@ -3944,7 +9643,7 @@
                 <a:ea typeface="Arial" pitchFamily="34" charset="-122"/>
                 <a:cs typeface="Arial" pitchFamily="34" charset="-120"/>
               </a:rPr>
-              <a:t>10</a:t>
+              <a:t>17</a:t>
             </a:r>
             <a:endParaRPr lang="en-US" sz="950" dirty="0"/>
           </a:p>
@@ -4775,7 +10474,7 @@
               <a:buNone/>
             </a:pPr>
             <a:r>
-              <a:rPr lang="en-US" sz="1000" i="1" dirty="0">
+              <a:rPr lang="en-US" sz="1000" dirty="0">
                 <a:solidFill>
                   <a:srgbClr val="6C8089"/>
                 </a:solidFill>
@@ -5423,7 +11122,7 @@
                 <a:ea typeface="Arial" pitchFamily="34" charset="-122"/>
                 <a:cs typeface="Arial" pitchFamily="34" charset="-120"/>
               </a:rPr>
-              <a:t>المحاصيل الرئيسية</a:t>
+              <a:t>الاقتصاد والأمن الغذائي</a:t>
             </a:r>
             <a:endParaRPr lang="en-US" sz="1150" dirty="0"/>
           </a:p>
@@ -5462,42 +11161,26 @@
                 <a:ea typeface="Arial" pitchFamily="34" charset="-122"/>
                 <a:cs typeface="Arial" pitchFamily="34" charset="-120"/>
               </a:rPr>
-              <a:t>خمسة محاصيل تحمل عمود الإنتاج</a:t>
+              <a:t>من أكبر مستوردي القمح، وأول مصدّر للبرتقال</a:t>
             </a:r>
             <a:endParaRPr lang="en-US" sz="3000" dirty="0"/>
           </a:p>
         </p:txBody>
       </p:sp>
-      <p:graphicFrame>
-        <p:nvGraphicFramePr>
-          <p:cNvPr id="4" name="Chart 0" descr=""/>
-          <p:cNvGraphicFramePr/>
-          <p:nvPr/>
-        </p:nvGraphicFramePr>
-        <p:xfrm>
-          <a:off x="594360" y="1783080"/>
-          <a:ext cx="7360920" cy="3977640"/>
-        </p:xfrm>
-        <a:graphic xmlns:a="http://schemas.openxmlformats.org/drawingml/2006/main">
-          <a:graphicData uri="http://schemas.openxmlformats.org/drawingml/2006/chart">
-            <c:chart xmlns:c="http://schemas.openxmlformats.org/drawingml/2006/chart" r:id="rId1"/>
-          </a:graphicData>
-        </a:graphic>
-      </p:graphicFrame>
-      <p:sp>
-        <p:nvSpPr>
-          <p:cNvPr id="5" name="Shape 2"/>
+      <p:sp>
+        <p:nvSpPr>
+          <p:cNvPr id="4" name="Shape 2"/>
           <p:cNvSpPr/>
           <p:nvPr/>
         </p:nvSpPr>
         <p:spPr>
           <a:xfrm>
-            <a:off x="8275320" y="1783080"/>
-            <a:ext cx="3291840" cy="3977640"/>
+            <a:off x="594360" y="1874520"/>
+            <a:ext cx="3484778" cy="2514600"/>
           </a:xfrm>
           <a:prstGeom prst="roundRect">
             <a:avLst>
-              <a:gd name="adj" fmla="val 2778"/>
+              <a:gd name="adj" fmla="val 3636"/>
             </a:avLst>
           </a:prstGeom>
           <a:solidFill>
@@ -5513,14 +11196,14 @@
       </p:sp>
       <p:sp>
         <p:nvSpPr>
-          <p:cNvPr id="6" name="Text 3"/>
-          <p:cNvSpPr txBox="1"/>
-          <p:nvPr/>
-        </p:nvSpPr>
-        <p:spPr>
-          <a:xfrm>
-            <a:off x="8503920" y="2011680"/>
-            <a:ext cx="2834640" cy="457200"/>
+          <p:cNvPr id="5" name="Text 3"/>
+          <p:cNvSpPr txBox="1"/>
+          <p:nvPr/>
+        </p:nvSpPr>
+        <p:spPr>
+          <a:xfrm>
+            <a:off x="777240" y="2148840"/>
+            <a:ext cx="3119018" cy="960120"/>
           </a:xfrm>
           <a:prstGeom prst="rect">
             <a:avLst/>
@@ -5532,11 +11215,11 @@
           <a:bodyPr wrap="square" lIns="0" tIns="0" rIns="0" bIns="0" rtlCol="0" anchor="ctr"/>
           <a:lstStyle/>
           <a:p>
-            <a:pPr rtl="1" algn="r" indent="0" marL="0">
-              <a:buNone/>
-            </a:pPr>
-            <a:r>
-              <a:rPr lang="en-US" sz="1300" b="1" dirty="0">
+            <a:pPr rtl="1" algn="ctr" indent="0" marL="0">
+              <a:buNone/>
+            </a:pPr>
+            <a:r>
+              <a:rPr lang="en-US" sz="3000" b="1" dirty="0">
                 <a:solidFill>
                   <a:srgbClr val="1C5A73"/>
                 </a:solidFill>
@@ -5544,22 +11227,280 @@
                 <a:ea typeface="Arial" pitchFamily="34" charset="-122"/>
                 <a:cs typeface="Arial" pitchFamily="34" charset="-120"/>
               </a:rPr>
-              <a:t>قراءة الرسم</a:t>
-            </a:r>
-            <a:endParaRPr lang="en-US" sz="1300" dirty="0"/>
-          </a:p>
-        </p:txBody>
-      </p:sp>
-      <p:sp>
-        <p:nvSpPr>
-          <p:cNvPr id="7" name="Text 4"/>
-          <p:cNvSpPr txBox="1"/>
-          <p:nvPr/>
-        </p:nvSpPr>
-        <p:spPr>
-          <a:xfrm>
-            <a:off x="8503920" y="2560320"/>
-            <a:ext cx="2834640" cy="3017520"/>
+              <a:t>≈ 12 مليون</a:t>
+            </a:r>
+            <a:endParaRPr lang="en-US" sz="3000" dirty="0"/>
+          </a:p>
+        </p:txBody>
+      </p:sp>
+      <p:sp>
+        <p:nvSpPr>
+          <p:cNvPr id="6" name="Text 4"/>
+          <p:cNvSpPr txBox="1"/>
+          <p:nvPr/>
+        </p:nvSpPr>
+        <p:spPr>
+          <a:xfrm>
+            <a:off x="795528" y="3154680"/>
+            <a:ext cx="3082442" cy="1051560"/>
+          </a:xfrm>
+          <a:prstGeom prst="rect">
+            <a:avLst/>
+          </a:prstGeom>
+          <a:noFill/>
+          <a:ln/>
+        </p:spPr>
+        <p:txBody>
+          <a:bodyPr wrap="square" lIns="0" tIns="0" rIns="0" bIns="0" rtlCol="0" anchor="t"/>
+          <a:lstStyle/>
+          <a:p>
+            <a:pPr rtl="1" algn="ctr" indent="0" marL="0">
+              <a:lnSpc>
+                <a:spcPct val="118000"/>
+              </a:lnSpc>
+              <a:buNone/>
+            </a:pPr>
+            <a:r>
+              <a:rPr lang="en-US" sz="1250" dirty="0">
+                <a:solidFill>
+                  <a:srgbClr val="31424A"/>
+                </a:solidFill>
+                <a:latin typeface="Arial" pitchFamily="34" charset="0"/>
+                <a:ea typeface="Arial" pitchFamily="34" charset="-122"/>
+                <a:cs typeface="Arial" pitchFamily="34" charset="-120"/>
+              </a:rPr>
+              <a:t>طن من القمح مستوردة سنوياً، من الأعلى عالمياً</a:t>
+            </a:r>
+            <a:endParaRPr lang="en-US" sz="1250" dirty="0"/>
+          </a:p>
+        </p:txBody>
+      </p:sp>
+      <p:sp>
+        <p:nvSpPr>
+          <p:cNvPr id="7" name="Shape 5"/>
+          <p:cNvSpPr/>
+          <p:nvPr/>
+        </p:nvSpPr>
+        <p:spPr>
+          <a:xfrm>
+            <a:off x="4353458" y="1874520"/>
+            <a:ext cx="3484778" cy="2514600"/>
+          </a:xfrm>
+          <a:prstGeom prst="roundRect">
+            <a:avLst>
+              <a:gd name="adj" fmla="val 3636"/>
+            </a:avLst>
+          </a:prstGeom>
+          <a:solidFill>
+            <a:srgbClr val="EDF3F5"/>
+          </a:solidFill>
+          <a:ln w="9525">
+            <a:solidFill>
+              <a:srgbClr val="D6E2E7"/>
+            </a:solidFill>
+            <a:prstDash val="solid"/>
+          </a:ln>
+        </p:spPr>
+      </p:sp>
+      <p:sp>
+        <p:nvSpPr>
+          <p:cNvPr id="8" name="Text 6"/>
+          <p:cNvSpPr txBox="1"/>
+          <p:nvPr/>
+        </p:nvSpPr>
+        <p:spPr>
+          <a:xfrm>
+            <a:off x="4536338" y="2148840"/>
+            <a:ext cx="3119018" cy="960120"/>
+          </a:xfrm>
+          <a:prstGeom prst="rect">
+            <a:avLst/>
+          </a:prstGeom>
+          <a:noFill/>
+          <a:ln/>
+        </p:spPr>
+        <p:txBody>
+          <a:bodyPr wrap="square" lIns="0" tIns="0" rIns="0" bIns="0" rtlCol="0" anchor="ctr"/>
+          <a:lstStyle/>
+          <a:p>
+            <a:pPr rtl="1" algn="ctr" indent="0" marL="0">
+              <a:buNone/>
+            </a:pPr>
+            <a:r>
+              <a:rPr lang="en-US" sz="3800" b="1" dirty="0">
+                <a:solidFill>
+                  <a:srgbClr val="1C5A73"/>
+                </a:solidFill>
+                <a:latin typeface="Arial" pitchFamily="34" charset="0"/>
+                <a:ea typeface="Arial" pitchFamily="34" charset="-122"/>
+                <a:cs typeface="Arial" pitchFamily="34" charset="-120"/>
+              </a:rPr>
+              <a:t>الأول</a:t>
+            </a:r>
+            <a:endParaRPr lang="en-US" sz="3800" dirty="0"/>
+          </a:p>
+        </p:txBody>
+      </p:sp>
+      <p:sp>
+        <p:nvSpPr>
+          <p:cNvPr id="9" name="Text 7"/>
+          <p:cNvSpPr txBox="1"/>
+          <p:nvPr/>
+        </p:nvSpPr>
+        <p:spPr>
+          <a:xfrm>
+            <a:off x="4554626" y="3154680"/>
+            <a:ext cx="3082442" cy="1051560"/>
+          </a:xfrm>
+          <a:prstGeom prst="rect">
+            <a:avLst/>
+          </a:prstGeom>
+          <a:noFill/>
+          <a:ln/>
+        </p:spPr>
+        <p:txBody>
+          <a:bodyPr wrap="square" lIns="0" tIns="0" rIns="0" bIns="0" rtlCol="0" anchor="t"/>
+          <a:lstStyle/>
+          <a:p>
+            <a:pPr rtl="1" algn="ctr" indent="0" marL="0">
+              <a:lnSpc>
+                <a:spcPct val="118000"/>
+              </a:lnSpc>
+              <a:buNone/>
+            </a:pPr>
+            <a:r>
+              <a:rPr lang="en-US" sz="1250" dirty="0">
+                <a:solidFill>
+                  <a:srgbClr val="31424A"/>
+                </a:solidFill>
+                <a:latin typeface="Arial" pitchFamily="34" charset="0"/>
+                <a:ea typeface="Arial" pitchFamily="34" charset="-122"/>
+                <a:cs typeface="Arial" pitchFamily="34" charset="-120"/>
+              </a:rPr>
+              <a:t>عالمياً في تصدير البرتقال</a:t>
+            </a:r>
+            <a:endParaRPr lang="en-US" sz="1250" dirty="0"/>
+          </a:p>
+        </p:txBody>
+      </p:sp>
+      <p:sp>
+        <p:nvSpPr>
+          <p:cNvPr id="10" name="Shape 8"/>
+          <p:cNvSpPr/>
+          <p:nvPr/>
+        </p:nvSpPr>
+        <p:spPr>
+          <a:xfrm>
+            <a:off x="8112557" y="1874520"/>
+            <a:ext cx="3484778" cy="2514600"/>
+          </a:xfrm>
+          <a:prstGeom prst="roundRect">
+            <a:avLst>
+              <a:gd name="adj" fmla="val 3636"/>
+            </a:avLst>
+          </a:prstGeom>
+          <a:solidFill>
+            <a:srgbClr val="EDF3F5"/>
+          </a:solidFill>
+          <a:ln w="9525">
+            <a:solidFill>
+              <a:srgbClr val="D6E2E7"/>
+            </a:solidFill>
+            <a:prstDash val="solid"/>
+          </a:ln>
+        </p:spPr>
+      </p:sp>
+      <p:sp>
+        <p:nvSpPr>
+          <p:cNvPr id="11" name="Text 9"/>
+          <p:cNvSpPr txBox="1"/>
+          <p:nvPr/>
+        </p:nvSpPr>
+        <p:spPr>
+          <a:xfrm>
+            <a:off x="8295437" y="2148840"/>
+            <a:ext cx="3119018" cy="960120"/>
+          </a:xfrm>
+          <a:prstGeom prst="rect">
+            <a:avLst/>
+          </a:prstGeom>
+          <a:noFill/>
+          <a:ln/>
+        </p:spPr>
+        <p:txBody>
+          <a:bodyPr wrap="square" lIns="0" tIns="0" rIns="0" bIns="0" rtlCol="0" anchor="ctr"/>
+          <a:lstStyle/>
+          <a:p>
+            <a:pPr rtl="1" algn="ctr" indent="0" marL="0">
+              <a:buNone/>
+            </a:pPr>
+            <a:r>
+              <a:rPr lang="en-US" sz="3000" b="1" dirty="0">
+                <a:solidFill>
+                  <a:srgbClr val="1C5A73"/>
+                </a:solidFill>
+                <a:latin typeface="Arial" pitchFamily="34" charset="0"/>
+                <a:ea typeface="Arial" pitchFamily="34" charset="-122"/>
+                <a:cs typeface="Arial" pitchFamily="34" charset="-120"/>
+              </a:rPr>
+              <a:t>≈ 107 مليون</a:t>
+            </a:r>
+            <a:endParaRPr lang="en-US" sz="3000" dirty="0"/>
+          </a:p>
+        </p:txBody>
+      </p:sp>
+      <p:sp>
+        <p:nvSpPr>
+          <p:cNvPr id="12" name="Text 10"/>
+          <p:cNvSpPr txBox="1"/>
+          <p:nvPr/>
+        </p:nvSpPr>
+        <p:spPr>
+          <a:xfrm>
+            <a:off x="8313725" y="3154680"/>
+            <a:ext cx="3082442" cy="1051560"/>
+          </a:xfrm>
+          <a:prstGeom prst="rect">
+            <a:avLst/>
+          </a:prstGeom>
+          <a:noFill/>
+          <a:ln/>
+        </p:spPr>
+        <p:txBody>
+          <a:bodyPr wrap="square" lIns="0" tIns="0" rIns="0" bIns="0" rtlCol="0" anchor="t"/>
+          <a:lstStyle/>
+          <a:p>
+            <a:pPr rtl="1" algn="ctr" indent="0" marL="0">
+              <a:lnSpc>
+                <a:spcPct val="118000"/>
+              </a:lnSpc>
+              <a:buNone/>
+            </a:pPr>
+            <a:r>
+              <a:rPr lang="en-US" sz="1250" dirty="0">
+                <a:solidFill>
+                  <a:srgbClr val="31424A"/>
+                </a:solidFill>
+                <a:latin typeface="Arial" pitchFamily="34" charset="0"/>
+                <a:ea typeface="Arial" pitchFamily="34" charset="-122"/>
+                <a:cs typeface="Arial" pitchFamily="34" charset="-120"/>
+              </a:rPr>
+              <a:t>نسمة يعيشون على نحو 5 % من مساحة البلاد</a:t>
+            </a:r>
+            <a:endParaRPr lang="en-US" sz="1250" dirty="0"/>
+          </a:p>
+        </p:txBody>
+      </p:sp>
+      <p:sp>
+        <p:nvSpPr>
+          <p:cNvPr id="13" name="Text 11"/>
+          <p:cNvSpPr txBox="1"/>
+          <p:nvPr/>
+        </p:nvSpPr>
+        <p:spPr>
+          <a:xfrm>
+            <a:off x="594360" y="4709160"/>
+            <a:ext cx="11002975" cy="1097280"/>
           </a:xfrm>
           <a:prstGeom prst="rect">
             <a:avLst/>
@@ -5573,12 +11514,12 @@
           <a:p>
             <a:pPr rtl="1" algn="r" indent="0" marL="0">
               <a:lnSpc>
-                <a:spcPct val="125000"/>
+                <a:spcPct val="130000"/>
               </a:lnSpc>
               <a:buNone/>
             </a:pPr>
             <a:r>
-              <a:rPr lang="en-US" sz="1200" dirty="0">
+              <a:rPr lang="en-US" sz="1350" dirty="0">
                 <a:solidFill>
                   <a:srgbClr val="31424A"/>
                 </a:solidFill>
@@ -5586,44 +11527,15 @@
                 <a:ea typeface="Arial" pitchFamily="34" charset="-122"/>
                 <a:cs typeface="Arial" pitchFamily="34" charset="-120"/>
               </a:rPr>
-              <a:t>قصب السكر أعلى المحاصيل استهلاكًا للماء لكل هكتار، وهو مركّز في الصعيد.</a:t>
-            </a:r>
-            <a:endParaRPr lang="en-US" sz="1200" dirty="0"/>
-          </a:p>
-          <a:p>
-            <a:pPr rtl="1" algn="r" indent="0" marL="0">
-              <a:lnSpc>
-                <a:spcPct val="125000"/>
-              </a:lnSpc>
-              <a:buNone/>
-            </a:pPr>
-            <a:endParaRPr lang="en-US" sz="1200" dirty="0"/>
-          </a:p>
-          <a:p>
-            <a:pPr rtl="1" algn="r" indent="0" marL="0">
-              <a:lnSpc>
-                <a:spcPct val="125000"/>
-              </a:lnSpc>
-              <a:buNone/>
-            </a:pPr>
-            <a:r>
-              <a:rPr lang="en-US" sz="1200" dirty="0">
-                <a:solidFill>
-                  <a:srgbClr val="31424A"/>
-                </a:solidFill>
-                <a:latin typeface="Arial" pitchFamily="34" charset="0"/>
-                <a:ea typeface="Arial" pitchFamily="34" charset="-122"/>
-                <a:cs typeface="Arial" pitchFamily="34" charset="-120"/>
-              </a:rPr>
-              <a:t>الموالح والطماطم هما محصولا التصدير: أكثر من 1,5 مليون طن من البرتقال تُشحن سنويًا. هنا يتحوّل توفير الماء مباشرة إلى هامش ربح.</a:t>
-            </a:r>
-            <a:endParaRPr lang="en-US" sz="1200" dirty="0"/>
-          </a:p>
-        </p:txBody>
-      </p:sp>
-      <p:sp>
-        <p:nvSpPr>
-          <p:cNvPr id="8" name="Text 5"/>
+              <a:t>يستهلك الخبز المدعوم جزءاً كبيراً من القمح المستورد، ما يربط فاتورة الغذاء مباشرة بسعر الصرف. في المقابل تتوسع صادرات الموالح والبطاطس والعنب والفراولة، ومعظمها يأتي من الأراضي الجديدة المستصلحة المروية بالتنقيط.</a:t>
+            </a:r>
+            <a:endParaRPr lang="en-US" sz="1350" dirty="0"/>
+          </a:p>
+        </p:txBody>
+      </p:sp>
+      <p:sp>
+        <p:nvSpPr>
+          <p:cNvPr id="14" name="Text 12"/>
           <p:cNvSpPr txBox="1"/>
           <p:nvPr/>
         </p:nvSpPr>
@@ -5664,7 +11576,7 @@
       </p:sp>
       <p:sp>
         <p:nvSpPr>
-          <p:cNvPr id="9" name="Text 6"/>
+          <p:cNvPr id="15" name="Text 13"/>
           <p:cNvSpPr txBox="1"/>
           <p:nvPr/>
         </p:nvSpPr>
@@ -5768,7 +11680,7 @@
                 <a:ea typeface="Arial" pitchFamily="34" charset="-122"/>
                 <a:cs typeface="Arial" pitchFamily="34" charset="-120"/>
               </a:rPr>
-              <a:t>ما نقترحه</a:t>
+              <a:t>المحاصيل الرئيسية</a:t>
             </a:r>
             <a:endParaRPr lang="en-US" sz="1150" dirty="0"/>
           </a:p>
@@ -5807,340 +11719,42 @@
                 <a:ea typeface="Arial" pitchFamily="34" charset="-122"/>
                 <a:cs typeface="Arial" pitchFamily="34" charset="-120"/>
               </a:rPr>
-              <a:t>تقنيتان لقيدين مختلفين</a:t>
+              <a:t>خمسة محاصيل تحمل عمود الإنتاج</a:t>
             </a:r>
             <a:endParaRPr lang="en-US" sz="3000" dirty="0"/>
           </a:p>
         </p:txBody>
       </p:sp>
-      <p:sp>
-        <p:nvSpPr>
-          <p:cNvPr id="4" name="Text 2"/>
-          <p:cNvSpPr txBox="1"/>
-          <p:nvPr/>
-        </p:nvSpPr>
-        <p:spPr>
-          <a:xfrm>
-            <a:off x="594360" y="1783080"/>
-            <a:ext cx="5227168" cy="411480"/>
-          </a:xfrm>
-          <a:prstGeom prst="rect">
-            <a:avLst/>
-          </a:prstGeom>
-          <a:noFill/>
-          <a:ln/>
-        </p:spPr>
-        <p:txBody>
-          <a:bodyPr wrap="square" lIns="0" tIns="0" rIns="0" bIns="0" rtlCol="0" anchor="ctr"/>
-          <a:lstStyle/>
-          <a:p>
-            <a:pPr rtl="1" algn="r" indent="0" marL="0">
-              <a:buNone/>
-            </a:pPr>
-            <a:r>
-              <a:rPr lang="en-US" sz="1600" b="1" dirty="0">
-                <a:solidFill>
-                  <a:srgbClr val="1C5A73"/>
-                </a:solidFill>
-                <a:latin typeface="Arial" pitchFamily="34" charset="0"/>
-                <a:ea typeface="Arial" pitchFamily="34" charset="-122"/>
-                <a:cs typeface="Arial" pitchFamily="34" charset="-120"/>
-              </a:rPr>
-              <a:t>EVERGREEN® — الاحتفاظ بالماء</a:t>
-            </a:r>
-            <a:endParaRPr lang="en-US" sz="1600" dirty="0"/>
-          </a:p>
-        </p:txBody>
-      </p:sp>
-      <p:sp>
-        <p:nvSpPr>
-          <p:cNvPr id="5" name="Text 3"/>
-          <p:cNvSpPr txBox="1"/>
-          <p:nvPr/>
-        </p:nvSpPr>
-        <p:spPr>
-          <a:xfrm>
-            <a:off x="594360" y="2286000"/>
-            <a:ext cx="5227168" cy="2468880"/>
-          </a:xfrm>
-          <a:prstGeom prst="rect">
-            <a:avLst/>
-          </a:prstGeom>
-          <a:noFill/>
-          <a:ln/>
-        </p:spPr>
-        <p:txBody>
-          <a:bodyPr wrap="square" lIns="0" tIns="0" rIns="0" bIns="0" rtlCol="0" anchor="t"/>
-          <a:lstStyle/>
-          <a:p>
-            <a:pPr algn="r" marL="342900" indent="-342900">
-              <a:lnSpc>
-                <a:spcPct val="122000"/>
-              </a:lnSpc>
-              <a:spcAft>
-                <a:spcPts val="1000"/>
-              </a:spcAft>
-              <a:buSzPct val="100000"/>
-              <a:buChar char="•"/>
-            </a:pPr>
-            <a:r>
-              <a:rPr lang="en-US" sz="1350" dirty="0">
-                <a:solidFill>
-                  <a:srgbClr val="31424A"/>
-                </a:solidFill>
-                <a:latin typeface="Arial" pitchFamily="34" charset="0"/>
-                <a:ea typeface="Arial" pitchFamily="34" charset="-122"/>
-                <a:cs typeface="Arial" pitchFamily="34" charset="-120"/>
-              </a:rPr>
-              <a:t>مادة حابسة للماء أساسها البوتاسيوم، تُوضع في منطقة الجذور عند الزراعة أو عند تجديد الغرس.</a:t>
-            </a:r>
-            <a:endParaRPr lang="en-US" sz="1350" dirty="0"/>
-          </a:p>
-          <a:p>
-            <a:pPr algn="r" marL="342900" indent="-342900">
-              <a:lnSpc>
-                <a:spcPct val="122000"/>
-              </a:lnSpc>
-              <a:spcAft>
-                <a:spcPts val="1000"/>
-              </a:spcAft>
-              <a:buSzPct val="100000"/>
-              <a:buChar char="•"/>
-            </a:pPr>
-            <a:r>
-              <a:rPr lang="en-US" sz="1350" dirty="0">
-                <a:solidFill>
-                  <a:srgbClr val="31424A"/>
-                </a:solidFill>
-                <a:latin typeface="Arial" pitchFamily="34" charset="0"/>
-                <a:ea typeface="Arial" pitchFamily="34" charset="-122"/>
-                <a:cs typeface="Arial" pitchFamily="34" charset="-120"/>
-              </a:rPr>
-              <a:t>تلتقط ماء الري وتعيده إلى النبات تدريجيًا، فتلغي الإجهاد المائي في المراحل الحرجة بين ريّتين.</a:t>
-            </a:r>
-            <a:endParaRPr lang="en-US" sz="1350" dirty="0"/>
-          </a:p>
-          <a:p>
-            <a:pPr algn="r" marL="342900" indent="-342900">
-              <a:lnSpc>
-                <a:spcPct val="122000"/>
-              </a:lnSpc>
-              <a:spcAft>
-                <a:spcPts val="1000"/>
-              </a:spcAft>
-              <a:buSzPct val="100000"/>
-              <a:buChar char="•"/>
-            </a:pPr>
-            <a:r>
-              <a:rPr lang="en-US" sz="1350" dirty="0">
-                <a:solidFill>
-                  <a:srgbClr val="31424A"/>
-                </a:solidFill>
-                <a:latin typeface="Arial" pitchFamily="34" charset="0"/>
-                <a:ea typeface="Arial" pitchFamily="34" charset="-122"/>
-                <a:cs typeface="Arial" pitchFamily="34" charset="-120"/>
-              </a:rPr>
-              <a:t>قدرة امتصاص تبلغ نحو 300 ضعف وزنها، ومفعول مفيد يمتد من 3 إلى 4 سنوات في التربة.</a:t>
-            </a:r>
-            <a:endParaRPr lang="en-US" sz="1350" dirty="0"/>
-          </a:p>
-          <a:p>
-            <a:pPr algn="r" marL="342900" indent="-342900">
-              <a:lnSpc>
-                <a:spcPct val="122000"/>
-              </a:lnSpc>
-              <a:spcAft>
-                <a:spcPts val="1000"/>
-              </a:spcAft>
-              <a:buSzPct val="100000"/>
-              <a:buChar char="•"/>
-            </a:pPr>
-            <a:r>
-              <a:rPr lang="en-US" sz="1350" dirty="0">
-                <a:solidFill>
-                  <a:srgbClr val="31424A"/>
-                </a:solidFill>
-                <a:latin typeface="Arial" pitchFamily="34" charset="0"/>
-                <a:ea typeface="Arial" pitchFamily="34" charset="-122"/>
-                <a:cs typeface="Arial" pitchFamily="34" charset="-120"/>
-              </a:rPr>
-              <a:t>تتحلل بنسبة 20 إلى 25 % سنويًا، دون تراكم في التربة ودون خطر جرعة زائدة.</a:t>
-            </a:r>
-            <a:endParaRPr lang="en-US" sz="1350" dirty="0"/>
-          </a:p>
-        </p:txBody>
-      </p:sp>
-      <p:sp>
-        <p:nvSpPr>
-          <p:cNvPr id="6" name="Text 4"/>
-          <p:cNvSpPr txBox="1"/>
-          <p:nvPr/>
-        </p:nvSpPr>
-        <p:spPr>
-          <a:xfrm>
-            <a:off x="6370168" y="1783080"/>
-            <a:ext cx="5227168" cy="411480"/>
-          </a:xfrm>
-          <a:prstGeom prst="rect">
-            <a:avLst/>
-          </a:prstGeom>
-          <a:noFill/>
-          <a:ln/>
-        </p:spPr>
-        <p:txBody>
-          <a:bodyPr wrap="square" lIns="0" tIns="0" rIns="0" bIns="0" rtlCol="0" anchor="ctr"/>
-          <a:lstStyle/>
-          <a:p>
-            <a:pPr rtl="1" algn="r" indent="0" marL="0">
-              <a:buNone/>
-            </a:pPr>
-            <a:r>
-              <a:rPr lang="en-US" sz="1600" b="1" dirty="0">
-                <a:solidFill>
-                  <a:srgbClr val="1C5A73"/>
-                </a:solidFill>
-                <a:latin typeface="Arial" pitchFamily="34" charset="0"/>
-                <a:ea typeface="Arial" pitchFamily="34" charset="-122"/>
-                <a:cs typeface="Arial" pitchFamily="34" charset="-120"/>
-              </a:rPr>
-              <a:t>ECOFERT® — التغذية دون إنهاك التربة</a:t>
-            </a:r>
-            <a:endParaRPr lang="en-US" sz="1600" dirty="0"/>
-          </a:p>
-        </p:txBody>
-      </p:sp>
-      <p:sp>
-        <p:nvSpPr>
-          <p:cNvPr id="7" name="Text 5"/>
-          <p:cNvSpPr txBox="1"/>
-          <p:nvPr/>
-        </p:nvSpPr>
-        <p:spPr>
-          <a:xfrm>
-            <a:off x="6370168" y="2286000"/>
-            <a:ext cx="5227168" cy="2468880"/>
-          </a:xfrm>
-          <a:prstGeom prst="rect">
-            <a:avLst/>
-          </a:prstGeom>
-          <a:noFill/>
-          <a:ln/>
-        </p:spPr>
-        <p:txBody>
-          <a:bodyPr wrap="square" lIns="0" tIns="0" rIns="0" bIns="0" rtlCol="0" anchor="t"/>
-          <a:lstStyle/>
-          <a:p>
-            <a:pPr algn="r" marL="342900" indent="-342900">
-              <a:lnSpc>
-                <a:spcPct val="122000"/>
-              </a:lnSpc>
-              <a:spcAft>
-                <a:spcPts val="1000"/>
-              </a:spcAft>
-              <a:buSzPct val="100000"/>
-              <a:buChar char="•"/>
-            </a:pPr>
-            <a:r>
-              <a:rPr lang="en-US" sz="1350" dirty="0">
-                <a:solidFill>
-                  <a:srgbClr val="31424A"/>
-                </a:solidFill>
-                <a:latin typeface="Arial" pitchFamily="34" charset="0"/>
-                <a:ea typeface="Arial" pitchFamily="34" charset="-122"/>
-                <a:cs typeface="Arial" pitchFamily="34" charset="-120"/>
-              </a:rPr>
-              <a:t>سماد بجرعات دقيقة من الأحماض الأمينية والنيتروجين والفوسفور والبوتاسيوم، من موارد متجددة.</a:t>
-            </a:r>
-            <a:endParaRPr lang="en-US" sz="1350" dirty="0"/>
-          </a:p>
-          <a:p>
-            <a:pPr algn="r" marL="342900" indent="-342900">
-              <a:lnSpc>
-                <a:spcPct val="122000"/>
-              </a:lnSpc>
-              <a:spcAft>
-                <a:spcPts val="1000"/>
-              </a:spcAft>
-              <a:buSzPct val="100000"/>
-              <a:buChar char="•"/>
-            </a:pPr>
-            <a:r>
-              <a:rPr lang="en-US" sz="1350" dirty="0">
-                <a:solidFill>
-                  <a:srgbClr val="31424A"/>
-                </a:solidFill>
-                <a:latin typeface="Arial" pitchFamily="34" charset="0"/>
-                <a:ea typeface="Arial" pitchFamily="34" charset="-122"/>
-                <a:cs typeface="Arial" pitchFamily="34" charset="-120"/>
-              </a:rPr>
-              <a:t>غير مخلّب: لا يستنزف المركّب الطيني الدبالي ولا يرفع الملوحة ولا نسبة النترات — نقطة حاسمة في شمال الدلتا.</a:t>
-            </a:r>
-            <a:endParaRPr lang="en-US" sz="1350" dirty="0"/>
-          </a:p>
-          <a:p>
-            <a:pPr algn="r" marL="342900" indent="-342900">
-              <a:lnSpc>
-                <a:spcPct val="122000"/>
-              </a:lnSpc>
-              <a:spcAft>
-                <a:spcPts val="1000"/>
-              </a:spcAft>
-              <a:buSzPct val="100000"/>
-              <a:buChar char="•"/>
-            </a:pPr>
-            <a:r>
-              <a:rPr lang="en-US" sz="1350" dirty="0">
-                <a:solidFill>
-                  <a:srgbClr val="31424A"/>
-                </a:solidFill>
-                <a:latin typeface="Arial" pitchFamily="34" charset="0"/>
-                <a:ea typeface="Arial" pitchFamily="34" charset="-122"/>
-                <a:cs typeface="Arial" pitchFamily="34" charset="-120"/>
-              </a:rPr>
-              <a:t>حاصل على شهادتي SOHISCERT والعضوية الأوروبية، وهو شرط دخول دفاتر شروط المشترين الأوروبيين.</a:t>
-            </a:r>
-            <a:endParaRPr lang="en-US" sz="1350" dirty="0"/>
-          </a:p>
-          <a:p>
-            <a:pPr algn="r" marL="342900" indent="-342900">
-              <a:lnSpc>
-                <a:spcPct val="122000"/>
-              </a:lnSpc>
-              <a:spcAft>
-                <a:spcPts val="1000"/>
-              </a:spcAft>
-              <a:buSzPct val="100000"/>
-              <a:buChar char="•"/>
-            </a:pPr>
-            <a:r>
-              <a:rPr lang="en-US" sz="1350" dirty="0">
-                <a:solidFill>
-                  <a:srgbClr val="31424A"/>
-                </a:solidFill>
-                <a:latin typeface="Arial" pitchFamily="34" charset="0"/>
-                <a:ea typeface="Arial" pitchFamily="34" charset="-122"/>
-                <a:cs typeface="Arial" pitchFamily="34" charset="-120"/>
-              </a:rPr>
-              <a:t>من 1 إلى 4 عبوات سعة 140 مل للهكتار، متوافق مع معدات التسميد بالري القائمة.</a:t>
-            </a:r>
-            <a:endParaRPr lang="en-US" sz="1350" dirty="0"/>
-          </a:p>
-        </p:txBody>
-      </p:sp>
-      <p:sp>
-        <p:nvSpPr>
-          <p:cNvPr id="8" name="Shape 6"/>
+      <p:graphicFrame>
+        <p:nvGraphicFramePr>
+          <p:cNvPr id="4" name="Chart 0" descr=""/>
+          <p:cNvGraphicFramePr/>
+          <p:nvPr/>
+        </p:nvGraphicFramePr>
+        <p:xfrm>
+          <a:off x="594360" y="1783080"/>
+          <a:ext cx="7360920" cy="3977640"/>
+        </p:xfrm>
+        <a:graphic xmlns:a="http://schemas.openxmlformats.org/drawingml/2006/main">
+          <a:graphicData uri="http://schemas.openxmlformats.org/drawingml/2006/chart">
+            <c:chart xmlns:c="http://schemas.openxmlformats.org/drawingml/2006/chart" r:id="rId1"/>
+          </a:graphicData>
+        </a:graphic>
+      </p:graphicFrame>
+      <p:sp>
+        <p:nvSpPr>
+          <p:cNvPr id="5" name="Shape 2"/>
           <p:cNvSpPr/>
           <p:nvPr/>
         </p:nvSpPr>
         <p:spPr>
           <a:xfrm>
-            <a:off x="594360" y="4846320"/>
-            <a:ext cx="11002975" cy="960120"/>
+            <a:off x="8275320" y="1783080"/>
+            <a:ext cx="3291840" cy="3977640"/>
           </a:xfrm>
           <a:prstGeom prst="roundRect">
             <a:avLst>
-              <a:gd name="adj" fmla="val 7619"/>
+              <a:gd name="adj" fmla="val 2778"/>
             </a:avLst>
           </a:prstGeom>
           <a:solidFill>
@@ -6156,14 +11770,53 @@
       </p:sp>
       <p:sp>
         <p:nvSpPr>
-          <p:cNvPr id="9" name="Text 7"/>
-          <p:cNvSpPr txBox="1"/>
-          <p:nvPr/>
-        </p:nvSpPr>
-        <p:spPr>
-          <a:xfrm>
-            <a:off x="822960" y="4983480"/>
-            <a:ext cx="10545775" cy="713232"/>
+          <p:cNvPr id="6" name="Text 3"/>
+          <p:cNvSpPr txBox="1"/>
+          <p:nvPr/>
+        </p:nvSpPr>
+        <p:spPr>
+          <a:xfrm>
+            <a:off x="8503920" y="2011680"/>
+            <a:ext cx="2834640" cy="457200"/>
+          </a:xfrm>
+          <a:prstGeom prst="rect">
+            <a:avLst/>
+          </a:prstGeom>
+          <a:noFill/>
+          <a:ln/>
+        </p:spPr>
+        <p:txBody>
+          <a:bodyPr wrap="square" lIns="0" tIns="0" rIns="0" bIns="0" rtlCol="0" anchor="ctr"/>
+          <a:lstStyle/>
+          <a:p>
+            <a:pPr rtl="1" algn="r" indent="0" marL="0">
+              <a:buNone/>
+            </a:pPr>
+            <a:r>
+              <a:rPr lang="en-US" sz="1300" b="1" dirty="0">
+                <a:solidFill>
+                  <a:srgbClr val="1C5A73"/>
+                </a:solidFill>
+                <a:latin typeface="Arial" pitchFamily="34" charset="0"/>
+                <a:ea typeface="Arial" pitchFamily="34" charset="-122"/>
+                <a:cs typeface="Arial" pitchFamily="34" charset="-120"/>
+              </a:rPr>
+              <a:t>قراءة الرسم</a:t>
+            </a:r>
+            <a:endParaRPr lang="en-US" sz="1300" dirty="0"/>
+          </a:p>
+        </p:txBody>
+      </p:sp>
+      <p:sp>
+        <p:nvSpPr>
+          <p:cNvPr id="7" name="Text 4"/>
+          <p:cNvSpPr txBox="1"/>
+          <p:nvPr/>
+        </p:nvSpPr>
+        <p:spPr>
+          <a:xfrm>
+            <a:off x="8503920" y="2560320"/>
+            <a:ext cx="2834640" cy="3017520"/>
           </a:xfrm>
           <a:prstGeom prst="rect">
             <a:avLst/>
@@ -6177,28 +11830,57 @@
           <a:p>
             <a:pPr rtl="1" algn="r" indent="0" marL="0">
               <a:lnSpc>
-                <a:spcPct val="118000"/>
+                <a:spcPct val="125000"/>
               </a:lnSpc>
               <a:buNone/>
             </a:pPr>
             <a:r>
-              <a:rPr lang="en-US" sz="1100" dirty="0">
-                <a:solidFill>
-                  <a:srgbClr val="6C8089"/>
-                </a:solidFill>
-                <a:latin typeface="Arial" pitchFamily="34" charset="0"/>
-                <a:ea typeface="Arial" pitchFamily="34" charset="-122"/>
-                <a:cs typeface="Arial" pitchFamily="34" charset="-120"/>
-              </a:rPr>
-              <a:t>المنتجان يُباعان منفصلين لكنهما صُمّما ليعزّز كل منهما الآخر: المادة الحابسة تطيل بقاء الماء متاحًا، والسماد يثمّر هذا الماء المتاح دون إضعاف التربة.</a:t>
-            </a:r>
-            <a:endParaRPr lang="en-US" sz="1100" dirty="0"/>
-          </a:p>
-        </p:txBody>
-      </p:sp>
-      <p:sp>
-        <p:nvSpPr>
-          <p:cNvPr id="10" name="Text 8"/>
+              <a:rPr lang="en-US" sz="1200" dirty="0">
+                <a:solidFill>
+                  <a:srgbClr val="31424A"/>
+                </a:solidFill>
+                <a:latin typeface="Arial" pitchFamily="34" charset="0"/>
+                <a:ea typeface="Arial" pitchFamily="34" charset="-122"/>
+                <a:cs typeface="Arial" pitchFamily="34" charset="-120"/>
+              </a:rPr>
+              <a:t>قصب السكر أعلى المحاصيل استهلاكًا للماء لكل هكتار، وهو مركّز في الصعيد.</a:t>
+            </a:r>
+            <a:endParaRPr lang="en-US" sz="1200" dirty="0"/>
+          </a:p>
+          <a:p>
+            <a:pPr rtl="1" algn="r" indent="0" marL="0">
+              <a:lnSpc>
+                <a:spcPct val="125000"/>
+              </a:lnSpc>
+              <a:buNone/>
+            </a:pPr>
+            <a:endParaRPr lang="en-US" sz="1200" dirty="0"/>
+          </a:p>
+          <a:p>
+            <a:pPr rtl="1" algn="r" indent="0" marL="0">
+              <a:lnSpc>
+                <a:spcPct val="125000"/>
+              </a:lnSpc>
+              <a:buNone/>
+            </a:pPr>
+            <a:r>
+              <a:rPr lang="en-US" sz="1200" dirty="0">
+                <a:solidFill>
+                  <a:srgbClr val="31424A"/>
+                </a:solidFill>
+                <a:latin typeface="Arial" pitchFamily="34" charset="0"/>
+                <a:ea typeface="Arial" pitchFamily="34" charset="-122"/>
+                <a:cs typeface="Arial" pitchFamily="34" charset="-120"/>
+              </a:rPr>
+              <a:t>الموالح والطماطم هما محصولا التصدير: أكثر من 1,5 مليون طن من البرتقال تُشحن سنويًا. هنا يتحوّل توفير الماء مباشرة إلى هامش ربح.</a:t>
+            </a:r>
+            <a:endParaRPr lang="en-US" sz="1200" dirty="0"/>
+          </a:p>
+        </p:txBody>
+      </p:sp>
+      <p:sp>
+        <p:nvSpPr>
+          <p:cNvPr id="8" name="Text 5"/>
           <p:cNvSpPr txBox="1"/>
           <p:nvPr/>
         </p:nvSpPr>
@@ -6239,7 +11921,7 @@
       </p:sp>
       <p:sp>
         <p:nvSpPr>
-          <p:cNvPr id="11" name="Text 9"/>
+          <p:cNvPr id="9" name="Text 6"/>
           <p:cNvSpPr txBox="1"/>
           <p:nvPr/>
         </p:nvSpPr>
@@ -6343,7 +12025,7 @@
                 <a:ea typeface="Arial" pitchFamily="34" charset="-122"/>
                 <a:cs typeface="Arial" pitchFamily="34" charset="-120"/>
               </a:rPr>
-              <a:t>ترتيب الحجم المتوقع</a:t>
+              <a:t>القطاع الأول</a:t>
             </a:r>
             <a:endParaRPr lang="en-US" sz="1150" dirty="0"/>
           </a:p>
@@ -6382,168 +12064,181 @@
                 <a:ea typeface="Arial" pitchFamily="34" charset="-122"/>
                 <a:cs typeface="Arial" pitchFamily="34" charset="-120"/>
               </a:rPr>
-              <a:t>توفير الماء المتوقع حسب أسلوب الري</a:t>
+              <a:t>الموالح: ريادة تصديرية على أراضٍ رملية</a:t>
             </a:r>
             <a:endParaRPr lang="en-US" sz="3000" dirty="0"/>
           </a:p>
         </p:txBody>
       </p:sp>
-      <p:graphicFrame>
-        <p:nvGraphicFramePr>
-          <p:cNvPr id="4" name="Chart 0" descr=""/>
-          <p:cNvGraphicFramePr/>
-          <p:nvPr/>
-        </p:nvGraphicFramePr>
-        <p:xfrm>
-          <a:off x="594360" y="1783080"/>
-          <a:ext cx="7360920" cy="3977640"/>
-        </p:xfrm>
-        <a:graphic xmlns:a="http://schemas.openxmlformats.org/drawingml/2006/main">
-          <a:graphicData uri="http://schemas.openxmlformats.org/drawingml/2006/chart">
-            <c:chart xmlns:c="http://schemas.openxmlformats.org/drawingml/2006/chart" r:id="rId1"/>
-          </a:graphicData>
-        </a:graphic>
-      </p:graphicFrame>
-      <p:sp>
-        <p:nvSpPr>
-          <p:cNvPr id="5" name="Shape 2"/>
-          <p:cNvSpPr/>
-          <p:nvPr/>
-        </p:nvSpPr>
-        <p:spPr>
-          <a:xfrm>
-            <a:off x="8275320" y="1783080"/>
-            <a:ext cx="3291840" cy="3977640"/>
-          </a:xfrm>
-          <a:prstGeom prst="roundRect">
-            <a:avLst>
-              <a:gd name="adj" fmla="val 2778"/>
-            </a:avLst>
-          </a:prstGeom>
-          <a:solidFill>
-            <a:srgbClr val="EDF3F5"/>
-          </a:solidFill>
-          <a:ln w="9525">
-            <a:solidFill>
-              <a:srgbClr val="D6E2E7"/>
-            </a:solidFill>
-            <a:prstDash val="solid"/>
-          </a:ln>
-        </p:spPr>
+      <p:pic>
+        <p:nvPicPr>
+          <p:cNvPr id="4" name="Image 0" descr="preencoded.png">    </p:cNvPr>
+          <p:cNvPicPr>
+            <a:picLocks noChangeAspect="1"/>
+          </p:cNvPicPr>
+          <p:nvPr/>
+        </p:nvPicPr>
+        <p:blipFill>
+          <a:blip r:embed="rId1"/>
+          <a:stretch>
+            <a:fillRect/>
+          </a:stretch>
+        </p:blipFill>
+        <p:spPr>
+          <a:xfrm>
+            <a:off x="6522415" y="1783080"/>
+            <a:ext cx="5074920" cy="3794760"/>
+          </a:xfrm>
+          <a:prstGeom prst="rect">
+            <a:avLst/>
+          </a:prstGeom>
+        </p:spPr>
+      </p:pic>
+      <p:sp>
+        <p:nvSpPr>
+          <p:cNvPr id="5" name="Text 2"/>
+          <p:cNvSpPr txBox="1"/>
+          <p:nvPr/>
+        </p:nvSpPr>
+        <p:spPr>
+          <a:xfrm>
+            <a:off x="594360" y="1783080"/>
+            <a:ext cx="5379415" cy="4251960"/>
+          </a:xfrm>
+          <a:prstGeom prst="rect">
+            <a:avLst/>
+          </a:prstGeom>
+          <a:noFill/>
+          <a:ln/>
+        </p:spPr>
+        <p:txBody>
+          <a:bodyPr wrap="square" lIns="0" tIns="0" rIns="0" bIns="0" rtlCol="0" anchor="t"/>
+          <a:lstStyle/>
+          <a:p>
+            <a:pPr algn="r" marL="342900" indent="-342900">
+              <a:lnSpc>
+                <a:spcPct val="122000"/>
+              </a:lnSpc>
+              <a:spcAft>
+                <a:spcPts val="1100"/>
+              </a:spcAft>
+              <a:buSzPct val="100000"/>
+              <a:buChar char="•"/>
+            </a:pPr>
+            <a:r>
+              <a:rPr lang="en-US" sz="1400" dirty="0">
+                <a:solidFill>
+                  <a:srgbClr val="31424A"/>
+                </a:solidFill>
+                <a:latin typeface="Arial" pitchFamily="34" charset="0"/>
+                <a:ea typeface="Arial" pitchFamily="34" charset="-122"/>
+                <a:cs typeface="Arial" pitchFamily="34" charset="-120"/>
+              </a:rPr>
+              <a:t>تتركز بساتين البرتقال في النوبارية والبحيرة والإسماعيلية والقليوبية، ويتجه جزء كبير من المحصول إلى التصدير.</a:t>
+            </a:r>
+            <a:endParaRPr lang="en-US" sz="1400" dirty="0"/>
+          </a:p>
+          <a:p>
+            <a:pPr algn="r" marL="342900" indent="-342900">
+              <a:lnSpc>
+                <a:spcPct val="122000"/>
+              </a:lnSpc>
+              <a:spcAft>
+                <a:spcPts val="1100"/>
+              </a:spcAft>
+              <a:buSzPct val="100000"/>
+              <a:buChar char="•"/>
+            </a:pPr>
+            <a:r>
+              <a:rPr lang="en-US" sz="1400" dirty="0">
+                <a:solidFill>
+                  <a:srgbClr val="31424A"/>
+                </a:solidFill>
+                <a:latin typeface="Arial" pitchFamily="34" charset="0"/>
+                <a:ea typeface="Arial" pitchFamily="34" charset="-122"/>
+                <a:cs typeface="Arial" pitchFamily="34" charset="-120"/>
+              </a:rPr>
+              <a:t>الأراضي الجديدة رملية وفقيرة، تفقد ماء الري بسرعة وتحتاج إلى ريّات متقاربة.</a:t>
+            </a:r>
+            <a:endParaRPr lang="en-US" sz="1400" dirty="0"/>
+          </a:p>
+          <a:p>
+            <a:pPr algn="r" marL="342900" indent="-342900">
+              <a:lnSpc>
+                <a:spcPct val="122000"/>
+              </a:lnSpc>
+              <a:spcAft>
+                <a:spcPts val="1100"/>
+              </a:spcAft>
+              <a:buSzPct val="100000"/>
+              <a:buChar char="•"/>
+            </a:pPr>
+            <a:r>
+              <a:rPr lang="en-US" sz="1400" dirty="0">
+                <a:solidFill>
+                  <a:srgbClr val="31424A"/>
+                </a:solidFill>
+                <a:latin typeface="Arial" pitchFamily="34" charset="0"/>
+                <a:ea typeface="Arial" pitchFamily="34" charset="-122"/>
+                <a:cs typeface="Arial" pitchFamily="34" charset="-120"/>
+              </a:rPr>
+              <a:t>مع ارتفاع الحرارة تزداد حاجة الأشجار إلى الماء في الصيف، بينما تبقى الحصص محدودة في أطراف الدلتا.</a:t>
+            </a:r>
+            <a:endParaRPr lang="en-US" sz="1400" dirty="0"/>
+          </a:p>
+          <a:p>
+            <a:pPr algn="r" marL="342900" indent="-342900">
+              <a:lnSpc>
+                <a:spcPct val="122000"/>
+              </a:lnSpc>
+              <a:spcAft>
+                <a:spcPts val="1100"/>
+              </a:spcAft>
+              <a:buSzPct val="100000"/>
+              <a:buChar char="•"/>
+            </a:pPr>
+            <a:r>
+              <a:rPr lang="en-US" sz="1400" dirty="0">
+                <a:solidFill>
+                  <a:srgbClr val="31424A"/>
+                </a:solidFill>
+                <a:latin typeface="Arial" pitchFamily="34" charset="0"/>
+                <a:ea typeface="Arial" pitchFamily="34" charset="-122"/>
+                <a:cs typeface="Arial" pitchFamily="34" charset="-120"/>
+              </a:rPr>
+              <a:t>تشترط أسواق التصدير حدوداً صارمة للمتبقيات: NAPEMA® يعالج الآفات دون أن يترك أثراً.</a:t>
+            </a:r>
+            <a:endParaRPr lang="en-US" sz="1400" dirty="0"/>
+          </a:p>
+          <a:p>
+            <a:pPr algn="r" marL="342900" indent="-342900">
+              <a:lnSpc>
+                <a:spcPct val="122000"/>
+              </a:lnSpc>
+              <a:spcAft>
+                <a:spcPts val="1100"/>
+              </a:spcAft>
+              <a:buSzPct val="100000"/>
+              <a:buChar char="•"/>
+            </a:pPr>
+            <a:r>
+              <a:rPr lang="en-US" sz="1400" dirty="0">
+                <a:solidFill>
+                  <a:srgbClr val="31424A"/>
+                </a:solidFill>
+                <a:latin typeface="Arial" pitchFamily="34" charset="0"/>
+                <a:ea typeface="Arial" pitchFamily="34" charset="-122"/>
+                <a:cs typeface="Arial" pitchFamily="34" charset="-120"/>
+              </a:rPr>
+              <a:t>وضع EVERGREEN® عند الغرس أو في خط التنقيط يطيل بقاء الماء حول الجذور بين الريّات.</a:t>
+            </a:r>
+            <a:endParaRPr lang="en-US" sz="1400" dirty="0"/>
+          </a:p>
+        </p:txBody>
       </p:sp>
       <p:sp>
         <p:nvSpPr>
           <p:cNvPr id="6" name="Text 3"/>
-          <p:cNvSpPr txBox="1"/>
-          <p:nvPr/>
-        </p:nvSpPr>
-        <p:spPr>
-          <a:xfrm>
-            <a:off x="8503920" y="2011680"/>
-            <a:ext cx="2834640" cy="457200"/>
-          </a:xfrm>
-          <a:prstGeom prst="rect">
-            <a:avLst/>
-          </a:prstGeom>
-          <a:noFill/>
-          <a:ln/>
-        </p:spPr>
-        <p:txBody>
-          <a:bodyPr wrap="square" lIns="0" tIns="0" rIns="0" bIns="0" rtlCol="0" anchor="ctr"/>
-          <a:lstStyle/>
-          <a:p>
-            <a:pPr rtl="1" algn="r" indent="0" marL="0">
-              <a:buNone/>
-            </a:pPr>
-            <a:r>
-              <a:rPr lang="en-US" sz="1300" b="1" dirty="0">
-                <a:solidFill>
-                  <a:srgbClr val="1C5A73"/>
-                </a:solidFill>
-                <a:latin typeface="Arial" pitchFamily="34" charset="0"/>
-                <a:ea typeface="Arial" pitchFamily="34" charset="-122"/>
-                <a:cs typeface="Arial" pitchFamily="34" charset="-120"/>
-              </a:rPr>
-              <a:t>تُقرأ بتحفّظ</a:t>
-            </a:r>
-            <a:endParaRPr lang="en-US" sz="1300" dirty="0"/>
-          </a:p>
-        </p:txBody>
-      </p:sp>
-      <p:sp>
-        <p:nvSpPr>
-          <p:cNvPr id="7" name="Text 4"/>
-          <p:cNvSpPr txBox="1"/>
-          <p:nvPr/>
-        </p:nvSpPr>
-        <p:spPr>
-          <a:xfrm>
-            <a:off x="8503920" y="2560320"/>
-            <a:ext cx="2834640" cy="3017520"/>
-          </a:xfrm>
-          <a:prstGeom prst="rect">
-            <a:avLst/>
-          </a:prstGeom>
-          <a:noFill/>
-          <a:ln/>
-        </p:spPr>
-        <p:txBody>
-          <a:bodyPr wrap="square" lIns="0" tIns="0" rIns="0" bIns="0" rtlCol="0" anchor="t"/>
-          <a:lstStyle/>
-          <a:p>
-            <a:pPr rtl="1" algn="r" indent="0" marL="0">
-              <a:lnSpc>
-                <a:spcPct val="125000"/>
-              </a:lnSpc>
-              <a:buNone/>
-            </a:pPr>
-            <a:r>
-              <a:rPr lang="en-US" sz="1200" dirty="0">
-                <a:solidFill>
-                  <a:srgbClr val="31424A"/>
-                </a:solidFill>
-                <a:latin typeface="Arial" pitchFamily="34" charset="0"/>
-                <a:ea typeface="Arial" pitchFamily="34" charset="-122"/>
-                <a:cs typeface="Arial" pitchFamily="34" charset="-120"/>
-              </a:rPr>
-              <a:t>هذه النطاقات تقديرية إرشادية، مبنية على المكاسب الموثقة لموادنا الحابسة للماء.</a:t>
-            </a:r>
-            <a:endParaRPr lang="en-US" sz="1200" dirty="0"/>
-          </a:p>
-          <a:p>
-            <a:pPr rtl="1" algn="r" indent="0" marL="0">
-              <a:lnSpc>
-                <a:spcPct val="125000"/>
-              </a:lnSpc>
-              <a:buNone/>
-            </a:pPr>
-            <a:endParaRPr lang="en-US" sz="1200" dirty="0"/>
-          </a:p>
-          <a:p>
-            <a:pPr rtl="1" algn="r" indent="0" marL="0">
-              <a:lnSpc>
-                <a:spcPct val="125000"/>
-              </a:lnSpc>
-              <a:buNone/>
-            </a:pPr>
-            <a:r>
-              <a:rPr lang="en-US" sz="1200" dirty="0">
-                <a:solidFill>
-                  <a:srgbClr val="31424A"/>
-                </a:solidFill>
-                <a:latin typeface="Arial" pitchFamily="34" charset="0"/>
-                <a:ea typeface="Arial" pitchFamily="34" charset="-122"/>
-                <a:cs typeface="Arial" pitchFamily="34" charset="-120"/>
-              </a:rPr>
-              <a:t>النتيجة الفعلية تتوقف على التربة والمناخ والمحصول. الأرقام تعطي ترتيب حجم فقط، وهي ليست بأي حال قيمة مضمونة أو تعاقدية أو مطلقة.</a:t>
-            </a:r>
-            <a:endParaRPr lang="en-US" sz="1200" dirty="0"/>
-          </a:p>
-        </p:txBody>
-      </p:sp>
-      <p:sp>
-        <p:nvSpPr>
-          <p:cNvPr id="8" name="Text 5"/>
           <p:cNvSpPr txBox="1"/>
           <p:nvPr/>
         </p:nvSpPr>
@@ -6584,7 +12279,7 @@
       </p:sp>
       <p:sp>
         <p:nvSpPr>
-          <p:cNvPr id="9" name="Text 6"/>
+          <p:cNvPr id="7" name="Text 4"/>
           <p:cNvSpPr txBox="1"/>
           <p:nvPr/>
         </p:nvSpPr>
@@ -6688,7 +12383,7 @@
                 <a:ea typeface="Arial" pitchFamily="34" charset="-122"/>
                 <a:cs typeface="Arial" pitchFamily="34" charset="-120"/>
               </a:rPr>
-              <a:t>ثلاثة ميادين أولوية</a:t>
+              <a:t>القطاع الثاني</a:t>
             </a:r>
             <a:endParaRPr lang="en-US" sz="1150" dirty="0"/>
           </a:p>
@@ -6727,42 +12422,15 @@
                 <a:ea typeface="Arial" pitchFamily="34" charset="-122"/>
                 <a:cs typeface="Arial" pitchFamily="34" charset="-120"/>
               </a:rPr>
-              <a:t>أين نبدأ التجارب الأولى</a:t>
+              <a:t>البطاطس والخضروات: من الدلتا إلى الصحراء المستصلحة</a:t>
             </a:r>
             <a:endParaRPr lang="en-US" sz="3000" dirty="0"/>
           </a:p>
         </p:txBody>
-      </p:sp>
-      <p:sp>
-        <p:nvSpPr>
-          <p:cNvPr id="4" name="Shape 2"/>
-          <p:cNvSpPr/>
-          <p:nvPr/>
-        </p:nvSpPr>
-        <p:spPr>
-          <a:xfrm>
-            <a:off x="594360" y="1783080"/>
-            <a:ext cx="3472586" cy="4069080"/>
-          </a:xfrm>
-          <a:prstGeom prst="roundRect">
-            <a:avLst>
-              <a:gd name="adj" fmla="val 2633"/>
-            </a:avLst>
-          </a:prstGeom>
-          <a:solidFill>
-            <a:srgbClr val="EDF3F5"/>
-          </a:solidFill>
-          <a:ln w="9525">
-            <a:solidFill>
-              <a:srgbClr val="D6E2E7"/>
-            </a:solidFill>
-            <a:prstDash val="solid"/>
-          </a:ln>
-        </p:spPr>
       </p:sp>
       <p:pic>
         <p:nvPicPr>
-          <p:cNvPr id="5" name="Image 0" descr="preencoded.png">    </p:cNvPr>
+          <p:cNvPr id="4" name="Image 0" descr="preencoded.png">    </p:cNvPr>
           <p:cNvPicPr>
             <a:picLocks noChangeAspect="1"/>
           </p:cNvPicPr>
@@ -6777,7 +12445,7 @@
         <p:spPr>
           <a:xfrm>
             <a:off x="594360" y="1783080"/>
-            <a:ext cx="3472586" cy="1691640"/>
+            <a:ext cx="5074920" cy="3794760"/>
           </a:xfrm>
           <a:prstGeom prst="rect">
             <a:avLst/>
@@ -6786,92 +12454,14 @@
       </p:pic>
       <p:sp>
         <p:nvSpPr>
-          <p:cNvPr id="6" name="Text 3"/>
-          <p:cNvSpPr txBox="1"/>
-          <p:nvPr/>
-        </p:nvSpPr>
-        <p:spPr>
-          <a:xfrm>
-            <a:off x="795528" y="3639312"/>
-            <a:ext cx="3070250" cy="384048"/>
-          </a:xfrm>
-          <a:prstGeom prst="rect">
-            <a:avLst/>
-          </a:prstGeom>
-          <a:noFill/>
-          <a:ln/>
-        </p:spPr>
-        <p:txBody>
-          <a:bodyPr wrap="square" lIns="0" tIns="0" rIns="0" bIns="0" rtlCol="0" anchor="ctr"/>
-          <a:lstStyle/>
-          <a:p>
-            <a:pPr rtl="1" algn="r" indent="0" marL="0">
-              <a:buNone/>
-            </a:pPr>
-            <a:r>
-              <a:rPr lang="en-US" sz="1500" b="1" dirty="0">
-                <a:solidFill>
-                  <a:srgbClr val="1C5A73"/>
-                </a:solidFill>
-                <a:latin typeface="Arial" pitchFamily="34" charset="0"/>
-                <a:ea typeface="Arial" pitchFamily="34" charset="-122"/>
-                <a:cs typeface="Arial" pitchFamily="34" charset="-120"/>
-              </a:rPr>
-              <a:t>شمال الدلتا</a:t>
-            </a:r>
-            <a:endParaRPr lang="en-US" sz="1500" dirty="0"/>
-          </a:p>
-        </p:txBody>
-      </p:sp>
-      <p:sp>
-        <p:nvSpPr>
-          <p:cNvPr id="7" name="Text 4"/>
-          <p:cNvSpPr txBox="1"/>
-          <p:nvPr/>
-        </p:nvSpPr>
-        <p:spPr>
-          <a:xfrm>
-            <a:off x="795528" y="4041648"/>
-            <a:ext cx="3070250" cy="329184"/>
-          </a:xfrm>
-          <a:prstGeom prst="rect">
-            <a:avLst/>
-          </a:prstGeom>
-          <a:noFill/>
-          <a:ln/>
-        </p:spPr>
-        <p:txBody>
-          <a:bodyPr wrap="square" lIns="0" tIns="0" rIns="0" bIns="0" rtlCol="0" anchor="ctr"/>
-          <a:lstStyle/>
-          <a:p>
-            <a:pPr rtl="1" algn="r" indent="0" marL="0">
-              <a:buNone/>
-            </a:pPr>
-            <a:r>
-              <a:rPr lang="en-US" sz="1250" b="1" dirty="0">
-                <a:solidFill>
-                  <a:srgbClr val="A3701A"/>
-                </a:solidFill>
-                <a:latin typeface="Arial" pitchFamily="34" charset="0"/>
-                <a:ea typeface="Arial" pitchFamily="34" charset="-122"/>
-                <a:cs typeface="Arial" pitchFamily="34" charset="-120"/>
-              </a:rPr>
-              <a:t>أرز وخضر وموالح على أرض قديمة</a:t>
-            </a:r>
-            <a:endParaRPr lang="en-US" sz="1250" dirty="0"/>
-          </a:p>
-        </p:txBody>
-      </p:sp>
-      <p:sp>
-        <p:nvSpPr>
-          <p:cNvPr id="8" name="Text 5"/>
-          <p:cNvSpPr txBox="1"/>
-          <p:nvPr/>
-        </p:nvSpPr>
-        <p:spPr>
-          <a:xfrm>
-            <a:off x="795528" y="4407408"/>
-            <a:ext cx="3070250" cy="1280160"/>
+          <p:cNvPr id="5" name="Text 2"/>
+          <p:cNvSpPr txBox="1"/>
+          <p:nvPr/>
+        </p:nvSpPr>
+        <p:spPr>
+          <a:xfrm>
+            <a:off x="6217920" y="1783080"/>
+            <a:ext cx="5379415" cy="4251960"/>
           </a:xfrm>
           <a:prstGeom prst="rect">
             <a:avLst/>
@@ -6885,16 +12475,16 @@
           <a:p>
             <a:pPr algn="r" marL="342900" indent="-342900">
               <a:lnSpc>
-                <a:spcPct val="116000"/>
+                <a:spcPct val="122000"/>
               </a:lnSpc>
               <a:spcAft>
-                <a:spcPts val="700"/>
+                <a:spcPts val="1100"/>
               </a:spcAft>
               <a:buSzPct val="100000"/>
               <a:buChar char="•"/>
             </a:pPr>
             <a:r>
-              <a:rPr lang="en-US" sz="1150" dirty="0">
+              <a:rPr lang="en-US" sz="1400" dirty="0">
                 <a:solidFill>
                   <a:srgbClr val="31424A"/>
                 </a:solidFill>
@@ -6902,23 +12492,23 @@
                 <a:ea typeface="Arial" pitchFamily="34" charset="-122"/>
                 <a:cs typeface="Arial" pitchFamily="34" charset="-120"/>
               </a:rPr>
-              <a:t>خضر وأرز وموالح على أراضٍ قديمة خصبة، لكن الري بالغمر ما زال هو السائد.</a:t>
-            </a:r>
-            <a:endParaRPr lang="en-US" sz="1150" dirty="0"/>
+              <a:t>مصر من أكبر منتجي البطاطس في أفريقيا، وتصدّر جزءاً مهماً منها إلى أوروبا والخليج.</a:t>
+            </a:r>
+            <a:endParaRPr lang="en-US" sz="1400" dirty="0"/>
           </a:p>
           <a:p>
             <a:pPr algn="r" marL="342900" indent="-342900">
               <a:lnSpc>
-                <a:spcPct val="116000"/>
+                <a:spcPct val="122000"/>
               </a:lnSpc>
               <a:spcAft>
-                <a:spcPts val="700"/>
+                <a:spcPts val="1100"/>
               </a:spcAft>
               <a:buSzPct val="100000"/>
               <a:buChar char="•"/>
             </a:pPr>
             <a:r>
-              <a:rPr lang="en-US" sz="1150" dirty="0">
+              <a:rPr lang="en-US" sz="1400" dirty="0">
                 <a:solidFill>
                   <a:srgbClr val="31424A"/>
                 </a:solidFill>
@@ -6926,23 +12516,23 @@
                 <a:ea typeface="Arial" pitchFamily="34" charset="-122"/>
                 <a:cs typeface="Arial" pitchFamily="34" charset="-120"/>
               </a:rPr>
-              <a:t>تداخل مياه البحر يرفع الملوحة: سماد غير مخلّب ميزة مباشرة هنا.</a:t>
-            </a:r>
-            <a:endParaRPr lang="en-US" sz="1150" dirty="0"/>
+              <a:t>تُزرع بطاطس التصدير في المنيا والنوبارية والصالحية، تحت الري المحوري أو بالتنقيط على تربة رملية.</a:t>
+            </a:r>
+            <a:endParaRPr lang="en-US" sz="1400" dirty="0"/>
           </a:p>
           <a:p>
             <a:pPr algn="r" marL="342900" indent="-342900">
               <a:lnSpc>
-                <a:spcPct val="116000"/>
+                <a:spcPct val="122000"/>
               </a:lnSpc>
               <a:spcAft>
-                <a:spcPts val="700"/>
+                <a:spcPts val="1100"/>
               </a:spcAft>
               <a:buSzPct val="100000"/>
               <a:buChar char="•"/>
             </a:pPr>
             <a:r>
-              <a:rPr lang="en-US" sz="1150" dirty="0">
+              <a:rPr lang="en-US" sz="1400" dirty="0">
                 <a:solidFill>
                   <a:srgbClr val="31424A"/>
                 </a:solidFill>
@@ -6950,174 +12540,23 @@
                 <a:ea typeface="Arial" pitchFamily="34" charset="-122"/>
                 <a:cs typeface="Arial" pitchFamily="34" charset="-120"/>
               </a:rPr>
-              <a:t>كثافة عالية من الجمعيات التعاونية تسمح بالوصول إلى عدد كبير من المزارعين.</a:t>
-            </a:r>
-            <a:endParaRPr lang="en-US" sz="1150" dirty="0"/>
-          </a:p>
-        </p:txBody>
-      </p:sp>
-      <p:sp>
-        <p:nvSpPr>
-          <p:cNvPr id="9" name="Shape 6"/>
-          <p:cNvSpPr/>
-          <p:nvPr/>
-        </p:nvSpPr>
-        <p:spPr>
-          <a:xfrm>
-            <a:off x="4359554" y="1783080"/>
-            <a:ext cx="3472586" cy="4069080"/>
-          </a:xfrm>
-          <a:prstGeom prst="roundRect">
-            <a:avLst>
-              <a:gd name="adj" fmla="val 2633"/>
-            </a:avLst>
-          </a:prstGeom>
-          <a:solidFill>
-            <a:srgbClr val="EDF3F5"/>
-          </a:solidFill>
-          <a:ln w="9525">
-            <a:solidFill>
-              <a:srgbClr val="D6E2E7"/>
-            </a:solidFill>
-            <a:prstDash val="solid"/>
-          </a:ln>
-        </p:spPr>
-      </p:sp>
-      <p:pic>
-        <p:nvPicPr>
-          <p:cNvPr id="10" name="Image 1" descr="preencoded.png">    </p:cNvPr>
-          <p:cNvPicPr>
-            <a:picLocks noChangeAspect="1"/>
-          </p:cNvPicPr>
-          <p:nvPr/>
-        </p:nvPicPr>
-        <p:blipFill>
-          <a:blip r:embed="rId2"/>
-          <a:stretch>
-            <a:fillRect/>
-          </a:stretch>
-        </p:blipFill>
-        <p:spPr>
-          <a:xfrm>
-            <a:off x="4359554" y="1783080"/>
-            <a:ext cx="3472586" cy="1691640"/>
-          </a:xfrm>
-          <a:prstGeom prst="rect">
-            <a:avLst/>
-          </a:prstGeom>
-        </p:spPr>
-      </p:pic>
-      <p:sp>
-        <p:nvSpPr>
-          <p:cNvPr id="11" name="Text 7"/>
-          <p:cNvSpPr txBox="1"/>
-          <p:nvPr/>
-        </p:nvSpPr>
-        <p:spPr>
-          <a:xfrm>
-            <a:off x="4560722" y="3639312"/>
-            <a:ext cx="3070250" cy="384048"/>
-          </a:xfrm>
-          <a:prstGeom prst="rect">
-            <a:avLst/>
-          </a:prstGeom>
-          <a:noFill/>
-          <a:ln/>
-        </p:spPr>
-        <p:txBody>
-          <a:bodyPr wrap="square" lIns="0" tIns="0" rIns="0" bIns="0" rtlCol="0" anchor="ctr"/>
-          <a:lstStyle/>
-          <a:p>
-            <a:pPr rtl="1" algn="r" indent="0" marL="0">
-              <a:buNone/>
-            </a:pPr>
-            <a:r>
-              <a:rPr lang="en-US" sz="1500" b="1" dirty="0">
-                <a:solidFill>
-                  <a:srgbClr val="1C5A73"/>
-                </a:solidFill>
-                <a:latin typeface="Arial" pitchFamily="34" charset="0"/>
-                <a:ea typeface="Arial" pitchFamily="34" charset="-122"/>
-                <a:cs typeface="Arial" pitchFamily="34" charset="-120"/>
-              </a:rPr>
-              <a:t>صعيد مصر</a:t>
-            </a:r>
-            <a:endParaRPr lang="en-US" sz="1500" dirty="0"/>
-          </a:p>
-        </p:txBody>
-      </p:sp>
-      <p:sp>
-        <p:nvSpPr>
-          <p:cNvPr id="12" name="Text 8"/>
-          <p:cNvSpPr txBox="1"/>
-          <p:nvPr/>
-        </p:nvSpPr>
-        <p:spPr>
-          <a:xfrm>
-            <a:off x="4560722" y="4041648"/>
-            <a:ext cx="3070250" cy="329184"/>
-          </a:xfrm>
-          <a:prstGeom prst="rect">
-            <a:avLst/>
-          </a:prstGeom>
-          <a:noFill/>
-          <a:ln/>
-        </p:spPr>
-        <p:txBody>
-          <a:bodyPr wrap="square" lIns="0" tIns="0" rIns="0" bIns="0" rtlCol="0" anchor="ctr"/>
-          <a:lstStyle/>
-          <a:p>
-            <a:pPr rtl="1" algn="r" indent="0" marL="0">
-              <a:buNone/>
-            </a:pPr>
-            <a:r>
-              <a:rPr lang="en-US" sz="1250" b="1" dirty="0">
-                <a:solidFill>
-                  <a:srgbClr val="A3701A"/>
-                </a:solidFill>
-                <a:latin typeface="Arial" pitchFamily="34" charset="0"/>
-                <a:ea typeface="Arial" pitchFamily="34" charset="-122"/>
-                <a:cs typeface="Arial" pitchFamily="34" charset="-120"/>
-              </a:rPr>
-              <a:t>≈ 16 مليون طن قصب سنويًا</a:t>
-            </a:r>
-            <a:endParaRPr lang="en-US" sz="1250" dirty="0"/>
-          </a:p>
-        </p:txBody>
-      </p:sp>
-      <p:sp>
-        <p:nvSpPr>
-          <p:cNvPr id="13" name="Text 9"/>
-          <p:cNvSpPr txBox="1"/>
-          <p:nvPr/>
-        </p:nvSpPr>
-        <p:spPr>
-          <a:xfrm>
-            <a:off x="4560722" y="4407408"/>
-            <a:ext cx="3070250" cy="1280160"/>
-          </a:xfrm>
-          <a:prstGeom prst="rect">
-            <a:avLst/>
-          </a:prstGeom>
-          <a:noFill/>
-          <a:ln/>
-        </p:spPr>
-        <p:txBody>
-          <a:bodyPr wrap="square" lIns="0" tIns="0" rIns="0" bIns="0" rtlCol="0" anchor="t"/>
-          <a:lstStyle/>
+              <a:t>في الأراضي القديمة بالدلتا ما زال الري بالغمر شائعاً، مع فواقد كبيرة وارتفاع في ملوحة التربة.</a:t>
+            </a:r>
+            <a:endParaRPr lang="en-US" sz="1400" dirty="0"/>
+          </a:p>
           <a:p>
             <a:pPr algn="r" marL="342900" indent="-342900">
               <a:lnSpc>
-                <a:spcPct val="116000"/>
+                <a:spcPct val="122000"/>
               </a:lnSpc>
               <a:spcAft>
-                <a:spcPts val="700"/>
+                <a:spcPts val="1100"/>
               </a:spcAft>
               <a:buSzPct val="100000"/>
               <a:buChar char="•"/>
             </a:pPr>
             <a:r>
-              <a:rPr lang="en-US" sz="1150" dirty="0">
+              <a:rPr lang="en-US" sz="1400" dirty="0">
                 <a:solidFill>
                   <a:srgbClr val="31424A"/>
                 </a:solidFill>
@@ -7125,23 +12564,23 @@
                 <a:ea typeface="Arial" pitchFamily="34" charset="-122"/>
                 <a:cs typeface="Arial" pitchFamily="34" charset="-120"/>
               </a:rPr>
-              <a:t>قصب السكر مركّز في المنيا وقنا وأسوان، وهو أعلى المحاصيل استهلاكًا للماء.</a:t>
-            </a:r>
-            <a:endParaRPr lang="en-US" sz="1150" dirty="0"/>
+              <a:t>تشجع الدولة التحول إلى الري الحديث في الأراضي القديمة لتوفير جزء من حصة النيل.</a:t>
+            </a:r>
+            <a:endParaRPr lang="en-US" sz="1400" dirty="0"/>
           </a:p>
           <a:p>
             <a:pPr algn="r" marL="342900" indent="-342900">
               <a:lnSpc>
-                <a:spcPct val="116000"/>
+                <a:spcPct val="122000"/>
               </a:lnSpc>
               <a:spcAft>
-                <a:spcPts val="700"/>
+                <a:spcPts val="1100"/>
               </a:spcAft>
               <a:buSzPct val="100000"/>
               <a:buChar char="•"/>
             </a:pPr>
             <a:r>
-              <a:rPr lang="en-US" sz="1150" dirty="0">
+              <a:rPr lang="en-US" sz="1400" dirty="0">
                 <a:solidFill>
                   <a:srgbClr val="31424A"/>
                 </a:solidFill>
@@ -7149,262 +12588,15 @@
                 <a:ea typeface="Arial" pitchFamily="34" charset="-122"/>
                 <a:cs typeface="Arial" pitchFamily="34" charset="-120"/>
               </a:rPr>
-              <a:t>تبخر شديد وصيف يتجاوز 45 درجة: الفاقد بين ريّتين هو الأعلى في البلاد.</a:t>
-            </a:r>
-            <a:endParaRPr lang="en-US" sz="1150" dirty="0"/>
-          </a:p>
-          <a:p>
-            <a:pPr algn="r" marL="342900" indent="-342900">
-              <a:lnSpc>
-                <a:spcPct val="116000"/>
-              </a:lnSpc>
-              <a:spcAft>
-                <a:spcPts val="700"/>
-              </a:spcAft>
-              <a:buSzPct val="100000"/>
-              <a:buChar char="•"/>
-            </a:pPr>
-            <a:r>
-              <a:rPr lang="en-US" sz="1150" dirty="0">
-                <a:solidFill>
-                  <a:srgbClr val="31424A"/>
-                </a:solidFill>
-                <a:latin typeface="Arial" pitchFamily="34" charset="0"/>
-                <a:ea typeface="Arial" pitchFamily="34" charset="-122"/>
-                <a:cs typeface="Arial" pitchFamily="34" charset="-120"/>
-              </a:rPr>
-              <a:t>مصانع السكر مشترٍ منظَّم، يسهّل اتفاقًا على مستوى منطقة كاملة.</a:t>
-            </a:r>
-            <a:endParaRPr lang="en-US" sz="1150" dirty="0"/>
-          </a:p>
-        </p:txBody>
-      </p:sp>
-      <p:sp>
-        <p:nvSpPr>
-          <p:cNvPr id="14" name="Shape 10"/>
-          <p:cNvSpPr/>
-          <p:nvPr/>
-        </p:nvSpPr>
-        <p:spPr>
-          <a:xfrm>
-            <a:off x="8124749" y="1783080"/>
-            <a:ext cx="3472586" cy="4069080"/>
-          </a:xfrm>
-          <a:prstGeom prst="roundRect">
-            <a:avLst>
-              <a:gd name="adj" fmla="val 2633"/>
-            </a:avLst>
-          </a:prstGeom>
-          <a:solidFill>
-            <a:srgbClr val="EDF3F5"/>
-          </a:solidFill>
-          <a:ln w="9525">
-            <a:solidFill>
-              <a:srgbClr val="D6E2E7"/>
-            </a:solidFill>
-            <a:prstDash val="solid"/>
-          </a:ln>
-        </p:spPr>
-      </p:sp>
-      <p:pic>
-        <p:nvPicPr>
-          <p:cNvPr id="15" name="Image 2" descr="preencoded.png">    </p:cNvPr>
-          <p:cNvPicPr>
-            <a:picLocks noChangeAspect="1"/>
-          </p:cNvPicPr>
-          <p:nvPr/>
-        </p:nvPicPr>
-        <p:blipFill>
-          <a:blip r:embed="rId3"/>
-          <a:stretch>
-            <a:fillRect/>
-          </a:stretch>
-        </p:blipFill>
-        <p:spPr>
-          <a:xfrm>
-            <a:off x="8124749" y="1783080"/>
-            <a:ext cx="3472586" cy="1691640"/>
-          </a:xfrm>
-          <a:prstGeom prst="rect">
-            <a:avLst/>
-          </a:prstGeom>
-        </p:spPr>
-      </p:pic>
-      <p:sp>
-        <p:nvSpPr>
-          <p:cNvPr id="16" name="Text 11"/>
-          <p:cNvSpPr txBox="1"/>
-          <p:nvPr/>
-        </p:nvSpPr>
-        <p:spPr>
-          <a:xfrm>
-            <a:off x="8325917" y="3639312"/>
-            <a:ext cx="3070250" cy="384048"/>
-          </a:xfrm>
-          <a:prstGeom prst="rect">
-            <a:avLst/>
-          </a:prstGeom>
-          <a:noFill/>
-          <a:ln/>
-        </p:spPr>
-        <p:txBody>
-          <a:bodyPr wrap="square" lIns="0" tIns="0" rIns="0" bIns="0" rtlCol="0" anchor="ctr"/>
-          <a:lstStyle/>
-          <a:p>
-            <a:pPr rtl="1" algn="r" indent="0" marL="0">
-              <a:buNone/>
-            </a:pPr>
-            <a:r>
-              <a:rPr lang="en-US" sz="1500" b="1" dirty="0">
-                <a:solidFill>
-                  <a:srgbClr val="1C5A73"/>
-                </a:solidFill>
-                <a:latin typeface="Arial" pitchFamily="34" charset="0"/>
-                <a:ea typeface="Arial" pitchFamily="34" charset="-122"/>
-                <a:cs typeface="Arial" pitchFamily="34" charset="-120"/>
-              </a:rPr>
-              <a:t>النوبارية وغرب الدلتا</a:t>
-            </a:r>
-            <a:endParaRPr lang="en-US" sz="1500" dirty="0"/>
-          </a:p>
-        </p:txBody>
-      </p:sp>
-      <p:sp>
-        <p:nvSpPr>
-          <p:cNvPr id="17" name="Text 12"/>
-          <p:cNvSpPr txBox="1"/>
-          <p:nvPr/>
-        </p:nvSpPr>
-        <p:spPr>
-          <a:xfrm>
-            <a:off x="8325917" y="4041648"/>
-            <a:ext cx="3070250" cy="329184"/>
-          </a:xfrm>
-          <a:prstGeom prst="rect">
-            <a:avLst/>
-          </a:prstGeom>
-          <a:noFill/>
-          <a:ln/>
-        </p:spPr>
-        <p:txBody>
-          <a:bodyPr wrap="square" lIns="0" tIns="0" rIns="0" bIns="0" rtlCol="0" anchor="ctr"/>
-          <a:lstStyle/>
-          <a:p>
-            <a:pPr rtl="1" algn="r" indent="0" marL="0">
-              <a:buNone/>
-            </a:pPr>
-            <a:r>
-              <a:rPr lang="en-US" sz="1250" b="1" dirty="0">
-                <a:solidFill>
-                  <a:srgbClr val="A3701A"/>
-                </a:solidFill>
-                <a:latin typeface="Arial" pitchFamily="34" charset="0"/>
-                <a:ea typeface="Arial" pitchFamily="34" charset="-122"/>
-                <a:cs typeface="Arial" pitchFamily="34" charset="-120"/>
-              </a:rPr>
-              <a:t>قطب تصدير الموالح والعنب</a:t>
-            </a:r>
-            <a:endParaRPr lang="en-US" sz="1250" dirty="0"/>
-          </a:p>
-        </p:txBody>
-      </p:sp>
-      <p:sp>
-        <p:nvSpPr>
-          <p:cNvPr id="18" name="Text 13"/>
-          <p:cNvSpPr txBox="1"/>
-          <p:nvPr/>
-        </p:nvSpPr>
-        <p:spPr>
-          <a:xfrm>
-            <a:off x="8325917" y="4407408"/>
-            <a:ext cx="3070250" cy="1280160"/>
-          </a:xfrm>
-          <a:prstGeom prst="rect">
-            <a:avLst/>
-          </a:prstGeom>
-          <a:noFill/>
-          <a:ln/>
-        </p:spPr>
-        <p:txBody>
-          <a:bodyPr wrap="square" lIns="0" tIns="0" rIns="0" bIns="0" rtlCol="0" anchor="t"/>
-          <a:lstStyle/>
-          <a:p>
-            <a:pPr algn="r" marL="342900" indent="-342900">
-              <a:lnSpc>
-                <a:spcPct val="116000"/>
-              </a:lnSpc>
-              <a:spcAft>
-                <a:spcPts val="700"/>
-              </a:spcAft>
-              <a:buSzPct val="100000"/>
-              <a:buChar char="•"/>
-            </a:pPr>
-            <a:r>
-              <a:rPr lang="en-US" sz="1150" dirty="0">
-                <a:solidFill>
-                  <a:srgbClr val="31424A"/>
-                </a:solidFill>
-                <a:latin typeface="Arial" pitchFamily="34" charset="0"/>
-                <a:ea typeface="Arial" pitchFamily="34" charset="-122"/>
-                <a:cs typeface="Arial" pitchFamily="34" charset="-120"/>
-              </a:rPr>
-              <a:t>أراضٍ مستصلحة رملية: قدرة احتفاظ بالماء ضعيفة، وهي الحالة الأنسب لموادنا.</a:t>
-            </a:r>
-            <a:endParaRPr lang="en-US" sz="1150" dirty="0"/>
-          </a:p>
-          <a:p>
-            <a:pPr algn="r" marL="342900" indent="-342900">
-              <a:lnSpc>
-                <a:spcPct val="116000"/>
-              </a:lnSpc>
-              <a:spcAft>
-                <a:spcPts val="700"/>
-              </a:spcAft>
-              <a:buSzPct val="100000"/>
-              <a:buChar char="•"/>
-            </a:pPr>
-            <a:r>
-              <a:rPr lang="en-US" sz="1150" dirty="0">
-                <a:solidFill>
-                  <a:srgbClr val="31424A"/>
-                </a:solidFill>
-                <a:latin typeface="Arial" pitchFamily="34" charset="0"/>
-                <a:ea typeface="Arial" pitchFamily="34" charset="-122"/>
-                <a:cs typeface="Arial" pitchFamily="34" charset="-120"/>
-              </a:rPr>
-              <a:t>مزارع تصدير كبيرة مجهّزة بالتنقيط والمحاور، وقرار شراء مركزي وسريع.</a:t>
-            </a:r>
-            <a:endParaRPr lang="en-US" sz="1150" dirty="0"/>
-          </a:p>
-          <a:p>
-            <a:pPr algn="r" marL="342900" indent="-342900">
-              <a:lnSpc>
-                <a:spcPct val="116000"/>
-              </a:lnSpc>
-              <a:spcAft>
-                <a:spcPts val="700"/>
-              </a:spcAft>
-              <a:buSzPct val="100000"/>
-              <a:buChar char="•"/>
-            </a:pPr>
-            <a:r>
-              <a:rPr lang="en-US" sz="1150" dirty="0">
-                <a:solidFill>
-                  <a:srgbClr val="31424A"/>
-                </a:solidFill>
-                <a:latin typeface="Arial" pitchFamily="34" charset="0"/>
-                <a:ea typeface="Arial" pitchFamily="34" charset="-122"/>
-                <a:cs typeface="Arial" pitchFamily="34" charset="-120"/>
-              </a:rPr>
-              <a:t>المشترون الأوروبيون يطلبون شهادة عضوية سارية.</a:t>
-            </a:r>
-            <a:endParaRPr lang="en-US" sz="1150" dirty="0"/>
-          </a:p>
-        </p:txBody>
-      </p:sp>
-      <p:sp>
-        <p:nvSpPr>
-          <p:cNvPr id="19" name="Text 14"/>
+              <a:t>تستفيد الطماطم والبطاطس مباشرة من احتباس الماء في منطقة الجذور، خصوصاً على التربة الرملية.</a:t>
+            </a:r>
+            <a:endParaRPr lang="en-US" sz="1400" dirty="0"/>
+          </a:p>
+        </p:txBody>
+      </p:sp>
+      <p:sp>
+        <p:nvSpPr>
+          <p:cNvPr id="6" name="Text 3"/>
           <p:cNvSpPr txBox="1"/>
           <p:nvPr/>
         </p:nvSpPr>
@@ -7445,7 +12637,7 @@
       </p:sp>
       <p:sp>
         <p:nvSpPr>
-          <p:cNvPr id="20" name="Text 15"/>
+          <p:cNvPr id="7" name="Text 4"/>
           <p:cNvSpPr txBox="1"/>
           <p:nvPr/>
         </p:nvSpPr>
@@ -7549,7 +12741,7 @@
                 <a:ea typeface="Arial" pitchFamily="34" charset="-122"/>
                 <a:cs typeface="Arial" pitchFamily="34" charset="-120"/>
               </a:rPr>
-              <a:t>كيف نعمل</a:t>
+              <a:t>إمكانات الإنتاج</a:t>
             </a:r>
             <a:endParaRPr lang="en-US" sz="1150" dirty="0"/>
           </a:p>
@@ -7588,26 +12780,42 @@
                 <a:ea typeface="Arial" pitchFamily="34" charset="-122"/>
                 <a:cs typeface="Arial" pitchFamily="34" charset="-120"/>
               </a:rPr>
-              <a:t>انتشار على مراحل، مُقاس عند كل خطوة</a:t>
+              <a:t>الزيادة المتوقعة في الإنتاج حسب المحصول</a:t>
             </a:r>
             <a:endParaRPr lang="en-US" sz="3000" dirty="0"/>
           </a:p>
         </p:txBody>
       </p:sp>
-      <p:sp>
-        <p:nvSpPr>
-          <p:cNvPr id="4" name="Shape 2"/>
+      <p:graphicFrame>
+        <p:nvGraphicFramePr>
+          <p:cNvPr id="4" name="Chart 0" descr=""/>
+          <p:cNvGraphicFramePr/>
+          <p:nvPr/>
+        </p:nvGraphicFramePr>
+        <p:xfrm>
+          <a:off x="594360" y="1783080"/>
+          <a:ext cx="7360920" cy="3977640"/>
+        </p:xfrm>
+        <a:graphic xmlns:a="http://schemas.openxmlformats.org/drawingml/2006/main">
+          <a:graphicData uri="http://schemas.openxmlformats.org/drawingml/2006/chart">
+            <c:chart xmlns:c="http://schemas.openxmlformats.org/drawingml/2006/chart" r:id="rId1"/>
+          </a:graphicData>
+        </a:graphic>
+      </p:graphicFrame>
+      <p:sp>
+        <p:nvSpPr>
+          <p:cNvPr id="5" name="Shape 2"/>
           <p:cNvSpPr/>
           <p:nvPr/>
         </p:nvSpPr>
         <p:spPr>
           <a:xfrm>
-            <a:off x="594360" y="1874520"/>
-            <a:ext cx="2545004" cy="2834640"/>
+            <a:off x="8275320" y="1783080"/>
+            <a:ext cx="3291840" cy="3977640"/>
           </a:xfrm>
           <a:prstGeom prst="roundRect">
             <a:avLst>
-              <a:gd name="adj" fmla="val 3593"/>
+              <a:gd name="adj" fmla="val 2778"/>
             </a:avLst>
           </a:prstGeom>
           <a:solidFill>
@@ -7623,34 +12831,14 @@
       </p:sp>
       <p:sp>
         <p:nvSpPr>
-          <p:cNvPr id="5" name="Shape 3"/>
-          <p:cNvSpPr/>
-          <p:nvPr/>
-        </p:nvSpPr>
-        <p:spPr>
-          <a:xfrm>
-            <a:off x="822960" y="2103120"/>
-            <a:ext cx="566928" cy="566928"/>
-          </a:xfrm>
-          <a:prstGeom prst="ellipse">
-            <a:avLst/>
-          </a:prstGeom>
-          <a:solidFill>
-            <a:srgbClr val="1C5A73"/>
-          </a:solidFill>
-          <a:ln/>
-        </p:spPr>
-      </p:sp>
-      <p:sp>
-        <p:nvSpPr>
-          <p:cNvPr id="6" name="Text 4"/>
-          <p:cNvSpPr txBox="1"/>
-          <p:nvPr/>
-        </p:nvSpPr>
-        <p:spPr>
-          <a:xfrm>
-            <a:off x="822960" y="2103120"/>
-            <a:ext cx="566928" cy="566928"/>
+          <p:cNvPr id="6" name="Text 3"/>
+          <p:cNvSpPr txBox="1"/>
+          <p:nvPr/>
+        </p:nvSpPr>
+        <p:spPr>
+          <a:xfrm>
+            <a:off x="8503920" y="2011680"/>
+            <a:ext cx="2834640" cy="457200"/>
           </a:xfrm>
           <a:prstGeom prst="rect">
             <a:avLst/>
@@ -7662,50 +12850,11 @@
           <a:bodyPr wrap="square" lIns="0" tIns="0" rIns="0" bIns="0" rtlCol="0" anchor="ctr"/>
           <a:lstStyle/>
           <a:p>
-            <a:pPr rtl="1" algn="ctr" indent="0" marL="0">
-              <a:buNone/>
-            </a:pPr>
-            <a:r>
-              <a:rPr lang="en-US" sz="1600" b="1" dirty="0">
-                <a:solidFill>
-                  <a:srgbClr val="FFFFFF"/>
-                </a:solidFill>
-                <a:latin typeface="Arial" pitchFamily="34" charset="0"/>
-                <a:ea typeface="Arial" pitchFamily="34" charset="-122"/>
-                <a:cs typeface="Arial" pitchFamily="34" charset="-120"/>
-              </a:rPr>
-              <a:t>1</a:t>
-            </a:r>
-            <a:endParaRPr lang="en-US" sz="1600" dirty="0"/>
-          </a:p>
-        </p:txBody>
-      </p:sp>
-      <p:sp>
-        <p:nvSpPr>
-          <p:cNvPr id="7" name="Text 5"/>
-          <p:cNvSpPr txBox="1"/>
-          <p:nvPr/>
-        </p:nvSpPr>
-        <p:spPr>
-          <a:xfrm>
-            <a:off x="822960" y="2788920"/>
-            <a:ext cx="2087804" cy="457200"/>
-          </a:xfrm>
-          <a:prstGeom prst="rect">
-            <a:avLst/>
-          </a:prstGeom>
-          <a:noFill/>
-          <a:ln/>
-        </p:spPr>
-        <p:txBody>
-          <a:bodyPr wrap="square" lIns="0" tIns="0" rIns="0" bIns="0" rtlCol="0" anchor="ctr"/>
-          <a:lstStyle/>
-          <a:p>
             <a:pPr rtl="1" algn="r" indent="0" marL="0">
               <a:buNone/>
             </a:pPr>
             <a:r>
-              <a:rPr lang="en-US" sz="1400" b="1" dirty="0">
+              <a:rPr lang="en-US" sz="1300" b="1" dirty="0">
                 <a:solidFill>
                   <a:srgbClr val="1C5A73"/>
                 </a:solidFill>
@@ -7713,565 +12862,22 @@
                 <a:ea typeface="Arial" pitchFamily="34" charset="-122"/>
                 <a:cs typeface="Arial" pitchFamily="34" charset="-120"/>
               </a:rPr>
-              <a:t>التشخيص</a:t>
-            </a:r>
-            <a:endParaRPr lang="en-US" sz="1400" dirty="0"/>
-          </a:p>
-        </p:txBody>
-      </p:sp>
-      <p:sp>
-        <p:nvSpPr>
-          <p:cNvPr id="8" name="Text 6"/>
-          <p:cNvSpPr txBox="1"/>
-          <p:nvPr/>
-        </p:nvSpPr>
-        <p:spPr>
-          <a:xfrm>
-            <a:off x="822960" y="3291840"/>
-            <a:ext cx="2087804" cy="1234440"/>
-          </a:xfrm>
-          <a:prstGeom prst="rect">
-            <a:avLst/>
-          </a:prstGeom>
-          <a:noFill/>
-          <a:ln/>
-        </p:spPr>
-        <p:txBody>
-          <a:bodyPr wrap="square" lIns="0" tIns="0" rIns="0" bIns="0" rtlCol="0" anchor="t"/>
-          <a:lstStyle/>
-          <a:p>
-            <a:pPr rtl="1" algn="r" indent="0" marL="0">
-              <a:lnSpc>
-                <a:spcPct val="120000"/>
-              </a:lnSpc>
-              <a:buNone/>
-            </a:pPr>
-            <a:r>
-              <a:rPr lang="en-US" sz="1200" dirty="0">
-                <a:solidFill>
-                  <a:srgbClr val="31424A"/>
-                </a:solidFill>
-                <a:latin typeface="Arial" pitchFamily="34" charset="0"/>
-                <a:ea typeface="Arial" pitchFamily="34" charset="-122"/>
-                <a:cs typeface="Arial" pitchFamily="34" charset="-120"/>
-              </a:rPr>
-              <a:t>تحليل التربة وأسلوب الري والمحصول. لا التزام على الإطلاق في هذه المرحلة.</a:t>
-            </a:r>
-            <a:endParaRPr lang="en-US" sz="1200" dirty="0"/>
-          </a:p>
-        </p:txBody>
-      </p:sp>
-      <p:sp>
-        <p:nvSpPr>
-          <p:cNvPr id="9" name="Shape 7"/>
-          <p:cNvSpPr/>
-          <p:nvPr/>
-        </p:nvSpPr>
-        <p:spPr>
-          <a:xfrm>
-            <a:off x="3413684" y="1874520"/>
-            <a:ext cx="2545004" cy="2834640"/>
-          </a:xfrm>
-          <a:prstGeom prst="roundRect">
-            <a:avLst>
-              <a:gd name="adj" fmla="val 3593"/>
-            </a:avLst>
-          </a:prstGeom>
-          <a:solidFill>
-            <a:srgbClr val="EDF3F5"/>
-          </a:solidFill>
-          <a:ln w="9525">
-            <a:solidFill>
-              <a:srgbClr val="D6E2E7"/>
-            </a:solidFill>
-            <a:prstDash val="solid"/>
-          </a:ln>
-        </p:spPr>
-      </p:sp>
-      <p:sp>
-        <p:nvSpPr>
-          <p:cNvPr id="10" name="Shape 8"/>
-          <p:cNvSpPr/>
-          <p:nvPr/>
-        </p:nvSpPr>
-        <p:spPr>
-          <a:xfrm>
-            <a:off x="3642284" y="2103120"/>
-            <a:ext cx="566928" cy="566928"/>
-          </a:xfrm>
-          <a:prstGeom prst="ellipse">
-            <a:avLst/>
-          </a:prstGeom>
-          <a:solidFill>
-            <a:srgbClr val="1C5A73"/>
-          </a:solidFill>
-          <a:ln/>
-        </p:spPr>
-      </p:sp>
-      <p:sp>
-        <p:nvSpPr>
-          <p:cNvPr id="11" name="Text 9"/>
-          <p:cNvSpPr txBox="1"/>
-          <p:nvPr/>
-        </p:nvSpPr>
-        <p:spPr>
-          <a:xfrm>
-            <a:off x="3642284" y="2103120"/>
-            <a:ext cx="566928" cy="566928"/>
-          </a:xfrm>
-          <a:prstGeom prst="rect">
-            <a:avLst/>
-          </a:prstGeom>
-          <a:noFill/>
-          <a:ln/>
-        </p:spPr>
-        <p:txBody>
-          <a:bodyPr wrap="square" lIns="0" tIns="0" rIns="0" bIns="0" rtlCol="0" anchor="ctr"/>
-          <a:lstStyle/>
-          <a:p>
-            <a:pPr rtl="1" algn="ctr" indent="0" marL="0">
-              <a:buNone/>
-            </a:pPr>
-            <a:r>
-              <a:rPr lang="en-US" sz="1600" b="1" dirty="0">
-                <a:solidFill>
-                  <a:srgbClr val="FFFFFF"/>
-                </a:solidFill>
-                <a:latin typeface="Arial" pitchFamily="34" charset="0"/>
-                <a:ea typeface="Arial" pitchFamily="34" charset="-122"/>
-                <a:cs typeface="Arial" pitchFamily="34" charset="-120"/>
-              </a:rPr>
-              <a:t>2</a:t>
-            </a:r>
-            <a:endParaRPr lang="en-US" sz="1600" dirty="0"/>
-          </a:p>
-        </p:txBody>
-      </p:sp>
-      <p:sp>
-        <p:nvSpPr>
-          <p:cNvPr id="12" name="Text 10"/>
-          <p:cNvSpPr txBox="1"/>
-          <p:nvPr/>
-        </p:nvSpPr>
-        <p:spPr>
-          <a:xfrm>
-            <a:off x="3642284" y="2788920"/>
-            <a:ext cx="2087804" cy="457200"/>
-          </a:xfrm>
-          <a:prstGeom prst="rect">
-            <a:avLst/>
-          </a:prstGeom>
-          <a:noFill/>
-          <a:ln/>
-        </p:spPr>
-        <p:txBody>
-          <a:bodyPr wrap="square" lIns="0" tIns="0" rIns="0" bIns="0" rtlCol="0" anchor="ctr"/>
-          <a:lstStyle/>
-          <a:p>
-            <a:pPr rtl="1" algn="r" indent="0" marL="0">
-              <a:buNone/>
-            </a:pPr>
-            <a:r>
-              <a:rPr lang="en-US" sz="1400" b="1" dirty="0">
-                <a:solidFill>
-                  <a:srgbClr val="1C5A73"/>
-                </a:solidFill>
-                <a:latin typeface="Arial" pitchFamily="34" charset="0"/>
-                <a:ea typeface="Arial" pitchFamily="34" charset="-122"/>
-                <a:cs typeface="Arial" pitchFamily="34" charset="-120"/>
-              </a:rPr>
-              <a:t>قطعة تجريبية</a:t>
-            </a:r>
-            <a:endParaRPr lang="en-US" sz="1400" dirty="0"/>
-          </a:p>
-        </p:txBody>
-      </p:sp>
-      <p:sp>
-        <p:nvSpPr>
-          <p:cNvPr id="13" name="Text 11"/>
-          <p:cNvSpPr txBox="1"/>
-          <p:nvPr/>
-        </p:nvSpPr>
-        <p:spPr>
-          <a:xfrm>
-            <a:off x="3642284" y="3291840"/>
-            <a:ext cx="2087804" cy="1234440"/>
-          </a:xfrm>
-          <a:prstGeom prst="rect">
-            <a:avLst/>
-          </a:prstGeom>
-          <a:noFill/>
-          <a:ln/>
-        </p:spPr>
-        <p:txBody>
-          <a:bodyPr wrap="square" lIns="0" tIns="0" rIns="0" bIns="0" rtlCol="0" anchor="t"/>
-          <a:lstStyle/>
-          <a:p>
-            <a:pPr rtl="1" algn="r" indent="0" marL="0">
-              <a:lnSpc>
-                <a:spcPct val="120000"/>
-              </a:lnSpc>
-              <a:buNone/>
-            </a:pPr>
-            <a:r>
-              <a:rPr lang="en-US" sz="1200" dirty="0">
-                <a:solidFill>
-                  <a:srgbClr val="31424A"/>
-                </a:solidFill>
-                <a:latin typeface="Arial" pitchFamily="34" charset="0"/>
-                <a:ea typeface="Arial" pitchFamily="34" charset="-122"/>
-                <a:cs typeface="Arial" pitchFamily="34" charset="-120"/>
-              </a:rPr>
-              <a:t>تجربة مقارنة على قطعة واحدة، مع قطعة شاهدة تُدار بالطريقة نفسها.</a:t>
-            </a:r>
-            <a:endParaRPr lang="en-US" sz="1200" dirty="0"/>
-          </a:p>
-        </p:txBody>
-      </p:sp>
-      <p:sp>
-        <p:nvSpPr>
-          <p:cNvPr id="14" name="Shape 12"/>
-          <p:cNvSpPr/>
-          <p:nvPr/>
-        </p:nvSpPr>
-        <p:spPr>
-          <a:xfrm>
-            <a:off x="6233008" y="1874520"/>
-            <a:ext cx="2545004" cy="2834640"/>
-          </a:xfrm>
-          <a:prstGeom prst="roundRect">
-            <a:avLst>
-              <a:gd name="adj" fmla="val 3593"/>
-            </a:avLst>
-          </a:prstGeom>
-          <a:solidFill>
-            <a:srgbClr val="EDF3F5"/>
-          </a:solidFill>
-          <a:ln w="9525">
-            <a:solidFill>
-              <a:srgbClr val="D6E2E7"/>
-            </a:solidFill>
-            <a:prstDash val="solid"/>
-          </a:ln>
-        </p:spPr>
-      </p:sp>
-      <p:sp>
-        <p:nvSpPr>
-          <p:cNvPr id="15" name="Shape 13"/>
-          <p:cNvSpPr/>
-          <p:nvPr/>
-        </p:nvSpPr>
-        <p:spPr>
-          <a:xfrm>
-            <a:off x="6461608" y="2103120"/>
-            <a:ext cx="566928" cy="566928"/>
-          </a:xfrm>
-          <a:prstGeom prst="ellipse">
-            <a:avLst/>
-          </a:prstGeom>
-          <a:solidFill>
-            <a:srgbClr val="1C5A73"/>
-          </a:solidFill>
-          <a:ln/>
-        </p:spPr>
-      </p:sp>
-      <p:sp>
-        <p:nvSpPr>
-          <p:cNvPr id="16" name="Text 14"/>
-          <p:cNvSpPr txBox="1"/>
-          <p:nvPr/>
-        </p:nvSpPr>
-        <p:spPr>
-          <a:xfrm>
-            <a:off x="6461608" y="2103120"/>
-            <a:ext cx="566928" cy="566928"/>
-          </a:xfrm>
-          <a:prstGeom prst="rect">
-            <a:avLst/>
-          </a:prstGeom>
-          <a:noFill/>
-          <a:ln/>
-        </p:spPr>
-        <p:txBody>
-          <a:bodyPr wrap="square" lIns="0" tIns="0" rIns="0" bIns="0" rtlCol="0" anchor="ctr"/>
-          <a:lstStyle/>
-          <a:p>
-            <a:pPr rtl="1" algn="ctr" indent="0" marL="0">
-              <a:buNone/>
-            </a:pPr>
-            <a:r>
-              <a:rPr lang="en-US" sz="1600" b="1" dirty="0">
-                <a:solidFill>
-                  <a:srgbClr val="FFFFFF"/>
-                </a:solidFill>
-                <a:latin typeface="Arial" pitchFamily="34" charset="0"/>
-                <a:ea typeface="Arial" pitchFamily="34" charset="-122"/>
-                <a:cs typeface="Arial" pitchFamily="34" charset="-120"/>
-              </a:rPr>
-              <a:t>3</a:t>
-            </a:r>
-            <a:endParaRPr lang="en-US" sz="1600" dirty="0"/>
-          </a:p>
-        </p:txBody>
-      </p:sp>
-      <p:sp>
-        <p:nvSpPr>
-          <p:cNvPr id="17" name="Text 15"/>
-          <p:cNvSpPr txBox="1"/>
-          <p:nvPr/>
-        </p:nvSpPr>
-        <p:spPr>
-          <a:xfrm>
-            <a:off x="6461608" y="2788920"/>
-            <a:ext cx="2087804" cy="457200"/>
-          </a:xfrm>
-          <a:prstGeom prst="rect">
-            <a:avLst/>
-          </a:prstGeom>
-          <a:noFill/>
-          <a:ln/>
-        </p:spPr>
-        <p:txBody>
-          <a:bodyPr wrap="square" lIns="0" tIns="0" rIns="0" bIns="0" rtlCol="0" anchor="ctr"/>
-          <a:lstStyle/>
-          <a:p>
-            <a:pPr rtl="1" algn="r" indent="0" marL="0">
-              <a:buNone/>
-            </a:pPr>
-            <a:r>
-              <a:rPr lang="en-US" sz="1400" b="1" dirty="0">
-                <a:solidFill>
-                  <a:srgbClr val="1C5A73"/>
-                </a:solidFill>
-                <a:latin typeface="Arial" pitchFamily="34" charset="0"/>
-                <a:ea typeface="Arial" pitchFamily="34" charset="-122"/>
-                <a:cs typeface="Arial" pitchFamily="34" charset="-120"/>
-              </a:rPr>
-              <a:t>القياس</a:t>
-            </a:r>
-            <a:endParaRPr lang="en-US" sz="1400" dirty="0"/>
-          </a:p>
-        </p:txBody>
-      </p:sp>
-      <p:sp>
-        <p:nvSpPr>
-          <p:cNvPr id="18" name="Text 16"/>
-          <p:cNvSpPr txBox="1"/>
-          <p:nvPr/>
-        </p:nvSpPr>
-        <p:spPr>
-          <a:xfrm>
-            <a:off x="6461608" y="3291840"/>
-            <a:ext cx="2087804" cy="1234440"/>
-          </a:xfrm>
-          <a:prstGeom prst="rect">
-            <a:avLst/>
-          </a:prstGeom>
-          <a:noFill/>
-          <a:ln/>
-        </p:spPr>
-        <p:txBody>
-          <a:bodyPr wrap="square" lIns="0" tIns="0" rIns="0" bIns="0" rtlCol="0" anchor="t"/>
-          <a:lstStyle/>
-          <a:p>
-            <a:pPr rtl="1" algn="r" indent="0" marL="0">
-              <a:lnSpc>
-                <a:spcPct val="120000"/>
-              </a:lnSpc>
-              <a:buNone/>
-            </a:pPr>
-            <a:r>
-              <a:rPr lang="en-US" sz="1200" dirty="0">
-                <a:solidFill>
-                  <a:srgbClr val="31424A"/>
-                </a:solidFill>
-                <a:latin typeface="Arial" pitchFamily="34" charset="0"/>
-                <a:ea typeface="Arial" pitchFamily="34" charset="-122"/>
-                <a:cs typeface="Arial" pitchFamily="34" charset="-120"/>
-              </a:rPr>
-              <a:t>تسجيل الاستهلاك المائي والمحصول على دورة زراعية كاملة.</a:t>
-            </a:r>
-            <a:endParaRPr lang="en-US" sz="1200" dirty="0"/>
-          </a:p>
-        </p:txBody>
-      </p:sp>
-      <p:sp>
-        <p:nvSpPr>
-          <p:cNvPr id="19" name="Shape 17"/>
-          <p:cNvSpPr/>
-          <p:nvPr/>
-        </p:nvSpPr>
-        <p:spPr>
-          <a:xfrm>
-            <a:off x="9052331" y="1874520"/>
-            <a:ext cx="2545004" cy="2834640"/>
-          </a:xfrm>
-          <a:prstGeom prst="roundRect">
-            <a:avLst>
-              <a:gd name="adj" fmla="val 3593"/>
-            </a:avLst>
-          </a:prstGeom>
-          <a:solidFill>
-            <a:srgbClr val="EDF3F5"/>
-          </a:solidFill>
-          <a:ln w="9525">
-            <a:solidFill>
-              <a:srgbClr val="D6E2E7"/>
-            </a:solidFill>
-            <a:prstDash val="solid"/>
-          </a:ln>
-        </p:spPr>
-      </p:sp>
-      <p:sp>
-        <p:nvSpPr>
-          <p:cNvPr id="20" name="Shape 18"/>
-          <p:cNvSpPr/>
-          <p:nvPr/>
-        </p:nvSpPr>
-        <p:spPr>
-          <a:xfrm>
-            <a:off x="9280931" y="2103120"/>
-            <a:ext cx="566928" cy="566928"/>
-          </a:xfrm>
-          <a:prstGeom prst="ellipse">
-            <a:avLst/>
-          </a:prstGeom>
-          <a:solidFill>
-            <a:srgbClr val="1C5A73"/>
-          </a:solidFill>
-          <a:ln/>
-        </p:spPr>
-      </p:sp>
-      <p:sp>
-        <p:nvSpPr>
-          <p:cNvPr id="21" name="Text 19"/>
-          <p:cNvSpPr txBox="1"/>
-          <p:nvPr/>
-        </p:nvSpPr>
-        <p:spPr>
-          <a:xfrm>
-            <a:off x="9280931" y="2103120"/>
-            <a:ext cx="566928" cy="566928"/>
-          </a:xfrm>
-          <a:prstGeom prst="rect">
-            <a:avLst/>
-          </a:prstGeom>
-          <a:noFill/>
-          <a:ln/>
-        </p:spPr>
-        <p:txBody>
-          <a:bodyPr wrap="square" lIns="0" tIns="0" rIns="0" bIns="0" rtlCol="0" anchor="ctr"/>
-          <a:lstStyle/>
-          <a:p>
-            <a:pPr rtl="1" algn="ctr" indent="0" marL="0">
-              <a:buNone/>
-            </a:pPr>
-            <a:r>
-              <a:rPr lang="en-US" sz="1600" b="1" dirty="0">
-                <a:solidFill>
-                  <a:srgbClr val="FFFFFF"/>
-                </a:solidFill>
-                <a:latin typeface="Arial" pitchFamily="34" charset="0"/>
-                <a:ea typeface="Arial" pitchFamily="34" charset="-122"/>
-                <a:cs typeface="Arial" pitchFamily="34" charset="-120"/>
-              </a:rPr>
-              <a:t>4</a:t>
-            </a:r>
-            <a:endParaRPr lang="en-US" sz="1600" dirty="0"/>
-          </a:p>
-        </p:txBody>
-      </p:sp>
-      <p:sp>
-        <p:nvSpPr>
-          <p:cNvPr id="22" name="Text 20"/>
-          <p:cNvSpPr txBox="1"/>
-          <p:nvPr/>
-        </p:nvSpPr>
-        <p:spPr>
-          <a:xfrm>
-            <a:off x="9280931" y="2788920"/>
-            <a:ext cx="2087804" cy="457200"/>
-          </a:xfrm>
-          <a:prstGeom prst="rect">
-            <a:avLst/>
-          </a:prstGeom>
-          <a:noFill/>
-          <a:ln/>
-        </p:spPr>
-        <p:txBody>
-          <a:bodyPr wrap="square" lIns="0" tIns="0" rIns="0" bIns="0" rtlCol="0" anchor="ctr"/>
-          <a:lstStyle/>
-          <a:p>
-            <a:pPr rtl="1" algn="r" indent="0" marL="0">
-              <a:buNone/>
-            </a:pPr>
-            <a:r>
-              <a:rPr lang="en-US" sz="1400" b="1" dirty="0">
-                <a:solidFill>
-                  <a:srgbClr val="1C5A73"/>
-                </a:solidFill>
-                <a:latin typeface="Arial" pitchFamily="34" charset="0"/>
-                <a:ea typeface="Arial" pitchFamily="34" charset="-122"/>
-                <a:cs typeface="Arial" pitchFamily="34" charset="-120"/>
-              </a:rPr>
-              <a:t>التوسيع</a:t>
-            </a:r>
-            <a:endParaRPr lang="en-US" sz="1400" dirty="0"/>
-          </a:p>
-        </p:txBody>
-      </p:sp>
-      <p:sp>
-        <p:nvSpPr>
-          <p:cNvPr id="23" name="Text 21"/>
-          <p:cNvSpPr txBox="1"/>
-          <p:nvPr/>
-        </p:nvSpPr>
-        <p:spPr>
-          <a:xfrm>
-            <a:off x="9280931" y="3291840"/>
-            <a:ext cx="2087804" cy="1234440"/>
-          </a:xfrm>
-          <a:prstGeom prst="rect">
-            <a:avLst/>
-          </a:prstGeom>
-          <a:noFill/>
-          <a:ln/>
-        </p:spPr>
-        <p:txBody>
-          <a:bodyPr wrap="square" lIns="0" tIns="0" rIns="0" bIns="0" rtlCol="0" anchor="t"/>
-          <a:lstStyle/>
-          <a:p>
-            <a:pPr rtl="1" algn="r" indent="0" marL="0">
-              <a:lnSpc>
-                <a:spcPct val="120000"/>
-              </a:lnSpc>
-              <a:buNone/>
-            </a:pPr>
-            <a:r>
-              <a:rPr lang="en-US" sz="1200" dirty="0">
-                <a:solidFill>
-                  <a:srgbClr val="31424A"/>
-                </a:solidFill>
-                <a:latin typeface="Arial" pitchFamily="34" charset="0"/>
-                <a:ea typeface="Arial" pitchFamily="34" charset="-122"/>
-                <a:cs typeface="Arial" pitchFamily="34" charset="-120"/>
-              </a:rPr>
-              <a:t>تعميم تدريجي على باقي القطع بناءً على النتائج المسجَّلة فعليًا.</a:t>
-            </a:r>
-            <a:endParaRPr lang="en-US" sz="1200" dirty="0"/>
-          </a:p>
-        </p:txBody>
-      </p:sp>
-      <p:sp>
-        <p:nvSpPr>
-          <p:cNvPr id="24" name="Text 22"/>
-          <p:cNvSpPr txBox="1"/>
-          <p:nvPr/>
-        </p:nvSpPr>
-        <p:spPr>
-          <a:xfrm>
-            <a:off x="594360" y="4983480"/>
-            <a:ext cx="11002975" cy="822960"/>
+              <a:t>تُقرأ بتحفّظ</a:t>
+            </a:r>
+            <a:endParaRPr lang="en-US" sz="1300" dirty="0"/>
+          </a:p>
+        </p:txBody>
+      </p:sp>
+      <p:sp>
+        <p:nvSpPr>
+          <p:cNvPr id="7" name="Text 4"/>
+          <p:cNvSpPr txBox="1"/>
+          <p:nvPr/>
+        </p:nvSpPr>
+        <p:spPr>
+          <a:xfrm>
+            <a:off x="8503920" y="2560320"/>
+            <a:ext cx="2834640" cy="3017520"/>
           </a:xfrm>
           <a:prstGeom prst="rect">
             <a:avLst/>
@@ -8290,23 +12896,52 @@
               <a:buNone/>
             </a:pPr>
             <a:r>
-              <a:rPr lang="en-US" sz="1250" i="1" dirty="0">
-                <a:solidFill>
-                  <a:srgbClr val="6C8089"/>
-                </a:solidFill>
-                <a:latin typeface="Arial" pitchFamily="34" charset="0"/>
-                <a:ea typeface="Arial" pitchFamily="34" charset="-122"/>
-                <a:cs typeface="Arial" pitchFamily="34" charset="-120"/>
-              </a:rPr>
-              <a:t>قاعدة الجرعة واحدة في كل مكان: 3 غرامات لكل لتر من التربة النافعة. ما يتغير من أرض إلى أخرى هو حجم التربة الذي تستكشفه الجذور فعليًا.</a:t>
-            </a:r>
-            <a:endParaRPr lang="en-US" sz="1250" dirty="0"/>
-          </a:p>
-        </p:txBody>
-      </p:sp>
-      <p:sp>
-        <p:nvSpPr>
-          <p:cNvPr id="25" name="Text 23"/>
+              <a:rPr lang="en-US" sz="1200" dirty="0">
+                <a:solidFill>
+                  <a:srgbClr val="31424A"/>
+                </a:solidFill>
+                <a:latin typeface="Arial" pitchFamily="34" charset="0"/>
+                <a:ea typeface="Arial" pitchFamily="34" charset="-122"/>
+                <a:cs typeface="Arial" pitchFamily="34" charset="-120"/>
+              </a:rPr>
+              <a:t>نطاقات يعتمدها حاسب الجرعات على موقعنا، لمحصول يُدار إدارة عادية مع وضع EVERGREEN® عند الزراعة.</a:t>
+            </a:r>
+            <a:endParaRPr lang="en-US" sz="1200" dirty="0"/>
+          </a:p>
+          <a:p>
+            <a:pPr rtl="1" algn="r" indent="0" marL="0">
+              <a:lnSpc>
+                <a:spcPct val="125000"/>
+              </a:lnSpc>
+              <a:buNone/>
+            </a:pPr>
+            <a:endParaRPr lang="en-US" sz="1200" dirty="0"/>
+          </a:p>
+          <a:p>
+            <a:pPr rtl="1" algn="r" indent="0" marL="0">
+              <a:lnSpc>
+                <a:spcPct val="125000"/>
+              </a:lnSpc>
+              <a:buNone/>
+            </a:pPr>
+            <a:r>
+              <a:rPr lang="en-US" sz="1200" dirty="0">
+                <a:solidFill>
+                  <a:srgbClr val="31424A"/>
+                </a:solidFill>
+                <a:latin typeface="Arial" pitchFamily="34" charset="0"/>
+                <a:ea typeface="Arial" pitchFamily="34" charset="-122"/>
+                <a:cs typeface="Arial" pitchFamily="34" charset="-120"/>
+              </a:rPr>
+              <a:t>النتيجة الفعلية تتوقف على التربة والمناخ وأسلوب الإدارة. أما الحبوب فلا نعلن فيها أي زيادة دون تجربة ميدانية.</a:t>
+            </a:r>
+            <a:endParaRPr lang="en-US" sz="1200" dirty="0"/>
+          </a:p>
+        </p:txBody>
+      </p:sp>
+      <p:sp>
+        <p:nvSpPr>
+          <p:cNvPr id="8" name="Text 5"/>
           <p:cNvSpPr txBox="1"/>
           <p:nvPr/>
         </p:nvSpPr>
@@ -8347,7 +12982,7 @@
       </p:sp>
       <p:sp>
         <p:nvSpPr>
-          <p:cNvPr id="26" name="Text 24"/>
+          <p:cNvPr id="9" name="Text 6"/>
           <p:cNvSpPr txBox="1"/>
           <p:nvPr/>
         </p:nvSpPr>

--- a/public/documents/countries/egypte.pptx
+++ b/public/documents/countries/egypte.pptx
@@ -3744,7 +3744,7 @@
       </p:sp>
       <p:pic>
         <p:nvPicPr>
-          <p:cNvPr id="5" name="Image 1" descr="C:\Users\Utilisateur\dev\green-solutions-web\public\images\logo-icon.png">    </p:cNvPr>
+          <p:cNvPr id="5" name="Image 1" descr="C:\Users\Utilisateur\dev\gsw-dossiers\public\images\logo-icon.png">    </p:cNvPr>
           <p:cNvPicPr>
             <a:picLocks noChangeAspect="1"/>
           </p:cNvPicPr>
@@ -3768,7 +3768,7 @@
       </p:pic>
       <p:pic>
         <p:nvPicPr>
-          <p:cNvPr id="6" name="Image 2" descr="C:\Users\Utilisateur\dev\green-solutions-web\scripts\dossiers\drapeaux\egypte.png">    </p:cNvPr>
+          <p:cNvPr id="6" name="Image 2" descr="C:\Users\Utilisateur\dev\gsw-dossiers\scripts\dossiers\drapeaux\egypte.png">    </p:cNvPr>
           <p:cNvPicPr>
             <a:picLocks noChangeAspect="1"/>
           </p:cNvPicPr>
@@ -9535,7 +9535,7 @@
                 <a:ea typeface="Arial" pitchFamily="34" charset="-122"/>
                 <a:cs typeface="Arial" pitchFamily="34" charset="-120"/>
               </a:rPr>
-              <a:t>contact@evergreen-ecosorb.com · 821 Chemin des Clapiers, 83220 Le Pradet, France</a:t>
+              <a:t>contact@evergreen-ecosorb.com · Green Solutions Groupe AIM SA, 46, route de la Condémine, 1475 Forel, Switzerland</a:t>
             </a:r>
             <a:endParaRPr lang="en-US" sz="1400" dirty="0"/>
           </a:p>
@@ -9543,7 +9543,7 @@
       </p:sp>
       <p:pic>
         <p:nvPicPr>
-          <p:cNvPr id="6" name="Image 1" descr="C:\Users\Utilisateur\dev\green-solutions-web\scripts\dossiers\sceau-aim-clair.png">    </p:cNvPr>
+          <p:cNvPr id="6" name="Image 1" descr="C:\Users\Utilisateur\dev\gsw-dossiers\scripts\dossiers\sceau-aim-clair.png">    </p:cNvPr>
           <p:cNvPicPr>
             <a:picLocks noChangeAspect="1"/>
           </p:cNvPicPr>

--- a/public/documents/countries/egypte.pptx
+++ b/public/documents/countries/egypte.pptx
@@ -3744,7 +3744,7 @@
       </p:sp>
       <p:pic>
         <p:nvPicPr>
-          <p:cNvPr id="5" name="Image 1" descr="C:\Users\Utilisateur\dev\gsw-dossiers\public\images\logo-icon.png">    </p:cNvPr>
+          <p:cNvPr id="5" name="Image 1" descr="C:\Users\Utilisateur\dev\green-solutions-web\public\images\logo-icon.png">    </p:cNvPr>
           <p:cNvPicPr>
             <a:picLocks noChangeAspect="1"/>
           </p:cNvPicPr>
@@ -3768,7 +3768,7 @@
       </p:pic>
       <p:pic>
         <p:nvPicPr>
-          <p:cNvPr id="6" name="Image 2" descr="C:\Users\Utilisateur\dev\gsw-dossiers\scripts\dossiers\drapeaux\egypte.png">    </p:cNvPr>
+          <p:cNvPr id="6" name="Image 2" descr="C:\Users\Utilisateur\dev\green-solutions-web\scripts\dossiers\drapeaux\egypte.png">    </p:cNvPr>
           <p:cNvPicPr>
             <a:picLocks noChangeAspect="1"/>
           </p:cNvPicPr>
@@ -3783,7 +3783,7 @@
         <p:spPr>
           <a:xfrm>
             <a:off x="6577279" y="1389888"/>
-            <a:ext cx="1965960" cy="1310640"/>
+            <a:ext cx="1964425" cy="1310640"/>
           </a:xfrm>
           <a:prstGeom prst="rect">
             <a:avLst/>
@@ -3799,7 +3799,7 @@
         <p:spPr>
           <a:xfrm>
             <a:off x="6577279" y="1389888"/>
-            <a:ext cx="1965960" cy="1310640"/>
+            <a:ext cx="1964425" cy="1310640"/>
           </a:xfrm>
           <a:prstGeom prst="rect">
             <a:avLst/>
@@ -9053,6 +9053,30 @@
             </a:r>
             <a:endParaRPr lang="en-US" sz="1350" dirty="0"/>
           </a:p>
+          <a:p>
+            <a:pPr algn="r" marL="342900" indent="-342900">
+              <a:lnSpc>
+                <a:spcPct val="122000"/>
+              </a:lnSpc>
+              <a:spcAft>
+                <a:spcPts val="1000"/>
+              </a:spcAft>
+              <a:buSzPct val="100000"/>
+              <a:buChar char="•"/>
+            </a:pPr>
+            <a:r>
+              <a:rPr lang="en-US" sz="1350" dirty="0">
+                <a:solidFill>
+                  <a:srgbClr val="31424A"/>
+                </a:solidFill>
+                <a:latin typeface="Arial" pitchFamily="34" charset="0"/>
+                <a:ea typeface="Arial" pitchFamily="34" charset="-122"/>
+                <a:cs typeface="Arial" pitchFamily="34" charset="-120"/>
+              </a:rPr>
+              <a:t>الصور الفوتوغرافية: Myousry6666 (CC BY-SA 4.0) — عبر ويكيميديا كومنز.</a:t>
+            </a:r>
+            <a:endParaRPr lang="en-US" sz="1350" dirty="0"/>
+          </a:p>
         </p:txBody>
       </p:sp>
       <p:sp>
@@ -9543,7 +9567,7 @@
       </p:sp>
       <p:pic>
         <p:nvPicPr>
-          <p:cNvPr id="6" name="Image 1" descr="C:\Users\Utilisateur\dev\gsw-dossiers\scripts\dossiers\sceau-aim-clair.png">    </p:cNvPr>
+          <p:cNvPr id="6" name="Image 1" descr="C:\Users\Utilisateur\dev\green-solutions-web\scripts\dossiers\sceau-aim-clair.png">    </p:cNvPr>
           <p:cNvPicPr>
             <a:picLocks noChangeAspect="1"/>
           </p:cNvPicPr>

--- a/public/documents/countries/egypte.pptx
+++ b/public/documents/countries/egypte.pptx
@@ -23,9 +23,10 @@
     <p:sldId id="271" r:id="rId17"/>
     <p:sldId id="272" r:id="rId18"/>
     <p:sldId id="273" r:id="rId19"/>
+    <p:sldId id="274" r:id="rId20"/>
   </p:sldIdLst>
   <p:notesMasterIdLst>
-    <p:notesMasterId r:id="rId20"/>
+    <p:notesMasterId r:id="rId21"/>
   </p:notesMasterIdLst>
   <p:sldSz cx="12192000" cy="6858000"/>
   <p:notesSz cx="6858000" cy="12192000"/>
@@ -124,7 +125,266 @@
 </p:presentation>
 </file>
 
-<file path=ppt/charts/chart25.xml><?xml version="1.0" encoding="utf-8"?>
+<file path=ppt/charts/chart40.xml><?xml version="1.0" encoding="utf-8"?>
+<c:chartSpace xmlns:c="http://schemas.openxmlformats.org/drawingml/2006/chart" xmlns:a="http://schemas.openxmlformats.org/drawingml/2006/main" xmlns:r="http://schemas.openxmlformats.org/officeDocument/2006/relationships">
+  <c:date1904 val="0"/>
+  <c:roundedCorners val="1"/>
+  <c:chart>
+    <c:autoTitleDeleted val="1"/>
+    <c:plotArea>
+      <c:layout/>
+      <c:barChart>
+        <c:barDir val="col"/>
+        <c:grouping val="clustered"/>
+        <c:varyColors val="0"/>
+        <c:ser>
+          <c:idx val="0"/>
+          <c:order val="0"/>
+          <c:tx>
+            <c:strRef>
+              <c:f>Sheet1!$B$1</c:f>
+              <c:strCache>
+                <c:ptCount val="1"/>
+                <c:pt idx="0">
+                  <c:v>مؤشر عالمي لعدد فترات الجفاف ومدتها</c:v>
+                </c:pt>
+              </c:strCache>
+            </c:strRef>
+          </c:tx>
+          <c:spPr>
+            <a:solidFill>
+              <a:srgbClr val="1C5A73"/>
+            </a:solidFill>
+            <a:effectLst/>
+          </c:spPr>
+          <c:invertIfNegative val="0"/>
+          <c:dLbls>
+            <c:numFmt formatCode="[$-401]0" sourceLinked="0"/>
+            <c:txPr>
+              <a:bodyPr/>
+              <a:lstStyle/>
+              <a:p>
+                <a:pPr>
+                  <a:defRPr b="0" i="0" strike="noStrike" sz="1100" u="none">
+                    <a:solidFill>
+                      <a:srgbClr val="0E3546"/>
+                    </a:solidFill>
+                    <a:latin typeface="Calibri"/>
+                  </a:defRPr>
+                </a:pPr>
+              </a:p>
+            </c:txPr>
+            <c:showLegendKey val="0"/>
+            <c:showVal val="1"/>
+            <c:showCatName val="0"/>
+            <c:showSerName val="0"/>
+            <c:showPercent val="0"/>
+            <c:showBubbleSize val="0"/>
+            <c:showLeaderLines val="0"/>
+          </c:dLbls>
+          <c:dPt>
+            <c:idx val="0"/>
+            <c:invertIfNegative val="0"/>
+            <c:bubble3D val="0"/>
+            <c:spPr>
+              <a:solidFill>
+                <a:srgbClr val="1C5A73"/>
+              </a:solidFill>
+              <a:effectLst/>
+            </c:spPr>
+          </c:dPt>
+          <c:dPt>
+            <c:idx val="1"/>
+            <c:invertIfNegative val="0"/>
+            <c:bubble3D val="0"/>
+            <c:spPr>
+              <a:solidFill>
+                <a:srgbClr val="E0A33E"/>
+              </a:solidFill>
+              <a:effectLst/>
+            </c:spPr>
+          </c:dPt>
+          <c:cat>
+            <c:multiLvlStrRef>
+              <c:f>Sheet1!$A$2:$A$3</c:f>
+              <c:multiLvlStrCache>
+                <c:ptCount val="2"/>
+                <c:lvl>
+                  <c:pt idx="0">
+                    <c:v>1980–1999</c:v>
+                  </c:pt>
+                  <c:pt idx="1">
+                    <c:v>منذ 2000</c:v>
+                  </c:pt>
+                </c:lvl>
+              </c:multiLvlStrCache>
+            </c:multiLvlStrRef>
+          </c:cat>
+          <c:val>
+            <c:numRef>
+              <c:f>Sheet1!$B$2:$B$3</c:f>
+              <c:numCache>
+                <c:formatCode>General</c:formatCode>
+                <c:ptCount val="2"/>
+                <c:pt idx="0">
+                  <c:v>100</c:v>
+                </c:pt>
+                <c:pt idx="1">
+                  <c:v>129</c:v>
+                </c:pt>
+              </c:numCache>
+            </c:numRef>
+          </c:val>
+        </c:ser>
+        <c:dLbls>
+          <c:numFmt formatCode="[$-401]0" sourceLinked="0"/>
+          <c:txPr>
+            <a:bodyPr/>
+            <a:lstStyle/>
+            <a:p>
+              <a:pPr>
+                <a:defRPr b="0" i="0" strike="noStrike" sz="1100" u="none">
+                  <a:solidFill>
+                    <a:srgbClr val="0E3546"/>
+                  </a:solidFill>
+                  <a:latin typeface="Calibri"/>
+                </a:defRPr>
+              </a:pPr>
+            </a:p>
+          </c:txPr>
+          <c:showLegendKey val="0"/>
+          <c:showVal val="1"/>
+          <c:showCatName val="0"/>
+          <c:showSerName val="0"/>
+          <c:showPercent val="0"/>
+          <c:showBubbleSize val="0"/>
+          <c:showLeaderLines val="0"/>
+        </c:dLbls>
+        <c:gapWidth val="150"/>
+        <c:overlap val="0"/>
+        <c:axId val="2094734554"/>
+        <c:axId val="2094734552"/>
+        <c:axId val="2094734556"/>
+      </c:barChart>
+      <c:catAx>
+        <c:axId val="2094734554"/>
+        <c:scaling>
+          <c:orientation val="minMax"/>
+        </c:scaling>
+        <c:delete val="0"/>
+        <c:axPos val="b"/>
+        <c:numFmt formatCode="General" sourceLinked="1"/>
+        <c:majorTickMark val="out"/>
+        <c:minorTickMark val="none"/>
+        <c:tickLblPos val="low"/>
+        <c:spPr>
+          <a:ln w="12700" cap="flat">
+            <a:solidFill>
+              <a:srgbClr val="888888"/>
+            </a:solidFill>
+            <a:prstDash val="solid"/>
+            <a:round/>
+          </a:ln>
+        </c:spPr>
+        <c:txPr>
+          <a:bodyPr/>
+          <a:lstStyle/>
+          <a:p>
+            <a:pPr>
+              <a:defRPr sz="1100" b="0" i="0" u="none" strike="noStrike">
+                <a:solidFill>
+                  <a:srgbClr val="6C8089"/>
+                </a:solidFill>
+                <a:latin typeface="Calibri"/>
+              </a:defRPr>
+            </a:pPr>
+            <a:endParaRPr lang="en-US"/>
+          </a:p>
+        </c:txPr>
+        <c:crossAx val="2094734552"/>
+        <c:crosses val="autoZero"/>
+        <c:auto val="1"/>
+        <c:lblAlgn val="ctr"/>
+        <c:noMultiLvlLbl val="1"/>
+      </c:catAx>
+      <c:valAx>
+        <c:axId val="2094734552"/>
+        <c:scaling>
+          <c:orientation val="minMax"/>
+          <c:max val="140"/>
+          <c:min val="0"/>
+        </c:scaling>
+        <c:delete val="0"/>
+        <c:axPos val="l"/>
+        <c:majorGridlines>
+          <c:spPr>
+            <a:ln w="9525" cap="flat">
+              <a:solidFill>
+                <a:srgbClr val="D6E2E7"/>
+              </a:solidFill>
+              <a:prstDash val="solid"/>
+              <a:round/>
+            </a:ln>
+          </c:spPr>
+        </c:majorGridlines>
+        <c:numFmt formatCode="General" sourceLinked="0"/>
+        <c:majorTickMark val="out"/>
+        <c:minorTickMark val="none"/>
+        <c:tickLblPos val="nextTo"/>
+        <c:spPr>
+          <a:ln w="12700" cap="flat">
+            <a:solidFill>
+              <a:srgbClr val="888888"/>
+            </a:solidFill>
+            <a:prstDash val="solid"/>
+            <a:round/>
+          </a:ln>
+        </c:spPr>
+        <c:txPr>
+          <a:bodyPr/>
+          <a:lstStyle/>
+          <a:p>
+            <a:pPr>
+              <a:defRPr sz="1100" b="0" i="0" u="none" strike="noStrike">
+                <a:solidFill>
+                  <a:srgbClr val="6C8089"/>
+                </a:solidFill>
+                <a:latin typeface="Calibri"/>
+              </a:defRPr>
+            </a:pPr>
+            <a:endParaRPr lang="en-US"/>
+          </a:p>
+        </c:txPr>
+        <c:crossAx val="2094734554"/>
+        <c:crosses val="autoZero"/>
+        <c:crossBetween val="between"/>
+        <c:majorUnit val="20"/>
+      </c:valAx>
+      <c:spPr>
+        <a:noFill/>
+        <a:ln>
+          <a:noFill/>
+        </a:ln>
+        <a:effectLst/>
+      </c:spPr>
+    </c:plotArea>
+    <c:plotVisOnly val="1"/>
+    <c:dispBlanksAs val="span"/>
+  </c:chart>
+  <c:spPr>
+    <a:noFill/>
+    <a:ln>
+      <a:noFill/>
+    </a:ln>
+    <a:effectLst/>
+  </c:spPr>
+  <c:externalData r:id="rId1">
+    <c:autoUpdate val="0"/>
+  </c:externalData>
+</c:chartSpace>
+</file>
+
+<file path=ppt/charts/chart41.xml><?xml version="1.0" encoding="utf-8"?>
 <c:chartSpace xmlns:c="http://schemas.openxmlformats.org/drawingml/2006/chart" xmlns:a="http://schemas.openxmlformats.org/drawingml/2006/main" xmlns:r="http://schemas.openxmlformats.org/officeDocument/2006/relationships">
   <c:date1904 val="0"/>
   <c:roundedCorners val="1"/>
@@ -369,7 +629,7 @@
 </c:chartSpace>
 </file>
 
-<file path=ppt/charts/chart26.xml><?xml version="1.0" encoding="utf-8"?>
+<file path=ppt/charts/chart42.xml><?xml version="1.0" encoding="utf-8"?>
 <c:chartSpace xmlns:c="http://schemas.openxmlformats.org/drawingml/2006/chart" xmlns:a="http://schemas.openxmlformats.org/drawingml/2006/main" xmlns:r="http://schemas.openxmlformats.org/officeDocument/2006/relationships">
   <c:date1904 val="0"/>
   <c:roundedCorners val="1"/>
@@ -677,7 +937,7 @@
 </c:chartSpace>
 </file>
 
-<file path=ppt/charts/chart27.xml><?xml version="1.0" encoding="utf-8"?>
+<file path=ppt/charts/chart43.xml><?xml version="1.0" encoding="utf-8"?>
 <c:chartSpace xmlns:c="http://schemas.openxmlformats.org/drawingml/2006/chart" xmlns:a="http://schemas.openxmlformats.org/drawingml/2006/main" xmlns:r="http://schemas.openxmlformats.org/officeDocument/2006/relationships">
   <c:date1904 val="0"/>
   <c:roundedCorners val="1"/>
@@ -1042,7 +1302,7 @@
 </c:chartSpace>
 </file>
 
-<file path=ppt/charts/chart28.xml><?xml version="1.0" encoding="utf-8"?>
+<file path=ppt/charts/chart44.xml><?xml version="1.0" encoding="utf-8"?>
 <c:chartSpace xmlns:c="http://schemas.openxmlformats.org/drawingml/2006/chart" xmlns:a="http://schemas.openxmlformats.org/drawingml/2006/main" xmlns:r="http://schemas.openxmlformats.org/officeDocument/2006/relationships">
   <c:date1904 val="0"/>
   <c:roundedCorners val="1"/>
@@ -2606,6 +2866,94 @@
             <a:fld id="{F7021451-1387-4CA6-816F-3879F97B5CBC}" type="slidenum">
               <a:rPr lang="en-US"/>
               <a:t>18</a:t>
+            </a:fld>
+            <a:endParaRPr lang="en-US"/>
+          </a:p>
+        </p:txBody>
+      </p:sp>
+    </p:spTree>
+    <p:extLst>
+      <p:ext uri="{BB962C8B-B14F-4D97-AF65-F5344CB8AC3E}">
+        <p14:creationId xmlns:p14="http://schemas.microsoft.com/office/powerpoint/2010/main" val="1024086991"/>
+      </p:ext>
+    </p:extLst>
+  </p:cSld>
+  <p:clrMapOvr>
+    <a:masterClrMapping/>
+  </p:clrMapOvr>
+</p:notes>
+</file>
+
+<file path=ppt/notesSlides/notesSlide19.xml><?xml version="1.0" encoding="utf-8"?>
+<p:notes xmlns:a="http://schemas.openxmlformats.org/drawingml/2006/main" xmlns:r="http://schemas.openxmlformats.org/officeDocument/2006/relationships" xmlns:p="http://schemas.openxmlformats.org/presentationml/2006/main">
+  <p:cSld>
+    <p:spTree>
+      <p:nvGrpSpPr>
+        <p:cNvPr id="1" name=""/>
+        <p:cNvGrpSpPr/>
+        <p:nvPr/>
+      </p:nvGrpSpPr>
+      <p:grpSpPr>
+        <a:xfrm>
+          <a:off x="0" y="0"/>
+          <a:ext cx="0" cy="0"/>
+          <a:chOff x="0" y="0"/>
+          <a:chExt cx="0" cy="0"/>
+        </a:xfrm>
+      </p:grpSpPr>
+      <p:sp>
+        <p:nvSpPr>
+          <p:cNvPr id="2" name="Slide Image Placeholder 1"/>
+          <p:cNvSpPr>
+            <a:spLocks noGrp="1" noRot="1" noChangeAspect="1"/>
+          </p:cNvSpPr>
+          <p:nvPr>
+            <p:ph type="sldImg"/>
+          </p:nvPr>
+        </p:nvSpPr>
+        <p:spPr/>
+      </p:sp>
+      <p:sp>
+        <p:nvSpPr>
+          <p:cNvPr id="3" name="Notes Placeholder 2"/>
+          <p:cNvSpPr>
+            <a:spLocks noGrp="1"/>
+          </p:cNvSpPr>
+          <p:nvPr>
+            <p:ph type="body" idx="1"/>
+          </p:nvPr>
+        </p:nvSpPr>
+        <p:spPr/>
+        <p:txBody>
+          <a:bodyPr/>
+          <a:lstStyle/>
+          <a:p>
+            <a:r>
+              <a:rPr lang="en-US" dirty="0"/>
+              <a:t/>
+            </a:r>
+            <a:endParaRPr lang="en-US" dirty="0"/>
+          </a:p>
+        </p:txBody>
+      </p:sp>
+      <p:sp>
+        <p:nvSpPr>
+          <p:cNvPr id="4" name="Slide Number Placeholder 3"/>
+          <p:cNvSpPr>
+            <a:spLocks noGrp="1"/>
+          </p:cNvSpPr>
+          <p:nvPr>
+            <p:ph type="sldNum" sz="quarter" idx="10"/>
+          </p:nvPr>
+        </p:nvSpPr>
+        <p:spPr/>
+        <p:txBody>
+          <a:bodyPr/>
+          <a:lstStyle/>
+          <a:p>
+            <a:fld id="{F7021451-1387-4CA6-816F-3879F97B5CBC}" type="slidenum">
+              <a:rPr lang="en-US"/>
+              <a:t>19</a:t>
             </a:fld>
             <a:endParaRPr lang="en-US"/>
           </a:p>
@@ -3744,7 +4092,7 @@
       </p:sp>
       <p:pic>
         <p:nvPicPr>
-          <p:cNvPr id="5" name="Image 1" descr="C:\Users\Utilisateur\dev\green-solutions-web\public\images\logo-icon.png">    </p:cNvPr>
+          <p:cNvPr id="5" name="Image 1" descr="/workspace/scratch/50eb4f7d8e13/green-solutions-web/public/images/logo-icon.png">    </p:cNvPr>
           <p:cNvPicPr>
             <a:picLocks noChangeAspect="1"/>
           </p:cNvPicPr>
@@ -3768,7 +4116,7 @@
       </p:pic>
       <p:pic>
         <p:nvPicPr>
-          <p:cNvPr id="6" name="Image 2" descr="C:\Users\Utilisateur\dev\green-solutions-web\scripts\dossiers\drapeaux\egypte.png">    </p:cNvPr>
+          <p:cNvPr id="6" name="Image 2" descr="/workspace/scratch/50eb4f7d8e13/green-solutions-web/scripts/dossiers/drapeaux/egypte.png">    </p:cNvPr>
           <p:cNvPicPr>
             <a:picLocks noChangeAspect="1"/>
           </p:cNvPicPr>
@@ -4118,7 +4466,7 @@
                 <a:ea typeface="Arial" pitchFamily="34" charset="-122"/>
                 <a:cs typeface="Arial" pitchFamily="34" charset="-120"/>
               </a:rPr>
-              <a:t>ما نقترحه</a:t>
+              <a:t>إمكانات الإنتاج</a:t>
             </a:r>
             <a:endParaRPr lang="en-US" sz="1150" dirty="0"/>
           </a:p>
@@ -4157,340 +4505,42 @@
                 <a:ea typeface="Arial" pitchFamily="34" charset="-122"/>
                 <a:cs typeface="Arial" pitchFamily="34" charset="-120"/>
               </a:rPr>
-              <a:t>تقنيتان لقيدين مختلفين</a:t>
+              <a:t>الزيادة المتوقعة في الإنتاج حسب المحصول</a:t>
             </a:r>
             <a:endParaRPr lang="en-US" sz="3000" dirty="0"/>
           </a:p>
         </p:txBody>
       </p:sp>
-      <p:sp>
-        <p:nvSpPr>
-          <p:cNvPr id="4" name="Text 2"/>
-          <p:cNvSpPr txBox="1"/>
-          <p:nvPr/>
-        </p:nvSpPr>
-        <p:spPr>
-          <a:xfrm>
-            <a:off x="594360" y="1783080"/>
-            <a:ext cx="5227168" cy="411480"/>
-          </a:xfrm>
-          <a:prstGeom prst="rect">
-            <a:avLst/>
-          </a:prstGeom>
-          <a:noFill/>
-          <a:ln/>
-        </p:spPr>
-        <p:txBody>
-          <a:bodyPr wrap="square" lIns="0" tIns="0" rIns="0" bIns="0" rtlCol="0" anchor="ctr"/>
-          <a:lstStyle/>
-          <a:p>
-            <a:pPr rtl="1" algn="r" indent="0" marL="0">
-              <a:buNone/>
-            </a:pPr>
-            <a:r>
-              <a:rPr lang="en-US" sz="1600" b="1" dirty="0">
-                <a:solidFill>
-                  <a:srgbClr val="1C5A73"/>
-                </a:solidFill>
-                <a:latin typeface="Arial" pitchFamily="34" charset="0"/>
-                <a:ea typeface="Arial" pitchFamily="34" charset="-122"/>
-                <a:cs typeface="Arial" pitchFamily="34" charset="-120"/>
-              </a:rPr>
-              <a:t>EVERGREEN® — الاحتفاظ بالماء</a:t>
-            </a:r>
-            <a:endParaRPr lang="en-US" sz="1600" dirty="0"/>
-          </a:p>
-        </p:txBody>
-      </p:sp>
-      <p:sp>
-        <p:nvSpPr>
-          <p:cNvPr id="5" name="Text 3"/>
-          <p:cNvSpPr txBox="1"/>
-          <p:nvPr/>
-        </p:nvSpPr>
-        <p:spPr>
-          <a:xfrm>
-            <a:off x="594360" y="2286000"/>
-            <a:ext cx="5227168" cy="2468880"/>
-          </a:xfrm>
-          <a:prstGeom prst="rect">
-            <a:avLst/>
-          </a:prstGeom>
-          <a:noFill/>
-          <a:ln/>
-        </p:spPr>
-        <p:txBody>
-          <a:bodyPr wrap="square" lIns="0" tIns="0" rIns="0" bIns="0" rtlCol="0" anchor="t"/>
-          <a:lstStyle/>
-          <a:p>
-            <a:pPr algn="r" marL="342900" indent="-342900">
-              <a:lnSpc>
-                <a:spcPct val="122000"/>
-              </a:lnSpc>
-              <a:spcAft>
-                <a:spcPts val="1000"/>
-              </a:spcAft>
-              <a:buSzPct val="100000"/>
-              <a:buChar char="•"/>
-            </a:pPr>
-            <a:r>
-              <a:rPr lang="en-US" sz="1350" dirty="0">
-                <a:solidFill>
-                  <a:srgbClr val="31424A"/>
-                </a:solidFill>
-                <a:latin typeface="Arial" pitchFamily="34" charset="0"/>
-                <a:ea typeface="Arial" pitchFamily="34" charset="-122"/>
-                <a:cs typeface="Arial" pitchFamily="34" charset="-120"/>
-              </a:rPr>
-              <a:t>مادة حابسة للماء أساسها البوتاسيوم، تُوضع في منطقة الجذور عند الزراعة أو عند تجديد الغرس.</a:t>
-            </a:r>
-            <a:endParaRPr lang="en-US" sz="1350" dirty="0"/>
-          </a:p>
-          <a:p>
-            <a:pPr algn="r" marL="342900" indent="-342900">
-              <a:lnSpc>
-                <a:spcPct val="122000"/>
-              </a:lnSpc>
-              <a:spcAft>
-                <a:spcPts val="1000"/>
-              </a:spcAft>
-              <a:buSzPct val="100000"/>
-              <a:buChar char="•"/>
-            </a:pPr>
-            <a:r>
-              <a:rPr lang="en-US" sz="1350" dirty="0">
-                <a:solidFill>
-                  <a:srgbClr val="31424A"/>
-                </a:solidFill>
-                <a:latin typeface="Arial" pitchFamily="34" charset="0"/>
-                <a:ea typeface="Arial" pitchFamily="34" charset="-122"/>
-                <a:cs typeface="Arial" pitchFamily="34" charset="-120"/>
-              </a:rPr>
-              <a:t>تلتقط ماء الري وتعيده إلى النبات تدريجيًا، فتلغي الإجهاد المائي في المراحل الحرجة بين ريّتين.</a:t>
-            </a:r>
-            <a:endParaRPr lang="en-US" sz="1350" dirty="0"/>
-          </a:p>
-          <a:p>
-            <a:pPr algn="r" marL="342900" indent="-342900">
-              <a:lnSpc>
-                <a:spcPct val="122000"/>
-              </a:lnSpc>
-              <a:spcAft>
-                <a:spcPts val="1000"/>
-              </a:spcAft>
-              <a:buSzPct val="100000"/>
-              <a:buChar char="•"/>
-            </a:pPr>
-            <a:r>
-              <a:rPr lang="en-US" sz="1350" dirty="0">
-                <a:solidFill>
-                  <a:srgbClr val="31424A"/>
-                </a:solidFill>
-                <a:latin typeface="Arial" pitchFamily="34" charset="0"/>
-                <a:ea typeface="Arial" pitchFamily="34" charset="-122"/>
-                <a:cs typeface="Arial" pitchFamily="34" charset="-120"/>
-              </a:rPr>
-              <a:t>قدرة امتصاص تبلغ نحو 300 ضعف وزنها، ومفعول مفيد يمتد من 3 إلى 4 سنوات في التربة.</a:t>
-            </a:r>
-            <a:endParaRPr lang="en-US" sz="1350" dirty="0"/>
-          </a:p>
-          <a:p>
-            <a:pPr algn="r" marL="342900" indent="-342900">
-              <a:lnSpc>
-                <a:spcPct val="122000"/>
-              </a:lnSpc>
-              <a:spcAft>
-                <a:spcPts val="1000"/>
-              </a:spcAft>
-              <a:buSzPct val="100000"/>
-              <a:buChar char="•"/>
-            </a:pPr>
-            <a:r>
-              <a:rPr lang="en-US" sz="1350" dirty="0">
-                <a:solidFill>
-                  <a:srgbClr val="31424A"/>
-                </a:solidFill>
-                <a:latin typeface="Arial" pitchFamily="34" charset="0"/>
-                <a:ea typeface="Arial" pitchFamily="34" charset="-122"/>
-                <a:cs typeface="Arial" pitchFamily="34" charset="-120"/>
-              </a:rPr>
-              <a:t>تتحلل بنسبة 20 إلى 25 % سنويًا، دون تراكم في التربة ودون خطر جرعة زائدة.</a:t>
-            </a:r>
-            <a:endParaRPr lang="en-US" sz="1350" dirty="0"/>
-          </a:p>
-        </p:txBody>
-      </p:sp>
-      <p:sp>
-        <p:nvSpPr>
-          <p:cNvPr id="6" name="Text 4"/>
-          <p:cNvSpPr txBox="1"/>
-          <p:nvPr/>
-        </p:nvSpPr>
-        <p:spPr>
-          <a:xfrm>
-            <a:off x="6370168" y="1783080"/>
-            <a:ext cx="5227168" cy="411480"/>
-          </a:xfrm>
-          <a:prstGeom prst="rect">
-            <a:avLst/>
-          </a:prstGeom>
-          <a:noFill/>
-          <a:ln/>
-        </p:spPr>
-        <p:txBody>
-          <a:bodyPr wrap="square" lIns="0" tIns="0" rIns="0" bIns="0" rtlCol="0" anchor="ctr"/>
-          <a:lstStyle/>
-          <a:p>
-            <a:pPr rtl="1" algn="r" indent="0" marL="0">
-              <a:buNone/>
-            </a:pPr>
-            <a:r>
-              <a:rPr lang="en-US" sz="1600" b="1" dirty="0">
-                <a:solidFill>
-                  <a:srgbClr val="1C5A73"/>
-                </a:solidFill>
-                <a:latin typeface="Arial" pitchFamily="34" charset="0"/>
-                <a:ea typeface="Arial" pitchFamily="34" charset="-122"/>
-                <a:cs typeface="Arial" pitchFamily="34" charset="-120"/>
-              </a:rPr>
-              <a:t>ECOFERT® — التغذية دون إنهاك التربة</a:t>
-            </a:r>
-            <a:endParaRPr lang="en-US" sz="1600" dirty="0"/>
-          </a:p>
-        </p:txBody>
-      </p:sp>
-      <p:sp>
-        <p:nvSpPr>
-          <p:cNvPr id="7" name="Text 5"/>
-          <p:cNvSpPr txBox="1"/>
-          <p:nvPr/>
-        </p:nvSpPr>
-        <p:spPr>
-          <a:xfrm>
-            <a:off x="6370168" y="2286000"/>
-            <a:ext cx="5227168" cy="2468880"/>
-          </a:xfrm>
-          <a:prstGeom prst="rect">
-            <a:avLst/>
-          </a:prstGeom>
-          <a:noFill/>
-          <a:ln/>
-        </p:spPr>
-        <p:txBody>
-          <a:bodyPr wrap="square" lIns="0" tIns="0" rIns="0" bIns="0" rtlCol="0" anchor="t"/>
-          <a:lstStyle/>
-          <a:p>
-            <a:pPr algn="r" marL="342900" indent="-342900">
-              <a:lnSpc>
-                <a:spcPct val="122000"/>
-              </a:lnSpc>
-              <a:spcAft>
-                <a:spcPts val="1000"/>
-              </a:spcAft>
-              <a:buSzPct val="100000"/>
-              <a:buChar char="•"/>
-            </a:pPr>
-            <a:r>
-              <a:rPr lang="en-US" sz="1350" dirty="0">
-                <a:solidFill>
-                  <a:srgbClr val="31424A"/>
-                </a:solidFill>
-                <a:latin typeface="Arial" pitchFamily="34" charset="0"/>
-                <a:ea typeface="Arial" pitchFamily="34" charset="-122"/>
-                <a:cs typeface="Arial" pitchFamily="34" charset="-120"/>
-              </a:rPr>
-              <a:t>سماد بجرعات دقيقة من الأحماض الأمينية والنيتروجين والفوسفور والبوتاسيوم، من موارد متجددة.</a:t>
-            </a:r>
-            <a:endParaRPr lang="en-US" sz="1350" dirty="0"/>
-          </a:p>
-          <a:p>
-            <a:pPr algn="r" marL="342900" indent="-342900">
-              <a:lnSpc>
-                <a:spcPct val="122000"/>
-              </a:lnSpc>
-              <a:spcAft>
-                <a:spcPts val="1000"/>
-              </a:spcAft>
-              <a:buSzPct val="100000"/>
-              <a:buChar char="•"/>
-            </a:pPr>
-            <a:r>
-              <a:rPr lang="en-US" sz="1350" dirty="0">
-                <a:solidFill>
-                  <a:srgbClr val="31424A"/>
-                </a:solidFill>
-                <a:latin typeface="Arial" pitchFamily="34" charset="0"/>
-                <a:ea typeface="Arial" pitchFamily="34" charset="-122"/>
-                <a:cs typeface="Arial" pitchFamily="34" charset="-120"/>
-              </a:rPr>
-              <a:t>غير مخلّب: لا يستنزف المركّب الطيني الدبالي ولا يرفع الملوحة ولا نسبة النترات — نقطة حاسمة في شمال الدلتا.</a:t>
-            </a:r>
-            <a:endParaRPr lang="en-US" sz="1350" dirty="0"/>
-          </a:p>
-          <a:p>
-            <a:pPr algn="r" marL="342900" indent="-342900">
-              <a:lnSpc>
-                <a:spcPct val="122000"/>
-              </a:lnSpc>
-              <a:spcAft>
-                <a:spcPts val="1000"/>
-              </a:spcAft>
-              <a:buSzPct val="100000"/>
-              <a:buChar char="•"/>
-            </a:pPr>
-            <a:r>
-              <a:rPr lang="en-US" sz="1350" dirty="0">
-                <a:solidFill>
-                  <a:srgbClr val="31424A"/>
-                </a:solidFill>
-                <a:latin typeface="Arial" pitchFamily="34" charset="0"/>
-                <a:ea typeface="Arial" pitchFamily="34" charset="-122"/>
-                <a:cs typeface="Arial" pitchFamily="34" charset="-120"/>
-              </a:rPr>
-              <a:t>حاصل على شهادتي SOHISCERT والعضوية الأوروبية، وهو شرط دخول دفاتر شروط المشترين الأوروبيين.</a:t>
-            </a:r>
-            <a:endParaRPr lang="en-US" sz="1350" dirty="0"/>
-          </a:p>
-          <a:p>
-            <a:pPr algn="r" marL="342900" indent="-342900">
-              <a:lnSpc>
-                <a:spcPct val="122000"/>
-              </a:lnSpc>
-              <a:spcAft>
-                <a:spcPts val="1000"/>
-              </a:spcAft>
-              <a:buSzPct val="100000"/>
-              <a:buChar char="•"/>
-            </a:pPr>
-            <a:r>
-              <a:rPr lang="en-US" sz="1350" dirty="0">
-                <a:solidFill>
-                  <a:srgbClr val="31424A"/>
-                </a:solidFill>
-                <a:latin typeface="Arial" pitchFamily="34" charset="0"/>
-                <a:ea typeface="Arial" pitchFamily="34" charset="-122"/>
-                <a:cs typeface="Arial" pitchFamily="34" charset="-120"/>
-              </a:rPr>
-              <a:t>من 1 إلى 4 عبوات سعة 140 مل للهكتار، متوافق مع معدات التسميد بالري القائمة.</a:t>
-            </a:r>
-            <a:endParaRPr lang="en-US" sz="1350" dirty="0"/>
-          </a:p>
-        </p:txBody>
-      </p:sp>
-      <p:sp>
-        <p:nvSpPr>
-          <p:cNvPr id="8" name="Shape 6"/>
+      <p:graphicFrame>
+        <p:nvGraphicFramePr>
+          <p:cNvPr id="4" name="Chart 0" descr=""/>
+          <p:cNvGraphicFramePr/>
+          <p:nvPr/>
+        </p:nvGraphicFramePr>
+        <p:xfrm>
+          <a:off x="594360" y="1783080"/>
+          <a:ext cx="7360920" cy="3977640"/>
+        </p:xfrm>
+        <a:graphic xmlns:a="http://schemas.openxmlformats.org/drawingml/2006/main">
+          <a:graphicData uri="http://schemas.openxmlformats.org/drawingml/2006/chart">
+            <c:chart xmlns:c="http://schemas.openxmlformats.org/drawingml/2006/chart" r:id="rId1"/>
+          </a:graphicData>
+        </a:graphic>
+      </p:graphicFrame>
+      <p:sp>
+        <p:nvSpPr>
+          <p:cNvPr id="5" name="Shape 2"/>
           <p:cNvSpPr/>
           <p:nvPr/>
         </p:nvSpPr>
         <p:spPr>
           <a:xfrm>
-            <a:off x="594360" y="4846320"/>
-            <a:ext cx="11002975" cy="960120"/>
+            <a:off x="8275320" y="1783080"/>
+            <a:ext cx="3291840" cy="3977640"/>
           </a:xfrm>
           <a:prstGeom prst="roundRect">
             <a:avLst>
-              <a:gd name="adj" fmla="val 7619"/>
+              <a:gd name="adj" fmla="val 2778"/>
             </a:avLst>
           </a:prstGeom>
           <a:solidFill>
@@ -4506,14 +4556,53 @@
       </p:sp>
       <p:sp>
         <p:nvSpPr>
-          <p:cNvPr id="9" name="Text 7"/>
-          <p:cNvSpPr txBox="1"/>
-          <p:nvPr/>
-        </p:nvSpPr>
-        <p:spPr>
-          <a:xfrm>
-            <a:off x="822960" y="4983480"/>
-            <a:ext cx="10545775" cy="713232"/>
+          <p:cNvPr id="6" name="Text 3"/>
+          <p:cNvSpPr txBox="1"/>
+          <p:nvPr/>
+        </p:nvSpPr>
+        <p:spPr>
+          <a:xfrm>
+            <a:off x="8503920" y="2011680"/>
+            <a:ext cx="2834640" cy="457200"/>
+          </a:xfrm>
+          <a:prstGeom prst="rect">
+            <a:avLst/>
+          </a:prstGeom>
+          <a:noFill/>
+          <a:ln/>
+        </p:spPr>
+        <p:txBody>
+          <a:bodyPr wrap="square" lIns="0" tIns="0" rIns="0" bIns="0" rtlCol="0" anchor="ctr"/>
+          <a:lstStyle/>
+          <a:p>
+            <a:pPr rtl="1" algn="r" indent="0" marL="0">
+              <a:buNone/>
+            </a:pPr>
+            <a:r>
+              <a:rPr lang="en-US" sz="1300" b="1" dirty="0">
+                <a:solidFill>
+                  <a:srgbClr val="1C5A73"/>
+                </a:solidFill>
+                <a:latin typeface="Arial" pitchFamily="34" charset="0"/>
+                <a:ea typeface="Arial" pitchFamily="34" charset="-122"/>
+                <a:cs typeface="Arial" pitchFamily="34" charset="-120"/>
+              </a:rPr>
+              <a:t>تُقرأ بتحفّظ</a:t>
+            </a:r>
+            <a:endParaRPr lang="en-US" sz="1300" dirty="0"/>
+          </a:p>
+        </p:txBody>
+      </p:sp>
+      <p:sp>
+        <p:nvSpPr>
+          <p:cNvPr id="7" name="Text 4"/>
+          <p:cNvSpPr txBox="1"/>
+          <p:nvPr/>
+        </p:nvSpPr>
+        <p:spPr>
+          <a:xfrm>
+            <a:off x="8503920" y="2560320"/>
+            <a:ext cx="2834640" cy="3017520"/>
           </a:xfrm>
           <a:prstGeom prst="rect">
             <a:avLst/>
@@ -4527,28 +4616,57 @@
           <a:p>
             <a:pPr rtl="1" algn="r" indent="0" marL="0">
               <a:lnSpc>
-                <a:spcPct val="118000"/>
+                <a:spcPct val="125000"/>
               </a:lnSpc>
               <a:buNone/>
             </a:pPr>
             <a:r>
-              <a:rPr lang="en-US" sz="1100" dirty="0">
-                <a:solidFill>
-                  <a:srgbClr val="6C8089"/>
-                </a:solidFill>
-                <a:latin typeface="Arial" pitchFamily="34" charset="0"/>
-                <a:ea typeface="Arial" pitchFamily="34" charset="-122"/>
-                <a:cs typeface="Arial" pitchFamily="34" charset="-120"/>
-              </a:rPr>
-              <a:t>المنتجان يُباعان منفصلين لكنهما صُمّما ليعزّز كل منهما الآخر: المادة الحابسة تطيل بقاء الماء متاحًا، والسماد يثمّر هذا الماء المتاح دون إضعاف التربة.</a:t>
-            </a:r>
-            <a:endParaRPr lang="en-US" sz="1100" dirty="0"/>
-          </a:p>
-        </p:txBody>
-      </p:sp>
-      <p:sp>
-        <p:nvSpPr>
-          <p:cNvPr id="10" name="Text 8"/>
+              <a:rPr lang="en-US" sz="1200" dirty="0">
+                <a:solidFill>
+                  <a:srgbClr val="31424A"/>
+                </a:solidFill>
+                <a:latin typeface="Arial" pitchFamily="34" charset="0"/>
+                <a:ea typeface="Arial" pitchFamily="34" charset="-122"/>
+                <a:cs typeface="Arial" pitchFamily="34" charset="-120"/>
+              </a:rPr>
+              <a:t>نطاقات يعتمدها حاسب الجرعات على موقعنا، لمحصول يُدار إدارة عادية مع وضع EVERGREEN® عند الزراعة.</a:t>
+            </a:r>
+            <a:endParaRPr lang="en-US" sz="1200" dirty="0"/>
+          </a:p>
+          <a:p>
+            <a:pPr rtl="1" algn="r" indent="0" marL="0">
+              <a:lnSpc>
+                <a:spcPct val="125000"/>
+              </a:lnSpc>
+              <a:buNone/>
+            </a:pPr>
+            <a:endParaRPr lang="en-US" sz="1200" dirty="0"/>
+          </a:p>
+          <a:p>
+            <a:pPr rtl="1" algn="r" indent="0" marL="0">
+              <a:lnSpc>
+                <a:spcPct val="125000"/>
+              </a:lnSpc>
+              <a:buNone/>
+            </a:pPr>
+            <a:r>
+              <a:rPr lang="en-US" sz="1200" dirty="0">
+                <a:solidFill>
+                  <a:srgbClr val="31424A"/>
+                </a:solidFill>
+                <a:latin typeface="Arial" pitchFamily="34" charset="0"/>
+                <a:ea typeface="Arial" pitchFamily="34" charset="-122"/>
+                <a:cs typeface="Arial" pitchFamily="34" charset="-120"/>
+              </a:rPr>
+              <a:t>النتيجة الفعلية تتوقف على التربة والمناخ وأسلوب الإدارة. أما الحبوب فلا نعلن فيها أي زيادة دون تجربة ميدانية.</a:t>
+            </a:r>
+            <a:endParaRPr lang="en-US" sz="1200" dirty="0"/>
+          </a:p>
+        </p:txBody>
+      </p:sp>
+      <p:sp>
+        <p:nvSpPr>
+          <p:cNvPr id="8" name="Text 5"/>
           <p:cNvSpPr txBox="1"/>
           <p:nvPr/>
         </p:nvSpPr>
@@ -4589,7 +4707,7 @@
       </p:sp>
       <p:sp>
         <p:nvSpPr>
-          <p:cNvPr id="11" name="Text 9"/>
+          <p:cNvPr id="9" name="Text 6"/>
           <p:cNvSpPr txBox="1"/>
           <p:nvPr/>
         </p:nvSpPr>
@@ -4693,7 +4811,7 @@
                 <a:ea typeface="Arial" pitchFamily="34" charset="-122"/>
                 <a:cs typeface="Arial" pitchFamily="34" charset="-120"/>
               </a:rPr>
-              <a:t>بقية المنتجات</a:t>
+              <a:t>ما نقترحه</a:t>
             </a:r>
             <a:endParaRPr lang="en-US" sz="1150" dirty="0"/>
           </a:p>
@@ -4732,7 +4850,7 @@
                 <a:ea typeface="Arial" pitchFamily="34" charset="-122"/>
                 <a:cs typeface="Arial" pitchFamily="34" charset="-120"/>
               </a:rPr>
-              <a:t>حماية المحاصيل وتثبيت التربة</a:t>
+              <a:t>تقنيتان لقيدين مختلفين</a:t>
             </a:r>
             <a:endParaRPr lang="en-US" sz="3000" dirty="0"/>
           </a:p>
@@ -4771,7 +4889,7 @@
                 <a:ea typeface="Arial" pitchFamily="34" charset="-122"/>
                 <a:cs typeface="Arial" pitchFamily="34" charset="-120"/>
               </a:rPr>
-              <a:t>NAPEMA® — حماية دون متبقيات</a:t>
+              <a:t>EVERGREEN® — الاحتفاظ بالماء</a:t>
             </a:r>
             <a:endParaRPr lang="en-US" sz="1600" dirty="0"/>
           </a:p>
@@ -4817,7 +4935,7 @@
                 <a:ea typeface="Arial" pitchFamily="34" charset="-122"/>
                 <a:cs typeface="Arial" pitchFamily="34" charset="-120"/>
               </a:rPr>
-              <a:t>مكافحة الأمراض والطفيليات والفطريات والآفات، دون أي جزيء كيميائي مُصنَّع.</a:t>
+              <a:t>مادة حابسة للماء أساسها البوتاسيوم، تُوضع في منطقة الجذور عند الزراعة أو عند تجديد الغرس.</a:t>
             </a:r>
             <a:endParaRPr lang="en-US" sz="1350" dirty="0"/>
           </a:p>
@@ -4841,7 +4959,7 @@
                 <a:ea typeface="Arial" pitchFamily="34" charset="-122"/>
                 <a:cs typeface="Arial" pitchFamily="34" charset="-120"/>
               </a:rPr>
-              <a:t>رشّ على الأوراق والجذور، بمفعول وقائي وعلاجي في آن واحد.</a:t>
+              <a:t>تلتقط ماء الري وتعيده إلى النبات تدريجيًا، فتلغي الإجهاد المائي في المراحل الحرجة بين ريّتين.</a:t>
             </a:r>
             <a:endParaRPr lang="en-US" sz="1350" dirty="0"/>
           </a:p>
@@ -4865,7 +4983,7 @@
                 <a:ea typeface="Arial" pitchFamily="34" charset="-122"/>
                 <a:cs typeface="Arial" pitchFamily="34" charset="-120"/>
               </a:rPr>
-              <a:t>لا متبقيات في التربة ولا في النبات ولا في الهواء، مع الحفاظ على الملقِّحات والحشرات النافعة.</a:t>
+              <a:t>قدرة امتصاص تبلغ نحو 300 ضعف وزنها، ومفعول مفيد يمتد من 3 إلى 4 سنوات في التربة.</a:t>
             </a:r>
             <a:endParaRPr lang="en-US" sz="1350" dirty="0"/>
           </a:p>
@@ -4889,7 +5007,7 @@
                 <a:ea typeface="Arial" pitchFamily="34" charset="-122"/>
                 <a:cs typeface="Arial" pitchFamily="34" charset="-120"/>
               </a:rPr>
-              <a:t>تركيبة مصمَّمة لمشكلة محددة: البق الدقيقي، واخضرار الحمضيات (HLB)، والنيماتودا.</a:t>
+              <a:t>تتحلل بنسبة 20 إلى 25 % سنويًا، دون تراكم في التربة ودون خطر جرعة زائدة.</a:t>
             </a:r>
             <a:endParaRPr lang="en-US" sz="1350" dirty="0"/>
           </a:p>
@@ -4928,7 +5046,7 @@
                 <a:ea typeface="Arial" pitchFamily="34" charset="-122"/>
                 <a:cs typeface="Arial" pitchFamily="34" charset="-120"/>
               </a:rPr>
-              <a:t>Paulownia ALTIFOLIA® — شجرة المناطق الحارة</a:t>
+              <a:t>ECOFERT® — التغذية دون إنهاك التربة</a:t>
             </a:r>
             <a:endParaRPr lang="en-US" sz="1600" dirty="0"/>
           </a:p>
@@ -4974,7 +5092,7 @@
                 <a:ea typeface="Arial" pitchFamily="34" charset="-122"/>
                 <a:cs typeface="Arial" pitchFamily="34" charset="-120"/>
               </a:rPr>
-              <a:t>من 13 إلى 15 متراً خلال ست إلى ثماني سنوات، بجذع كبير القطر.</a:t>
+              <a:t>سماد بجرعات دقيقة من الأحماض الأمينية والنيتروجين والفوسفور والبوتاسيوم، من موارد متجددة.</a:t>
             </a:r>
             <a:endParaRPr lang="en-US" sz="1350" dirty="0"/>
           </a:p>
@@ -4998,7 +5116,7 @@
                 <a:ea typeface="Arial" pitchFamily="34" charset="-122"/>
                 <a:cs typeface="Arial" pitchFamily="34" charset="-120"/>
               </a:rPr>
-              <a:t>مع 100 غرام من EVERGREEN® لكل شتلة، تنخفض حاجة الري بنسبة 50 %.</a:t>
+              <a:t>غير مخلّب: لا يستنزف المركّب الطيني الدبالي ولا يرفع الملوحة ولا نسبة النترات — نقطة حاسمة في شمال الدلتا.</a:t>
             </a:r>
             <a:endParaRPr lang="en-US" sz="1350" dirty="0"/>
           </a:p>
@@ -5022,7 +5140,7 @@
                 <a:ea typeface="Arial" pitchFamily="34" charset="-122"/>
                 <a:cs typeface="Arial" pitchFamily="34" charset="-120"/>
               </a:rPr>
-              <a:t>تتحمّل من −25 إلى +45 درجة مئوية، ولا يشتعل خشبها قبل 426 درجة.</a:t>
+              <a:t>حاصل على شهادتي SOHISCERT والعضوية الأوروبية، وهو شرط دخول دفاتر شروط المشترين الأوروبيين.</a:t>
             </a:r>
             <a:endParaRPr lang="en-US" sz="1350" dirty="0"/>
           </a:p>
@@ -5046,7 +5164,7 @@
                 <a:ea typeface="Arial" pitchFamily="34" charset="-122"/>
                 <a:cs typeface="Arial" pitchFamily="34" charset="-120"/>
               </a:rPr>
-              <a:t>مصدّ للرياح، وحماية للتربة من التعرية، و400 إلى 700 كغ من العسل للهكتار.</a:t>
+              <a:t>من 1 إلى 4 عبوات سعة 140 مل للهكتار، متوافق مع معدات التسميد بالري القائمة.</a:t>
             </a:r>
             <a:endParaRPr lang="en-US" sz="1350" dirty="0"/>
           </a:p>
@@ -5115,7 +5233,7 @@
                 <a:ea typeface="Arial" pitchFamily="34" charset="-122"/>
                 <a:cs typeface="Arial" pitchFamily="34" charset="-120"/>
               </a:rPr>
-              <a:t>تُسلَّم الشتلات في أصص (25 إلى 30 سم)، معتمدة خالية من الأمراض، وتُستبدل بالضمان عند تلفها. أول قطع في نهاية السنة السادسة، ويُقدَّر الخشب بنحو 400 إلى 450 يورو للمتر المكعب.</a:t>
+              <a:t>المنتجان يُباعان منفصلين لكنهما صُمّما ليعزّز كل منهما الآخر: المادة الحابسة تطيل بقاء الماء متاحًا، والسماد يثمّر هذا الماء المتاح دون إضعاف التربة.</a:t>
             </a:r>
             <a:endParaRPr lang="en-US" sz="1100" dirty="0"/>
           </a:p>
@@ -5268,7 +5386,7 @@
                 <a:ea typeface="Arial" pitchFamily="34" charset="-122"/>
                 <a:cs typeface="Arial" pitchFamily="34" charset="-120"/>
               </a:rPr>
-              <a:t>ترتيب الحجم المتوقع</a:t>
+              <a:t>بقية المنتجات</a:t>
             </a:r>
             <a:endParaRPr lang="en-US" sz="1150" dirty="0"/>
           </a:p>
@@ -5307,42 +5425,340 @@
                 <a:ea typeface="Arial" pitchFamily="34" charset="-122"/>
                 <a:cs typeface="Arial" pitchFamily="34" charset="-120"/>
               </a:rPr>
-              <a:t>توفير الماء المتوقع حسب أسلوب الري</a:t>
+              <a:t>حماية المحاصيل وتثبيت التربة</a:t>
             </a:r>
             <a:endParaRPr lang="en-US" sz="3000" dirty="0"/>
           </a:p>
         </p:txBody>
       </p:sp>
-      <p:graphicFrame>
-        <p:nvGraphicFramePr>
-          <p:cNvPr id="4" name="Chart 0" descr=""/>
-          <p:cNvGraphicFramePr/>
-          <p:nvPr/>
-        </p:nvGraphicFramePr>
-        <p:xfrm>
-          <a:off x="594360" y="1783080"/>
-          <a:ext cx="7360920" cy="3977640"/>
-        </p:xfrm>
-        <a:graphic xmlns:a="http://schemas.openxmlformats.org/drawingml/2006/main">
-          <a:graphicData uri="http://schemas.openxmlformats.org/drawingml/2006/chart">
-            <c:chart xmlns:c="http://schemas.openxmlformats.org/drawingml/2006/chart" r:id="rId1"/>
-          </a:graphicData>
-        </a:graphic>
-      </p:graphicFrame>
-      <p:sp>
-        <p:nvSpPr>
-          <p:cNvPr id="5" name="Shape 2"/>
+      <p:sp>
+        <p:nvSpPr>
+          <p:cNvPr id="4" name="Text 2"/>
+          <p:cNvSpPr txBox="1"/>
+          <p:nvPr/>
+        </p:nvSpPr>
+        <p:spPr>
+          <a:xfrm>
+            <a:off x="594360" y="1783080"/>
+            <a:ext cx="5227168" cy="411480"/>
+          </a:xfrm>
+          <a:prstGeom prst="rect">
+            <a:avLst/>
+          </a:prstGeom>
+          <a:noFill/>
+          <a:ln/>
+        </p:spPr>
+        <p:txBody>
+          <a:bodyPr wrap="square" lIns="0" tIns="0" rIns="0" bIns="0" rtlCol="0" anchor="ctr"/>
+          <a:lstStyle/>
+          <a:p>
+            <a:pPr rtl="1" algn="r" indent="0" marL="0">
+              <a:buNone/>
+            </a:pPr>
+            <a:r>
+              <a:rPr lang="en-US" sz="1600" b="1" dirty="0">
+                <a:solidFill>
+                  <a:srgbClr val="1C5A73"/>
+                </a:solidFill>
+                <a:latin typeface="Arial" pitchFamily="34" charset="0"/>
+                <a:ea typeface="Arial" pitchFamily="34" charset="-122"/>
+                <a:cs typeface="Arial" pitchFamily="34" charset="-120"/>
+              </a:rPr>
+              <a:t>NAPEMA® — حماية دون متبقيات</a:t>
+            </a:r>
+            <a:endParaRPr lang="en-US" sz="1600" dirty="0"/>
+          </a:p>
+        </p:txBody>
+      </p:sp>
+      <p:sp>
+        <p:nvSpPr>
+          <p:cNvPr id="5" name="Text 3"/>
+          <p:cNvSpPr txBox="1"/>
+          <p:nvPr/>
+        </p:nvSpPr>
+        <p:spPr>
+          <a:xfrm>
+            <a:off x="594360" y="2286000"/>
+            <a:ext cx="5227168" cy="2468880"/>
+          </a:xfrm>
+          <a:prstGeom prst="rect">
+            <a:avLst/>
+          </a:prstGeom>
+          <a:noFill/>
+          <a:ln/>
+        </p:spPr>
+        <p:txBody>
+          <a:bodyPr wrap="square" lIns="0" tIns="0" rIns="0" bIns="0" rtlCol="0" anchor="t"/>
+          <a:lstStyle/>
+          <a:p>
+            <a:pPr algn="r" marL="342900" indent="-342900">
+              <a:lnSpc>
+                <a:spcPct val="122000"/>
+              </a:lnSpc>
+              <a:spcAft>
+                <a:spcPts val="1000"/>
+              </a:spcAft>
+              <a:buSzPct val="100000"/>
+              <a:buChar char="•"/>
+            </a:pPr>
+            <a:r>
+              <a:rPr lang="en-US" sz="1350" dirty="0">
+                <a:solidFill>
+                  <a:srgbClr val="31424A"/>
+                </a:solidFill>
+                <a:latin typeface="Arial" pitchFamily="34" charset="0"/>
+                <a:ea typeface="Arial" pitchFamily="34" charset="-122"/>
+                <a:cs typeface="Arial" pitchFamily="34" charset="-120"/>
+              </a:rPr>
+              <a:t>مكافحة الأمراض والطفيليات والفطريات والآفات، دون أي جزيء كيميائي مُصنَّع.</a:t>
+            </a:r>
+            <a:endParaRPr lang="en-US" sz="1350" dirty="0"/>
+          </a:p>
+          <a:p>
+            <a:pPr algn="r" marL="342900" indent="-342900">
+              <a:lnSpc>
+                <a:spcPct val="122000"/>
+              </a:lnSpc>
+              <a:spcAft>
+                <a:spcPts val="1000"/>
+              </a:spcAft>
+              <a:buSzPct val="100000"/>
+              <a:buChar char="•"/>
+            </a:pPr>
+            <a:r>
+              <a:rPr lang="en-US" sz="1350" dirty="0">
+                <a:solidFill>
+                  <a:srgbClr val="31424A"/>
+                </a:solidFill>
+                <a:latin typeface="Arial" pitchFamily="34" charset="0"/>
+                <a:ea typeface="Arial" pitchFamily="34" charset="-122"/>
+                <a:cs typeface="Arial" pitchFamily="34" charset="-120"/>
+              </a:rPr>
+              <a:t>رشّ على الأوراق والجذور، بمفعول وقائي وعلاجي في آن واحد.</a:t>
+            </a:r>
+            <a:endParaRPr lang="en-US" sz="1350" dirty="0"/>
+          </a:p>
+          <a:p>
+            <a:pPr algn="r" marL="342900" indent="-342900">
+              <a:lnSpc>
+                <a:spcPct val="122000"/>
+              </a:lnSpc>
+              <a:spcAft>
+                <a:spcPts val="1000"/>
+              </a:spcAft>
+              <a:buSzPct val="100000"/>
+              <a:buChar char="•"/>
+            </a:pPr>
+            <a:r>
+              <a:rPr lang="en-US" sz="1350" dirty="0">
+                <a:solidFill>
+                  <a:srgbClr val="31424A"/>
+                </a:solidFill>
+                <a:latin typeface="Arial" pitchFamily="34" charset="0"/>
+                <a:ea typeface="Arial" pitchFamily="34" charset="-122"/>
+                <a:cs typeface="Arial" pitchFamily="34" charset="-120"/>
+              </a:rPr>
+              <a:t>لا متبقيات في التربة ولا في النبات ولا في الهواء، مع الحفاظ على الملقِّحات والحشرات النافعة.</a:t>
+            </a:r>
+            <a:endParaRPr lang="en-US" sz="1350" dirty="0"/>
+          </a:p>
+          <a:p>
+            <a:pPr algn="r" marL="342900" indent="-342900">
+              <a:lnSpc>
+                <a:spcPct val="122000"/>
+              </a:lnSpc>
+              <a:spcAft>
+                <a:spcPts val="1000"/>
+              </a:spcAft>
+              <a:buSzPct val="100000"/>
+              <a:buChar char="•"/>
+            </a:pPr>
+            <a:r>
+              <a:rPr lang="en-US" sz="1350" dirty="0">
+                <a:solidFill>
+                  <a:srgbClr val="31424A"/>
+                </a:solidFill>
+                <a:latin typeface="Arial" pitchFamily="34" charset="0"/>
+                <a:ea typeface="Arial" pitchFamily="34" charset="-122"/>
+                <a:cs typeface="Arial" pitchFamily="34" charset="-120"/>
+              </a:rPr>
+              <a:t>تركيبة مصمَّمة لمشكلة محددة: البق الدقيقي، واخضرار الحمضيات (HLB)، والنيماتودا.</a:t>
+            </a:r>
+            <a:endParaRPr lang="en-US" sz="1350" dirty="0"/>
+          </a:p>
+        </p:txBody>
+      </p:sp>
+      <p:sp>
+        <p:nvSpPr>
+          <p:cNvPr id="6" name="Text 4"/>
+          <p:cNvSpPr txBox="1"/>
+          <p:nvPr/>
+        </p:nvSpPr>
+        <p:spPr>
+          <a:xfrm>
+            <a:off x="6370168" y="1783080"/>
+            <a:ext cx="5227168" cy="411480"/>
+          </a:xfrm>
+          <a:prstGeom prst="rect">
+            <a:avLst/>
+          </a:prstGeom>
+          <a:noFill/>
+          <a:ln/>
+        </p:spPr>
+        <p:txBody>
+          <a:bodyPr wrap="square" lIns="0" tIns="0" rIns="0" bIns="0" rtlCol="0" anchor="ctr"/>
+          <a:lstStyle/>
+          <a:p>
+            <a:pPr rtl="1" algn="r" indent="0" marL="0">
+              <a:buNone/>
+            </a:pPr>
+            <a:r>
+              <a:rPr lang="en-US" sz="1600" b="1" dirty="0">
+                <a:solidFill>
+                  <a:srgbClr val="1C5A73"/>
+                </a:solidFill>
+                <a:latin typeface="Arial" pitchFamily="34" charset="0"/>
+                <a:ea typeface="Arial" pitchFamily="34" charset="-122"/>
+                <a:cs typeface="Arial" pitchFamily="34" charset="-120"/>
+              </a:rPr>
+              <a:t>Paulownia ALTIFOLIA® — شجرة المناطق الحارة</a:t>
+            </a:r>
+            <a:endParaRPr lang="en-US" sz="1600" dirty="0"/>
+          </a:p>
+        </p:txBody>
+      </p:sp>
+      <p:sp>
+        <p:nvSpPr>
+          <p:cNvPr id="7" name="Text 5"/>
+          <p:cNvSpPr txBox="1"/>
+          <p:nvPr/>
+        </p:nvSpPr>
+        <p:spPr>
+          <a:xfrm>
+            <a:off x="6370168" y="2286000"/>
+            <a:ext cx="5227168" cy="2468880"/>
+          </a:xfrm>
+          <a:prstGeom prst="rect">
+            <a:avLst/>
+          </a:prstGeom>
+          <a:noFill/>
+          <a:ln/>
+        </p:spPr>
+        <p:txBody>
+          <a:bodyPr wrap="square" lIns="0" tIns="0" rIns="0" bIns="0" rtlCol="0" anchor="t"/>
+          <a:lstStyle/>
+          <a:p>
+            <a:pPr algn="r" marL="342900" indent="-342900">
+              <a:lnSpc>
+                <a:spcPct val="122000"/>
+              </a:lnSpc>
+              <a:spcAft>
+                <a:spcPts val="1000"/>
+              </a:spcAft>
+              <a:buSzPct val="100000"/>
+              <a:buChar char="•"/>
+            </a:pPr>
+            <a:r>
+              <a:rPr lang="en-US" sz="1350" dirty="0">
+                <a:solidFill>
+                  <a:srgbClr val="31424A"/>
+                </a:solidFill>
+                <a:latin typeface="Arial" pitchFamily="34" charset="0"/>
+                <a:ea typeface="Arial" pitchFamily="34" charset="-122"/>
+                <a:cs typeface="Arial" pitchFamily="34" charset="-120"/>
+              </a:rPr>
+              <a:t>من 13 إلى 15 متراً خلال ست إلى ثماني سنوات، بجذع كبير القطر.</a:t>
+            </a:r>
+            <a:endParaRPr lang="en-US" sz="1350" dirty="0"/>
+          </a:p>
+          <a:p>
+            <a:pPr algn="r" marL="342900" indent="-342900">
+              <a:lnSpc>
+                <a:spcPct val="122000"/>
+              </a:lnSpc>
+              <a:spcAft>
+                <a:spcPts val="1000"/>
+              </a:spcAft>
+              <a:buSzPct val="100000"/>
+              <a:buChar char="•"/>
+            </a:pPr>
+            <a:r>
+              <a:rPr lang="en-US" sz="1350" dirty="0">
+                <a:solidFill>
+                  <a:srgbClr val="31424A"/>
+                </a:solidFill>
+                <a:latin typeface="Arial" pitchFamily="34" charset="0"/>
+                <a:ea typeface="Arial" pitchFamily="34" charset="-122"/>
+                <a:cs typeface="Arial" pitchFamily="34" charset="-120"/>
+              </a:rPr>
+              <a:t>مع 100 غرام من EVERGREEN® لكل شتلة، تنخفض حاجة الري بنسبة 50 %.</a:t>
+            </a:r>
+            <a:endParaRPr lang="en-US" sz="1350" dirty="0"/>
+          </a:p>
+          <a:p>
+            <a:pPr algn="r" marL="342900" indent="-342900">
+              <a:lnSpc>
+                <a:spcPct val="122000"/>
+              </a:lnSpc>
+              <a:spcAft>
+                <a:spcPts val="1000"/>
+              </a:spcAft>
+              <a:buSzPct val="100000"/>
+              <a:buChar char="•"/>
+            </a:pPr>
+            <a:r>
+              <a:rPr lang="en-US" sz="1350" dirty="0">
+                <a:solidFill>
+                  <a:srgbClr val="31424A"/>
+                </a:solidFill>
+                <a:latin typeface="Arial" pitchFamily="34" charset="0"/>
+                <a:ea typeface="Arial" pitchFamily="34" charset="-122"/>
+                <a:cs typeface="Arial" pitchFamily="34" charset="-120"/>
+              </a:rPr>
+              <a:t>تتحمّل من −25 إلى +45 درجة مئوية، ولا يشتعل خشبها قبل 426 درجة.</a:t>
+            </a:r>
+            <a:endParaRPr lang="en-US" sz="1350" dirty="0"/>
+          </a:p>
+          <a:p>
+            <a:pPr algn="r" marL="342900" indent="-342900">
+              <a:lnSpc>
+                <a:spcPct val="122000"/>
+              </a:lnSpc>
+              <a:spcAft>
+                <a:spcPts val="1000"/>
+              </a:spcAft>
+              <a:buSzPct val="100000"/>
+              <a:buChar char="•"/>
+            </a:pPr>
+            <a:r>
+              <a:rPr lang="en-US" sz="1350" dirty="0">
+                <a:solidFill>
+                  <a:srgbClr val="31424A"/>
+                </a:solidFill>
+                <a:latin typeface="Arial" pitchFamily="34" charset="0"/>
+                <a:ea typeface="Arial" pitchFamily="34" charset="-122"/>
+                <a:cs typeface="Arial" pitchFamily="34" charset="-120"/>
+              </a:rPr>
+              <a:t>مصدّ للرياح، وحماية للتربة من التعرية، و400 إلى 700 كغ من العسل للهكتار.</a:t>
+            </a:r>
+            <a:endParaRPr lang="en-US" sz="1350" dirty="0"/>
+          </a:p>
+        </p:txBody>
+      </p:sp>
+      <p:sp>
+        <p:nvSpPr>
+          <p:cNvPr id="8" name="Shape 6"/>
           <p:cNvSpPr/>
           <p:nvPr/>
         </p:nvSpPr>
         <p:spPr>
           <a:xfrm>
-            <a:off x="8275320" y="1783080"/>
-            <a:ext cx="3291840" cy="3977640"/>
+            <a:off x="594360" y="4846320"/>
+            <a:ext cx="11002975" cy="960120"/>
           </a:xfrm>
           <a:prstGeom prst="roundRect">
             <a:avLst>
-              <a:gd name="adj" fmla="val 2778"/>
+              <a:gd name="adj" fmla="val 7619"/>
             </a:avLst>
           </a:prstGeom>
           <a:solidFill>
@@ -5358,53 +5774,14 @@
       </p:sp>
       <p:sp>
         <p:nvSpPr>
-          <p:cNvPr id="6" name="Text 3"/>
-          <p:cNvSpPr txBox="1"/>
-          <p:nvPr/>
-        </p:nvSpPr>
-        <p:spPr>
-          <a:xfrm>
-            <a:off x="8503920" y="2011680"/>
-            <a:ext cx="2834640" cy="457200"/>
-          </a:xfrm>
-          <a:prstGeom prst="rect">
-            <a:avLst/>
-          </a:prstGeom>
-          <a:noFill/>
-          <a:ln/>
-        </p:spPr>
-        <p:txBody>
-          <a:bodyPr wrap="square" lIns="0" tIns="0" rIns="0" bIns="0" rtlCol="0" anchor="ctr"/>
-          <a:lstStyle/>
-          <a:p>
-            <a:pPr rtl="1" algn="r" indent="0" marL="0">
-              <a:buNone/>
-            </a:pPr>
-            <a:r>
-              <a:rPr lang="en-US" sz="1300" b="1" dirty="0">
-                <a:solidFill>
-                  <a:srgbClr val="1C5A73"/>
-                </a:solidFill>
-                <a:latin typeface="Arial" pitchFamily="34" charset="0"/>
-                <a:ea typeface="Arial" pitchFamily="34" charset="-122"/>
-                <a:cs typeface="Arial" pitchFamily="34" charset="-120"/>
-              </a:rPr>
-              <a:t>تُقرأ بتحفّظ</a:t>
-            </a:r>
-            <a:endParaRPr lang="en-US" sz="1300" dirty="0"/>
-          </a:p>
-        </p:txBody>
-      </p:sp>
-      <p:sp>
-        <p:nvSpPr>
-          <p:cNvPr id="7" name="Text 4"/>
-          <p:cNvSpPr txBox="1"/>
-          <p:nvPr/>
-        </p:nvSpPr>
-        <p:spPr>
-          <a:xfrm>
-            <a:off x="8503920" y="2560320"/>
-            <a:ext cx="2834640" cy="3017520"/>
+          <p:cNvPr id="9" name="Text 7"/>
+          <p:cNvSpPr txBox="1"/>
+          <p:nvPr/>
+        </p:nvSpPr>
+        <p:spPr>
+          <a:xfrm>
+            <a:off x="822960" y="4983480"/>
+            <a:ext cx="10545775" cy="713232"/>
           </a:xfrm>
           <a:prstGeom prst="rect">
             <a:avLst/>
@@ -5418,57 +5795,28 @@
           <a:p>
             <a:pPr rtl="1" algn="r" indent="0" marL="0">
               <a:lnSpc>
-                <a:spcPct val="125000"/>
+                <a:spcPct val="118000"/>
               </a:lnSpc>
               <a:buNone/>
             </a:pPr>
             <a:r>
-              <a:rPr lang="en-US" sz="1200" dirty="0">
-                <a:solidFill>
-                  <a:srgbClr val="31424A"/>
-                </a:solidFill>
-                <a:latin typeface="Arial" pitchFamily="34" charset="0"/>
-                <a:ea typeface="Arial" pitchFamily="34" charset="-122"/>
-                <a:cs typeface="Arial" pitchFamily="34" charset="-120"/>
-              </a:rPr>
-              <a:t>هذه النطاقات تقديرية إرشادية، مبنية على المكاسب الموثقة لموادنا الحابسة للماء.</a:t>
-            </a:r>
-            <a:endParaRPr lang="en-US" sz="1200" dirty="0"/>
-          </a:p>
-          <a:p>
-            <a:pPr rtl="1" algn="r" indent="0" marL="0">
-              <a:lnSpc>
-                <a:spcPct val="125000"/>
-              </a:lnSpc>
-              <a:buNone/>
-            </a:pPr>
-            <a:endParaRPr lang="en-US" sz="1200" dirty="0"/>
-          </a:p>
-          <a:p>
-            <a:pPr rtl="1" algn="r" indent="0" marL="0">
-              <a:lnSpc>
-                <a:spcPct val="125000"/>
-              </a:lnSpc>
-              <a:buNone/>
-            </a:pPr>
-            <a:r>
-              <a:rPr lang="en-US" sz="1200" dirty="0">
-                <a:solidFill>
-                  <a:srgbClr val="31424A"/>
-                </a:solidFill>
-                <a:latin typeface="Arial" pitchFamily="34" charset="0"/>
-                <a:ea typeface="Arial" pitchFamily="34" charset="-122"/>
-                <a:cs typeface="Arial" pitchFamily="34" charset="-120"/>
-              </a:rPr>
-              <a:t>النتيجة الفعلية تتوقف على التربة والمناخ والمحصول. الأرقام تعطي ترتيب حجم فقط، وهي ليست بأي حال قيمة مضمونة أو تعاقدية أو مطلقة.</a:t>
-            </a:r>
-            <a:endParaRPr lang="en-US" sz="1200" dirty="0"/>
-          </a:p>
-        </p:txBody>
-      </p:sp>
-      <p:sp>
-        <p:nvSpPr>
-          <p:cNvPr id="8" name="Text 5"/>
+              <a:rPr lang="en-US" sz="1100" dirty="0">
+                <a:solidFill>
+                  <a:srgbClr val="6C8089"/>
+                </a:solidFill>
+                <a:latin typeface="Arial" pitchFamily="34" charset="0"/>
+                <a:ea typeface="Arial" pitchFamily="34" charset="-122"/>
+                <a:cs typeface="Arial" pitchFamily="34" charset="-120"/>
+              </a:rPr>
+              <a:t>تُسلَّم الشتلات في أصص (25 إلى 30 سم)، معتمدة خالية من الأمراض، وتُستبدل بالضمان عند تلفها. أول قطع في نهاية السنة السادسة، ويُقدَّر الخشب بنحو 400 إلى 450 يورو للمتر المكعب.</a:t>
+            </a:r>
+            <a:endParaRPr lang="en-US" sz="1100" dirty="0"/>
+          </a:p>
+        </p:txBody>
+      </p:sp>
+      <p:sp>
+        <p:nvSpPr>
+          <p:cNvPr id="10" name="Text 8"/>
           <p:cNvSpPr txBox="1"/>
           <p:nvPr/>
         </p:nvSpPr>
@@ -5509,7 +5857,7 @@
       </p:sp>
       <p:sp>
         <p:nvSpPr>
-          <p:cNvPr id="9" name="Text 6"/>
+          <p:cNvPr id="11" name="Text 9"/>
           <p:cNvSpPr txBox="1"/>
           <p:nvPr/>
         </p:nvSpPr>
@@ -5613,7 +5961,7 @@
                 <a:ea typeface="Arial" pitchFamily="34" charset="-122"/>
                 <a:cs typeface="Arial" pitchFamily="34" charset="-120"/>
               </a:rPr>
-              <a:t>ثلاثة ميادين أولوية</a:t>
+              <a:t>ترتيب الحجم المتوقع</a:t>
             </a:r>
             <a:endParaRPr lang="en-US" sz="1150" dirty="0"/>
           </a:p>
@@ -5652,26 +6000,42 @@
                 <a:ea typeface="Arial" pitchFamily="34" charset="-122"/>
                 <a:cs typeface="Arial" pitchFamily="34" charset="-120"/>
               </a:rPr>
-              <a:t>أين نبدأ التجارب الأولى</a:t>
+              <a:t>توفير الماء المتوقع حسب أسلوب الري</a:t>
             </a:r>
             <a:endParaRPr lang="en-US" sz="3000" dirty="0"/>
           </a:p>
         </p:txBody>
       </p:sp>
-      <p:sp>
-        <p:nvSpPr>
-          <p:cNvPr id="4" name="Shape 2"/>
+      <p:graphicFrame>
+        <p:nvGraphicFramePr>
+          <p:cNvPr id="4" name="Chart 0" descr=""/>
+          <p:cNvGraphicFramePr/>
+          <p:nvPr/>
+        </p:nvGraphicFramePr>
+        <p:xfrm>
+          <a:off x="594360" y="1783080"/>
+          <a:ext cx="7360920" cy="3977640"/>
+        </p:xfrm>
+        <a:graphic xmlns:a="http://schemas.openxmlformats.org/drawingml/2006/main">
+          <a:graphicData uri="http://schemas.openxmlformats.org/drawingml/2006/chart">
+            <c:chart xmlns:c="http://schemas.openxmlformats.org/drawingml/2006/chart" r:id="rId1"/>
+          </a:graphicData>
+        </a:graphic>
+      </p:graphicFrame>
+      <p:sp>
+        <p:nvSpPr>
+          <p:cNvPr id="5" name="Shape 2"/>
           <p:cNvSpPr/>
           <p:nvPr/>
         </p:nvSpPr>
         <p:spPr>
           <a:xfrm>
-            <a:off x="594360" y="1783080"/>
-            <a:ext cx="3472586" cy="4069080"/>
+            <a:off x="8275320" y="1783080"/>
+            <a:ext cx="3291840" cy="3977640"/>
           </a:xfrm>
           <a:prstGeom prst="roundRect">
             <a:avLst>
-              <a:gd name="adj" fmla="val 2633"/>
+              <a:gd name="adj" fmla="val 2778"/>
             </a:avLst>
           </a:prstGeom>
           <a:solidFill>
@@ -5685,30 +6049,6 @@
           </a:ln>
         </p:spPr>
       </p:sp>
-      <p:pic>
-        <p:nvPicPr>
-          <p:cNvPr id="5" name="Image 0" descr="preencoded.png">    </p:cNvPr>
-          <p:cNvPicPr>
-            <a:picLocks noChangeAspect="1"/>
-          </p:cNvPicPr>
-          <p:nvPr/>
-        </p:nvPicPr>
-        <p:blipFill>
-          <a:blip r:embed="rId1"/>
-          <a:stretch>
-            <a:fillRect/>
-          </a:stretch>
-        </p:blipFill>
-        <p:spPr>
-          <a:xfrm>
-            <a:off x="594360" y="1783080"/>
-            <a:ext cx="3472586" cy="1691640"/>
-          </a:xfrm>
-          <a:prstGeom prst="rect">
-            <a:avLst/>
-          </a:prstGeom>
-        </p:spPr>
-      </p:pic>
       <p:sp>
         <p:nvSpPr>
           <p:cNvPr id="6" name="Text 3"/>
@@ -5717,8 +6057,8 @@
         </p:nvSpPr>
         <p:spPr>
           <a:xfrm>
-            <a:off x="795528" y="3639312"/>
-            <a:ext cx="3070250" cy="384048"/>
+            <a:off x="8503920" y="2011680"/>
+            <a:ext cx="2834640" cy="457200"/>
           </a:xfrm>
           <a:prstGeom prst="rect">
             <a:avLst/>
@@ -5734,7 +6074,7 @@
               <a:buNone/>
             </a:pPr>
             <a:r>
-              <a:rPr lang="en-US" sz="1500" b="1" dirty="0">
+              <a:rPr lang="en-US" sz="1300" b="1" dirty="0">
                 <a:solidFill>
                   <a:srgbClr val="1C5A73"/>
                 </a:solidFill>
@@ -5742,9 +6082,9 @@
                 <a:ea typeface="Arial" pitchFamily="34" charset="-122"/>
                 <a:cs typeface="Arial" pitchFamily="34" charset="-120"/>
               </a:rPr>
-              <a:t>شمال الدلتا</a:t>
-            </a:r>
-            <a:endParaRPr lang="en-US" sz="1500" dirty="0"/>
+              <a:t>تُقرأ بتحفّظ</a:t>
+            </a:r>
+            <a:endParaRPr lang="en-US" sz="1300" dirty="0"/>
           </a:p>
         </p:txBody>
       </p:sp>
@@ -5756,580 +6096,72 @@
         </p:nvSpPr>
         <p:spPr>
           <a:xfrm>
-            <a:off x="795528" y="4041648"/>
-            <a:ext cx="3070250" cy="329184"/>
-          </a:xfrm>
-          <a:prstGeom prst="rect">
-            <a:avLst/>
-          </a:prstGeom>
-          <a:noFill/>
-          <a:ln/>
-        </p:spPr>
-        <p:txBody>
-          <a:bodyPr wrap="square" lIns="0" tIns="0" rIns="0" bIns="0" rtlCol="0" anchor="ctr"/>
+            <a:off x="8503920" y="2560320"/>
+            <a:ext cx="2834640" cy="3017520"/>
+          </a:xfrm>
+          <a:prstGeom prst="rect">
+            <a:avLst/>
+          </a:prstGeom>
+          <a:noFill/>
+          <a:ln/>
+        </p:spPr>
+        <p:txBody>
+          <a:bodyPr wrap="square" lIns="0" tIns="0" rIns="0" bIns="0" rtlCol="0" anchor="t"/>
           <a:lstStyle/>
           <a:p>
             <a:pPr rtl="1" algn="r" indent="0" marL="0">
-              <a:buNone/>
-            </a:pPr>
-            <a:r>
-              <a:rPr lang="en-US" sz="1250" b="1" dirty="0">
-                <a:solidFill>
-                  <a:srgbClr val="A3701A"/>
-                </a:solidFill>
-                <a:latin typeface="Arial" pitchFamily="34" charset="0"/>
-                <a:ea typeface="Arial" pitchFamily="34" charset="-122"/>
-                <a:cs typeface="Arial" pitchFamily="34" charset="-120"/>
-              </a:rPr>
-              <a:t>أرز وخضر وموالح على أرض قديمة</a:t>
-            </a:r>
-            <a:endParaRPr lang="en-US" sz="1250" dirty="0"/>
+              <a:lnSpc>
+                <a:spcPct val="125000"/>
+              </a:lnSpc>
+              <a:buNone/>
+            </a:pPr>
+            <a:r>
+              <a:rPr lang="en-US" sz="1200" dirty="0">
+                <a:solidFill>
+                  <a:srgbClr val="31424A"/>
+                </a:solidFill>
+                <a:latin typeface="Arial" pitchFamily="34" charset="0"/>
+                <a:ea typeface="Arial" pitchFamily="34" charset="-122"/>
+                <a:cs typeface="Arial" pitchFamily="34" charset="-120"/>
+              </a:rPr>
+              <a:t>هذه النطاقات تقديرية إرشادية، مبنية على المكاسب الموثقة لموادنا الحابسة للماء.</a:t>
+            </a:r>
+            <a:endParaRPr lang="en-US" sz="1200" dirty="0"/>
+          </a:p>
+          <a:p>
+            <a:pPr rtl="1" algn="r" indent="0" marL="0">
+              <a:lnSpc>
+                <a:spcPct val="125000"/>
+              </a:lnSpc>
+              <a:buNone/>
+            </a:pPr>
+            <a:endParaRPr lang="en-US" sz="1200" dirty="0"/>
+          </a:p>
+          <a:p>
+            <a:pPr rtl="1" algn="r" indent="0" marL="0">
+              <a:lnSpc>
+                <a:spcPct val="125000"/>
+              </a:lnSpc>
+              <a:buNone/>
+            </a:pPr>
+            <a:r>
+              <a:rPr lang="en-US" sz="1200" dirty="0">
+                <a:solidFill>
+                  <a:srgbClr val="31424A"/>
+                </a:solidFill>
+                <a:latin typeface="Arial" pitchFamily="34" charset="0"/>
+                <a:ea typeface="Arial" pitchFamily="34" charset="-122"/>
+                <a:cs typeface="Arial" pitchFamily="34" charset="-120"/>
+              </a:rPr>
+              <a:t>النتيجة الفعلية تتوقف على التربة والمناخ والمحصول. الأرقام تعطي ترتيب حجم فقط، وهي ليست بأي حال قيمة مضمونة أو تعاقدية أو مطلقة.</a:t>
+            </a:r>
+            <a:endParaRPr lang="en-US" sz="1200" dirty="0"/>
           </a:p>
         </p:txBody>
       </p:sp>
       <p:sp>
         <p:nvSpPr>
           <p:cNvPr id="8" name="Text 5"/>
-          <p:cNvSpPr txBox="1"/>
-          <p:nvPr/>
-        </p:nvSpPr>
-        <p:spPr>
-          <a:xfrm>
-            <a:off x="795528" y="4407408"/>
-            <a:ext cx="3070250" cy="1280160"/>
-          </a:xfrm>
-          <a:prstGeom prst="rect">
-            <a:avLst/>
-          </a:prstGeom>
-          <a:noFill/>
-          <a:ln/>
-        </p:spPr>
-        <p:txBody>
-          <a:bodyPr wrap="square" lIns="0" tIns="0" rIns="0" bIns="0" rtlCol="0" anchor="t"/>
-          <a:lstStyle/>
-          <a:p>
-            <a:pPr algn="r" marL="342900" indent="-342900">
-              <a:lnSpc>
-                <a:spcPct val="116000"/>
-              </a:lnSpc>
-              <a:spcAft>
-                <a:spcPts val="700"/>
-              </a:spcAft>
-              <a:buSzPct val="100000"/>
-              <a:buChar char="•"/>
-            </a:pPr>
-            <a:r>
-              <a:rPr lang="en-US" sz="1150" dirty="0">
-                <a:solidFill>
-                  <a:srgbClr val="31424A"/>
-                </a:solidFill>
-                <a:latin typeface="Arial" pitchFamily="34" charset="0"/>
-                <a:ea typeface="Arial" pitchFamily="34" charset="-122"/>
-                <a:cs typeface="Arial" pitchFamily="34" charset="-120"/>
-              </a:rPr>
-              <a:t>خضر وأرز وموالح على أراضٍ قديمة خصبة، لكن الري بالغمر ما زال هو السائد.</a:t>
-            </a:r>
-            <a:endParaRPr lang="en-US" sz="1150" dirty="0"/>
-          </a:p>
-          <a:p>
-            <a:pPr algn="r" marL="342900" indent="-342900">
-              <a:lnSpc>
-                <a:spcPct val="116000"/>
-              </a:lnSpc>
-              <a:spcAft>
-                <a:spcPts val="700"/>
-              </a:spcAft>
-              <a:buSzPct val="100000"/>
-              <a:buChar char="•"/>
-            </a:pPr>
-            <a:r>
-              <a:rPr lang="en-US" sz="1150" dirty="0">
-                <a:solidFill>
-                  <a:srgbClr val="31424A"/>
-                </a:solidFill>
-                <a:latin typeface="Arial" pitchFamily="34" charset="0"/>
-                <a:ea typeface="Arial" pitchFamily="34" charset="-122"/>
-                <a:cs typeface="Arial" pitchFamily="34" charset="-120"/>
-              </a:rPr>
-              <a:t>تداخل مياه البحر يرفع الملوحة: سماد غير مخلّب ميزة مباشرة هنا.</a:t>
-            </a:r>
-            <a:endParaRPr lang="en-US" sz="1150" dirty="0"/>
-          </a:p>
-          <a:p>
-            <a:pPr algn="r" marL="342900" indent="-342900">
-              <a:lnSpc>
-                <a:spcPct val="116000"/>
-              </a:lnSpc>
-              <a:spcAft>
-                <a:spcPts val="700"/>
-              </a:spcAft>
-              <a:buSzPct val="100000"/>
-              <a:buChar char="•"/>
-            </a:pPr>
-            <a:r>
-              <a:rPr lang="en-US" sz="1150" dirty="0">
-                <a:solidFill>
-                  <a:srgbClr val="31424A"/>
-                </a:solidFill>
-                <a:latin typeface="Arial" pitchFamily="34" charset="0"/>
-                <a:ea typeface="Arial" pitchFamily="34" charset="-122"/>
-                <a:cs typeface="Arial" pitchFamily="34" charset="-120"/>
-              </a:rPr>
-              <a:t>كثافة عالية من الجمعيات التعاونية تسمح بالوصول إلى عدد كبير من المزارعين.</a:t>
-            </a:r>
-            <a:endParaRPr lang="en-US" sz="1150" dirty="0"/>
-          </a:p>
-        </p:txBody>
-      </p:sp>
-      <p:sp>
-        <p:nvSpPr>
-          <p:cNvPr id="9" name="Shape 6"/>
-          <p:cNvSpPr/>
-          <p:nvPr/>
-        </p:nvSpPr>
-        <p:spPr>
-          <a:xfrm>
-            <a:off x="4359554" y="1783080"/>
-            <a:ext cx="3472586" cy="4069080"/>
-          </a:xfrm>
-          <a:prstGeom prst="roundRect">
-            <a:avLst>
-              <a:gd name="adj" fmla="val 2633"/>
-            </a:avLst>
-          </a:prstGeom>
-          <a:solidFill>
-            <a:srgbClr val="EDF3F5"/>
-          </a:solidFill>
-          <a:ln w="9525">
-            <a:solidFill>
-              <a:srgbClr val="D6E2E7"/>
-            </a:solidFill>
-            <a:prstDash val="solid"/>
-          </a:ln>
-        </p:spPr>
-      </p:sp>
-      <p:pic>
-        <p:nvPicPr>
-          <p:cNvPr id="10" name="Image 1" descr="preencoded.png">    </p:cNvPr>
-          <p:cNvPicPr>
-            <a:picLocks noChangeAspect="1"/>
-          </p:cNvPicPr>
-          <p:nvPr/>
-        </p:nvPicPr>
-        <p:blipFill>
-          <a:blip r:embed="rId2"/>
-          <a:stretch>
-            <a:fillRect/>
-          </a:stretch>
-        </p:blipFill>
-        <p:spPr>
-          <a:xfrm>
-            <a:off x="4359554" y="1783080"/>
-            <a:ext cx="3472586" cy="1691640"/>
-          </a:xfrm>
-          <a:prstGeom prst="rect">
-            <a:avLst/>
-          </a:prstGeom>
-        </p:spPr>
-      </p:pic>
-      <p:sp>
-        <p:nvSpPr>
-          <p:cNvPr id="11" name="Text 7"/>
-          <p:cNvSpPr txBox="1"/>
-          <p:nvPr/>
-        </p:nvSpPr>
-        <p:spPr>
-          <a:xfrm>
-            <a:off x="4560722" y="3639312"/>
-            <a:ext cx="3070250" cy="384048"/>
-          </a:xfrm>
-          <a:prstGeom prst="rect">
-            <a:avLst/>
-          </a:prstGeom>
-          <a:noFill/>
-          <a:ln/>
-        </p:spPr>
-        <p:txBody>
-          <a:bodyPr wrap="square" lIns="0" tIns="0" rIns="0" bIns="0" rtlCol="0" anchor="ctr"/>
-          <a:lstStyle/>
-          <a:p>
-            <a:pPr rtl="1" algn="r" indent="0" marL="0">
-              <a:buNone/>
-            </a:pPr>
-            <a:r>
-              <a:rPr lang="en-US" sz="1500" b="1" dirty="0">
-                <a:solidFill>
-                  <a:srgbClr val="1C5A73"/>
-                </a:solidFill>
-                <a:latin typeface="Arial" pitchFamily="34" charset="0"/>
-                <a:ea typeface="Arial" pitchFamily="34" charset="-122"/>
-                <a:cs typeface="Arial" pitchFamily="34" charset="-120"/>
-              </a:rPr>
-              <a:t>صعيد مصر</a:t>
-            </a:r>
-            <a:endParaRPr lang="en-US" sz="1500" dirty="0"/>
-          </a:p>
-        </p:txBody>
-      </p:sp>
-      <p:sp>
-        <p:nvSpPr>
-          <p:cNvPr id="12" name="Text 8"/>
-          <p:cNvSpPr txBox="1"/>
-          <p:nvPr/>
-        </p:nvSpPr>
-        <p:spPr>
-          <a:xfrm>
-            <a:off x="4560722" y="4041648"/>
-            <a:ext cx="3070250" cy="329184"/>
-          </a:xfrm>
-          <a:prstGeom prst="rect">
-            <a:avLst/>
-          </a:prstGeom>
-          <a:noFill/>
-          <a:ln/>
-        </p:spPr>
-        <p:txBody>
-          <a:bodyPr wrap="square" lIns="0" tIns="0" rIns="0" bIns="0" rtlCol="0" anchor="ctr"/>
-          <a:lstStyle/>
-          <a:p>
-            <a:pPr rtl="1" algn="r" indent="0" marL="0">
-              <a:buNone/>
-            </a:pPr>
-            <a:r>
-              <a:rPr lang="en-US" sz="1250" b="1" dirty="0">
-                <a:solidFill>
-                  <a:srgbClr val="A3701A"/>
-                </a:solidFill>
-                <a:latin typeface="Arial" pitchFamily="34" charset="0"/>
-                <a:ea typeface="Arial" pitchFamily="34" charset="-122"/>
-                <a:cs typeface="Arial" pitchFamily="34" charset="-120"/>
-              </a:rPr>
-              <a:t>≈ 16 مليون طن قصب سنويًا</a:t>
-            </a:r>
-            <a:endParaRPr lang="en-US" sz="1250" dirty="0"/>
-          </a:p>
-        </p:txBody>
-      </p:sp>
-      <p:sp>
-        <p:nvSpPr>
-          <p:cNvPr id="13" name="Text 9"/>
-          <p:cNvSpPr txBox="1"/>
-          <p:nvPr/>
-        </p:nvSpPr>
-        <p:spPr>
-          <a:xfrm>
-            <a:off x="4560722" y="4407408"/>
-            <a:ext cx="3070250" cy="1280160"/>
-          </a:xfrm>
-          <a:prstGeom prst="rect">
-            <a:avLst/>
-          </a:prstGeom>
-          <a:noFill/>
-          <a:ln/>
-        </p:spPr>
-        <p:txBody>
-          <a:bodyPr wrap="square" lIns="0" tIns="0" rIns="0" bIns="0" rtlCol="0" anchor="t"/>
-          <a:lstStyle/>
-          <a:p>
-            <a:pPr algn="r" marL="342900" indent="-342900">
-              <a:lnSpc>
-                <a:spcPct val="116000"/>
-              </a:lnSpc>
-              <a:spcAft>
-                <a:spcPts val="700"/>
-              </a:spcAft>
-              <a:buSzPct val="100000"/>
-              <a:buChar char="•"/>
-            </a:pPr>
-            <a:r>
-              <a:rPr lang="en-US" sz="1150" dirty="0">
-                <a:solidFill>
-                  <a:srgbClr val="31424A"/>
-                </a:solidFill>
-                <a:latin typeface="Arial" pitchFamily="34" charset="0"/>
-                <a:ea typeface="Arial" pitchFamily="34" charset="-122"/>
-                <a:cs typeface="Arial" pitchFamily="34" charset="-120"/>
-              </a:rPr>
-              <a:t>قصب السكر مركّز في المنيا وقنا وأسوان، وهو أعلى المحاصيل استهلاكًا للماء.</a:t>
-            </a:r>
-            <a:endParaRPr lang="en-US" sz="1150" dirty="0"/>
-          </a:p>
-          <a:p>
-            <a:pPr algn="r" marL="342900" indent="-342900">
-              <a:lnSpc>
-                <a:spcPct val="116000"/>
-              </a:lnSpc>
-              <a:spcAft>
-                <a:spcPts val="700"/>
-              </a:spcAft>
-              <a:buSzPct val="100000"/>
-              <a:buChar char="•"/>
-            </a:pPr>
-            <a:r>
-              <a:rPr lang="en-US" sz="1150" dirty="0">
-                <a:solidFill>
-                  <a:srgbClr val="31424A"/>
-                </a:solidFill>
-                <a:latin typeface="Arial" pitchFamily="34" charset="0"/>
-                <a:ea typeface="Arial" pitchFamily="34" charset="-122"/>
-                <a:cs typeface="Arial" pitchFamily="34" charset="-120"/>
-              </a:rPr>
-              <a:t>تبخر شديد وصيف يتجاوز 45 درجة: الفاقد بين ريّتين هو الأعلى في البلاد.</a:t>
-            </a:r>
-            <a:endParaRPr lang="en-US" sz="1150" dirty="0"/>
-          </a:p>
-          <a:p>
-            <a:pPr algn="r" marL="342900" indent="-342900">
-              <a:lnSpc>
-                <a:spcPct val="116000"/>
-              </a:lnSpc>
-              <a:spcAft>
-                <a:spcPts val="700"/>
-              </a:spcAft>
-              <a:buSzPct val="100000"/>
-              <a:buChar char="•"/>
-            </a:pPr>
-            <a:r>
-              <a:rPr lang="en-US" sz="1150" dirty="0">
-                <a:solidFill>
-                  <a:srgbClr val="31424A"/>
-                </a:solidFill>
-                <a:latin typeface="Arial" pitchFamily="34" charset="0"/>
-                <a:ea typeface="Arial" pitchFamily="34" charset="-122"/>
-                <a:cs typeface="Arial" pitchFamily="34" charset="-120"/>
-              </a:rPr>
-              <a:t>مصانع السكر مشترٍ منظَّم، يسهّل اتفاقًا على مستوى منطقة كاملة.</a:t>
-            </a:r>
-            <a:endParaRPr lang="en-US" sz="1150" dirty="0"/>
-          </a:p>
-        </p:txBody>
-      </p:sp>
-      <p:sp>
-        <p:nvSpPr>
-          <p:cNvPr id="14" name="Shape 10"/>
-          <p:cNvSpPr/>
-          <p:nvPr/>
-        </p:nvSpPr>
-        <p:spPr>
-          <a:xfrm>
-            <a:off x="8124749" y="1783080"/>
-            <a:ext cx="3472586" cy="4069080"/>
-          </a:xfrm>
-          <a:prstGeom prst="roundRect">
-            <a:avLst>
-              <a:gd name="adj" fmla="val 2633"/>
-            </a:avLst>
-          </a:prstGeom>
-          <a:solidFill>
-            <a:srgbClr val="EDF3F5"/>
-          </a:solidFill>
-          <a:ln w="9525">
-            <a:solidFill>
-              <a:srgbClr val="D6E2E7"/>
-            </a:solidFill>
-            <a:prstDash val="solid"/>
-          </a:ln>
-        </p:spPr>
-      </p:sp>
-      <p:pic>
-        <p:nvPicPr>
-          <p:cNvPr id="15" name="Image 2" descr="preencoded.png">    </p:cNvPr>
-          <p:cNvPicPr>
-            <a:picLocks noChangeAspect="1"/>
-          </p:cNvPicPr>
-          <p:nvPr/>
-        </p:nvPicPr>
-        <p:blipFill>
-          <a:blip r:embed="rId3"/>
-          <a:stretch>
-            <a:fillRect/>
-          </a:stretch>
-        </p:blipFill>
-        <p:spPr>
-          <a:xfrm>
-            <a:off x="8124749" y="1783080"/>
-            <a:ext cx="3472586" cy="1691640"/>
-          </a:xfrm>
-          <a:prstGeom prst="rect">
-            <a:avLst/>
-          </a:prstGeom>
-        </p:spPr>
-      </p:pic>
-      <p:sp>
-        <p:nvSpPr>
-          <p:cNvPr id="16" name="Text 11"/>
-          <p:cNvSpPr txBox="1"/>
-          <p:nvPr/>
-        </p:nvSpPr>
-        <p:spPr>
-          <a:xfrm>
-            <a:off x="8325917" y="3639312"/>
-            <a:ext cx="3070250" cy="384048"/>
-          </a:xfrm>
-          <a:prstGeom prst="rect">
-            <a:avLst/>
-          </a:prstGeom>
-          <a:noFill/>
-          <a:ln/>
-        </p:spPr>
-        <p:txBody>
-          <a:bodyPr wrap="square" lIns="0" tIns="0" rIns="0" bIns="0" rtlCol="0" anchor="ctr"/>
-          <a:lstStyle/>
-          <a:p>
-            <a:pPr rtl="1" algn="r" indent="0" marL="0">
-              <a:buNone/>
-            </a:pPr>
-            <a:r>
-              <a:rPr lang="en-US" sz="1500" b="1" dirty="0">
-                <a:solidFill>
-                  <a:srgbClr val="1C5A73"/>
-                </a:solidFill>
-                <a:latin typeface="Arial" pitchFamily="34" charset="0"/>
-                <a:ea typeface="Arial" pitchFamily="34" charset="-122"/>
-                <a:cs typeface="Arial" pitchFamily="34" charset="-120"/>
-              </a:rPr>
-              <a:t>النوبارية وغرب الدلتا</a:t>
-            </a:r>
-            <a:endParaRPr lang="en-US" sz="1500" dirty="0"/>
-          </a:p>
-        </p:txBody>
-      </p:sp>
-      <p:sp>
-        <p:nvSpPr>
-          <p:cNvPr id="17" name="Text 12"/>
-          <p:cNvSpPr txBox="1"/>
-          <p:nvPr/>
-        </p:nvSpPr>
-        <p:spPr>
-          <a:xfrm>
-            <a:off x="8325917" y="4041648"/>
-            <a:ext cx="3070250" cy="329184"/>
-          </a:xfrm>
-          <a:prstGeom prst="rect">
-            <a:avLst/>
-          </a:prstGeom>
-          <a:noFill/>
-          <a:ln/>
-        </p:spPr>
-        <p:txBody>
-          <a:bodyPr wrap="square" lIns="0" tIns="0" rIns="0" bIns="0" rtlCol="0" anchor="ctr"/>
-          <a:lstStyle/>
-          <a:p>
-            <a:pPr rtl="1" algn="r" indent="0" marL="0">
-              <a:buNone/>
-            </a:pPr>
-            <a:r>
-              <a:rPr lang="en-US" sz="1250" b="1" dirty="0">
-                <a:solidFill>
-                  <a:srgbClr val="A3701A"/>
-                </a:solidFill>
-                <a:latin typeface="Arial" pitchFamily="34" charset="0"/>
-                <a:ea typeface="Arial" pitchFamily="34" charset="-122"/>
-                <a:cs typeface="Arial" pitchFamily="34" charset="-120"/>
-              </a:rPr>
-              <a:t>قطب تصدير الموالح والعنب</a:t>
-            </a:r>
-            <a:endParaRPr lang="en-US" sz="1250" dirty="0"/>
-          </a:p>
-        </p:txBody>
-      </p:sp>
-      <p:sp>
-        <p:nvSpPr>
-          <p:cNvPr id="18" name="Text 13"/>
-          <p:cNvSpPr txBox="1"/>
-          <p:nvPr/>
-        </p:nvSpPr>
-        <p:spPr>
-          <a:xfrm>
-            <a:off x="8325917" y="4407408"/>
-            <a:ext cx="3070250" cy="1280160"/>
-          </a:xfrm>
-          <a:prstGeom prst="rect">
-            <a:avLst/>
-          </a:prstGeom>
-          <a:noFill/>
-          <a:ln/>
-        </p:spPr>
-        <p:txBody>
-          <a:bodyPr wrap="square" lIns="0" tIns="0" rIns="0" bIns="0" rtlCol="0" anchor="t"/>
-          <a:lstStyle/>
-          <a:p>
-            <a:pPr algn="r" marL="342900" indent="-342900">
-              <a:lnSpc>
-                <a:spcPct val="116000"/>
-              </a:lnSpc>
-              <a:spcAft>
-                <a:spcPts val="700"/>
-              </a:spcAft>
-              <a:buSzPct val="100000"/>
-              <a:buChar char="•"/>
-            </a:pPr>
-            <a:r>
-              <a:rPr lang="en-US" sz="1150" dirty="0">
-                <a:solidFill>
-                  <a:srgbClr val="31424A"/>
-                </a:solidFill>
-                <a:latin typeface="Arial" pitchFamily="34" charset="0"/>
-                <a:ea typeface="Arial" pitchFamily="34" charset="-122"/>
-                <a:cs typeface="Arial" pitchFamily="34" charset="-120"/>
-              </a:rPr>
-              <a:t>أراضٍ مستصلحة رملية: قدرة احتفاظ بالماء ضعيفة، وهي الحالة الأنسب لموادنا.</a:t>
-            </a:r>
-            <a:endParaRPr lang="en-US" sz="1150" dirty="0"/>
-          </a:p>
-          <a:p>
-            <a:pPr algn="r" marL="342900" indent="-342900">
-              <a:lnSpc>
-                <a:spcPct val="116000"/>
-              </a:lnSpc>
-              <a:spcAft>
-                <a:spcPts val="700"/>
-              </a:spcAft>
-              <a:buSzPct val="100000"/>
-              <a:buChar char="•"/>
-            </a:pPr>
-            <a:r>
-              <a:rPr lang="en-US" sz="1150" dirty="0">
-                <a:solidFill>
-                  <a:srgbClr val="31424A"/>
-                </a:solidFill>
-                <a:latin typeface="Arial" pitchFamily="34" charset="0"/>
-                <a:ea typeface="Arial" pitchFamily="34" charset="-122"/>
-                <a:cs typeface="Arial" pitchFamily="34" charset="-120"/>
-              </a:rPr>
-              <a:t>مزارع تصدير كبيرة مجهّزة بالتنقيط والمحاور، وقرار شراء مركزي وسريع.</a:t>
-            </a:r>
-            <a:endParaRPr lang="en-US" sz="1150" dirty="0"/>
-          </a:p>
-          <a:p>
-            <a:pPr algn="r" marL="342900" indent="-342900">
-              <a:lnSpc>
-                <a:spcPct val="116000"/>
-              </a:lnSpc>
-              <a:spcAft>
-                <a:spcPts val="700"/>
-              </a:spcAft>
-              <a:buSzPct val="100000"/>
-              <a:buChar char="•"/>
-            </a:pPr>
-            <a:r>
-              <a:rPr lang="en-US" sz="1150" dirty="0">
-                <a:solidFill>
-                  <a:srgbClr val="31424A"/>
-                </a:solidFill>
-                <a:latin typeface="Arial" pitchFamily="34" charset="0"/>
-                <a:ea typeface="Arial" pitchFamily="34" charset="-122"/>
-                <a:cs typeface="Arial" pitchFamily="34" charset="-120"/>
-              </a:rPr>
-              <a:t>المشترون الأوروبيون يطلبون شهادة عضوية سارية.</a:t>
-            </a:r>
-            <a:endParaRPr lang="en-US" sz="1150" dirty="0"/>
-          </a:p>
-        </p:txBody>
-      </p:sp>
-      <p:sp>
-        <p:nvSpPr>
-          <p:cNvPr id="19" name="Text 14"/>
           <p:cNvSpPr txBox="1"/>
           <p:nvPr/>
         </p:nvSpPr>
@@ -6370,7 +6202,7 @@
       </p:sp>
       <p:sp>
         <p:nvSpPr>
-          <p:cNvPr id="20" name="Text 15"/>
+          <p:cNvPr id="9" name="Text 6"/>
           <p:cNvSpPr txBox="1"/>
           <p:nvPr/>
         </p:nvSpPr>
@@ -6474,7 +6306,7 @@
                 <a:ea typeface="Arial" pitchFamily="34" charset="-122"/>
                 <a:cs typeface="Arial" pitchFamily="34" charset="-120"/>
               </a:rPr>
-              <a:t>كيف نعمل</a:t>
+              <a:t>ثلاثة ميادين أولوية</a:t>
             </a:r>
             <a:endParaRPr lang="en-US" sz="1150" dirty="0"/>
           </a:p>
@@ -6513,7 +6345,7 @@
                 <a:ea typeface="Arial" pitchFamily="34" charset="-122"/>
                 <a:cs typeface="Arial" pitchFamily="34" charset="-120"/>
               </a:rPr>
-              <a:t>انتشار على مراحل، مُقاس عند كل خطوة</a:t>
+              <a:t>أين نبدأ التجارب الأولى</a:t>
             </a:r>
             <a:endParaRPr lang="en-US" sz="3000" dirty="0"/>
           </a:p>
@@ -6527,12 +6359,12 @@
         </p:nvSpPr>
         <p:spPr>
           <a:xfrm>
-            <a:off x="594360" y="1874520"/>
-            <a:ext cx="2545004" cy="2834640"/>
+            <a:off x="594360" y="1783080"/>
+            <a:ext cx="3472586" cy="4069080"/>
           </a:xfrm>
           <a:prstGeom prst="roundRect">
             <a:avLst>
-              <a:gd name="adj" fmla="val 3593"/>
+              <a:gd name="adj" fmla="val 2633"/>
             </a:avLst>
           </a:prstGeom>
           <a:solidFill>
@@ -6546,160 +6378,216 @@
           </a:ln>
         </p:spPr>
       </p:sp>
-      <p:sp>
-        <p:nvSpPr>
-          <p:cNvPr id="5" name="Shape 3"/>
+      <p:pic>
+        <p:nvPicPr>
+          <p:cNvPr id="5" name="Image 0" descr="preencoded.png">    </p:cNvPr>
+          <p:cNvPicPr>
+            <a:picLocks noChangeAspect="1"/>
+          </p:cNvPicPr>
+          <p:nvPr/>
+        </p:nvPicPr>
+        <p:blipFill>
+          <a:blip r:embed="rId1"/>
+          <a:stretch>
+            <a:fillRect/>
+          </a:stretch>
+        </p:blipFill>
+        <p:spPr>
+          <a:xfrm>
+            <a:off x="594360" y="1783080"/>
+            <a:ext cx="3472586" cy="1691640"/>
+          </a:xfrm>
+          <a:prstGeom prst="rect">
+            <a:avLst/>
+          </a:prstGeom>
+        </p:spPr>
+      </p:pic>
+      <p:sp>
+        <p:nvSpPr>
+          <p:cNvPr id="6" name="Text 3"/>
+          <p:cNvSpPr txBox="1"/>
+          <p:nvPr/>
+        </p:nvSpPr>
+        <p:spPr>
+          <a:xfrm>
+            <a:off x="795528" y="3639312"/>
+            <a:ext cx="3070250" cy="384048"/>
+          </a:xfrm>
+          <a:prstGeom prst="rect">
+            <a:avLst/>
+          </a:prstGeom>
+          <a:noFill/>
+          <a:ln/>
+        </p:spPr>
+        <p:txBody>
+          <a:bodyPr wrap="square" lIns="0" tIns="0" rIns="0" bIns="0" rtlCol="0" anchor="ctr"/>
+          <a:lstStyle/>
+          <a:p>
+            <a:pPr rtl="1" algn="r" indent="0" marL="0">
+              <a:buNone/>
+            </a:pPr>
+            <a:r>
+              <a:rPr lang="en-US" sz="1500" b="1" dirty="0">
+                <a:solidFill>
+                  <a:srgbClr val="1C5A73"/>
+                </a:solidFill>
+                <a:latin typeface="Arial" pitchFamily="34" charset="0"/>
+                <a:ea typeface="Arial" pitchFamily="34" charset="-122"/>
+                <a:cs typeface="Arial" pitchFamily="34" charset="-120"/>
+              </a:rPr>
+              <a:t>شمال الدلتا</a:t>
+            </a:r>
+            <a:endParaRPr lang="en-US" sz="1500" dirty="0"/>
+          </a:p>
+        </p:txBody>
+      </p:sp>
+      <p:sp>
+        <p:nvSpPr>
+          <p:cNvPr id="7" name="Text 4"/>
+          <p:cNvSpPr txBox="1"/>
+          <p:nvPr/>
+        </p:nvSpPr>
+        <p:spPr>
+          <a:xfrm>
+            <a:off x="795528" y="4041648"/>
+            <a:ext cx="3070250" cy="329184"/>
+          </a:xfrm>
+          <a:prstGeom prst="rect">
+            <a:avLst/>
+          </a:prstGeom>
+          <a:noFill/>
+          <a:ln/>
+        </p:spPr>
+        <p:txBody>
+          <a:bodyPr wrap="square" lIns="0" tIns="0" rIns="0" bIns="0" rtlCol="0" anchor="ctr"/>
+          <a:lstStyle/>
+          <a:p>
+            <a:pPr rtl="1" algn="r" indent="0" marL="0">
+              <a:buNone/>
+            </a:pPr>
+            <a:r>
+              <a:rPr lang="en-US" sz="1250" b="1" dirty="0">
+                <a:solidFill>
+                  <a:srgbClr val="A3701A"/>
+                </a:solidFill>
+                <a:latin typeface="Arial" pitchFamily="34" charset="0"/>
+                <a:ea typeface="Arial" pitchFamily="34" charset="-122"/>
+                <a:cs typeface="Arial" pitchFamily="34" charset="-120"/>
+              </a:rPr>
+              <a:t>أرز وخضر وموالح على أرض قديمة</a:t>
+            </a:r>
+            <a:endParaRPr lang="en-US" sz="1250" dirty="0"/>
+          </a:p>
+        </p:txBody>
+      </p:sp>
+      <p:sp>
+        <p:nvSpPr>
+          <p:cNvPr id="8" name="Text 5"/>
+          <p:cNvSpPr txBox="1"/>
+          <p:nvPr/>
+        </p:nvSpPr>
+        <p:spPr>
+          <a:xfrm>
+            <a:off x="795528" y="4407408"/>
+            <a:ext cx="3070250" cy="1280160"/>
+          </a:xfrm>
+          <a:prstGeom prst="rect">
+            <a:avLst/>
+          </a:prstGeom>
+          <a:noFill/>
+          <a:ln/>
+        </p:spPr>
+        <p:txBody>
+          <a:bodyPr wrap="square" lIns="0" tIns="0" rIns="0" bIns="0" rtlCol="0" anchor="t"/>
+          <a:lstStyle/>
+          <a:p>
+            <a:pPr algn="r" marL="342900" indent="-342900">
+              <a:lnSpc>
+                <a:spcPct val="116000"/>
+              </a:lnSpc>
+              <a:spcAft>
+                <a:spcPts val="700"/>
+              </a:spcAft>
+              <a:buSzPct val="100000"/>
+              <a:buChar char="•"/>
+            </a:pPr>
+            <a:r>
+              <a:rPr lang="en-US" sz="1150" dirty="0">
+                <a:solidFill>
+                  <a:srgbClr val="31424A"/>
+                </a:solidFill>
+                <a:latin typeface="Arial" pitchFamily="34" charset="0"/>
+                <a:ea typeface="Arial" pitchFamily="34" charset="-122"/>
+                <a:cs typeface="Arial" pitchFamily="34" charset="-120"/>
+              </a:rPr>
+              <a:t>خضر وأرز وموالح على أراضٍ قديمة خصبة، لكن الري بالغمر ما زال هو السائد.</a:t>
+            </a:r>
+            <a:endParaRPr lang="en-US" sz="1150" dirty="0"/>
+          </a:p>
+          <a:p>
+            <a:pPr algn="r" marL="342900" indent="-342900">
+              <a:lnSpc>
+                <a:spcPct val="116000"/>
+              </a:lnSpc>
+              <a:spcAft>
+                <a:spcPts val="700"/>
+              </a:spcAft>
+              <a:buSzPct val="100000"/>
+              <a:buChar char="•"/>
+            </a:pPr>
+            <a:r>
+              <a:rPr lang="en-US" sz="1150" dirty="0">
+                <a:solidFill>
+                  <a:srgbClr val="31424A"/>
+                </a:solidFill>
+                <a:latin typeface="Arial" pitchFamily="34" charset="0"/>
+                <a:ea typeface="Arial" pitchFamily="34" charset="-122"/>
+                <a:cs typeface="Arial" pitchFamily="34" charset="-120"/>
+              </a:rPr>
+              <a:t>تداخل مياه البحر يرفع الملوحة: سماد غير مخلّب ميزة مباشرة هنا.</a:t>
+            </a:r>
+            <a:endParaRPr lang="en-US" sz="1150" dirty="0"/>
+          </a:p>
+          <a:p>
+            <a:pPr algn="r" marL="342900" indent="-342900">
+              <a:lnSpc>
+                <a:spcPct val="116000"/>
+              </a:lnSpc>
+              <a:spcAft>
+                <a:spcPts val="700"/>
+              </a:spcAft>
+              <a:buSzPct val="100000"/>
+              <a:buChar char="•"/>
+            </a:pPr>
+            <a:r>
+              <a:rPr lang="en-US" sz="1150" dirty="0">
+                <a:solidFill>
+                  <a:srgbClr val="31424A"/>
+                </a:solidFill>
+                <a:latin typeface="Arial" pitchFamily="34" charset="0"/>
+                <a:ea typeface="Arial" pitchFamily="34" charset="-122"/>
+                <a:cs typeface="Arial" pitchFamily="34" charset="-120"/>
+              </a:rPr>
+              <a:t>كثافة عالية من الجمعيات التعاونية تسمح بالوصول إلى عدد كبير من المزارعين.</a:t>
+            </a:r>
+            <a:endParaRPr lang="en-US" sz="1150" dirty="0"/>
+          </a:p>
+        </p:txBody>
+      </p:sp>
+      <p:sp>
+        <p:nvSpPr>
+          <p:cNvPr id="9" name="Shape 6"/>
           <p:cNvSpPr/>
           <p:nvPr/>
         </p:nvSpPr>
         <p:spPr>
           <a:xfrm>
-            <a:off x="822960" y="2103120"/>
-            <a:ext cx="566928" cy="566928"/>
-          </a:xfrm>
-          <a:prstGeom prst="ellipse">
-            <a:avLst/>
-          </a:prstGeom>
-          <a:solidFill>
-            <a:srgbClr val="1C5A73"/>
-          </a:solidFill>
-          <a:ln/>
-        </p:spPr>
-      </p:sp>
-      <p:sp>
-        <p:nvSpPr>
-          <p:cNvPr id="6" name="Text 4"/>
-          <p:cNvSpPr txBox="1"/>
-          <p:nvPr/>
-        </p:nvSpPr>
-        <p:spPr>
-          <a:xfrm>
-            <a:off x="822960" y="2103120"/>
-            <a:ext cx="566928" cy="566928"/>
-          </a:xfrm>
-          <a:prstGeom prst="rect">
-            <a:avLst/>
-          </a:prstGeom>
-          <a:noFill/>
-          <a:ln/>
-        </p:spPr>
-        <p:txBody>
-          <a:bodyPr wrap="square" lIns="0" tIns="0" rIns="0" bIns="0" rtlCol="0" anchor="ctr"/>
-          <a:lstStyle/>
-          <a:p>
-            <a:pPr rtl="1" algn="ctr" indent="0" marL="0">
-              <a:buNone/>
-            </a:pPr>
-            <a:r>
-              <a:rPr lang="en-US" sz="1600" b="1" dirty="0">
-                <a:solidFill>
-                  <a:srgbClr val="FFFFFF"/>
-                </a:solidFill>
-                <a:latin typeface="Arial" pitchFamily="34" charset="0"/>
-                <a:ea typeface="Arial" pitchFamily="34" charset="-122"/>
-                <a:cs typeface="Arial" pitchFamily="34" charset="-120"/>
-              </a:rPr>
-              <a:t>1</a:t>
-            </a:r>
-            <a:endParaRPr lang="en-US" sz="1600" dirty="0"/>
-          </a:p>
-        </p:txBody>
-      </p:sp>
-      <p:sp>
-        <p:nvSpPr>
-          <p:cNvPr id="7" name="Text 5"/>
-          <p:cNvSpPr txBox="1"/>
-          <p:nvPr/>
-        </p:nvSpPr>
-        <p:spPr>
-          <a:xfrm>
-            <a:off x="822960" y="2788920"/>
-            <a:ext cx="2087804" cy="457200"/>
-          </a:xfrm>
-          <a:prstGeom prst="rect">
-            <a:avLst/>
-          </a:prstGeom>
-          <a:noFill/>
-          <a:ln/>
-        </p:spPr>
-        <p:txBody>
-          <a:bodyPr wrap="square" lIns="0" tIns="0" rIns="0" bIns="0" rtlCol="0" anchor="ctr"/>
-          <a:lstStyle/>
-          <a:p>
-            <a:pPr rtl="1" algn="r" indent="0" marL="0">
-              <a:buNone/>
-            </a:pPr>
-            <a:r>
-              <a:rPr lang="en-US" sz="1400" b="1" dirty="0">
-                <a:solidFill>
-                  <a:srgbClr val="1C5A73"/>
-                </a:solidFill>
-                <a:latin typeface="Arial" pitchFamily="34" charset="0"/>
-                <a:ea typeface="Arial" pitchFamily="34" charset="-122"/>
-                <a:cs typeface="Arial" pitchFamily="34" charset="-120"/>
-              </a:rPr>
-              <a:t>التشخيص</a:t>
-            </a:r>
-            <a:endParaRPr lang="en-US" sz="1400" dirty="0"/>
-          </a:p>
-        </p:txBody>
-      </p:sp>
-      <p:sp>
-        <p:nvSpPr>
-          <p:cNvPr id="8" name="Text 6"/>
-          <p:cNvSpPr txBox="1"/>
-          <p:nvPr/>
-        </p:nvSpPr>
-        <p:spPr>
-          <a:xfrm>
-            <a:off x="822960" y="3291840"/>
-            <a:ext cx="2087804" cy="1234440"/>
-          </a:xfrm>
-          <a:prstGeom prst="rect">
-            <a:avLst/>
-          </a:prstGeom>
-          <a:noFill/>
-          <a:ln/>
-        </p:spPr>
-        <p:txBody>
-          <a:bodyPr wrap="square" lIns="0" tIns="0" rIns="0" bIns="0" rtlCol="0" anchor="t"/>
-          <a:lstStyle/>
-          <a:p>
-            <a:pPr rtl="1" algn="r" indent="0" marL="0">
-              <a:lnSpc>
-                <a:spcPct val="120000"/>
-              </a:lnSpc>
-              <a:buNone/>
-            </a:pPr>
-            <a:r>
-              <a:rPr lang="en-US" sz="1200" dirty="0">
-                <a:solidFill>
-                  <a:srgbClr val="31424A"/>
-                </a:solidFill>
-                <a:latin typeface="Arial" pitchFamily="34" charset="0"/>
-                <a:ea typeface="Arial" pitchFamily="34" charset="-122"/>
-                <a:cs typeface="Arial" pitchFamily="34" charset="-120"/>
-              </a:rPr>
-              <a:t>تحليل التربة وأسلوب الري والمحصول. لا التزام على الإطلاق في هذه المرحلة.</a:t>
-            </a:r>
-            <a:endParaRPr lang="en-US" sz="1200" dirty="0"/>
-          </a:p>
-        </p:txBody>
-      </p:sp>
-      <p:sp>
-        <p:nvSpPr>
-          <p:cNvPr id="9" name="Shape 7"/>
-          <p:cNvSpPr/>
-          <p:nvPr/>
-        </p:nvSpPr>
-        <p:spPr>
-          <a:xfrm>
-            <a:off x="3413684" y="1874520"/>
-            <a:ext cx="2545004" cy="2834640"/>
+            <a:off x="4359554" y="1783080"/>
+            <a:ext cx="3472586" cy="4069080"/>
           </a:xfrm>
           <a:prstGeom prst="roundRect">
             <a:avLst>
-              <a:gd name="adj" fmla="val 3593"/>
+              <a:gd name="adj" fmla="val 2633"/>
             </a:avLst>
           </a:prstGeom>
           <a:solidFill>
@@ -6713,160 +6601,216 @@
           </a:ln>
         </p:spPr>
       </p:sp>
-      <p:sp>
-        <p:nvSpPr>
-          <p:cNvPr id="10" name="Shape 8"/>
+      <p:pic>
+        <p:nvPicPr>
+          <p:cNvPr id="10" name="Image 1" descr="preencoded.png">    </p:cNvPr>
+          <p:cNvPicPr>
+            <a:picLocks noChangeAspect="1"/>
+          </p:cNvPicPr>
+          <p:nvPr/>
+        </p:nvPicPr>
+        <p:blipFill>
+          <a:blip r:embed="rId2"/>
+          <a:stretch>
+            <a:fillRect/>
+          </a:stretch>
+        </p:blipFill>
+        <p:spPr>
+          <a:xfrm>
+            <a:off x="4359554" y="1783080"/>
+            <a:ext cx="3472586" cy="1691640"/>
+          </a:xfrm>
+          <a:prstGeom prst="rect">
+            <a:avLst/>
+          </a:prstGeom>
+        </p:spPr>
+      </p:pic>
+      <p:sp>
+        <p:nvSpPr>
+          <p:cNvPr id="11" name="Text 7"/>
+          <p:cNvSpPr txBox="1"/>
+          <p:nvPr/>
+        </p:nvSpPr>
+        <p:spPr>
+          <a:xfrm>
+            <a:off x="4560722" y="3639312"/>
+            <a:ext cx="3070250" cy="384048"/>
+          </a:xfrm>
+          <a:prstGeom prst="rect">
+            <a:avLst/>
+          </a:prstGeom>
+          <a:noFill/>
+          <a:ln/>
+        </p:spPr>
+        <p:txBody>
+          <a:bodyPr wrap="square" lIns="0" tIns="0" rIns="0" bIns="0" rtlCol="0" anchor="ctr"/>
+          <a:lstStyle/>
+          <a:p>
+            <a:pPr rtl="1" algn="r" indent="0" marL="0">
+              <a:buNone/>
+            </a:pPr>
+            <a:r>
+              <a:rPr lang="en-US" sz="1500" b="1" dirty="0">
+                <a:solidFill>
+                  <a:srgbClr val="1C5A73"/>
+                </a:solidFill>
+                <a:latin typeface="Arial" pitchFamily="34" charset="0"/>
+                <a:ea typeface="Arial" pitchFamily="34" charset="-122"/>
+                <a:cs typeface="Arial" pitchFamily="34" charset="-120"/>
+              </a:rPr>
+              <a:t>صعيد مصر</a:t>
+            </a:r>
+            <a:endParaRPr lang="en-US" sz="1500" dirty="0"/>
+          </a:p>
+        </p:txBody>
+      </p:sp>
+      <p:sp>
+        <p:nvSpPr>
+          <p:cNvPr id="12" name="Text 8"/>
+          <p:cNvSpPr txBox="1"/>
+          <p:nvPr/>
+        </p:nvSpPr>
+        <p:spPr>
+          <a:xfrm>
+            <a:off x="4560722" y="4041648"/>
+            <a:ext cx="3070250" cy="329184"/>
+          </a:xfrm>
+          <a:prstGeom prst="rect">
+            <a:avLst/>
+          </a:prstGeom>
+          <a:noFill/>
+          <a:ln/>
+        </p:spPr>
+        <p:txBody>
+          <a:bodyPr wrap="square" lIns="0" tIns="0" rIns="0" bIns="0" rtlCol="0" anchor="ctr"/>
+          <a:lstStyle/>
+          <a:p>
+            <a:pPr rtl="1" algn="r" indent="0" marL="0">
+              <a:buNone/>
+            </a:pPr>
+            <a:r>
+              <a:rPr lang="en-US" sz="1250" b="1" dirty="0">
+                <a:solidFill>
+                  <a:srgbClr val="A3701A"/>
+                </a:solidFill>
+                <a:latin typeface="Arial" pitchFamily="34" charset="0"/>
+                <a:ea typeface="Arial" pitchFamily="34" charset="-122"/>
+                <a:cs typeface="Arial" pitchFamily="34" charset="-120"/>
+              </a:rPr>
+              <a:t>≈ 16 مليون طن قصب سنويًا</a:t>
+            </a:r>
+            <a:endParaRPr lang="en-US" sz="1250" dirty="0"/>
+          </a:p>
+        </p:txBody>
+      </p:sp>
+      <p:sp>
+        <p:nvSpPr>
+          <p:cNvPr id="13" name="Text 9"/>
+          <p:cNvSpPr txBox="1"/>
+          <p:nvPr/>
+        </p:nvSpPr>
+        <p:spPr>
+          <a:xfrm>
+            <a:off x="4560722" y="4407408"/>
+            <a:ext cx="3070250" cy="1280160"/>
+          </a:xfrm>
+          <a:prstGeom prst="rect">
+            <a:avLst/>
+          </a:prstGeom>
+          <a:noFill/>
+          <a:ln/>
+        </p:spPr>
+        <p:txBody>
+          <a:bodyPr wrap="square" lIns="0" tIns="0" rIns="0" bIns="0" rtlCol="0" anchor="t"/>
+          <a:lstStyle/>
+          <a:p>
+            <a:pPr algn="r" marL="342900" indent="-342900">
+              <a:lnSpc>
+                <a:spcPct val="116000"/>
+              </a:lnSpc>
+              <a:spcAft>
+                <a:spcPts val="700"/>
+              </a:spcAft>
+              <a:buSzPct val="100000"/>
+              <a:buChar char="•"/>
+            </a:pPr>
+            <a:r>
+              <a:rPr lang="en-US" sz="1150" dirty="0">
+                <a:solidFill>
+                  <a:srgbClr val="31424A"/>
+                </a:solidFill>
+                <a:latin typeface="Arial" pitchFamily="34" charset="0"/>
+                <a:ea typeface="Arial" pitchFamily="34" charset="-122"/>
+                <a:cs typeface="Arial" pitchFamily="34" charset="-120"/>
+              </a:rPr>
+              <a:t>قصب السكر مركّز في المنيا وقنا وأسوان، وهو أعلى المحاصيل استهلاكًا للماء.</a:t>
+            </a:r>
+            <a:endParaRPr lang="en-US" sz="1150" dirty="0"/>
+          </a:p>
+          <a:p>
+            <a:pPr algn="r" marL="342900" indent="-342900">
+              <a:lnSpc>
+                <a:spcPct val="116000"/>
+              </a:lnSpc>
+              <a:spcAft>
+                <a:spcPts val="700"/>
+              </a:spcAft>
+              <a:buSzPct val="100000"/>
+              <a:buChar char="•"/>
+            </a:pPr>
+            <a:r>
+              <a:rPr lang="en-US" sz="1150" dirty="0">
+                <a:solidFill>
+                  <a:srgbClr val="31424A"/>
+                </a:solidFill>
+                <a:latin typeface="Arial" pitchFamily="34" charset="0"/>
+                <a:ea typeface="Arial" pitchFamily="34" charset="-122"/>
+                <a:cs typeface="Arial" pitchFamily="34" charset="-120"/>
+              </a:rPr>
+              <a:t>تبخر شديد وصيف يتجاوز 45 درجة: الفاقد بين ريّتين هو الأعلى في البلاد.</a:t>
+            </a:r>
+            <a:endParaRPr lang="en-US" sz="1150" dirty="0"/>
+          </a:p>
+          <a:p>
+            <a:pPr algn="r" marL="342900" indent="-342900">
+              <a:lnSpc>
+                <a:spcPct val="116000"/>
+              </a:lnSpc>
+              <a:spcAft>
+                <a:spcPts val="700"/>
+              </a:spcAft>
+              <a:buSzPct val="100000"/>
+              <a:buChar char="•"/>
+            </a:pPr>
+            <a:r>
+              <a:rPr lang="en-US" sz="1150" dirty="0">
+                <a:solidFill>
+                  <a:srgbClr val="31424A"/>
+                </a:solidFill>
+                <a:latin typeface="Arial" pitchFamily="34" charset="0"/>
+                <a:ea typeface="Arial" pitchFamily="34" charset="-122"/>
+                <a:cs typeface="Arial" pitchFamily="34" charset="-120"/>
+              </a:rPr>
+              <a:t>مصانع السكر مشترٍ منظَّم، يسهّل اتفاقًا على مستوى منطقة كاملة.</a:t>
+            </a:r>
+            <a:endParaRPr lang="en-US" sz="1150" dirty="0"/>
+          </a:p>
+        </p:txBody>
+      </p:sp>
+      <p:sp>
+        <p:nvSpPr>
+          <p:cNvPr id="14" name="Shape 10"/>
           <p:cNvSpPr/>
           <p:nvPr/>
         </p:nvSpPr>
         <p:spPr>
           <a:xfrm>
-            <a:off x="3642284" y="2103120"/>
-            <a:ext cx="566928" cy="566928"/>
-          </a:xfrm>
-          <a:prstGeom prst="ellipse">
-            <a:avLst/>
-          </a:prstGeom>
-          <a:solidFill>
-            <a:srgbClr val="1C5A73"/>
-          </a:solidFill>
-          <a:ln/>
-        </p:spPr>
-      </p:sp>
-      <p:sp>
-        <p:nvSpPr>
-          <p:cNvPr id="11" name="Text 9"/>
-          <p:cNvSpPr txBox="1"/>
-          <p:nvPr/>
-        </p:nvSpPr>
-        <p:spPr>
-          <a:xfrm>
-            <a:off x="3642284" y="2103120"/>
-            <a:ext cx="566928" cy="566928"/>
-          </a:xfrm>
-          <a:prstGeom prst="rect">
-            <a:avLst/>
-          </a:prstGeom>
-          <a:noFill/>
-          <a:ln/>
-        </p:spPr>
-        <p:txBody>
-          <a:bodyPr wrap="square" lIns="0" tIns="0" rIns="0" bIns="0" rtlCol="0" anchor="ctr"/>
-          <a:lstStyle/>
-          <a:p>
-            <a:pPr rtl="1" algn="ctr" indent="0" marL="0">
-              <a:buNone/>
-            </a:pPr>
-            <a:r>
-              <a:rPr lang="en-US" sz="1600" b="1" dirty="0">
-                <a:solidFill>
-                  <a:srgbClr val="FFFFFF"/>
-                </a:solidFill>
-                <a:latin typeface="Arial" pitchFamily="34" charset="0"/>
-                <a:ea typeface="Arial" pitchFamily="34" charset="-122"/>
-                <a:cs typeface="Arial" pitchFamily="34" charset="-120"/>
-              </a:rPr>
-              <a:t>2</a:t>
-            </a:r>
-            <a:endParaRPr lang="en-US" sz="1600" dirty="0"/>
-          </a:p>
-        </p:txBody>
-      </p:sp>
-      <p:sp>
-        <p:nvSpPr>
-          <p:cNvPr id="12" name="Text 10"/>
-          <p:cNvSpPr txBox="1"/>
-          <p:nvPr/>
-        </p:nvSpPr>
-        <p:spPr>
-          <a:xfrm>
-            <a:off x="3642284" y="2788920"/>
-            <a:ext cx="2087804" cy="457200"/>
-          </a:xfrm>
-          <a:prstGeom prst="rect">
-            <a:avLst/>
-          </a:prstGeom>
-          <a:noFill/>
-          <a:ln/>
-        </p:spPr>
-        <p:txBody>
-          <a:bodyPr wrap="square" lIns="0" tIns="0" rIns="0" bIns="0" rtlCol="0" anchor="ctr"/>
-          <a:lstStyle/>
-          <a:p>
-            <a:pPr rtl="1" algn="r" indent="0" marL="0">
-              <a:buNone/>
-            </a:pPr>
-            <a:r>
-              <a:rPr lang="en-US" sz="1400" b="1" dirty="0">
-                <a:solidFill>
-                  <a:srgbClr val="1C5A73"/>
-                </a:solidFill>
-                <a:latin typeface="Arial" pitchFamily="34" charset="0"/>
-                <a:ea typeface="Arial" pitchFamily="34" charset="-122"/>
-                <a:cs typeface="Arial" pitchFamily="34" charset="-120"/>
-              </a:rPr>
-              <a:t>قطعة تجريبية</a:t>
-            </a:r>
-            <a:endParaRPr lang="en-US" sz="1400" dirty="0"/>
-          </a:p>
-        </p:txBody>
-      </p:sp>
-      <p:sp>
-        <p:nvSpPr>
-          <p:cNvPr id="13" name="Text 11"/>
-          <p:cNvSpPr txBox="1"/>
-          <p:nvPr/>
-        </p:nvSpPr>
-        <p:spPr>
-          <a:xfrm>
-            <a:off x="3642284" y="3291840"/>
-            <a:ext cx="2087804" cy="1234440"/>
-          </a:xfrm>
-          <a:prstGeom prst="rect">
-            <a:avLst/>
-          </a:prstGeom>
-          <a:noFill/>
-          <a:ln/>
-        </p:spPr>
-        <p:txBody>
-          <a:bodyPr wrap="square" lIns="0" tIns="0" rIns="0" bIns="0" rtlCol="0" anchor="t"/>
-          <a:lstStyle/>
-          <a:p>
-            <a:pPr rtl="1" algn="r" indent="0" marL="0">
-              <a:lnSpc>
-                <a:spcPct val="120000"/>
-              </a:lnSpc>
-              <a:buNone/>
-            </a:pPr>
-            <a:r>
-              <a:rPr lang="en-US" sz="1200" dirty="0">
-                <a:solidFill>
-                  <a:srgbClr val="31424A"/>
-                </a:solidFill>
-                <a:latin typeface="Arial" pitchFamily="34" charset="0"/>
-                <a:ea typeface="Arial" pitchFamily="34" charset="-122"/>
-                <a:cs typeface="Arial" pitchFamily="34" charset="-120"/>
-              </a:rPr>
-              <a:t>تجربة مقارنة على قطعة واحدة، مع قطعة شاهدة تُدار بالطريقة نفسها.</a:t>
-            </a:r>
-            <a:endParaRPr lang="en-US" sz="1200" dirty="0"/>
-          </a:p>
-        </p:txBody>
-      </p:sp>
-      <p:sp>
-        <p:nvSpPr>
-          <p:cNvPr id="14" name="Shape 12"/>
-          <p:cNvSpPr/>
-          <p:nvPr/>
-        </p:nvSpPr>
-        <p:spPr>
-          <a:xfrm>
-            <a:off x="6233008" y="1874520"/>
-            <a:ext cx="2545004" cy="2834640"/>
+            <a:off x="8124749" y="1783080"/>
+            <a:ext cx="3472586" cy="4069080"/>
           </a:xfrm>
           <a:prstGeom prst="roundRect">
             <a:avLst>
-              <a:gd name="adj" fmla="val 3593"/>
+              <a:gd name="adj" fmla="val 2633"/>
             </a:avLst>
           </a:prstGeom>
           <a:solidFill>
@@ -6880,36 +6824,40 @@
           </a:ln>
         </p:spPr>
       </p:sp>
-      <p:sp>
-        <p:nvSpPr>
-          <p:cNvPr id="15" name="Shape 13"/>
-          <p:cNvSpPr/>
-          <p:nvPr/>
-        </p:nvSpPr>
-        <p:spPr>
-          <a:xfrm>
-            <a:off x="6461608" y="2103120"/>
-            <a:ext cx="566928" cy="566928"/>
-          </a:xfrm>
-          <a:prstGeom prst="ellipse">
-            <a:avLst/>
-          </a:prstGeom>
-          <a:solidFill>
-            <a:srgbClr val="1C5A73"/>
-          </a:solidFill>
-          <a:ln/>
-        </p:spPr>
-      </p:sp>
-      <p:sp>
-        <p:nvSpPr>
-          <p:cNvPr id="16" name="Text 14"/>
-          <p:cNvSpPr txBox="1"/>
-          <p:nvPr/>
-        </p:nvSpPr>
-        <p:spPr>
-          <a:xfrm>
-            <a:off x="6461608" y="2103120"/>
-            <a:ext cx="566928" cy="566928"/>
+      <p:pic>
+        <p:nvPicPr>
+          <p:cNvPr id="15" name="Image 2" descr="preencoded.png">    </p:cNvPr>
+          <p:cNvPicPr>
+            <a:picLocks noChangeAspect="1"/>
+          </p:cNvPicPr>
+          <p:nvPr/>
+        </p:nvPicPr>
+        <p:blipFill>
+          <a:blip r:embed="rId3"/>
+          <a:stretch>
+            <a:fillRect/>
+          </a:stretch>
+        </p:blipFill>
+        <p:spPr>
+          <a:xfrm>
+            <a:off x="8124749" y="1783080"/>
+            <a:ext cx="3472586" cy="1691640"/>
+          </a:xfrm>
+          <a:prstGeom prst="rect">
+            <a:avLst/>
+          </a:prstGeom>
+        </p:spPr>
+      </p:pic>
+      <p:sp>
+        <p:nvSpPr>
+          <p:cNvPr id="16" name="Text 11"/>
+          <p:cNvSpPr txBox="1"/>
+          <p:nvPr/>
+        </p:nvSpPr>
+        <p:spPr>
+          <a:xfrm>
+            <a:off x="8325917" y="3639312"/>
+            <a:ext cx="3070250" cy="384048"/>
           </a:xfrm>
           <a:prstGeom prst="rect">
             <a:avLst/>
@@ -6921,34 +6869,34 @@
           <a:bodyPr wrap="square" lIns="0" tIns="0" rIns="0" bIns="0" rtlCol="0" anchor="ctr"/>
           <a:lstStyle/>
           <a:p>
-            <a:pPr rtl="1" algn="ctr" indent="0" marL="0">
-              <a:buNone/>
-            </a:pPr>
-            <a:r>
-              <a:rPr lang="en-US" sz="1600" b="1" dirty="0">
-                <a:solidFill>
-                  <a:srgbClr val="FFFFFF"/>
-                </a:solidFill>
-                <a:latin typeface="Arial" pitchFamily="34" charset="0"/>
-                <a:ea typeface="Arial" pitchFamily="34" charset="-122"/>
-                <a:cs typeface="Arial" pitchFamily="34" charset="-120"/>
-              </a:rPr>
-              <a:t>3</a:t>
-            </a:r>
-            <a:endParaRPr lang="en-US" sz="1600" dirty="0"/>
-          </a:p>
-        </p:txBody>
-      </p:sp>
-      <p:sp>
-        <p:nvSpPr>
-          <p:cNvPr id="17" name="Text 15"/>
-          <p:cNvSpPr txBox="1"/>
-          <p:nvPr/>
-        </p:nvSpPr>
-        <p:spPr>
-          <a:xfrm>
-            <a:off x="6461608" y="2788920"/>
-            <a:ext cx="2087804" cy="457200"/>
+            <a:pPr rtl="1" algn="r" indent="0" marL="0">
+              <a:buNone/>
+            </a:pPr>
+            <a:r>
+              <a:rPr lang="en-US" sz="1500" b="1" dirty="0">
+                <a:solidFill>
+                  <a:srgbClr val="1C5A73"/>
+                </a:solidFill>
+                <a:latin typeface="Arial" pitchFamily="34" charset="0"/>
+                <a:ea typeface="Arial" pitchFamily="34" charset="-122"/>
+                <a:cs typeface="Arial" pitchFamily="34" charset="-120"/>
+              </a:rPr>
+              <a:t>النوبارية وغرب الدلتا</a:t>
+            </a:r>
+            <a:endParaRPr lang="en-US" sz="1500" dirty="0"/>
+          </a:p>
+        </p:txBody>
+      </p:sp>
+      <p:sp>
+        <p:nvSpPr>
+          <p:cNvPr id="17" name="Text 12"/>
+          <p:cNvSpPr txBox="1"/>
+          <p:nvPr/>
+        </p:nvSpPr>
+        <p:spPr>
+          <a:xfrm>
+            <a:off x="8325917" y="4041648"/>
+            <a:ext cx="3070250" cy="329184"/>
           </a:xfrm>
           <a:prstGeom prst="rect">
             <a:avLst/>
@@ -6964,30 +6912,30 @@
               <a:buNone/>
             </a:pPr>
             <a:r>
-              <a:rPr lang="en-US" sz="1400" b="1" dirty="0">
-                <a:solidFill>
-                  <a:srgbClr val="1C5A73"/>
-                </a:solidFill>
-                <a:latin typeface="Arial" pitchFamily="34" charset="0"/>
-                <a:ea typeface="Arial" pitchFamily="34" charset="-122"/>
-                <a:cs typeface="Arial" pitchFamily="34" charset="-120"/>
-              </a:rPr>
-              <a:t>القياس</a:t>
-            </a:r>
-            <a:endParaRPr lang="en-US" sz="1400" dirty="0"/>
-          </a:p>
-        </p:txBody>
-      </p:sp>
-      <p:sp>
-        <p:nvSpPr>
-          <p:cNvPr id="18" name="Text 16"/>
-          <p:cNvSpPr txBox="1"/>
-          <p:nvPr/>
-        </p:nvSpPr>
-        <p:spPr>
-          <a:xfrm>
-            <a:off x="6461608" y="3291840"/>
-            <a:ext cx="2087804" cy="1234440"/>
+              <a:rPr lang="en-US" sz="1250" b="1" dirty="0">
+                <a:solidFill>
+                  <a:srgbClr val="A3701A"/>
+                </a:solidFill>
+                <a:latin typeface="Arial" pitchFamily="34" charset="0"/>
+                <a:ea typeface="Arial" pitchFamily="34" charset="-122"/>
+                <a:cs typeface="Arial" pitchFamily="34" charset="-120"/>
+              </a:rPr>
+              <a:t>قطب تصدير الموالح والعنب</a:t>
+            </a:r>
+            <a:endParaRPr lang="en-US" sz="1250" dirty="0"/>
+          </a:p>
+        </p:txBody>
+      </p:sp>
+      <p:sp>
+        <p:nvSpPr>
+          <p:cNvPr id="18" name="Text 13"/>
+          <p:cNvSpPr txBox="1"/>
+          <p:nvPr/>
+        </p:nvSpPr>
+        <p:spPr>
+          <a:xfrm>
+            <a:off x="8325917" y="4407408"/>
+            <a:ext cx="3070250" cy="1280160"/>
           </a:xfrm>
           <a:prstGeom prst="rect">
             <a:avLst/>
@@ -6999,14 +6947,18 @@
           <a:bodyPr wrap="square" lIns="0" tIns="0" rIns="0" bIns="0" rtlCol="0" anchor="t"/>
           <a:lstStyle/>
           <a:p>
-            <a:pPr rtl="1" algn="r" indent="0" marL="0">
+            <a:pPr algn="r" marL="342900" indent="-342900">
               <a:lnSpc>
-                <a:spcPct val="120000"/>
+                <a:spcPct val="116000"/>
               </a:lnSpc>
-              <a:buNone/>
-            </a:pPr>
-            <a:r>
-              <a:rPr lang="en-US" sz="1200" dirty="0">
+              <a:spcAft>
+                <a:spcPts val="700"/>
+              </a:spcAft>
+              <a:buSzPct val="100000"/>
+              <a:buChar char="•"/>
+            </a:pPr>
+            <a:r>
+              <a:rPr lang="en-US" sz="1150" dirty="0">
                 <a:solidFill>
                   <a:srgbClr val="31424A"/>
                 </a:solidFill>
@@ -7014,166 +6966,23 @@
                 <a:ea typeface="Arial" pitchFamily="34" charset="-122"/>
                 <a:cs typeface="Arial" pitchFamily="34" charset="-120"/>
               </a:rPr>
-              <a:t>تسجيل الاستهلاك المائي والمحصول على دورة زراعية كاملة.</a:t>
-            </a:r>
-            <a:endParaRPr lang="en-US" sz="1200" dirty="0"/>
-          </a:p>
-        </p:txBody>
-      </p:sp>
-      <p:sp>
-        <p:nvSpPr>
-          <p:cNvPr id="19" name="Shape 17"/>
-          <p:cNvSpPr/>
-          <p:nvPr/>
-        </p:nvSpPr>
-        <p:spPr>
-          <a:xfrm>
-            <a:off x="9052331" y="1874520"/>
-            <a:ext cx="2545004" cy="2834640"/>
-          </a:xfrm>
-          <a:prstGeom prst="roundRect">
-            <a:avLst>
-              <a:gd name="adj" fmla="val 3593"/>
-            </a:avLst>
-          </a:prstGeom>
-          <a:solidFill>
-            <a:srgbClr val="EDF3F5"/>
-          </a:solidFill>
-          <a:ln w="9525">
-            <a:solidFill>
-              <a:srgbClr val="D6E2E7"/>
-            </a:solidFill>
-            <a:prstDash val="solid"/>
-          </a:ln>
-        </p:spPr>
-      </p:sp>
-      <p:sp>
-        <p:nvSpPr>
-          <p:cNvPr id="20" name="Shape 18"/>
-          <p:cNvSpPr/>
-          <p:nvPr/>
-        </p:nvSpPr>
-        <p:spPr>
-          <a:xfrm>
-            <a:off x="9280931" y="2103120"/>
-            <a:ext cx="566928" cy="566928"/>
-          </a:xfrm>
-          <a:prstGeom prst="ellipse">
-            <a:avLst/>
-          </a:prstGeom>
-          <a:solidFill>
-            <a:srgbClr val="1C5A73"/>
-          </a:solidFill>
-          <a:ln/>
-        </p:spPr>
-      </p:sp>
-      <p:sp>
-        <p:nvSpPr>
-          <p:cNvPr id="21" name="Text 19"/>
-          <p:cNvSpPr txBox="1"/>
-          <p:nvPr/>
-        </p:nvSpPr>
-        <p:spPr>
-          <a:xfrm>
-            <a:off x="9280931" y="2103120"/>
-            <a:ext cx="566928" cy="566928"/>
-          </a:xfrm>
-          <a:prstGeom prst="rect">
-            <a:avLst/>
-          </a:prstGeom>
-          <a:noFill/>
-          <a:ln/>
-        </p:spPr>
-        <p:txBody>
-          <a:bodyPr wrap="square" lIns="0" tIns="0" rIns="0" bIns="0" rtlCol="0" anchor="ctr"/>
-          <a:lstStyle/>
-          <a:p>
-            <a:pPr rtl="1" algn="ctr" indent="0" marL="0">
-              <a:buNone/>
-            </a:pPr>
-            <a:r>
-              <a:rPr lang="en-US" sz="1600" b="1" dirty="0">
-                <a:solidFill>
-                  <a:srgbClr val="FFFFFF"/>
-                </a:solidFill>
-                <a:latin typeface="Arial" pitchFamily="34" charset="0"/>
-                <a:ea typeface="Arial" pitchFamily="34" charset="-122"/>
-                <a:cs typeface="Arial" pitchFamily="34" charset="-120"/>
-              </a:rPr>
-              <a:t>4</a:t>
-            </a:r>
-            <a:endParaRPr lang="en-US" sz="1600" dirty="0"/>
-          </a:p>
-        </p:txBody>
-      </p:sp>
-      <p:sp>
-        <p:nvSpPr>
-          <p:cNvPr id="22" name="Text 20"/>
-          <p:cNvSpPr txBox="1"/>
-          <p:nvPr/>
-        </p:nvSpPr>
-        <p:spPr>
-          <a:xfrm>
-            <a:off x="9280931" y="2788920"/>
-            <a:ext cx="2087804" cy="457200"/>
-          </a:xfrm>
-          <a:prstGeom prst="rect">
-            <a:avLst/>
-          </a:prstGeom>
-          <a:noFill/>
-          <a:ln/>
-        </p:spPr>
-        <p:txBody>
-          <a:bodyPr wrap="square" lIns="0" tIns="0" rIns="0" bIns="0" rtlCol="0" anchor="ctr"/>
-          <a:lstStyle/>
-          <a:p>
-            <a:pPr rtl="1" algn="r" indent="0" marL="0">
-              <a:buNone/>
-            </a:pPr>
-            <a:r>
-              <a:rPr lang="en-US" sz="1400" b="1" dirty="0">
-                <a:solidFill>
-                  <a:srgbClr val="1C5A73"/>
-                </a:solidFill>
-                <a:latin typeface="Arial" pitchFamily="34" charset="0"/>
-                <a:ea typeface="Arial" pitchFamily="34" charset="-122"/>
-                <a:cs typeface="Arial" pitchFamily="34" charset="-120"/>
-              </a:rPr>
-              <a:t>التوسيع</a:t>
-            </a:r>
-            <a:endParaRPr lang="en-US" sz="1400" dirty="0"/>
-          </a:p>
-        </p:txBody>
-      </p:sp>
-      <p:sp>
-        <p:nvSpPr>
-          <p:cNvPr id="23" name="Text 21"/>
-          <p:cNvSpPr txBox="1"/>
-          <p:nvPr/>
-        </p:nvSpPr>
-        <p:spPr>
-          <a:xfrm>
-            <a:off x="9280931" y="3291840"/>
-            <a:ext cx="2087804" cy="1234440"/>
-          </a:xfrm>
-          <a:prstGeom prst="rect">
-            <a:avLst/>
-          </a:prstGeom>
-          <a:noFill/>
-          <a:ln/>
-        </p:spPr>
-        <p:txBody>
-          <a:bodyPr wrap="square" lIns="0" tIns="0" rIns="0" bIns="0" rtlCol="0" anchor="t"/>
-          <a:lstStyle/>
-          <a:p>
-            <a:pPr rtl="1" algn="r" indent="0" marL="0">
+              <a:t>أراضٍ مستصلحة رملية: قدرة احتفاظ بالماء ضعيفة، وهي الحالة الأنسب لموادنا.</a:t>
+            </a:r>
+            <a:endParaRPr lang="en-US" sz="1150" dirty="0"/>
+          </a:p>
+          <a:p>
+            <a:pPr algn="r" marL="342900" indent="-342900">
               <a:lnSpc>
-                <a:spcPct val="120000"/>
+                <a:spcPct val="116000"/>
               </a:lnSpc>
-              <a:buNone/>
-            </a:pPr>
-            <a:r>
-              <a:rPr lang="en-US" sz="1200" dirty="0">
+              <a:spcAft>
+                <a:spcPts val="700"/>
+              </a:spcAft>
+              <a:buSzPct val="100000"/>
+              <a:buChar char="•"/>
+            </a:pPr>
+            <a:r>
+              <a:rPr lang="en-US" sz="1150" dirty="0">
                 <a:solidFill>
                   <a:srgbClr val="31424A"/>
                 </a:solidFill>
@@ -7181,57 +6990,39 @@
                 <a:ea typeface="Arial" pitchFamily="34" charset="-122"/>
                 <a:cs typeface="Arial" pitchFamily="34" charset="-120"/>
               </a:rPr>
-              <a:t>تعميم تدريجي على باقي القطع بناءً على النتائج المسجَّلة فعليًا.</a:t>
-            </a:r>
-            <a:endParaRPr lang="en-US" sz="1200" dirty="0"/>
-          </a:p>
-        </p:txBody>
-      </p:sp>
-      <p:sp>
-        <p:nvSpPr>
-          <p:cNvPr id="24" name="Text 22"/>
-          <p:cNvSpPr txBox="1"/>
-          <p:nvPr/>
-        </p:nvSpPr>
-        <p:spPr>
-          <a:xfrm>
-            <a:off x="594360" y="4983480"/>
-            <a:ext cx="11002975" cy="822960"/>
-          </a:xfrm>
-          <a:prstGeom prst="rect">
-            <a:avLst/>
-          </a:prstGeom>
-          <a:noFill/>
-          <a:ln/>
-        </p:spPr>
-        <p:txBody>
-          <a:bodyPr wrap="square" lIns="0" tIns="0" rIns="0" bIns="0" rtlCol="0" anchor="t"/>
-          <a:lstStyle/>
-          <a:p>
-            <a:pPr rtl="1" algn="r" indent="0" marL="0">
+              <a:t>مزارع تصدير كبيرة مجهّزة بالتنقيط والمحاور، وقرار شراء مركزي وسريع.</a:t>
+            </a:r>
+            <a:endParaRPr lang="en-US" sz="1150" dirty="0"/>
+          </a:p>
+          <a:p>
+            <a:pPr algn="r" marL="342900" indent="-342900">
               <a:lnSpc>
-                <a:spcPct val="125000"/>
+                <a:spcPct val="116000"/>
               </a:lnSpc>
-              <a:buNone/>
-            </a:pPr>
-            <a:r>
-              <a:rPr lang="en-US" sz="1250" dirty="0">
-                <a:solidFill>
-                  <a:srgbClr val="6C8089"/>
-                </a:solidFill>
-                <a:latin typeface="Arial" pitchFamily="34" charset="0"/>
-                <a:ea typeface="Arial" pitchFamily="34" charset="-122"/>
-                <a:cs typeface="Arial" pitchFamily="34" charset="-120"/>
-              </a:rPr>
-              <a:t>قاعدة الجرعة واحدة في كل مكان: 3 غرامات لكل لتر من التربة النافعة. ما يتغير من أرض إلى أخرى هو حجم التربة الذي تستكشفه الجذور فعليًا.</a:t>
-            </a:r>
-            <a:endParaRPr lang="en-US" sz="1250" dirty="0"/>
-          </a:p>
-        </p:txBody>
-      </p:sp>
-      <p:sp>
-        <p:nvSpPr>
-          <p:cNvPr id="25" name="Text 23"/>
+              <a:spcAft>
+                <a:spcPts val="700"/>
+              </a:spcAft>
+              <a:buSzPct val="100000"/>
+              <a:buChar char="•"/>
+            </a:pPr>
+            <a:r>
+              <a:rPr lang="en-US" sz="1150" dirty="0">
+                <a:solidFill>
+                  <a:srgbClr val="31424A"/>
+                </a:solidFill>
+                <a:latin typeface="Arial" pitchFamily="34" charset="0"/>
+                <a:ea typeface="Arial" pitchFamily="34" charset="-122"/>
+                <a:cs typeface="Arial" pitchFamily="34" charset="-120"/>
+              </a:rPr>
+              <a:t>المشترون الأوروبيون يطلبون شهادة عضوية سارية.</a:t>
+            </a:r>
+            <a:endParaRPr lang="en-US" sz="1150" dirty="0"/>
+          </a:p>
+        </p:txBody>
+      </p:sp>
+      <p:sp>
+        <p:nvSpPr>
+          <p:cNvPr id="19" name="Text 14"/>
           <p:cNvSpPr txBox="1"/>
           <p:nvPr/>
         </p:nvSpPr>
@@ -7272,7 +7063,7 @@
       </p:sp>
       <p:sp>
         <p:nvSpPr>
-          <p:cNvPr id="26" name="Text 24"/>
+          <p:cNvPr id="20" name="Text 15"/>
           <p:cNvSpPr txBox="1"/>
           <p:nvPr/>
         </p:nvSpPr>
@@ -7376,7 +7167,7 @@
                 <a:ea typeface="Arial" pitchFamily="34" charset="-122"/>
                 <a:cs typeface="Arial" pitchFamily="34" charset="-120"/>
               </a:rPr>
-              <a:t>العمل معاً</a:t>
+              <a:t>كيف نعمل</a:t>
             </a:r>
             <a:endParaRPr lang="en-US" sz="1150" dirty="0"/>
           </a:p>
@@ -7415,7 +7206,7 @@
                 <a:ea typeface="Arial" pitchFamily="34" charset="-122"/>
                 <a:cs typeface="Arial" pitchFamily="34" charset="-120"/>
               </a:rPr>
-              <a:t>شريك محلي في مصر</a:t>
+              <a:t>انتشار على مراحل، مُقاس عند كل خطوة</a:t>
             </a:r>
             <a:endParaRPr lang="en-US" sz="3000" dirty="0"/>
           </a:p>
@@ -7540,7 +7331,7 @@
                 <a:ea typeface="Arial" pitchFamily="34" charset="-122"/>
                 <a:cs typeface="Arial" pitchFamily="34" charset="-120"/>
               </a:rPr>
-              <a:t>التوزيع</a:t>
+              <a:t>التشخيص</a:t>
             </a:r>
             <a:endParaRPr lang="en-US" sz="1400" dirty="0"/>
           </a:p>
@@ -7582,7 +7373,7 @@
                 <a:ea typeface="Arial" pitchFamily="34" charset="-122"/>
                 <a:cs typeface="Arial" pitchFamily="34" charset="-120"/>
               </a:rPr>
-              <a:t>حصرية على مستوى الإقليم ومخزون إطلاق للموسم التجاري الأول.</a:t>
+              <a:t>تحليل التربة وأسلوب الري والمحصول. لا التزام على الإطلاق في هذه المرحلة.</a:t>
             </a:r>
             <a:endParaRPr lang="en-US" sz="1200" dirty="0"/>
           </a:p>
@@ -7707,7 +7498,7 @@
                 <a:ea typeface="Arial" pitchFamily="34" charset="-122"/>
                 <a:cs typeface="Arial" pitchFamily="34" charset="-120"/>
               </a:rPr>
-              <a:t>التدريب</a:t>
+              <a:t>قطعة تجريبية</a:t>
             </a:r>
             <a:endParaRPr lang="en-US" sz="1400" dirty="0"/>
           </a:p>
@@ -7749,7 +7540,7 @@
                 <a:ea typeface="Arial" pitchFamily="34" charset="-122"/>
                 <a:cs typeface="Arial" pitchFamily="34" charset="-120"/>
               </a:rPr>
-              <a:t>تدريب فني للفرق، وبروتوكولات الجرعات، وتحديثها في كل موسم.</a:t>
+              <a:t>تجربة مقارنة على قطعة واحدة، مع قطعة شاهدة تُدار بالطريقة نفسها.</a:t>
             </a:r>
             <a:endParaRPr lang="en-US" sz="1200" dirty="0"/>
           </a:p>
@@ -7874,7 +7665,7 @@
                 <a:ea typeface="Arial" pitchFamily="34" charset="-122"/>
                 <a:cs typeface="Arial" pitchFamily="34" charset="-120"/>
               </a:rPr>
-              <a:t>تجارب مشتركة</a:t>
+              <a:t>القياس</a:t>
             </a:r>
             <a:endParaRPr lang="en-US" sz="1400" dirty="0"/>
           </a:p>
@@ -7916,7 +7707,7 @@
                 <a:ea typeface="Arial" pitchFamily="34" charset="-122"/>
                 <a:cs typeface="Arial" pitchFamily="34" charset="-120"/>
               </a:rPr>
-              <a:t>قطع إرشادية مع قطعة شاهد، ونتائج تُعرض على المزارعين.</a:t>
+              <a:t>تسجيل الاستهلاك المائي والمحصول على دورة زراعية كاملة.</a:t>
             </a:r>
             <a:endParaRPr lang="en-US" sz="1200" dirty="0"/>
           </a:p>
@@ -8041,7 +7832,7 @@
                 <a:ea typeface="Arial" pitchFamily="34" charset="-122"/>
                 <a:cs typeface="Arial" pitchFamily="34" charset="-120"/>
               </a:rPr>
-              <a:t>المؤسسات</a:t>
+              <a:t>التوسيع</a:t>
             </a:r>
             <a:endParaRPr lang="en-US" sz="1400" dirty="0"/>
           </a:p>
@@ -8083,7 +7874,7 @@
                 <a:ea typeface="Arial" pitchFamily="34" charset="-122"/>
                 <a:cs typeface="Arial" pitchFamily="34" charset="-120"/>
               </a:rPr>
-              <a:t>حوار مع وزارة الزراعة وبرامج الأمن الغذائي.</a:t>
+              <a:t>تعميم تدريجي على باقي القطع بناءً على النتائج المسجَّلة فعليًا.</a:t>
             </a:r>
             <a:endParaRPr lang="en-US" sz="1200" dirty="0"/>
           </a:p>
@@ -8125,7 +7916,7 @@
                 <a:ea typeface="Arial" pitchFamily="34" charset="-122"/>
                 <a:cs typeface="Arial" pitchFamily="34" charset="-120"/>
               </a:rPr>
-              <a:t>يتكيف الإطار مع الإقليم: يمكن أن يقود الشراكة مستورد أو موزّع مدخلات زراعية أو جمعية منتجين.</a:t>
+              <a:t>قاعدة الجرعة واحدة في كل مكان: 3 غرامات لكل لتر من التربة النافعة. ما يتغير من أرض إلى أخرى هو حجم التربة الذي تستكشفه الجذور فعليًا.</a:t>
             </a:r>
             <a:endParaRPr lang="en-US" sz="1250" dirty="0"/>
           </a:p>
@@ -8278,7 +8069,7 @@
                 <a:ea typeface="Arial" pitchFamily="34" charset="-122"/>
                 <a:cs typeface="Arial" pitchFamily="34" charset="-120"/>
               </a:rPr>
-              <a:t>ما ينبغي توقّعه</a:t>
+              <a:t>العمل معاً</a:t>
             </a:r>
             <a:endParaRPr lang="en-US" sz="1150" dirty="0"/>
           </a:p>
@@ -8317,7 +8108,7 @@
                 <a:ea typeface="Arial" pitchFamily="34" charset="-122"/>
                 <a:cs typeface="Arial" pitchFamily="34" charset="-120"/>
               </a:rPr>
-              <a:t>مخاطر محدّدة وردود عليها</a:t>
+              <a:t>شريك محلي في مصر</a:t>
             </a:r>
             <a:endParaRPr lang="en-US" sz="3000" dirty="0"/>
           </a:p>
@@ -8325,332 +8116,18 @@
       </p:sp>
       <p:sp>
         <p:nvSpPr>
-          <p:cNvPr id="4" name="Text 2"/>
-          <p:cNvSpPr txBox="1"/>
-          <p:nvPr/>
-        </p:nvSpPr>
-        <p:spPr>
-          <a:xfrm>
-            <a:off x="594360" y="1783080"/>
-            <a:ext cx="5227168" cy="411480"/>
-          </a:xfrm>
-          <a:prstGeom prst="rect">
-            <a:avLst/>
-          </a:prstGeom>
-          <a:noFill/>
-          <a:ln/>
-        </p:spPr>
-        <p:txBody>
-          <a:bodyPr wrap="square" lIns="0" tIns="0" rIns="0" bIns="0" rtlCol="0" anchor="ctr"/>
-          <a:lstStyle/>
-          <a:p>
-            <a:pPr rtl="1" algn="r" indent="0" marL="0">
-              <a:buNone/>
-            </a:pPr>
-            <a:r>
-              <a:rPr lang="en-US" sz="1600" b="1" dirty="0">
-                <a:solidFill>
-                  <a:srgbClr val="1C5A73"/>
-                </a:solidFill>
-                <a:latin typeface="Arial" pitchFamily="34" charset="0"/>
-                <a:ea typeface="Arial" pitchFamily="34" charset="-122"/>
-                <a:cs typeface="Arial" pitchFamily="34" charset="-120"/>
-              </a:rPr>
-              <a:t>المخاطر</a:t>
-            </a:r>
-            <a:endParaRPr lang="en-US" sz="1600" dirty="0"/>
-          </a:p>
-        </p:txBody>
-      </p:sp>
-      <p:sp>
-        <p:nvSpPr>
-          <p:cNvPr id="5" name="Text 3"/>
-          <p:cNvSpPr txBox="1"/>
-          <p:nvPr/>
-        </p:nvSpPr>
-        <p:spPr>
-          <a:xfrm>
-            <a:off x="594360" y="2286000"/>
-            <a:ext cx="5227168" cy="2468880"/>
-          </a:xfrm>
-          <a:prstGeom prst="rect">
-            <a:avLst/>
-          </a:prstGeom>
-          <a:noFill/>
-          <a:ln/>
-        </p:spPr>
-        <p:txBody>
-          <a:bodyPr wrap="square" lIns="0" tIns="0" rIns="0" bIns="0" rtlCol="0" anchor="t"/>
-          <a:lstStyle/>
-          <a:p>
-            <a:pPr algn="r" marL="342900" indent="-342900">
-              <a:lnSpc>
-                <a:spcPct val="122000"/>
-              </a:lnSpc>
-              <a:spcAft>
-                <a:spcPts val="1000"/>
-              </a:spcAft>
-              <a:buSzPct val="100000"/>
-              <a:buChar char="•"/>
-            </a:pPr>
-            <a:r>
-              <a:rPr lang="en-US" sz="1350" dirty="0">
-                <a:solidFill>
-                  <a:srgbClr val="31424A"/>
-                </a:solidFill>
-                <a:latin typeface="Arial" pitchFamily="34" charset="0"/>
-                <a:ea typeface="Arial" pitchFamily="34" charset="-122"/>
-                <a:cs typeface="Arial" pitchFamily="34" charset="-120"/>
-              </a:rPr>
-              <a:t>تفتّت الحيازات في الوادي والدلتا: متوسط الحيازة أقل من فدانين، وقرار الشراء مشتّت.</a:t>
-            </a:r>
-            <a:endParaRPr lang="en-US" sz="1350" dirty="0"/>
-          </a:p>
-          <a:p>
-            <a:pPr algn="r" marL="342900" indent="-342900">
-              <a:lnSpc>
-                <a:spcPct val="122000"/>
-              </a:lnSpc>
-              <a:spcAft>
-                <a:spcPts val="1000"/>
-              </a:spcAft>
-              <a:buSzPct val="100000"/>
-              <a:buChar char="•"/>
-            </a:pPr>
-            <a:r>
-              <a:rPr lang="en-US" sz="1350" dirty="0">
-                <a:solidFill>
-                  <a:srgbClr val="31424A"/>
-                </a:solidFill>
-                <a:latin typeface="Arial" pitchFamily="34" charset="0"/>
-                <a:ea typeface="Arial" pitchFamily="34" charset="-122"/>
-                <a:cs typeface="Arial" pitchFamily="34" charset="-120"/>
-              </a:rPr>
-              <a:t>ماء الري متاح بتكلفة منخفضة جدًا للمزارع، ما يضعف الحافز المالي المباشر للتوفير.</a:t>
-            </a:r>
-            <a:endParaRPr lang="en-US" sz="1350" dirty="0"/>
-          </a:p>
-          <a:p>
-            <a:pPr algn="r" marL="342900" indent="-342900">
-              <a:lnSpc>
-                <a:spcPct val="122000"/>
-              </a:lnSpc>
-              <a:spcAft>
-                <a:spcPts val="1000"/>
-              </a:spcAft>
-              <a:buSzPct val="100000"/>
-              <a:buChar char="•"/>
-            </a:pPr>
-            <a:r>
-              <a:rPr lang="en-US" sz="1350" dirty="0">
-                <a:solidFill>
-                  <a:srgbClr val="31424A"/>
-                </a:solidFill>
-                <a:latin typeface="Arial" pitchFamily="34" charset="0"/>
-                <a:ea typeface="Arial" pitchFamily="34" charset="-122"/>
-                <a:cs typeface="Arial" pitchFamily="34" charset="-120"/>
-              </a:rPr>
-              <a:t>منافسة مواد رخيصة أساسها الصوديوم تركت انطباعًا سيئًا وأضرّت بتربة مالحة أصلًا.</a:t>
-            </a:r>
-            <a:endParaRPr lang="en-US" sz="1350" dirty="0"/>
-          </a:p>
-          <a:p>
-            <a:pPr algn="r" marL="342900" indent="-342900">
-              <a:lnSpc>
-                <a:spcPct val="122000"/>
-              </a:lnSpc>
-              <a:spcAft>
-                <a:spcPts val="1000"/>
-              </a:spcAft>
-              <a:buSzPct val="100000"/>
-              <a:buChar char="•"/>
-            </a:pPr>
-            <a:r>
-              <a:rPr lang="en-US" sz="1350" dirty="0">
-                <a:solidFill>
-                  <a:srgbClr val="31424A"/>
-                </a:solidFill>
-                <a:latin typeface="Arial" pitchFamily="34" charset="0"/>
-                <a:ea typeface="Arial" pitchFamily="34" charset="-122"/>
-                <a:cs typeface="Arial" pitchFamily="34" charset="-120"/>
-              </a:rPr>
-              <a:t>سيولة المزارع محدودة وتكلفة المستلزمات المستوردة مرتفعة بفعل تقلبات سعر الصرف.</a:t>
-            </a:r>
-            <a:endParaRPr lang="en-US" sz="1350" dirty="0"/>
-          </a:p>
-        </p:txBody>
-      </p:sp>
-      <p:sp>
-        <p:nvSpPr>
-          <p:cNvPr id="6" name="Text 4"/>
-          <p:cNvSpPr txBox="1"/>
-          <p:nvPr/>
-        </p:nvSpPr>
-        <p:spPr>
-          <a:xfrm>
-            <a:off x="6370168" y="1783080"/>
-            <a:ext cx="5227168" cy="411480"/>
-          </a:xfrm>
-          <a:prstGeom prst="rect">
-            <a:avLst/>
-          </a:prstGeom>
-          <a:noFill/>
-          <a:ln/>
-        </p:spPr>
-        <p:txBody>
-          <a:bodyPr wrap="square" lIns="0" tIns="0" rIns="0" bIns="0" rtlCol="0" anchor="ctr"/>
-          <a:lstStyle/>
-          <a:p>
-            <a:pPr rtl="1" algn="r" indent="0" marL="0">
-              <a:buNone/>
-            </a:pPr>
-            <a:r>
-              <a:rPr lang="en-US" sz="1600" b="1" dirty="0">
-                <a:solidFill>
-                  <a:srgbClr val="1C5A73"/>
-                </a:solidFill>
-                <a:latin typeface="Arial" pitchFamily="34" charset="0"/>
-                <a:ea typeface="Arial" pitchFamily="34" charset="-122"/>
-                <a:cs typeface="Arial" pitchFamily="34" charset="-120"/>
-              </a:rPr>
-              <a:t>الردود</a:t>
-            </a:r>
-            <a:endParaRPr lang="en-US" sz="1600" dirty="0"/>
-          </a:p>
-        </p:txBody>
-      </p:sp>
-      <p:sp>
-        <p:nvSpPr>
-          <p:cNvPr id="7" name="Text 5"/>
-          <p:cNvSpPr txBox="1"/>
-          <p:nvPr/>
-        </p:nvSpPr>
-        <p:spPr>
-          <a:xfrm>
-            <a:off x="6370168" y="2286000"/>
-            <a:ext cx="5227168" cy="2468880"/>
-          </a:xfrm>
-          <a:prstGeom prst="rect">
-            <a:avLst/>
-          </a:prstGeom>
-          <a:noFill/>
-          <a:ln/>
-        </p:spPr>
-        <p:txBody>
-          <a:bodyPr wrap="square" lIns="0" tIns="0" rIns="0" bIns="0" rtlCol="0" anchor="t"/>
-          <a:lstStyle/>
-          <a:p>
-            <a:pPr algn="r" marL="342900" indent="-342900">
-              <a:lnSpc>
-                <a:spcPct val="122000"/>
-              </a:lnSpc>
-              <a:spcAft>
-                <a:spcPts val="1000"/>
-              </a:spcAft>
-              <a:buSzPct val="100000"/>
-              <a:buChar char="•"/>
-            </a:pPr>
-            <a:r>
-              <a:rPr lang="en-US" sz="1350" dirty="0">
-                <a:solidFill>
-                  <a:srgbClr val="31424A"/>
-                </a:solidFill>
-                <a:latin typeface="Arial" pitchFamily="34" charset="0"/>
-                <a:ea typeface="Arial" pitchFamily="34" charset="-122"/>
-                <a:cs typeface="Arial" pitchFamily="34" charset="-120"/>
-              </a:rPr>
-              <a:t>المرور عبر الجمعيات التعاونية ومصانع السكر ومصدّري الموالح، لا عبر الحيازة الفردية.</a:t>
-            </a:r>
-            <a:endParaRPr lang="en-US" sz="1350" dirty="0"/>
-          </a:p>
-          <a:p>
-            <a:pPr algn="r" marL="342900" indent="-342900">
-              <a:lnSpc>
-                <a:spcPct val="122000"/>
-              </a:lnSpc>
-              <a:spcAft>
-                <a:spcPts val="1000"/>
-              </a:spcAft>
-              <a:buSzPct val="100000"/>
-              <a:buChar char="•"/>
-            </a:pPr>
-            <a:r>
-              <a:rPr lang="en-US" sz="1350" dirty="0">
-                <a:solidFill>
-                  <a:srgbClr val="31424A"/>
-                </a:solidFill>
-                <a:latin typeface="Arial" pitchFamily="34" charset="0"/>
-                <a:ea typeface="Arial" pitchFamily="34" charset="-122"/>
-                <a:cs typeface="Arial" pitchFamily="34" charset="-120"/>
-              </a:rPr>
-              <a:t>عرض المكسب على المحصول والجودة، لا على فاتورة الماء وحدها: الماء المتاح باستمرار يرفع الإنتاج.</a:t>
-            </a:r>
-            <a:endParaRPr lang="en-US" sz="1350" dirty="0"/>
-          </a:p>
-          <a:p>
-            <a:pPr algn="r" marL="342900" indent="-342900">
-              <a:lnSpc>
-                <a:spcPct val="122000"/>
-              </a:lnSpc>
-              <a:spcAft>
-                <a:spcPts val="1000"/>
-              </a:spcAft>
-              <a:buSzPct val="100000"/>
-              <a:buChar char="•"/>
-            </a:pPr>
-            <a:r>
-              <a:rPr lang="en-US" sz="1350" dirty="0">
-                <a:solidFill>
-                  <a:srgbClr val="31424A"/>
-                </a:solidFill>
-                <a:latin typeface="Arial" pitchFamily="34" charset="0"/>
-                <a:ea typeface="Arial" pitchFamily="34" charset="-122"/>
-                <a:cs typeface="Arial" pitchFamily="34" charset="-120"/>
-              </a:rPr>
-              <a:t>توثيق فارق التركيبة: بوتاسيوم لا صوديوم، ملائم للمحاصيل الغذائية وللتربة المالحة.</a:t>
-            </a:r>
-            <a:endParaRPr lang="en-US" sz="1350" dirty="0"/>
-          </a:p>
-          <a:p>
-            <a:pPr algn="r" marL="342900" indent="-342900">
-              <a:lnSpc>
-                <a:spcPct val="122000"/>
-              </a:lnSpc>
-              <a:spcAft>
-                <a:spcPts val="1000"/>
-              </a:spcAft>
-              <a:buSzPct val="100000"/>
-              <a:buChar char="•"/>
-            </a:pPr>
-            <a:r>
-              <a:rPr lang="en-US" sz="1350" dirty="0">
-                <a:solidFill>
-                  <a:srgbClr val="31424A"/>
-                </a:solidFill>
-                <a:latin typeface="Arial" pitchFamily="34" charset="0"/>
-                <a:ea typeface="Arial" pitchFamily="34" charset="-122"/>
-                <a:cs typeface="Arial" pitchFamily="34" charset="-120"/>
-              </a:rPr>
-              <a:t>توزيع الالتزام: مفعول يمتد 3 إلى 4 سنوات يوزّع التكلفة على عدة مواسم.</a:t>
-            </a:r>
-            <a:endParaRPr lang="en-US" sz="1350" dirty="0"/>
-          </a:p>
-        </p:txBody>
-      </p:sp>
-      <p:sp>
-        <p:nvSpPr>
-          <p:cNvPr id="8" name="Shape 6"/>
+          <p:cNvPr id="4" name="Shape 2"/>
           <p:cNvSpPr/>
           <p:nvPr/>
         </p:nvSpPr>
         <p:spPr>
           <a:xfrm>
-            <a:off x="594360" y="4846320"/>
-            <a:ext cx="11002975" cy="960120"/>
+            <a:off x="594360" y="1874520"/>
+            <a:ext cx="2545004" cy="2834640"/>
           </a:xfrm>
           <a:prstGeom prst="roundRect">
             <a:avLst>
-              <a:gd name="adj" fmla="val 7619"/>
+              <a:gd name="adj" fmla="val 3593"/>
             </a:avLst>
           </a:prstGeom>
           <a:solidFill>
@@ -8666,14 +8143,112 @@
       </p:sp>
       <p:sp>
         <p:nvSpPr>
-          <p:cNvPr id="9" name="Text 7"/>
-          <p:cNvSpPr txBox="1"/>
-          <p:nvPr/>
-        </p:nvSpPr>
-        <p:spPr>
-          <a:xfrm>
-            <a:off x="822960" y="4983480"/>
-            <a:ext cx="10545775" cy="713232"/>
+          <p:cNvPr id="5" name="Shape 3"/>
+          <p:cNvSpPr/>
+          <p:nvPr/>
+        </p:nvSpPr>
+        <p:spPr>
+          <a:xfrm>
+            <a:off x="822960" y="2103120"/>
+            <a:ext cx="566928" cy="566928"/>
+          </a:xfrm>
+          <a:prstGeom prst="ellipse">
+            <a:avLst/>
+          </a:prstGeom>
+          <a:solidFill>
+            <a:srgbClr val="1C5A73"/>
+          </a:solidFill>
+          <a:ln/>
+        </p:spPr>
+      </p:sp>
+      <p:sp>
+        <p:nvSpPr>
+          <p:cNvPr id="6" name="Text 4"/>
+          <p:cNvSpPr txBox="1"/>
+          <p:nvPr/>
+        </p:nvSpPr>
+        <p:spPr>
+          <a:xfrm>
+            <a:off x="822960" y="2103120"/>
+            <a:ext cx="566928" cy="566928"/>
+          </a:xfrm>
+          <a:prstGeom prst="rect">
+            <a:avLst/>
+          </a:prstGeom>
+          <a:noFill/>
+          <a:ln/>
+        </p:spPr>
+        <p:txBody>
+          <a:bodyPr wrap="square" lIns="0" tIns="0" rIns="0" bIns="0" rtlCol="0" anchor="ctr"/>
+          <a:lstStyle/>
+          <a:p>
+            <a:pPr rtl="1" algn="ctr" indent="0" marL="0">
+              <a:buNone/>
+            </a:pPr>
+            <a:r>
+              <a:rPr lang="en-US" sz="1600" b="1" dirty="0">
+                <a:solidFill>
+                  <a:srgbClr val="FFFFFF"/>
+                </a:solidFill>
+                <a:latin typeface="Arial" pitchFamily="34" charset="0"/>
+                <a:ea typeface="Arial" pitchFamily="34" charset="-122"/>
+                <a:cs typeface="Arial" pitchFamily="34" charset="-120"/>
+              </a:rPr>
+              <a:t>1</a:t>
+            </a:r>
+            <a:endParaRPr lang="en-US" sz="1600" dirty="0"/>
+          </a:p>
+        </p:txBody>
+      </p:sp>
+      <p:sp>
+        <p:nvSpPr>
+          <p:cNvPr id="7" name="Text 5"/>
+          <p:cNvSpPr txBox="1"/>
+          <p:nvPr/>
+        </p:nvSpPr>
+        <p:spPr>
+          <a:xfrm>
+            <a:off x="822960" y="2788920"/>
+            <a:ext cx="2087804" cy="457200"/>
+          </a:xfrm>
+          <a:prstGeom prst="rect">
+            <a:avLst/>
+          </a:prstGeom>
+          <a:noFill/>
+          <a:ln/>
+        </p:spPr>
+        <p:txBody>
+          <a:bodyPr wrap="square" lIns="0" tIns="0" rIns="0" bIns="0" rtlCol="0" anchor="ctr"/>
+          <a:lstStyle/>
+          <a:p>
+            <a:pPr rtl="1" algn="r" indent="0" marL="0">
+              <a:buNone/>
+            </a:pPr>
+            <a:r>
+              <a:rPr lang="en-US" sz="1400" b="1" dirty="0">
+                <a:solidFill>
+                  <a:srgbClr val="1C5A73"/>
+                </a:solidFill>
+                <a:latin typeface="Arial" pitchFamily="34" charset="0"/>
+                <a:ea typeface="Arial" pitchFamily="34" charset="-122"/>
+                <a:cs typeface="Arial" pitchFamily="34" charset="-120"/>
+              </a:rPr>
+              <a:t>التوزيع</a:t>
+            </a:r>
+            <a:endParaRPr lang="en-US" sz="1400" dirty="0"/>
+          </a:p>
+        </p:txBody>
+      </p:sp>
+      <p:sp>
+        <p:nvSpPr>
+          <p:cNvPr id="8" name="Text 6"/>
+          <p:cNvSpPr txBox="1"/>
+          <p:nvPr/>
+        </p:nvSpPr>
+        <p:spPr>
+          <a:xfrm>
+            <a:off x="822960" y="3291840"/>
+            <a:ext cx="2087804" cy="1234440"/>
           </a:xfrm>
           <a:prstGeom prst="rect">
             <a:avLst/>
@@ -8687,12 +8262,555 @@
           <a:p>
             <a:pPr rtl="1" algn="r" indent="0" marL="0">
               <a:lnSpc>
-                <a:spcPct val="118000"/>
+                <a:spcPct val="120000"/>
               </a:lnSpc>
               <a:buNone/>
             </a:pPr>
             <a:r>
-              <a:rPr lang="en-US" sz="1100" dirty="0">
+              <a:rPr lang="en-US" sz="1200" dirty="0">
+                <a:solidFill>
+                  <a:srgbClr val="31424A"/>
+                </a:solidFill>
+                <a:latin typeface="Arial" pitchFamily="34" charset="0"/>
+                <a:ea typeface="Arial" pitchFamily="34" charset="-122"/>
+                <a:cs typeface="Arial" pitchFamily="34" charset="-120"/>
+              </a:rPr>
+              <a:t>حصرية على مستوى الإقليم ومخزون إطلاق للموسم التجاري الأول.</a:t>
+            </a:r>
+            <a:endParaRPr lang="en-US" sz="1200" dirty="0"/>
+          </a:p>
+        </p:txBody>
+      </p:sp>
+      <p:sp>
+        <p:nvSpPr>
+          <p:cNvPr id="9" name="Shape 7"/>
+          <p:cNvSpPr/>
+          <p:nvPr/>
+        </p:nvSpPr>
+        <p:spPr>
+          <a:xfrm>
+            <a:off x="3413684" y="1874520"/>
+            <a:ext cx="2545004" cy="2834640"/>
+          </a:xfrm>
+          <a:prstGeom prst="roundRect">
+            <a:avLst>
+              <a:gd name="adj" fmla="val 3593"/>
+            </a:avLst>
+          </a:prstGeom>
+          <a:solidFill>
+            <a:srgbClr val="EDF3F5"/>
+          </a:solidFill>
+          <a:ln w="9525">
+            <a:solidFill>
+              <a:srgbClr val="D6E2E7"/>
+            </a:solidFill>
+            <a:prstDash val="solid"/>
+          </a:ln>
+        </p:spPr>
+      </p:sp>
+      <p:sp>
+        <p:nvSpPr>
+          <p:cNvPr id="10" name="Shape 8"/>
+          <p:cNvSpPr/>
+          <p:nvPr/>
+        </p:nvSpPr>
+        <p:spPr>
+          <a:xfrm>
+            <a:off x="3642284" y="2103120"/>
+            <a:ext cx="566928" cy="566928"/>
+          </a:xfrm>
+          <a:prstGeom prst="ellipse">
+            <a:avLst/>
+          </a:prstGeom>
+          <a:solidFill>
+            <a:srgbClr val="1C5A73"/>
+          </a:solidFill>
+          <a:ln/>
+        </p:spPr>
+      </p:sp>
+      <p:sp>
+        <p:nvSpPr>
+          <p:cNvPr id="11" name="Text 9"/>
+          <p:cNvSpPr txBox="1"/>
+          <p:nvPr/>
+        </p:nvSpPr>
+        <p:spPr>
+          <a:xfrm>
+            <a:off x="3642284" y="2103120"/>
+            <a:ext cx="566928" cy="566928"/>
+          </a:xfrm>
+          <a:prstGeom prst="rect">
+            <a:avLst/>
+          </a:prstGeom>
+          <a:noFill/>
+          <a:ln/>
+        </p:spPr>
+        <p:txBody>
+          <a:bodyPr wrap="square" lIns="0" tIns="0" rIns="0" bIns="0" rtlCol="0" anchor="ctr"/>
+          <a:lstStyle/>
+          <a:p>
+            <a:pPr rtl="1" algn="ctr" indent="0" marL="0">
+              <a:buNone/>
+            </a:pPr>
+            <a:r>
+              <a:rPr lang="en-US" sz="1600" b="1" dirty="0">
+                <a:solidFill>
+                  <a:srgbClr val="FFFFFF"/>
+                </a:solidFill>
+                <a:latin typeface="Arial" pitchFamily="34" charset="0"/>
+                <a:ea typeface="Arial" pitchFamily="34" charset="-122"/>
+                <a:cs typeface="Arial" pitchFamily="34" charset="-120"/>
+              </a:rPr>
+              <a:t>2</a:t>
+            </a:r>
+            <a:endParaRPr lang="en-US" sz="1600" dirty="0"/>
+          </a:p>
+        </p:txBody>
+      </p:sp>
+      <p:sp>
+        <p:nvSpPr>
+          <p:cNvPr id="12" name="Text 10"/>
+          <p:cNvSpPr txBox="1"/>
+          <p:nvPr/>
+        </p:nvSpPr>
+        <p:spPr>
+          <a:xfrm>
+            <a:off x="3642284" y="2788920"/>
+            <a:ext cx="2087804" cy="457200"/>
+          </a:xfrm>
+          <a:prstGeom prst="rect">
+            <a:avLst/>
+          </a:prstGeom>
+          <a:noFill/>
+          <a:ln/>
+        </p:spPr>
+        <p:txBody>
+          <a:bodyPr wrap="square" lIns="0" tIns="0" rIns="0" bIns="0" rtlCol="0" anchor="ctr"/>
+          <a:lstStyle/>
+          <a:p>
+            <a:pPr rtl="1" algn="r" indent="0" marL="0">
+              <a:buNone/>
+            </a:pPr>
+            <a:r>
+              <a:rPr lang="en-US" sz="1400" b="1" dirty="0">
+                <a:solidFill>
+                  <a:srgbClr val="1C5A73"/>
+                </a:solidFill>
+                <a:latin typeface="Arial" pitchFamily="34" charset="0"/>
+                <a:ea typeface="Arial" pitchFamily="34" charset="-122"/>
+                <a:cs typeface="Arial" pitchFamily="34" charset="-120"/>
+              </a:rPr>
+              <a:t>التدريب</a:t>
+            </a:r>
+            <a:endParaRPr lang="en-US" sz="1400" dirty="0"/>
+          </a:p>
+        </p:txBody>
+      </p:sp>
+      <p:sp>
+        <p:nvSpPr>
+          <p:cNvPr id="13" name="Text 11"/>
+          <p:cNvSpPr txBox="1"/>
+          <p:nvPr/>
+        </p:nvSpPr>
+        <p:spPr>
+          <a:xfrm>
+            <a:off x="3642284" y="3291840"/>
+            <a:ext cx="2087804" cy="1234440"/>
+          </a:xfrm>
+          <a:prstGeom prst="rect">
+            <a:avLst/>
+          </a:prstGeom>
+          <a:noFill/>
+          <a:ln/>
+        </p:spPr>
+        <p:txBody>
+          <a:bodyPr wrap="square" lIns="0" tIns="0" rIns="0" bIns="0" rtlCol="0" anchor="t"/>
+          <a:lstStyle/>
+          <a:p>
+            <a:pPr rtl="1" algn="r" indent="0" marL="0">
+              <a:lnSpc>
+                <a:spcPct val="120000"/>
+              </a:lnSpc>
+              <a:buNone/>
+            </a:pPr>
+            <a:r>
+              <a:rPr lang="en-US" sz="1200" dirty="0">
+                <a:solidFill>
+                  <a:srgbClr val="31424A"/>
+                </a:solidFill>
+                <a:latin typeface="Arial" pitchFamily="34" charset="0"/>
+                <a:ea typeface="Arial" pitchFamily="34" charset="-122"/>
+                <a:cs typeface="Arial" pitchFamily="34" charset="-120"/>
+              </a:rPr>
+              <a:t>تدريب فني للفرق، وبروتوكولات الجرعات، وتحديثها في كل موسم.</a:t>
+            </a:r>
+            <a:endParaRPr lang="en-US" sz="1200" dirty="0"/>
+          </a:p>
+        </p:txBody>
+      </p:sp>
+      <p:sp>
+        <p:nvSpPr>
+          <p:cNvPr id="14" name="Shape 12"/>
+          <p:cNvSpPr/>
+          <p:nvPr/>
+        </p:nvSpPr>
+        <p:spPr>
+          <a:xfrm>
+            <a:off x="6233008" y="1874520"/>
+            <a:ext cx="2545004" cy="2834640"/>
+          </a:xfrm>
+          <a:prstGeom prst="roundRect">
+            <a:avLst>
+              <a:gd name="adj" fmla="val 3593"/>
+            </a:avLst>
+          </a:prstGeom>
+          <a:solidFill>
+            <a:srgbClr val="EDF3F5"/>
+          </a:solidFill>
+          <a:ln w="9525">
+            <a:solidFill>
+              <a:srgbClr val="D6E2E7"/>
+            </a:solidFill>
+            <a:prstDash val="solid"/>
+          </a:ln>
+        </p:spPr>
+      </p:sp>
+      <p:sp>
+        <p:nvSpPr>
+          <p:cNvPr id="15" name="Shape 13"/>
+          <p:cNvSpPr/>
+          <p:nvPr/>
+        </p:nvSpPr>
+        <p:spPr>
+          <a:xfrm>
+            <a:off x="6461608" y="2103120"/>
+            <a:ext cx="566928" cy="566928"/>
+          </a:xfrm>
+          <a:prstGeom prst="ellipse">
+            <a:avLst/>
+          </a:prstGeom>
+          <a:solidFill>
+            <a:srgbClr val="1C5A73"/>
+          </a:solidFill>
+          <a:ln/>
+        </p:spPr>
+      </p:sp>
+      <p:sp>
+        <p:nvSpPr>
+          <p:cNvPr id="16" name="Text 14"/>
+          <p:cNvSpPr txBox="1"/>
+          <p:nvPr/>
+        </p:nvSpPr>
+        <p:spPr>
+          <a:xfrm>
+            <a:off x="6461608" y="2103120"/>
+            <a:ext cx="566928" cy="566928"/>
+          </a:xfrm>
+          <a:prstGeom prst="rect">
+            <a:avLst/>
+          </a:prstGeom>
+          <a:noFill/>
+          <a:ln/>
+        </p:spPr>
+        <p:txBody>
+          <a:bodyPr wrap="square" lIns="0" tIns="0" rIns="0" bIns="0" rtlCol="0" anchor="ctr"/>
+          <a:lstStyle/>
+          <a:p>
+            <a:pPr rtl="1" algn="ctr" indent="0" marL="0">
+              <a:buNone/>
+            </a:pPr>
+            <a:r>
+              <a:rPr lang="en-US" sz="1600" b="1" dirty="0">
+                <a:solidFill>
+                  <a:srgbClr val="FFFFFF"/>
+                </a:solidFill>
+                <a:latin typeface="Arial" pitchFamily="34" charset="0"/>
+                <a:ea typeface="Arial" pitchFamily="34" charset="-122"/>
+                <a:cs typeface="Arial" pitchFamily="34" charset="-120"/>
+              </a:rPr>
+              <a:t>3</a:t>
+            </a:r>
+            <a:endParaRPr lang="en-US" sz="1600" dirty="0"/>
+          </a:p>
+        </p:txBody>
+      </p:sp>
+      <p:sp>
+        <p:nvSpPr>
+          <p:cNvPr id="17" name="Text 15"/>
+          <p:cNvSpPr txBox="1"/>
+          <p:nvPr/>
+        </p:nvSpPr>
+        <p:spPr>
+          <a:xfrm>
+            <a:off x="6461608" y="2788920"/>
+            <a:ext cx="2087804" cy="457200"/>
+          </a:xfrm>
+          <a:prstGeom prst="rect">
+            <a:avLst/>
+          </a:prstGeom>
+          <a:noFill/>
+          <a:ln/>
+        </p:spPr>
+        <p:txBody>
+          <a:bodyPr wrap="square" lIns="0" tIns="0" rIns="0" bIns="0" rtlCol="0" anchor="ctr"/>
+          <a:lstStyle/>
+          <a:p>
+            <a:pPr rtl="1" algn="r" indent="0" marL="0">
+              <a:buNone/>
+            </a:pPr>
+            <a:r>
+              <a:rPr lang="en-US" sz="1400" b="1" dirty="0">
+                <a:solidFill>
+                  <a:srgbClr val="1C5A73"/>
+                </a:solidFill>
+                <a:latin typeface="Arial" pitchFamily="34" charset="0"/>
+                <a:ea typeface="Arial" pitchFamily="34" charset="-122"/>
+                <a:cs typeface="Arial" pitchFamily="34" charset="-120"/>
+              </a:rPr>
+              <a:t>تجارب مشتركة</a:t>
+            </a:r>
+            <a:endParaRPr lang="en-US" sz="1400" dirty="0"/>
+          </a:p>
+        </p:txBody>
+      </p:sp>
+      <p:sp>
+        <p:nvSpPr>
+          <p:cNvPr id="18" name="Text 16"/>
+          <p:cNvSpPr txBox="1"/>
+          <p:nvPr/>
+        </p:nvSpPr>
+        <p:spPr>
+          <a:xfrm>
+            <a:off x="6461608" y="3291840"/>
+            <a:ext cx="2087804" cy="1234440"/>
+          </a:xfrm>
+          <a:prstGeom prst="rect">
+            <a:avLst/>
+          </a:prstGeom>
+          <a:noFill/>
+          <a:ln/>
+        </p:spPr>
+        <p:txBody>
+          <a:bodyPr wrap="square" lIns="0" tIns="0" rIns="0" bIns="0" rtlCol="0" anchor="t"/>
+          <a:lstStyle/>
+          <a:p>
+            <a:pPr rtl="1" algn="r" indent="0" marL="0">
+              <a:lnSpc>
+                <a:spcPct val="120000"/>
+              </a:lnSpc>
+              <a:buNone/>
+            </a:pPr>
+            <a:r>
+              <a:rPr lang="en-US" sz="1200" dirty="0">
+                <a:solidFill>
+                  <a:srgbClr val="31424A"/>
+                </a:solidFill>
+                <a:latin typeface="Arial" pitchFamily="34" charset="0"/>
+                <a:ea typeface="Arial" pitchFamily="34" charset="-122"/>
+                <a:cs typeface="Arial" pitchFamily="34" charset="-120"/>
+              </a:rPr>
+              <a:t>قطع إرشادية مع قطعة شاهد، ونتائج تُعرض على المزارعين.</a:t>
+            </a:r>
+            <a:endParaRPr lang="en-US" sz="1200" dirty="0"/>
+          </a:p>
+        </p:txBody>
+      </p:sp>
+      <p:sp>
+        <p:nvSpPr>
+          <p:cNvPr id="19" name="Shape 17"/>
+          <p:cNvSpPr/>
+          <p:nvPr/>
+        </p:nvSpPr>
+        <p:spPr>
+          <a:xfrm>
+            <a:off x="9052331" y="1874520"/>
+            <a:ext cx="2545004" cy="2834640"/>
+          </a:xfrm>
+          <a:prstGeom prst="roundRect">
+            <a:avLst>
+              <a:gd name="adj" fmla="val 3593"/>
+            </a:avLst>
+          </a:prstGeom>
+          <a:solidFill>
+            <a:srgbClr val="EDF3F5"/>
+          </a:solidFill>
+          <a:ln w="9525">
+            <a:solidFill>
+              <a:srgbClr val="D6E2E7"/>
+            </a:solidFill>
+            <a:prstDash val="solid"/>
+          </a:ln>
+        </p:spPr>
+      </p:sp>
+      <p:sp>
+        <p:nvSpPr>
+          <p:cNvPr id="20" name="Shape 18"/>
+          <p:cNvSpPr/>
+          <p:nvPr/>
+        </p:nvSpPr>
+        <p:spPr>
+          <a:xfrm>
+            <a:off x="9280931" y="2103120"/>
+            <a:ext cx="566928" cy="566928"/>
+          </a:xfrm>
+          <a:prstGeom prst="ellipse">
+            <a:avLst/>
+          </a:prstGeom>
+          <a:solidFill>
+            <a:srgbClr val="1C5A73"/>
+          </a:solidFill>
+          <a:ln/>
+        </p:spPr>
+      </p:sp>
+      <p:sp>
+        <p:nvSpPr>
+          <p:cNvPr id="21" name="Text 19"/>
+          <p:cNvSpPr txBox="1"/>
+          <p:nvPr/>
+        </p:nvSpPr>
+        <p:spPr>
+          <a:xfrm>
+            <a:off x="9280931" y="2103120"/>
+            <a:ext cx="566928" cy="566928"/>
+          </a:xfrm>
+          <a:prstGeom prst="rect">
+            <a:avLst/>
+          </a:prstGeom>
+          <a:noFill/>
+          <a:ln/>
+        </p:spPr>
+        <p:txBody>
+          <a:bodyPr wrap="square" lIns="0" tIns="0" rIns="0" bIns="0" rtlCol="0" anchor="ctr"/>
+          <a:lstStyle/>
+          <a:p>
+            <a:pPr rtl="1" algn="ctr" indent="0" marL="0">
+              <a:buNone/>
+            </a:pPr>
+            <a:r>
+              <a:rPr lang="en-US" sz="1600" b="1" dirty="0">
+                <a:solidFill>
+                  <a:srgbClr val="FFFFFF"/>
+                </a:solidFill>
+                <a:latin typeface="Arial" pitchFamily="34" charset="0"/>
+                <a:ea typeface="Arial" pitchFamily="34" charset="-122"/>
+                <a:cs typeface="Arial" pitchFamily="34" charset="-120"/>
+              </a:rPr>
+              <a:t>4</a:t>
+            </a:r>
+            <a:endParaRPr lang="en-US" sz="1600" dirty="0"/>
+          </a:p>
+        </p:txBody>
+      </p:sp>
+      <p:sp>
+        <p:nvSpPr>
+          <p:cNvPr id="22" name="Text 20"/>
+          <p:cNvSpPr txBox="1"/>
+          <p:nvPr/>
+        </p:nvSpPr>
+        <p:spPr>
+          <a:xfrm>
+            <a:off x="9280931" y="2788920"/>
+            <a:ext cx="2087804" cy="457200"/>
+          </a:xfrm>
+          <a:prstGeom prst="rect">
+            <a:avLst/>
+          </a:prstGeom>
+          <a:noFill/>
+          <a:ln/>
+        </p:spPr>
+        <p:txBody>
+          <a:bodyPr wrap="square" lIns="0" tIns="0" rIns="0" bIns="0" rtlCol="0" anchor="ctr"/>
+          <a:lstStyle/>
+          <a:p>
+            <a:pPr rtl="1" algn="r" indent="0" marL="0">
+              <a:buNone/>
+            </a:pPr>
+            <a:r>
+              <a:rPr lang="en-US" sz="1400" b="1" dirty="0">
+                <a:solidFill>
+                  <a:srgbClr val="1C5A73"/>
+                </a:solidFill>
+                <a:latin typeface="Arial" pitchFamily="34" charset="0"/>
+                <a:ea typeface="Arial" pitchFamily="34" charset="-122"/>
+                <a:cs typeface="Arial" pitchFamily="34" charset="-120"/>
+              </a:rPr>
+              <a:t>المؤسسات</a:t>
+            </a:r>
+            <a:endParaRPr lang="en-US" sz="1400" dirty="0"/>
+          </a:p>
+        </p:txBody>
+      </p:sp>
+      <p:sp>
+        <p:nvSpPr>
+          <p:cNvPr id="23" name="Text 21"/>
+          <p:cNvSpPr txBox="1"/>
+          <p:nvPr/>
+        </p:nvSpPr>
+        <p:spPr>
+          <a:xfrm>
+            <a:off x="9280931" y="3291840"/>
+            <a:ext cx="2087804" cy="1234440"/>
+          </a:xfrm>
+          <a:prstGeom prst="rect">
+            <a:avLst/>
+          </a:prstGeom>
+          <a:noFill/>
+          <a:ln/>
+        </p:spPr>
+        <p:txBody>
+          <a:bodyPr wrap="square" lIns="0" tIns="0" rIns="0" bIns="0" rtlCol="0" anchor="t"/>
+          <a:lstStyle/>
+          <a:p>
+            <a:pPr rtl="1" algn="r" indent="0" marL="0">
+              <a:lnSpc>
+                <a:spcPct val="120000"/>
+              </a:lnSpc>
+              <a:buNone/>
+            </a:pPr>
+            <a:r>
+              <a:rPr lang="en-US" sz="1200" dirty="0">
+                <a:solidFill>
+                  <a:srgbClr val="31424A"/>
+                </a:solidFill>
+                <a:latin typeface="Arial" pitchFamily="34" charset="0"/>
+                <a:ea typeface="Arial" pitchFamily="34" charset="-122"/>
+                <a:cs typeface="Arial" pitchFamily="34" charset="-120"/>
+              </a:rPr>
+              <a:t>حوار مع وزارة الزراعة وبرامج الأمن الغذائي.</a:t>
+            </a:r>
+            <a:endParaRPr lang="en-US" sz="1200" dirty="0"/>
+          </a:p>
+        </p:txBody>
+      </p:sp>
+      <p:sp>
+        <p:nvSpPr>
+          <p:cNvPr id="24" name="Text 22"/>
+          <p:cNvSpPr txBox="1"/>
+          <p:nvPr/>
+        </p:nvSpPr>
+        <p:spPr>
+          <a:xfrm>
+            <a:off x="594360" y="4983480"/>
+            <a:ext cx="11002975" cy="822960"/>
+          </a:xfrm>
+          <a:prstGeom prst="rect">
+            <a:avLst/>
+          </a:prstGeom>
+          <a:noFill/>
+          <a:ln/>
+        </p:spPr>
+        <p:txBody>
+          <a:bodyPr wrap="square" lIns="0" tIns="0" rIns="0" bIns="0" rtlCol="0" anchor="t"/>
+          <a:lstStyle/>
+          <a:p>
+            <a:pPr rtl="1" algn="r" indent="0" marL="0">
+              <a:lnSpc>
+                <a:spcPct val="125000"/>
+              </a:lnSpc>
+              <a:buNone/>
+            </a:pPr>
+            <a:r>
+              <a:rPr lang="en-US" sz="1250" dirty="0">
                 <a:solidFill>
                   <a:srgbClr val="6C8089"/>
                 </a:solidFill>
@@ -8700,15 +8818,15 @@
                 <a:ea typeface="Arial" pitchFamily="34" charset="-122"/>
                 <a:cs typeface="Arial" pitchFamily="34" charset="-120"/>
               </a:rPr>
-              <a:t>تحليل الأكريلاميد (مختبر Polymex، ISO 9001، بتركيز أقل من 3,0 ميكروغرام/غرام) وفحص REACH / SVHC (SGS) وشهادة SOHISCERT السارية حتى 4 سبتمبر 2027: متاحة جميعها عند الطلب.</a:t>
-            </a:r>
-            <a:endParaRPr lang="en-US" sz="1100" dirty="0"/>
-          </a:p>
-        </p:txBody>
-      </p:sp>
-      <p:sp>
-        <p:nvSpPr>
-          <p:cNvPr id="10" name="Text 8"/>
+              <a:t>يتكيف الإطار مع الإقليم: يمكن أن يقود الشراكة مستورد أو موزّع مدخلات زراعية أو جمعية منتجين.</a:t>
+            </a:r>
+            <a:endParaRPr lang="en-US" sz="1250" dirty="0"/>
+          </a:p>
+        </p:txBody>
+      </p:sp>
+      <p:sp>
+        <p:nvSpPr>
+          <p:cNvPr id="25" name="Text 23"/>
           <p:cNvSpPr txBox="1"/>
           <p:nvPr/>
         </p:nvSpPr>
@@ -8749,7 +8867,7 @@
       </p:sp>
       <p:sp>
         <p:nvSpPr>
-          <p:cNvPr id="11" name="Text 9"/>
+          <p:cNvPr id="26" name="Text 24"/>
           <p:cNvSpPr txBox="1"/>
           <p:nvPr/>
         </p:nvSpPr>
@@ -8853,7 +8971,7 @@
                 <a:ea typeface="Arial" pitchFamily="34" charset="-122"/>
                 <a:cs typeface="Arial" pitchFamily="34" charset="-120"/>
               </a:rPr>
-              <a:t>المصادر</a:t>
+              <a:t>ما ينبغي توقّعه</a:t>
             </a:r>
             <a:endParaRPr lang="en-US" sz="1150" dirty="0"/>
           </a:p>
@@ -8892,7 +9010,7 @@
                 <a:ea typeface="Arial" pitchFamily="34" charset="-122"/>
                 <a:cs typeface="Arial" pitchFamily="34" charset="-120"/>
               </a:rPr>
-              <a:t>المصادر وافتراضات العمل</a:t>
+              <a:t>مخاطر محدّدة وردود عليها</a:t>
             </a:r>
             <a:endParaRPr lang="en-US" sz="3000" dirty="0"/>
           </a:p>
@@ -8931,7 +9049,7 @@
                 <a:ea typeface="Arial" pitchFamily="34" charset="-122"/>
                 <a:cs typeface="Arial" pitchFamily="34" charset="-120"/>
               </a:rPr>
-              <a:t>المصادر الرئيسية</a:t>
+              <a:t>المخاطر</a:t>
             </a:r>
             <a:endParaRPr lang="en-US" sz="1600" dirty="0"/>
           </a:p>
@@ -8977,7 +9095,7 @@
                 <a:ea typeface="Arial" pitchFamily="34" charset="-122"/>
                 <a:cs typeface="Arial" pitchFamily="34" charset="-120"/>
               </a:rPr>
-              <a:t>الجهاز المركزي للتعبئة العامة والإحصاء: السكان والإنتاج الزراعي والتجارة الخارجية.</a:t>
+              <a:t>تفتّت الحيازات في الوادي والدلتا: متوسط الحيازة أقل من فدانين، وقرار الشراء مشتّت.</a:t>
             </a:r>
             <a:endParaRPr lang="en-US" sz="1350" dirty="0"/>
           </a:p>
@@ -9001,7 +9119,7 @@
                 <a:ea typeface="Arial" pitchFamily="34" charset="-122"/>
                 <a:cs typeface="Arial" pitchFamily="34" charset="-120"/>
               </a:rPr>
-              <a:t>وزارة الزراعة واستصلاح الأراضي: إحصاءات الصادرات الزراعية.</a:t>
+              <a:t>ماء الري متاح بتكلفة منخفضة جدًا للمزارع، ما يضعف الحافز المالي المباشر للتوفير.</a:t>
             </a:r>
             <a:endParaRPr lang="en-US" sz="1350" dirty="0"/>
           </a:p>
@@ -9025,7 +9143,7 @@
                 <a:ea typeface="Arial" pitchFamily="34" charset="-122"/>
                 <a:cs typeface="Arial" pitchFamily="34" charset="-120"/>
               </a:rPr>
-              <a:t>وزارة الموارد المائية والري: الخطة القومية للموارد المائية.</a:t>
+              <a:t>منافسة مواد رخيصة أساسها الصوديوم تركت انطباعًا سيئًا وأضرّت بتربة مالحة أصلًا.</a:t>
             </a:r>
             <a:endParaRPr lang="en-US" sz="1350" dirty="0"/>
           </a:p>
@@ -9049,10 +9167,71 @@
                 <a:ea typeface="Arial" pitchFamily="34" charset="-122"/>
                 <a:cs typeface="Arial" pitchFamily="34" charset="-120"/>
               </a:rPr>
-              <a:t>منظمة الأغذية والزراعة (FAOSTAT وAQUASTAT) والبنك الدولي (WDI).</a:t>
+              <a:t>سيولة المزارع محدودة وتكلفة المستلزمات المستوردة مرتفعة بفعل تقلبات سعر الصرف.</a:t>
             </a:r>
             <a:endParaRPr lang="en-US" sz="1350" dirty="0"/>
           </a:p>
+        </p:txBody>
+      </p:sp>
+      <p:sp>
+        <p:nvSpPr>
+          <p:cNvPr id="6" name="Text 4"/>
+          <p:cNvSpPr txBox="1"/>
+          <p:nvPr/>
+        </p:nvSpPr>
+        <p:spPr>
+          <a:xfrm>
+            <a:off x="6370168" y="1783080"/>
+            <a:ext cx="5227168" cy="411480"/>
+          </a:xfrm>
+          <a:prstGeom prst="rect">
+            <a:avLst/>
+          </a:prstGeom>
+          <a:noFill/>
+          <a:ln/>
+        </p:spPr>
+        <p:txBody>
+          <a:bodyPr wrap="square" lIns="0" tIns="0" rIns="0" bIns="0" rtlCol="0" anchor="ctr"/>
+          <a:lstStyle/>
+          <a:p>
+            <a:pPr rtl="1" algn="r" indent="0" marL="0">
+              <a:buNone/>
+            </a:pPr>
+            <a:r>
+              <a:rPr lang="en-US" sz="1600" b="1" dirty="0">
+                <a:solidFill>
+                  <a:srgbClr val="1C5A73"/>
+                </a:solidFill>
+                <a:latin typeface="Arial" pitchFamily="34" charset="0"/>
+                <a:ea typeface="Arial" pitchFamily="34" charset="-122"/>
+                <a:cs typeface="Arial" pitchFamily="34" charset="-120"/>
+              </a:rPr>
+              <a:t>الردود</a:t>
+            </a:r>
+            <a:endParaRPr lang="en-US" sz="1600" dirty="0"/>
+          </a:p>
+        </p:txBody>
+      </p:sp>
+      <p:sp>
+        <p:nvSpPr>
+          <p:cNvPr id="7" name="Text 5"/>
+          <p:cNvSpPr txBox="1"/>
+          <p:nvPr/>
+        </p:nvSpPr>
+        <p:spPr>
+          <a:xfrm>
+            <a:off x="6370168" y="2286000"/>
+            <a:ext cx="5227168" cy="2468880"/>
+          </a:xfrm>
+          <a:prstGeom prst="rect">
+            <a:avLst/>
+          </a:prstGeom>
+          <a:noFill/>
+          <a:ln/>
+        </p:spPr>
+        <p:txBody>
+          <a:bodyPr wrap="square" lIns="0" tIns="0" rIns="0" bIns="0" rtlCol="0" anchor="t"/>
+          <a:lstStyle/>
           <a:p>
             <a:pPr algn="r" marL="342900" indent="-342900">
               <a:lnSpc>
@@ -9073,71 +9252,10 @@
                 <a:ea typeface="Arial" pitchFamily="34" charset="-122"/>
                 <a:cs typeface="Arial" pitchFamily="34" charset="-120"/>
               </a:rPr>
-              <a:t>الصور الفوتوغرافية: Myousry6666 (CC BY-SA 4.0) — عبر ويكيميديا كومنز.</a:t>
+              <a:t>المرور عبر الجمعيات التعاونية ومصانع السكر ومصدّري الموالح، لا عبر الحيازة الفردية.</a:t>
             </a:r>
             <a:endParaRPr lang="en-US" sz="1350" dirty="0"/>
           </a:p>
-        </p:txBody>
-      </p:sp>
-      <p:sp>
-        <p:nvSpPr>
-          <p:cNvPr id="6" name="Text 4"/>
-          <p:cNvSpPr txBox="1"/>
-          <p:nvPr/>
-        </p:nvSpPr>
-        <p:spPr>
-          <a:xfrm>
-            <a:off x="6370168" y="1783080"/>
-            <a:ext cx="5227168" cy="411480"/>
-          </a:xfrm>
-          <a:prstGeom prst="rect">
-            <a:avLst/>
-          </a:prstGeom>
-          <a:noFill/>
-          <a:ln/>
-        </p:spPr>
-        <p:txBody>
-          <a:bodyPr wrap="square" lIns="0" tIns="0" rIns="0" bIns="0" rtlCol="0" anchor="ctr"/>
-          <a:lstStyle/>
-          <a:p>
-            <a:pPr rtl="1" algn="r" indent="0" marL="0">
-              <a:buNone/>
-            </a:pPr>
-            <a:r>
-              <a:rPr lang="en-US" sz="1600" b="1" dirty="0">
-                <a:solidFill>
-                  <a:srgbClr val="1C5A73"/>
-                </a:solidFill>
-                <a:latin typeface="Arial" pitchFamily="34" charset="0"/>
-                <a:ea typeface="Arial" pitchFamily="34" charset="-122"/>
-                <a:cs typeface="Arial" pitchFamily="34" charset="-120"/>
-              </a:rPr>
-              <a:t>افتراضات العمل</a:t>
-            </a:r>
-            <a:endParaRPr lang="en-US" sz="1600" dirty="0"/>
-          </a:p>
-        </p:txBody>
-      </p:sp>
-      <p:sp>
-        <p:nvSpPr>
-          <p:cNvPr id="7" name="Text 5"/>
-          <p:cNvSpPr txBox="1"/>
-          <p:nvPr/>
-        </p:nvSpPr>
-        <p:spPr>
-          <a:xfrm>
-            <a:off x="6370168" y="2286000"/>
-            <a:ext cx="5227168" cy="2468880"/>
-          </a:xfrm>
-          <a:prstGeom prst="rect">
-            <a:avLst/>
-          </a:prstGeom>
-          <a:noFill/>
-          <a:ln/>
-        </p:spPr>
-        <p:txBody>
-          <a:bodyPr wrap="square" lIns="0" tIns="0" rIns="0" bIns="0" rtlCol="0" anchor="t"/>
-          <a:lstStyle/>
           <a:p>
             <a:pPr algn="r" marL="342900" indent="-342900">
               <a:lnSpc>
@@ -9158,7 +9276,7 @@
                 <a:ea typeface="Arial" pitchFamily="34" charset="-122"/>
                 <a:cs typeface="Arial" pitchFamily="34" charset="-120"/>
               </a:rPr>
-              <a:t>الأرقام رتب حجم مقرّبة، مأخوذة من أحدث البيانات العامة المتاحة.</a:t>
+              <a:t>عرض المكسب على المحصول والجودة، لا على فاتورة الماء وحدها: الماء المتاح باستمرار يرفع الإنتاج.</a:t>
             </a:r>
             <a:endParaRPr lang="en-US" sz="1350" dirty="0"/>
           </a:p>
@@ -9182,7 +9300,7 @@
                 <a:ea typeface="Arial" pitchFamily="34" charset="-122"/>
                 <a:cs typeface="Arial" pitchFamily="34" charset="-120"/>
               </a:rPr>
-              <a:t>توفير الماء وزيادة الإنتاج أرقام استرشادية تتغير بحسب التربة والمناخ والمحصول.</a:t>
+              <a:t>توثيق فارق التركيبة: بوتاسيوم لا صوديوم، ملائم للمحاصيل الغذائية وللتربة المالحة.</a:t>
             </a:r>
             <a:endParaRPr lang="en-US" sz="1350" dirty="0"/>
           </a:p>
@@ -9206,7 +9324,7 @@
                 <a:ea typeface="Arial" pitchFamily="34" charset="-122"/>
                 <a:cs typeface="Arial" pitchFamily="34" charset="-120"/>
               </a:rPr>
-              <a:t>وثيقة عمل تجارية: تُحدَّث الأرقام قبل أي تقديم رسمي.</a:t>
+              <a:t>توزيع الالتزام: مفعول يمتد 3 إلى 4 سنوات يوزّع التكلفة على عدة مواسم.</a:t>
             </a:r>
             <a:endParaRPr lang="en-US" sz="1350" dirty="0"/>
           </a:p>
@@ -9275,7 +9393,7 @@
                 <a:ea typeface="Arial" pitchFamily="34" charset="-122"/>
                 <a:cs typeface="Arial" pitchFamily="34" charset="-120"/>
               </a:rPr>
-              <a:t>تقارير التجارب والشهادات (SOHISCERT، وتحاليل Polymex وSGS) والنشرات الفنية متاحة عند الطلب.</a:t>
+              <a:t>تحليل الأكريلاميد (مختبر Polymex، ISO 9001، بتركيز أقل من 3,0 ميكروغرام/غرام) وفحص REACH / SVHC (SGS) وشهادة SOHISCERT السارية حتى 4 سبتمبر 2027: متاحة جميعها عند الطلب.</a:t>
             </a:r>
             <a:endParaRPr lang="en-US" sz="1100" dirty="0"/>
           </a:p>
@@ -9374,6 +9492,605 @@
 <file path=ppt/slides/slide18.xml><?xml version="1.0" encoding="utf-8"?>
 <p:sld xmlns:a="http://schemas.openxmlformats.org/drawingml/2006/main" xmlns:r="http://schemas.openxmlformats.org/officeDocument/2006/relationships" xmlns:p="http://schemas.openxmlformats.org/presentationml/2006/main">
   <p:cSld name="Slide 18">
+    <p:bg>
+      <p:bgPr>
+        <a:solidFill>
+          <a:srgbClr val="FAFBFB"/>
+        </a:solidFill>
+      </p:bgPr>
+    </p:bg>
+    <p:spTree>
+      <p:nvGrpSpPr>
+        <p:cNvPr id="1" name=""/>
+        <p:cNvGrpSpPr/>
+        <p:nvPr/>
+      </p:nvGrpSpPr>
+      <p:grpSpPr>
+        <a:xfrm>
+          <a:off x="0" y="0"/>
+          <a:ext cx="0" cy="0"/>
+          <a:chOff x="0" y="0"/>
+          <a:chExt cx="0" cy="0"/>
+        </a:xfrm>
+      </p:grpSpPr>
+      <p:sp>
+        <p:nvSpPr>
+          <p:cNvPr id="2" name="Text 0"/>
+          <p:cNvSpPr txBox="1"/>
+          <p:nvPr/>
+        </p:nvSpPr>
+        <p:spPr>
+          <a:xfrm>
+            <a:off x="594360" y="411480"/>
+            <a:ext cx="10515600" cy="274320"/>
+          </a:xfrm>
+          <a:prstGeom prst="rect">
+            <a:avLst/>
+          </a:prstGeom>
+          <a:noFill/>
+          <a:ln/>
+        </p:spPr>
+        <p:txBody>
+          <a:bodyPr wrap="square" lIns="0" tIns="0" rIns="0" bIns="0" rtlCol="0" anchor="ctr"/>
+          <a:lstStyle/>
+          <a:p>
+            <a:pPr rtl="1" algn="r" indent="0" marL="0">
+              <a:buNone/>
+            </a:pPr>
+            <a:r>
+              <a:rPr lang="en-US" sz="1150" b="1" spc="200" kern="0" dirty="0">
+                <a:solidFill>
+                  <a:srgbClr val="E0A33E"/>
+                </a:solidFill>
+                <a:latin typeface="Arial" pitchFamily="34" charset="0"/>
+                <a:ea typeface="Arial" pitchFamily="34" charset="-122"/>
+                <a:cs typeface="Arial" pitchFamily="34" charset="-120"/>
+              </a:rPr>
+              <a:t>المصادر</a:t>
+            </a:r>
+            <a:endParaRPr lang="en-US" sz="1150" dirty="0"/>
+          </a:p>
+        </p:txBody>
+      </p:sp>
+      <p:sp>
+        <p:nvSpPr>
+          <p:cNvPr id="3" name="Text 1"/>
+          <p:cNvSpPr txBox="1"/>
+          <p:nvPr/>
+        </p:nvSpPr>
+        <p:spPr>
+          <a:xfrm>
+            <a:off x="594360" y="731520"/>
+            <a:ext cx="10881360" cy="731520"/>
+          </a:xfrm>
+          <a:prstGeom prst="rect">
+            <a:avLst/>
+          </a:prstGeom>
+          <a:noFill/>
+          <a:ln/>
+        </p:spPr>
+        <p:txBody>
+          <a:bodyPr wrap="square" lIns="0" tIns="0" rIns="0" bIns="0" rtlCol="0" anchor="ctr"/>
+          <a:lstStyle/>
+          <a:p>
+            <a:pPr rtl="1" algn="r" indent="0" marL="0">
+              <a:buNone/>
+            </a:pPr>
+            <a:r>
+              <a:rPr lang="en-US" sz="3000" b="1" dirty="0">
+                <a:solidFill>
+                  <a:srgbClr val="0E3546"/>
+                </a:solidFill>
+                <a:latin typeface="Arial" pitchFamily="34" charset="0"/>
+                <a:ea typeface="Arial" pitchFamily="34" charset="-122"/>
+                <a:cs typeface="Arial" pitchFamily="34" charset="-120"/>
+              </a:rPr>
+              <a:t>المصادر وافتراضات العمل</a:t>
+            </a:r>
+            <a:endParaRPr lang="en-US" sz="3000" dirty="0"/>
+          </a:p>
+        </p:txBody>
+      </p:sp>
+      <p:sp>
+        <p:nvSpPr>
+          <p:cNvPr id="4" name="Text 2"/>
+          <p:cNvSpPr txBox="1"/>
+          <p:nvPr/>
+        </p:nvSpPr>
+        <p:spPr>
+          <a:xfrm>
+            <a:off x="594360" y="1783080"/>
+            <a:ext cx="5227168" cy="411480"/>
+          </a:xfrm>
+          <a:prstGeom prst="rect">
+            <a:avLst/>
+          </a:prstGeom>
+          <a:noFill/>
+          <a:ln/>
+        </p:spPr>
+        <p:txBody>
+          <a:bodyPr wrap="square" lIns="0" tIns="0" rIns="0" bIns="0" rtlCol="0" anchor="ctr"/>
+          <a:lstStyle/>
+          <a:p>
+            <a:pPr rtl="1" algn="r" indent="0" marL="0">
+              <a:buNone/>
+            </a:pPr>
+            <a:r>
+              <a:rPr lang="en-US" sz="1600" b="1" dirty="0">
+                <a:solidFill>
+                  <a:srgbClr val="1C5A73"/>
+                </a:solidFill>
+                <a:latin typeface="Arial" pitchFamily="34" charset="0"/>
+                <a:ea typeface="Arial" pitchFamily="34" charset="-122"/>
+                <a:cs typeface="Arial" pitchFamily="34" charset="-120"/>
+              </a:rPr>
+              <a:t>المصادر الرئيسية</a:t>
+            </a:r>
+            <a:endParaRPr lang="en-US" sz="1600" dirty="0"/>
+          </a:p>
+        </p:txBody>
+      </p:sp>
+      <p:sp>
+        <p:nvSpPr>
+          <p:cNvPr id="5" name="Text 3"/>
+          <p:cNvSpPr txBox="1"/>
+          <p:nvPr/>
+        </p:nvSpPr>
+        <p:spPr>
+          <a:xfrm>
+            <a:off x="594360" y="2286000"/>
+            <a:ext cx="5227168" cy="2468880"/>
+          </a:xfrm>
+          <a:prstGeom prst="rect">
+            <a:avLst/>
+          </a:prstGeom>
+          <a:noFill/>
+          <a:ln/>
+        </p:spPr>
+        <p:txBody>
+          <a:bodyPr wrap="square" lIns="0" tIns="0" rIns="0" bIns="0" rtlCol="0" anchor="t"/>
+          <a:lstStyle/>
+          <a:p>
+            <a:pPr algn="r" marL="342900" indent="-342900">
+              <a:lnSpc>
+                <a:spcPct val="122000"/>
+              </a:lnSpc>
+              <a:spcAft>
+                <a:spcPts val="1000"/>
+              </a:spcAft>
+              <a:buSzPct val="100000"/>
+              <a:buChar char="•"/>
+            </a:pPr>
+            <a:r>
+              <a:rPr lang="en-US" sz="1350" dirty="0">
+                <a:solidFill>
+                  <a:srgbClr val="31424A"/>
+                </a:solidFill>
+                <a:latin typeface="Arial" pitchFamily="34" charset="0"/>
+                <a:ea typeface="Arial" pitchFamily="34" charset="-122"/>
+                <a:cs typeface="Arial" pitchFamily="34" charset="-120"/>
+              </a:rPr>
+              <a:t>الجهاز المركزي للتعبئة العامة والإحصاء: السكان والإنتاج الزراعي والتجارة الخارجية.</a:t>
+            </a:r>
+            <a:endParaRPr lang="en-US" sz="1350" dirty="0"/>
+          </a:p>
+          <a:p>
+            <a:pPr algn="r" marL="342900" indent="-342900">
+              <a:lnSpc>
+                <a:spcPct val="122000"/>
+              </a:lnSpc>
+              <a:spcAft>
+                <a:spcPts val="1000"/>
+              </a:spcAft>
+              <a:buSzPct val="100000"/>
+              <a:buChar char="•"/>
+            </a:pPr>
+            <a:r>
+              <a:rPr lang="en-US" sz="1350" dirty="0">
+                <a:solidFill>
+                  <a:srgbClr val="31424A"/>
+                </a:solidFill>
+                <a:latin typeface="Arial" pitchFamily="34" charset="0"/>
+                <a:ea typeface="Arial" pitchFamily="34" charset="-122"/>
+                <a:cs typeface="Arial" pitchFamily="34" charset="-120"/>
+              </a:rPr>
+              <a:t>وزارة الزراعة واستصلاح الأراضي: إحصاءات الصادرات الزراعية.</a:t>
+            </a:r>
+            <a:endParaRPr lang="en-US" sz="1350" dirty="0"/>
+          </a:p>
+          <a:p>
+            <a:pPr algn="r" marL="342900" indent="-342900">
+              <a:lnSpc>
+                <a:spcPct val="122000"/>
+              </a:lnSpc>
+              <a:spcAft>
+                <a:spcPts val="1000"/>
+              </a:spcAft>
+              <a:buSzPct val="100000"/>
+              <a:buChar char="•"/>
+            </a:pPr>
+            <a:r>
+              <a:rPr lang="en-US" sz="1350" dirty="0">
+                <a:solidFill>
+                  <a:srgbClr val="31424A"/>
+                </a:solidFill>
+                <a:latin typeface="Arial" pitchFamily="34" charset="0"/>
+                <a:ea typeface="Arial" pitchFamily="34" charset="-122"/>
+                <a:cs typeface="Arial" pitchFamily="34" charset="-120"/>
+              </a:rPr>
+              <a:t>وزارة الموارد المائية والري: الخطة القومية للموارد المائية.</a:t>
+            </a:r>
+            <a:endParaRPr lang="en-US" sz="1350" dirty="0"/>
+          </a:p>
+          <a:p>
+            <a:pPr algn="r" marL="342900" indent="-342900">
+              <a:lnSpc>
+                <a:spcPct val="122000"/>
+              </a:lnSpc>
+              <a:spcAft>
+                <a:spcPts val="1000"/>
+              </a:spcAft>
+              <a:buSzPct val="100000"/>
+              <a:buChar char="•"/>
+            </a:pPr>
+            <a:r>
+              <a:rPr lang="en-US" sz="1350" dirty="0">
+                <a:solidFill>
+                  <a:srgbClr val="31424A"/>
+                </a:solidFill>
+                <a:latin typeface="Arial" pitchFamily="34" charset="0"/>
+                <a:ea typeface="Arial" pitchFamily="34" charset="-122"/>
+                <a:cs typeface="Arial" pitchFamily="34" charset="-120"/>
+              </a:rPr>
+              <a:t>منظمة الأغذية والزراعة (FAOSTAT وAQUASTAT) والبنك الدولي (WDI).</a:t>
+            </a:r>
+            <a:endParaRPr lang="en-US" sz="1350" dirty="0"/>
+          </a:p>
+          <a:p>
+            <a:pPr algn="r" marL="342900" indent="-342900">
+              <a:lnSpc>
+                <a:spcPct val="122000"/>
+              </a:lnSpc>
+              <a:spcAft>
+                <a:spcPts val="1000"/>
+              </a:spcAft>
+              <a:buSzPct val="100000"/>
+              <a:buChar char="•"/>
+            </a:pPr>
+            <a:r>
+              <a:rPr lang="en-US" sz="1350" dirty="0">
+                <a:solidFill>
+                  <a:srgbClr val="31424A"/>
+                </a:solidFill>
+                <a:latin typeface="Arial" pitchFamily="34" charset="0"/>
+                <a:ea typeface="Arial" pitchFamily="34" charset="-122"/>
+                <a:cs typeface="Arial" pitchFamily="34" charset="-120"/>
+              </a:rPr>
+              <a:t>اتفاقية الأمم المتحدة لمكافحة التصحر، الجفاف بالأرقام 2022: ارتفاع عدد فترات الجفاف ومدتها 29٪ منذ 2000 مقارنة بـ1980–1999.</a:t>
+            </a:r>
+            <a:endParaRPr lang="en-US" sz="1350" dirty="0"/>
+          </a:p>
+          <a:p>
+            <a:pPr algn="r" marL="342900" indent="-342900">
+              <a:lnSpc>
+                <a:spcPct val="122000"/>
+              </a:lnSpc>
+              <a:spcAft>
+                <a:spcPts val="1000"/>
+              </a:spcAft>
+              <a:buSzPct val="100000"/>
+              <a:buChar char="•"/>
+            </a:pPr>
+            <a:r>
+              <a:rPr lang="en-US" sz="1350" dirty="0">
+                <a:solidFill>
+                  <a:srgbClr val="31424A"/>
+                </a:solidFill>
+                <a:latin typeface="Arial" pitchFamily="34" charset="0"/>
+                <a:ea typeface="Arial" pitchFamily="34" charset="-122"/>
+                <a:cs typeface="Arial" pitchFamily="34" charset="-120"/>
+              </a:rPr>
+              <a:t>الأمم المتحدة للمياه / أكواستات الفاو، مؤشر الهدف 6.4.2: تعريف الإجهاد المائي وحدوده.</a:t>
+            </a:r>
+            <a:endParaRPr lang="en-US" sz="1350" dirty="0"/>
+          </a:p>
+        </p:txBody>
+      </p:sp>
+      <p:sp>
+        <p:nvSpPr>
+          <p:cNvPr id="6" name="Text 4"/>
+          <p:cNvSpPr txBox="1"/>
+          <p:nvPr/>
+        </p:nvSpPr>
+        <p:spPr>
+          <a:xfrm>
+            <a:off x="6370168" y="1783080"/>
+            <a:ext cx="5227168" cy="411480"/>
+          </a:xfrm>
+          <a:prstGeom prst="rect">
+            <a:avLst/>
+          </a:prstGeom>
+          <a:noFill/>
+          <a:ln/>
+        </p:spPr>
+        <p:txBody>
+          <a:bodyPr wrap="square" lIns="0" tIns="0" rIns="0" bIns="0" rtlCol="0" anchor="ctr"/>
+          <a:lstStyle/>
+          <a:p>
+            <a:pPr rtl="1" algn="r" indent="0" marL="0">
+              <a:buNone/>
+            </a:pPr>
+            <a:r>
+              <a:rPr lang="en-US" sz="1600" b="1" dirty="0">
+                <a:solidFill>
+                  <a:srgbClr val="1C5A73"/>
+                </a:solidFill>
+                <a:latin typeface="Arial" pitchFamily="34" charset="0"/>
+                <a:ea typeface="Arial" pitchFamily="34" charset="-122"/>
+                <a:cs typeface="Arial" pitchFamily="34" charset="-120"/>
+              </a:rPr>
+              <a:t>افتراضات العمل</a:t>
+            </a:r>
+            <a:endParaRPr lang="en-US" sz="1600" dirty="0"/>
+          </a:p>
+        </p:txBody>
+      </p:sp>
+      <p:sp>
+        <p:nvSpPr>
+          <p:cNvPr id="7" name="Text 5"/>
+          <p:cNvSpPr txBox="1"/>
+          <p:nvPr/>
+        </p:nvSpPr>
+        <p:spPr>
+          <a:xfrm>
+            <a:off x="6370168" y="2286000"/>
+            <a:ext cx="5227168" cy="2468880"/>
+          </a:xfrm>
+          <a:prstGeom prst="rect">
+            <a:avLst/>
+          </a:prstGeom>
+          <a:noFill/>
+          <a:ln/>
+        </p:spPr>
+        <p:txBody>
+          <a:bodyPr wrap="square" lIns="0" tIns="0" rIns="0" bIns="0" rtlCol="0" anchor="t"/>
+          <a:lstStyle/>
+          <a:p>
+            <a:pPr algn="r" marL="342900" indent="-342900">
+              <a:lnSpc>
+                <a:spcPct val="122000"/>
+              </a:lnSpc>
+              <a:spcAft>
+                <a:spcPts val="1000"/>
+              </a:spcAft>
+              <a:buSzPct val="100000"/>
+              <a:buChar char="•"/>
+            </a:pPr>
+            <a:r>
+              <a:rPr lang="en-US" sz="1350" dirty="0">
+                <a:solidFill>
+                  <a:srgbClr val="31424A"/>
+                </a:solidFill>
+                <a:latin typeface="Arial" pitchFamily="34" charset="0"/>
+                <a:ea typeface="Arial" pitchFamily="34" charset="-122"/>
+                <a:cs typeface="Arial" pitchFamily="34" charset="-120"/>
+              </a:rPr>
+              <a:t>الأرقام رتب حجم مقرّبة، مأخوذة من أحدث البيانات العامة المتاحة.</a:t>
+            </a:r>
+            <a:endParaRPr lang="en-US" sz="1350" dirty="0"/>
+          </a:p>
+          <a:p>
+            <a:pPr algn="r" marL="342900" indent="-342900">
+              <a:lnSpc>
+                <a:spcPct val="122000"/>
+              </a:lnSpc>
+              <a:spcAft>
+                <a:spcPts val="1000"/>
+              </a:spcAft>
+              <a:buSzPct val="100000"/>
+              <a:buChar char="•"/>
+            </a:pPr>
+            <a:r>
+              <a:rPr lang="en-US" sz="1350" dirty="0">
+                <a:solidFill>
+                  <a:srgbClr val="31424A"/>
+                </a:solidFill>
+                <a:latin typeface="Arial" pitchFamily="34" charset="0"/>
+                <a:ea typeface="Arial" pitchFamily="34" charset="-122"/>
+                <a:cs typeface="Arial" pitchFamily="34" charset="-120"/>
+              </a:rPr>
+              <a:t>توفير الماء وزيادة الإنتاج أرقام استرشادية تتغير بحسب التربة والمناخ والمحصول.</a:t>
+            </a:r>
+            <a:endParaRPr lang="en-US" sz="1350" dirty="0"/>
+          </a:p>
+          <a:p>
+            <a:pPr algn="r" marL="342900" indent="-342900">
+              <a:lnSpc>
+                <a:spcPct val="122000"/>
+              </a:lnSpc>
+              <a:spcAft>
+                <a:spcPts val="1000"/>
+              </a:spcAft>
+              <a:buSzPct val="100000"/>
+              <a:buChar char="•"/>
+            </a:pPr>
+            <a:r>
+              <a:rPr lang="en-US" sz="1350" dirty="0">
+                <a:solidFill>
+                  <a:srgbClr val="31424A"/>
+                </a:solidFill>
+                <a:latin typeface="Arial" pitchFamily="34" charset="0"/>
+                <a:ea typeface="Arial" pitchFamily="34" charset="-122"/>
+                <a:cs typeface="Arial" pitchFamily="34" charset="-120"/>
+              </a:rPr>
+              <a:t>وثيقة عمل تجارية: تُحدَّث الأرقام قبل أي تقديم رسمي.</a:t>
+            </a:r>
+            <a:endParaRPr lang="en-US" sz="1350" dirty="0"/>
+          </a:p>
+        </p:txBody>
+      </p:sp>
+      <p:sp>
+        <p:nvSpPr>
+          <p:cNvPr id="8" name="Shape 6"/>
+          <p:cNvSpPr/>
+          <p:nvPr/>
+        </p:nvSpPr>
+        <p:spPr>
+          <a:xfrm>
+            <a:off x="594360" y="4846320"/>
+            <a:ext cx="11002975" cy="960120"/>
+          </a:xfrm>
+          <a:prstGeom prst="roundRect">
+            <a:avLst>
+              <a:gd name="adj" fmla="val 7619"/>
+            </a:avLst>
+          </a:prstGeom>
+          <a:solidFill>
+            <a:srgbClr val="EDF3F5"/>
+          </a:solidFill>
+          <a:ln w="9525">
+            <a:solidFill>
+              <a:srgbClr val="D6E2E7"/>
+            </a:solidFill>
+            <a:prstDash val="solid"/>
+          </a:ln>
+        </p:spPr>
+      </p:sp>
+      <p:sp>
+        <p:nvSpPr>
+          <p:cNvPr id="9" name="Text 7"/>
+          <p:cNvSpPr txBox="1"/>
+          <p:nvPr/>
+        </p:nvSpPr>
+        <p:spPr>
+          <a:xfrm>
+            <a:off x="822960" y="4983480"/>
+            <a:ext cx="10545775" cy="713232"/>
+          </a:xfrm>
+          <a:prstGeom prst="rect">
+            <a:avLst/>
+          </a:prstGeom>
+          <a:noFill/>
+          <a:ln/>
+        </p:spPr>
+        <p:txBody>
+          <a:bodyPr wrap="square" lIns="0" tIns="0" rIns="0" bIns="0" rtlCol="0" anchor="t"/>
+          <a:lstStyle/>
+          <a:p>
+            <a:pPr rtl="1" algn="r" indent="0" marL="0">
+              <a:lnSpc>
+                <a:spcPct val="118000"/>
+              </a:lnSpc>
+              <a:buNone/>
+            </a:pPr>
+            <a:r>
+              <a:rPr lang="en-US" sz="1100" dirty="0">
+                <a:solidFill>
+                  <a:srgbClr val="6C8089"/>
+                </a:solidFill>
+                <a:latin typeface="Arial" pitchFamily="34" charset="0"/>
+                <a:ea typeface="Arial" pitchFamily="34" charset="-122"/>
+                <a:cs typeface="Arial" pitchFamily="34" charset="-120"/>
+              </a:rPr>
+              <a:t>تقارير التجارب والشهادات (SOHISCERT، وتحاليل Polymex وSGS) والنشرات الفنية متاحة عند الطلب.</a:t>
+            </a:r>
+            <a:endParaRPr lang="en-US" sz="1100" dirty="0"/>
+          </a:p>
+        </p:txBody>
+      </p:sp>
+      <p:sp>
+        <p:nvSpPr>
+          <p:cNvPr id="10" name="Text 8"/>
+          <p:cNvSpPr txBox="1"/>
+          <p:nvPr/>
+        </p:nvSpPr>
+        <p:spPr>
+          <a:xfrm>
+            <a:off x="502920" y="6382512"/>
+            <a:ext cx="8229600" cy="274320"/>
+          </a:xfrm>
+          <a:prstGeom prst="rect">
+            <a:avLst/>
+          </a:prstGeom>
+          <a:noFill/>
+          <a:ln/>
+        </p:spPr>
+        <p:txBody>
+          <a:bodyPr wrap="square" lIns="0" tIns="0" rIns="0" bIns="0" rtlCol="0" anchor="ctr"/>
+          <a:lstStyle/>
+          <a:p>
+            <a:pPr rtl="1" algn="r" indent="0" marL="0">
+              <a:buNone/>
+            </a:pPr>
+            <a:r>
+              <a:rPr lang="en-US" sz="950" dirty="0">
+                <a:solidFill>
+                  <a:srgbClr val="6C8089">
+                    <a:alpha val="80000"/>
+                  </a:srgbClr>
+                </a:solidFill>
+                <a:latin typeface="Arial" pitchFamily="34" charset="0"/>
+                <a:ea typeface="Arial" pitchFamily="34" charset="-122"/>
+                <a:cs typeface="Arial" pitchFamily="34" charset="-120"/>
+              </a:rPr>
+              <a:t>Green Solutions · دراسة سوق مصر</a:t>
+            </a:r>
+            <a:endParaRPr lang="en-US" sz="950" dirty="0"/>
+          </a:p>
+        </p:txBody>
+      </p:sp>
+      <p:sp>
+        <p:nvSpPr>
+          <p:cNvPr id="11" name="Text 9"/>
+          <p:cNvSpPr txBox="1"/>
+          <p:nvPr/>
+        </p:nvSpPr>
+        <p:spPr>
+          <a:xfrm>
+            <a:off x="11140135" y="6382512"/>
+            <a:ext cx="548640" cy="274320"/>
+          </a:xfrm>
+          <a:prstGeom prst="rect">
+            <a:avLst/>
+          </a:prstGeom>
+          <a:noFill/>
+          <a:ln/>
+        </p:spPr>
+        <p:txBody>
+          <a:bodyPr wrap="square" lIns="0" tIns="0" rIns="0" bIns="0" rtlCol="0" anchor="ctr"/>
+          <a:lstStyle/>
+          <a:p>
+            <a:pPr rtl="1" algn="r" indent="0" marL="0">
+              <a:buNone/>
+            </a:pPr>
+            <a:r>
+              <a:rPr lang="en-US" sz="950" dirty="0">
+                <a:solidFill>
+                  <a:srgbClr val="6C8089">
+                    <a:alpha val="80000"/>
+                  </a:srgbClr>
+                </a:solidFill>
+                <a:latin typeface="Arial" pitchFamily="34" charset="0"/>
+                <a:ea typeface="Arial" pitchFamily="34" charset="-122"/>
+                <a:cs typeface="Arial" pitchFamily="34" charset="-120"/>
+              </a:rPr>
+              <a:t>17</a:t>
+            </a:r>
+            <a:endParaRPr lang="en-US" sz="950" dirty="0"/>
+          </a:p>
+        </p:txBody>
+      </p:sp>
+    </p:spTree>
+  </p:cSld>
+  <p:clrMapOvr>
+    <a:masterClrMapping/>
+  </p:clrMapOvr>
+</p:sld>
+</file>
+
+<file path=ppt/slides/slide19.xml><?xml version="1.0" encoding="utf-8"?>
+<p:sld xmlns:a="http://schemas.openxmlformats.org/drawingml/2006/main" xmlns:r="http://schemas.openxmlformats.org/officeDocument/2006/relationships" xmlns:p="http://schemas.openxmlformats.org/presentationml/2006/main">
+  <p:cSld name="Slide 19">
     <p:spTree>
       <p:nvGrpSpPr>
         <p:cNvPr id="1" name=""/>
@@ -9567,7 +10284,7 @@
       </p:sp>
       <p:pic>
         <p:nvPicPr>
-          <p:cNvPr id="6" name="Image 1" descr="C:\Users\Utilisateur\dev\green-solutions-web\scripts\dossiers\sceau-aim-clair.png">    </p:cNvPr>
+          <p:cNvPr id="6" name="Image 1" descr="/workspace/scratch/50eb4f7d8e13/green-solutions-web/scripts/dossiers/sceau-aim-clair.png">    </p:cNvPr>
           <p:cNvPicPr>
             <a:picLocks noChangeAspect="1"/>
           </p:cNvPicPr>
@@ -9667,7 +10384,7 @@
                 <a:ea typeface="Arial" pitchFamily="34" charset="-122"/>
                 <a:cs typeface="Arial" pitchFamily="34" charset="-120"/>
               </a:rPr>
-              <a:t>17</a:t>
+              <a:t>18</a:t>
             </a:r>
             <a:endParaRPr lang="en-US" sz="950" dirty="0"/>
           </a:p>
@@ -10801,7 +11518,7 @@
                 <a:ea typeface="Arial" pitchFamily="34" charset="-122"/>
                 <a:cs typeface="Arial" pitchFamily="34" charset="-120"/>
               </a:rPr>
-              <a:t>أين تذهب المياه</a:t>
+              <a:t>الجفاف والإجهاد المائي</a:t>
             </a:r>
             <a:endParaRPr lang="en-US" sz="1150" dirty="0"/>
           </a:p>
@@ -10840,7 +11557,7 @@
                 <a:ea typeface="Arial" pitchFamily="34" charset="-122"/>
                 <a:cs typeface="Arial" pitchFamily="34" charset="-120"/>
               </a:rPr>
-              <a:t>الري يستهلك أربعة أخماس المسحوب</a:t>
+              <a:t>الضغط يتزايد، لكن المخاطر تبقى محلية</a:t>
             </a:r>
             <a:endParaRPr lang="en-US" sz="3000" dirty="0"/>
           </a:p>
@@ -10922,7 +11639,7 @@
                 <a:ea typeface="Arial" pitchFamily="34" charset="-122"/>
                 <a:cs typeface="Arial" pitchFamily="34" charset="-120"/>
               </a:rPr>
-              <a:t>ماذا يعني ذلك</a:t>
+              <a:t>مؤشران مختلفان</a:t>
             </a:r>
             <a:endParaRPr lang="en-US" sz="1300" dirty="0"/>
           </a:p>
@@ -10964,7 +11681,7 @@
                 <a:ea typeface="Arial" pitchFamily="34" charset="-122"/>
                 <a:cs typeface="Arial" pitchFamily="34" charset="-120"/>
               </a:rPr>
-              <a:t>خفض الاستهلاك الزراعي بنسبة 10 % يوفّر حجمًا من الماء يعادل الاستخدام الصناعي كله تقريبًا.</a:t>
+              <a:t>عالمياً، ارتفع عدد فترات الجفاف ومدتها بنسبة 29٪ منذ عام 2000 مقارنة بالعقدين السابقين.</a:t>
             </a:r>
             <a:endParaRPr lang="en-US" sz="1200" dirty="0"/>
           </a:p>
@@ -10993,7 +11710,7 @@
                 <a:ea typeface="Arial" pitchFamily="34" charset="-122"/>
                 <a:cs typeface="Arial" pitchFamily="34" charset="-120"/>
               </a:rPr>
-              <a:t>لذلك ينصبّ الجهد أولًا على الحقل، لا على الاستخدامات الأخرى.</a:t>
+              <a:t>أما الإجهاد المائي فيقيس نسبة السحب إلى الموارد المتجددة المتاحة بعد الاحتياجات البيئية. لذلك لا تمثل هذه الإشارة العالمية توقعاً خاصاً بالدولة، بل يجب قراءتها مع الأمطار والمياه الجوفية والمواسم والاستخدامات المحلية.</a:t>
             </a:r>
             <a:endParaRPr lang="en-US" sz="1200" dirty="0"/>
           </a:p>
@@ -11146,7 +11863,7 @@
                 <a:ea typeface="Arial" pitchFamily="34" charset="-122"/>
                 <a:cs typeface="Arial" pitchFamily="34" charset="-120"/>
               </a:rPr>
-              <a:t>الاقتصاد والأمن الغذائي</a:t>
+              <a:t>أين تذهب المياه</a:t>
             </a:r>
             <a:endParaRPr lang="en-US" sz="1150" dirty="0"/>
           </a:p>
@@ -11185,26 +11902,42 @@
                 <a:ea typeface="Arial" pitchFamily="34" charset="-122"/>
                 <a:cs typeface="Arial" pitchFamily="34" charset="-120"/>
               </a:rPr>
-              <a:t>من أكبر مستوردي القمح، وأول مصدّر للبرتقال</a:t>
+              <a:t>الري يستهلك أربعة أخماس المسحوب</a:t>
             </a:r>
             <a:endParaRPr lang="en-US" sz="3000" dirty="0"/>
           </a:p>
         </p:txBody>
       </p:sp>
-      <p:sp>
-        <p:nvSpPr>
-          <p:cNvPr id="4" name="Shape 2"/>
+      <p:graphicFrame>
+        <p:nvGraphicFramePr>
+          <p:cNvPr id="4" name="Chart 0" descr=""/>
+          <p:cNvGraphicFramePr/>
+          <p:nvPr/>
+        </p:nvGraphicFramePr>
+        <p:xfrm>
+          <a:off x="594360" y="1783080"/>
+          <a:ext cx="7360920" cy="3977640"/>
+        </p:xfrm>
+        <a:graphic xmlns:a="http://schemas.openxmlformats.org/drawingml/2006/main">
+          <a:graphicData uri="http://schemas.openxmlformats.org/drawingml/2006/chart">
+            <c:chart xmlns:c="http://schemas.openxmlformats.org/drawingml/2006/chart" r:id="rId1"/>
+          </a:graphicData>
+        </a:graphic>
+      </p:graphicFrame>
+      <p:sp>
+        <p:nvSpPr>
+          <p:cNvPr id="5" name="Shape 2"/>
           <p:cNvSpPr/>
           <p:nvPr/>
         </p:nvSpPr>
         <p:spPr>
           <a:xfrm>
-            <a:off x="594360" y="1874520"/>
-            <a:ext cx="3484778" cy="2514600"/>
+            <a:off x="8275320" y="1783080"/>
+            <a:ext cx="3291840" cy="3977640"/>
           </a:xfrm>
           <a:prstGeom prst="roundRect">
             <a:avLst>
-              <a:gd name="adj" fmla="val 3636"/>
+              <a:gd name="adj" fmla="val 2778"/>
             </a:avLst>
           </a:prstGeom>
           <a:solidFill>
@@ -11220,14 +11953,14 @@
       </p:sp>
       <p:sp>
         <p:nvSpPr>
-          <p:cNvPr id="5" name="Text 3"/>
-          <p:cNvSpPr txBox="1"/>
-          <p:nvPr/>
-        </p:nvSpPr>
-        <p:spPr>
-          <a:xfrm>
-            <a:off x="777240" y="2148840"/>
-            <a:ext cx="3119018" cy="960120"/>
+          <p:cNvPr id="6" name="Text 3"/>
+          <p:cNvSpPr txBox="1"/>
+          <p:nvPr/>
+        </p:nvSpPr>
+        <p:spPr>
+          <a:xfrm>
+            <a:off x="8503920" y="2011680"/>
+            <a:ext cx="2834640" cy="457200"/>
           </a:xfrm>
           <a:prstGeom prst="rect">
             <a:avLst/>
@@ -11239,11 +11972,11 @@
           <a:bodyPr wrap="square" lIns="0" tIns="0" rIns="0" bIns="0" rtlCol="0" anchor="ctr"/>
           <a:lstStyle/>
           <a:p>
-            <a:pPr rtl="1" algn="ctr" indent="0" marL="0">
-              <a:buNone/>
-            </a:pPr>
-            <a:r>
-              <a:rPr lang="en-US" sz="3000" b="1" dirty="0">
+            <a:pPr rtl="1" algn="r" indent="0" marL="0">
+              <a:buNone/>
+            </a:pPr>
+            <a:r>
+              <a:rPr lang="en-US" sz="1300" b="1" dirty="0">
                 <a:solidFill>
                   <a:srgbClr val="1C5A73"/>
                 </a:solidFill>
@@ -11251,280 +11984,22 @@
                 <a:ea typeface="Arial" pitchFamily="34" charset="-122"/>
                 <a:cs typeface="Arial" pitchFamily="34" charset="-120"/>
               </a:rPr>
-              <a:t>≈ 12 مليون</a:t>
-            </a:r>
-            <a:endParaRPr lang="en-US" sz="3000" dirty="0"/>
-          </a:p>
-        </p:txBody>
-      </p:sp>
-      <p:sp>
-        <p:nvSpPr>
-          <p:cNvPr id="6" name="Text 4"/>
-          <p:cNvSpPr txBox="1"/>
-          <p:nvPr/>
-        </p:nvSpPr>
-        <p:spPr>
-          <a:xfrm>
-            <a:off x="795528" y="3154680"/>
-            <a:ext cx="3082442" cy="1051560"/>
-          </a:xfrm>
-          <a:prstGeom prst="rect">
-            <a:avLst/>
-          </a:prstGeom>
-          <a:noFill/>
-          <a:ln/>
-        </p:spPr>
-        <p:txBody>
-          <a:bodyPr wrap="square" lIns="0" tIns="0" rIns="0" bIns="0" rtlCol="0" anchor="t"/>
-          <a:lstStyle/>
-          <a:p>
-            <a:pPr rtl="1" algn="ctr" indent="0" marL="0">
-              <a:lnSpc>
-                <a:spcPct val="118000"/>
-              </a:lnSpc>
-              <a:buNone/>
-            </a:pPr>
-            <a:r>
-              <a:rPr lang="en-US" sz="1250" dirty="0">
-                <a:solidFill>
-                  <a:srgbClr val="31424A"/>
-                </a:solidFill>
-                <a:latin typeface="Arial" pitchFamily="34" charset="0"/>
-                <a:ea typeface="Arial" pitchFamily="34" charset="-122"/>
-                <a:cs typeface="Arial" pitchFamily="34" charset="-120"/>
-              </a:rPr>
-              <a:t>طن من القمح مستوردة سنوياً، من الأعلى عالمياً</a:t>
-            </a:r>
-            <a:endParaRPr lang="en-US" sz="1250" dirty="0"/>
-          </a:p>
-        </p:txBody>
-      </p:sp>
-      <p:sp>
-        <p:nvSpPr>
-          <p:cNvPr id="7" name="Shape 5"/>
-          <p:cNvSpPr/>
-          <p:nvPr/>
-        </p:nvSpPr>
-        <p:spPr>
-          <a:xfrm>
-            <a:off x="4353458" y="1874520"/>
-            <a:ext cx="3484778" cy="2514600"/>
-          </a:xfrm>
-          <a:prstGeom prst="roundRect">
-            <a:avLst>
-              <a:gd name="adj" fmla="val 3636"/>
-            </a:avLst>
-          </a:prstGeom>
-          <a:solidFill>
-            <a:srgbClr val="EDF3F5"/>
-          </a:solidFill>
-          <a:ln w="9525">
-            <a:solidFill>
-              <a:srgbClr val="D6E2E7"/>
-            </a:solidFill>
-            <a:prstDash val="solid"/>
-          </a:ln>
-        </p:spPr>
-      </p:sp>
-      <p:sp>
-        <p:nvSpPr>
-          <p:cNvPr id="8" name="Text 6"/>
-          <p:cNvSpPr txBox="1"/>
-          <p:nvPr/>
-        </p:nvSpPr>
-        <p:spPr>
-          <a:xfrm>
-            <a:off x="4536338" y="2148840"/>
-            <a:ext cx="3119018" cy="960120"/>
-          </a:xfrm>
-          <a:prstGeom prst="rect">
-            <a:avLst/>
-          </a:prstGeom>
-          <a:noFill/>
-          <a:ln/>
-        </p:spPr>
-        <p:txBody>
-          <a:bodyPr wrap="square" lIns="0" tIns="0" rIns="0" bIns="0" rtlCol="0" anchor="ctr"/>
-          <a:lstStyle/>
-          <a:p>
-            <a:pPr rtl="1" algn="ctr" indent="0" marL="0">
-              <a:buNone/>
-            </a:pPr>
-            <a:r>
-              <a:rPr lang="en-US" sz="3800" b="1" dirty="0">
-                <a:solidFill>
-                  <a:srgbClr val="1C5A73"/>
-                </a:solidFill>
-                <a:latin typeface="Arial" pitchFamily="34" charset="0"/>
-                <a:ea typeface="Arial" pitchFamily="34" charset="-122"/>
-                <a:cs typeface="Arial" pitchFamily="34" charset="-120"/>
-              </a:rPr>
-              <a:t>الأول</a:t>
-            </a:r>
-            <a:endParaRPr lang="en-US" sz="3800" dirty="0"/>
-          </a:p>
-        </p:txBody>
-      </p:sp>
-      <p:sp>
-        <p:nvSpPr>
-          <p:cNvPr id="9" name="Text 7"/>
-          <p:cNvSpPr txBox="1"/>
-          <p:nvPr/>
-        </p:nvSpPr>
-        <p:spPr>
-          <a:xfrm>
-            <a:off x="4554626" y="3154680"/>
-            <a:ext cx="3082442" cy="1051560"/>
-          </a:xfrm>
-          <a:prstGeom prst="rect">
-            <a:avLst/>
-          </a:prstGeom>
-          <a:noFill/>
-          <a:ln/>
-        </p:spPr>
-        <p:txBody>
-          <a:bodyPr wrap="square" lIns="0" tIns="0" rIns="0" bIns="0" rtlCol="0" anchor="t"/>
-          <a:lstStyle/>
-          <a:p>
-            <a:pPr rtl="1" algn="ctr" indent="0" marL="0">
-              <a:lnSpc>
-                <a:spcPct val="118000"/>
-              </a:lnSpc>
-              <a:buNone/>
-            </a:pPr>
-            <a:r>
-              <a:rPr lang="en-US" sz="1250" dirty="0">
-                <a:solidFill>
-                  <a:srgbClr val="31424A"/>
-                </a:solidFill>
-                <a:latin typeface="Arial" pitchFamily="34" charset="0"/>
-                <a:ea typeface="Arial" pitchFamily="34" charset="-122"/>
-                <a:cs typeface="Arial" pitchFamily="34" charset="-120"/>
-              </a:rPr>
-              <a:t>عالمياً في تصدير البرتقال</a:t>
-            </a:r>
-            <a:endParaRPr lang="en-US" sz="1250" dirty="0"/>
-          </a:p>
-        </p:txBody>
-      </p:sp>
-      <p:sp>
-        <p:nvSpPr>
-          <p:cNvPr id="10" name="Shape 8"/>
-          <p:cNvSpPr/>
-          <p:nvPr/>
-        </p:nvSpPr>
-        <p:spPr>
-          <a:xfrm>
-            <a:off x="8112557" y="1874520"/>
-            <a:ext cx="3484778" cy="2514600"/>
-          </a:xfrm>
-          <a:prstGeom prst="roundRect">
-            <a:avLst>
-              <a:gd name="adj" fmla="val 3636"/>
-            </a:avLst>
-          </a:prstGeom>
-          <a:solidFill>
-            <a:srgbClr val="EDF3F5"/>
-          </a:solidFill>
-          <a:ln w="9525">
-            <a:solidFill>
-              <a:srgbClr val="D6E2E7"/>
-            </a:solidFill>
-            <a:prstDash val="solid"/>
-          </a:ln>
-        </p:spPr>
-      </p:sp>
-      <p:sp>
-        <p:nvSpPr>
-          <p:cNvPr id="11" name="Text 9"/>
-          <p:cNvSpPr txBox="1"/>
-          <p:nvPr/>
-        </p:nvSpPr>
-        <p:spPr>
-          <a:xfrm>
-            <a:off x="8295437" y="2148840"/>
-            <a:ext cx="3119018" cy="960120"/>
-          </a:xfrm>
-          <a:prstGeom prst="rect">
-            <a:avLst/>
-          </a:prstGeom>
-          <a:noFill/>
-          <a:ln/>
-        </p:spPr>
-        <p:txBody>
-          <a:bodyPr wrap="square" lIns="0" tIns="0" rIns="0" bIns="0" rtlCol="0" anchor="ctr"/>
-          <a:lstStyle/>
-          <a:p>
-            <a:pPr rtl="1" algn="ctr" indent="0" marL="0">
-              <a:buNone/>
-            </a:pPr>
-            <a:r>
-              <a:rPr lang="en-US" sz="3000" b="1" dirty="0">
-                <a:solidFill>
-                  <a:srgbClr val="1C5A73"/>
-                </a:solidFill>
-                <a:latin typeface="Arial" pitchFamily="34" charset="0"/>
-                <a:ea typeface="Arial" pitchFamily="34" charset="-122"/>
-                <a:cs typeface="Arial" pitchFamily="34" charset="-120"/>
-              </a:rPr>
-              <a:t>≈ 107 مليون</a:t>
-            </a:r>
-            <a:endParaRPr lang="en-US" sz="3000" dirty="0"/>
-          </a:p>
-        </p:txBody>
-      </p:sp>
-      <p:sp>
-        <p:nvSpPr>
-          <p:cNvPr id="12" name="Text 10"/>
-          <p:cNvSpPr txBox="1"/>
-          <p:nvPr/>
-        </p:nvSpPr>
-        <p:spPr>
-          <a:xfrm>
-            <a:off x="8313725" y="3154680"/>
-            <a:ext cx="3082442" cy="1051560"/>
-          </a:xfrm>
-          <a:prstGeom prst="rect">
-            <a:avLst/>
-          </a:prstGeom>
-          <a:noFill/>
-          <a:ln/>
-        </p:spPr>
-        <p:txBody>
-          <a:bodyPr wrap="square" lIns="0" tIns="0" rIns="0" bIns="0" rtlCol="0" anchor="t"/>
-          <a:lstStyle/>
-          <a:p>
-            <a:pPr rtl="1" algn="ctr" indent="0" marL="0">
-              <a:lnSpc>
-                <a:spcPct val="118000"/>
-              </a:lnSpc>
-              <a:buNone/>
-            </a:pPr>
-            <a:r>
-              <a:rPr lang="en-US" sz="1250" dirty="0">
-                <a:solidFill>
-                  <a:srgbClr val="31424A"/>
-                </a:solidFill>
-                <a:latin typeface="Arial" pitchFamily="34" charset="0"/>
-                <a:ea typeface="Arial" pitchFamily="34" charset="-122"/>
-                <a:cs typeface="Arial" pitchFamily="34" charset="-120"/>
-              </a:rPr>
-              <a:t>نسمة يعيشون على نحو 5 % من مساحة البلاد</a:t>
-            </a:r>
-            <a:endParaRPr lang="en-US" sz="1250" dirty="0"/>
-          </a:p>
-        </p:txBody>
-      </p:sp>
-      <p:sp>
-        <p:nvSpPr>
-          <p:cNvPr id="13" name="Text 11"/>
-          <p:cNvSpPr txBox="1"/>
-          <p:nvPr/>
-        </p:nvSpPr>
-        <p:spPr>
-          <a:xfrm>
-            <a:off x="594360" y="4709160"/>
-            <a:ext cx="11002975" cy="1097280"/>
+              <a:t>ماذا يعني ذلك</a:t>
+            </a:r>
+            <a:endParaRPr lang="en-US" sz="1300" dirty="0"/>
+          </a:p>
+        </p:txBody>
+      </p:sp>
+      <p:sp>
+        <p:nvSpPr>
+          <p:cNvPr id="7" name="Text 4"/>
+          <p:cNvSpPr txBox="1"/>
+          <p:nvPr/>
+        </p:nvSpPr>
+        <p:spPr>
+          <a:xfrm>
+            <a:off x="8503920" y="2560320"/>
+            <a:ext cx="2834640" cy="3017520"/>
           </a:xfrm>
           <a:prstGeom prst="rect">
             <a:avLst/>
@@ -11538,12 +12013,12 @@
           <a:p>
             <a:pPr rtl="1" algn="r" indent="0" marL="0">
               <a:lnSpc>
-                <a:spcPct val="130000"/>
+                <a:spcPct val="125000"/>
               </a:lnSpc>
               <a:buNone/>
             </a:pPr>
             <a:r>
-              <a:rPr lang="en-US" sz="1350" dirty="0">
+              <a:rPr lang="en-US" sz="1200" dirty="0">
                 <a:solidFill>
                   <a:srgbClr val="31424A"/>
                 </a:solidFill>
@@ -11551,15 +12026,44 @@
                 <a:ea typeface="Arial" pitchFamily="34" charset="-122"/>
                 <a:cs typeface="Arial" pitchFamily="34" charset="-120"/>
               </a:rPr>
-              <a:t>يستهلك الخبز المدعوم جزءاً كبيراً من القمح المستورد، ما يربط فاتورة الغذاء مباشرة بسعر الصرف. في المقابل تتوسع صادرات الموالح والبطاطس والعنب والفراولة، ومعظمها يأتي من الأراضي الجديدة المستصلحة المروية بالتنقيط.</a:t>
-            </a:r>
-            <a:endParaRPr lang="en-US" sz="1350" dirty="0"/>
-          </a:p>
-        </p:txBody>
-      </p:sp>
-      <p:sp>
-        <p:nvSpPr>
-          <p:cNvPr id="14" name="Text 12"/>
+              <a:t>خفض الاستهلاك الزراعي بنسبة 10 % يوفّر حجمًا من الماء يعادل الاستخدام الصناعي كله تقريبًا.</a:t>
+            </a:r>
+            <a:endParaRPr lang="en-US" sz="1200" dirty="0"/>
+          </a:p>
+          <a:p>
+            <a:pPr rtl="1" algn="r" indent="0" marL="0">
+              <a:lnSpc>
+                <a:spcPct val="125000"/>
+              </a:lnSpc>
+              <a:buNone/>
+            </a:pPr>
+            <a:endParaRPr lang="en-US" sz="1200" dirty="0"/>
+          </a:p>
+          <a:p>
+            <a:pPr rtl="1" algn="r" indent="0" marL="0">
+              <a:lnSpc>
+                <a:spcPct val="125000"/>
+              </a:lnSpc>
+              <a:buNone/>
+            </a:pPr>
+            <a:r>
+              <a:rPr lang="en-US" sz="1200" dirty="0">
+                <a:solidFill>
+                  <a:srgbClr val="31424A"/>
+                </a:solidFill>
+                <a:latin typeface="Arial" pitchFamily="34" charset="0"/>
+                <a:ea typeface="Arial" pitchFamily="34" charset="-122"/>
+                <a:cs typeface="Arial" pitchFamily="34" charset="-120"/>
+              </a:rPr>
+              <a:t>لذلك ينصبّ الجهد أولًا على الحقل، لا على الاستخدامات الأخرى.</a:t>
+            </a:r>
+            <a:endParaRPr lang="en-US" sz="1200" dirty="0"/>
+          </a:p>
+        </p:txBody>
+      </p:sp>
+      <p:sp>
+        <p:nvSpPr>
+          <p:cNvPr id="8" name="Text 5"/>
           <p:cNvSpPr txBox="1"/>
           <p:nvPr/>
         </p:nvSpPr>
@@ -11600,7 +12104,7 @@
       </p:sp>
       <p:sp>
         <p:nvSpPr>
-          <p:cNvPr id="15" name="Text 13"/>
+          <p:cNvPr id="9" name="Text 6"/>
           <p:cNvSpPr txBox="1"/>
           <p:nvPr/>
         </p:nvSpPr>
@@ -11704,7 +12208,7 @@
                 <a:ea typeface="Arial" pitchFamily="34" charset="-122"/>
                 <a:cs typeface="Arial" pitchFamily="34" charset="-120"/>
               </a:rPr>
-              <a:t>المحاصيل الرئيسية</a:t>
+              <a:t>الاقتصاد والأمن الغذائي</a:t>
             </a:r>
             <a:endParaRPr lang="en-US" sz="1150" dirty="0"/>
           </a:p>
@@ -11743,42 +12247,26 @@
                 <a:ea typeface="Arial" pitchFamily="34" charset="-122"/>
                 <a:cs typeface="Arial" pitchFamily="34" charset="-120"/>
               </a:rPr>
-              <a:t>خمسة محاصيل تحمل عمود الإنتاج</a:t>
+              <a:t>من أكبر مستوردي القمح، وأول مصدّر للبرتقال</a:t>
             </a:r>
             <a:endParaRPr lang="en-US" sz="3000" dirty="0"/>
           </a:p>
         </p:txBody>
       </p:sp>
-      <p:graphicFrame>
-        <p:nvGraphicFramePr>
-          <p:cNvPr id="4" name="Chart 0" descr=""/>
-          <p:cNvGraphicFramePr/>
-          <p:nvPr/>
-        </p:nvGraphicFramePr>
-        <p:xfrm>
-          <a:off x="594360" y="1783080"/>
-          <a:ext cx="7360920" cy="3977640"/>
-        </p:xfrm>
-        <a:graphic xmlns:a="http://schemas.openxmlformats.org/drawingml/2006/main">
-          <a:graphicData uri="http://schemas.openxmlformats.org/drawingml/2006/chart">
-            <c:chart xmlns:c="http://schemas.openxmlformats.org/drawingml/2006/chart" r:id="rId1"/>
-          </a:graphicData>
-        </a:graphic>
-      </p:graphicFrame>
-      <p:sp>
-        <p:nvSpPr>
-          <p:cNvPr id="5" name="Shape 2"/>
+      <p:sp>
+        <p:nvSpPr>
+          <p:cNvPr id="4" name="Shape 2"/>
           <p:cNvSpPr/>
           <p:nvPr/>
         </p:nvSpPr>
         <p:spPr>
           <a:xfrm>
-            <a:off x="8275320" y="1783080"/>
-            <a:ext cx="3291840" cy="3977640"/>
+            <a:off x="594360" y="1874520"/>
+            <a:ext cx="3484778" cy="2514600"/>
           </a:xfrm>
           <a:prstGeom prst="roundRect">
             <a:avLst>
-              <a:gd name="adj" fmla="val 2778"/>
+              <a:gd name="adj" fmla="val 3636"/>
             </a:avLst>
           </a:prstGeom>
           <a:solidFill>
@@ -11794,14 +12282,14 @@
       </p:sp>
       <p:sp>
         <p:nvSpPr>
-          <p:cNvPr id="6" name="Text 3"/>
-          <p:cNvSpPr txBox="1"/>
-          <p:nvPr/>
-        </p:nvSpPr>
-        <p:spPr>
-          <a:xfrm>
-            <a:off x="8503920" y="2011680"/>
-            <a:ext cx="2834640" cy="457200"/>
+          <p:cNvPr id="5" name="Text 3"/>
+          <p:cNvSpPr txBox="1"/>
+          <p:nvPr/>
+        </p:nvSpPr>
+        <p:spPr>
+          <a:xfrm>
+            <a:off x="777240" y="2148840"/>
+            <a:ext cx="3119018" cy="960120"/>
           </a:xfrm>
           <a:prstGeom prst="rect">
             <a:avLst/>
@@ -11813,11 +12301,11 @@
           <a:bodyPr wrap="square" lIns="0" tIns="0" rIns="0" bIns="0" rtlCol="0" anchor="ctr"/>
           <a:lstStyle/>
           <a:p>
-            <a:pPr rtl="1" algn="r" indent="0" marL="0">
-              <a:buNone/>
-            </a:pPr>
-            <a:r>
-              <a:rPr lang="en-US" sz="1300" b="1" dirty="0">
+            <a:pPr rtl="1" algn="ctr" indent="0" marL="0">
+              <a:buNone/>
+            </a:pPr>
+            <a:r>
+              <a:rPr lang="en-US" sz="3000" b="1" dirty="0">
                 <a:solidFill>
                   <a:srgbClr val="1C5A73"/>
                 </a:solidFill>
@@ -11825,22 +12313,280 @@
                 <a:ea typeface="Arial" pitchFamily="34" charset="-122"/>
                 <a:cs typeface="Arial" pitchFamily="34" charset="-120"/>
               </a:rPr>
-              <a:t>قراءة الرسم</a:t>
-            </a:r>
-            <a:endParaRPr lang="en-US" sz="1300" dirty="0"/>
-          </a:p>
-        </p:txBody>
-      </p:sp>
-      <p:sp>
-        <p:nvSpPr>
-          <p:cNvPr id="7" name="Text 4"/>
-          <p:cNvSpPr txBox="1"/>
-          <p:nvPr/>
-        </p:nvSpPr>
-        <p:spPr>
-          <a:xfrm>
-            <a:off x="8503920" y="2560320"/>
-            <a:ext cx="2834640" cy="3017520"/>
+              <a:t>≈ 12 مليون</a:t>
+            </a:r>
+            <a:endParaRPr lang="en-US" sz="3000" dirty="0"/>
+          </a:p>
+        </p:txBody>
+      </p:sp>
+      <p:sp>
+        <p:nvSpPr>
+          <p:cNvPr id="6" name="Text 4"/>
+          <p:cNvSpPr txBox="1"/>
+          <p:nvPr/>
+        </p:nvSpPr>
+        <p:spPr>
+          <a:xfrm>
+            <a:off x="795528" y="3154680"/>
+            <a:ext cx="3082442" cy="1051560"/>
+          </a:xfrm>
+          <a:prstGeom prst="rect">
+            <a:avLst/>
+          </a:prstGeom>
+          <a:noFill/>
+          <a:ln/>
+        </p:spPr>
+        <p:txBody>
+          <a:bodyPr wrap="square" lIns="0" tIns="0" rIns="0" bIns="0" rtlCol="0" anchor="t"/>
+          <a:lstStyle/>
+          <a:p>
+            <a:pPr rtl="1" algn="ctr" indent="0" marL="0">
+              <a:lnSpc>
+                <a:spcPct val="118000"/>
+              </a:lnSpc>
+              <a:buNone/>
+            </a:pPr>
+            <a:r>
+              <a:rPr lang="en-US" sz="1250" dirty="0">
+                <a:solidFill>
+                  <a:srgbClr val="31424A"/>
+                </a:solidFill>
+                <a:latin typeface="Arial" pitchFamily="34" charset="0"/>
+                <a:ea typeface="Arial" pitchFamily="34" charset="-122"/>
+                <a:cs typeface="Arial" pitchFamily="34" charset="-120"/>
+              </a:rPr>
+              <a:t>طن من القمح مستوردة سنوياً، من الأعلى عالمياً</a:t>
+            </a:r>
+            <a:endParaRPr lang="en-US" sz="1250" dirty="0"/>
+          </a:p>
+        </p:txBody>
+      </p:sp>
+      <p:sp>
+        <p:nvSpPr>
+          <p:cNvPr id="7" name="Shape 5"/>
+          <p:cNvSpPr/>
+          <p:nvPr/>
+        </p:nvSpPr>
+        <p:spPr>
+          <a:xfrm>
+            <a:off x="4353458" y="1874520"/>
+            <a:ext cx="3484778" cy="2514600"/>
+          </a:xfrm>
+          <a:prstGeom prst="roundRect">
+            <a:avLst>
+              <a:gd name="adj" fmla="val 3636"/>
+            </a:avLst>
+          </a:prstGeom>
+          <a:solidFill>
+            <a:srgbClr val="EDF3F5"/>
+          </a:solidFill>
+          <a:ln w="9525">
+            <a:solidFill>
+              <a:srgbClr val="D6E2E7"/>
+            </a:solidFill>
+            <a:prstDash val="solid"/>
+          </a:ln>
+        </p:spPr>
+      </p:sp>
+      <p:sp>
+        <p:nvSpPr>
+          <p:cNvPr id="8" name="Text 6"/>
+          <p:cNvSpPr txBox="1"/>
+          <p:nvPr/>
+        </p:nvSpPr>
+        <p:spPr>
+          <a:xfrm>
+            <a:off x="4536338" y="2148840"/>
+            <a:ext cx="3119018" cy="960120"/>
+          </a:xfrm>
+          <a:prstGeom prst="rect">
+            <a:avLst/>
+          </a:prstGeom>
+          <a:noFill/>
+          <a:ln/>
+        </p:spPr>
+        <p:txBody>
+          <a:bodyPr wrap="square" lIns="0" tIns="0" rIns="0" bIns="0" rtlCol="0" anchor="ctr"/>
+          <a:lstStyle/>
+          <a:p>
+            <a:pPr rtl="1" algn="ctr" indent="0" marL="0">
+              <a:buNone/>
+            </a:pPr>
+            <a:r>
+              <a:rPr lang="en-US" sz="3800" b="1" dirty="0">
+                <a:solidFill>
+                  <a:srgbClr val="1C5A73"/>
+                </a:solidFill>
+                <a:latin typeface="Arial" pitchFamily="34" charset="0"/>
+                <a:ea typeface="Arial" pitchFamily="34" charset="-122"/>
+                <a:cs typeface="Arial" pitchFamily="34" charset="-120"/>
+              </a:rPr>
+              <a:t>الأول</a:t>
+            </a:r>
+            <a:endParaRPr lang="en-US" sz="3800" dirty="0"/>
+          </a:p>
+        </p:txBody>
+      </p:sp>
+      <p:sp>
+        <p:nvSpPr>
+          <p:cNvPr id="9" name="Text 7"/>
+          <p:cNvSpPr txBox="1"/>
+          <p:nvPr/>
+        </p:nvSpPr>
+        <p:spPr>
+          <a:xfrm>
+            <a:off x="4554626" y="3154680"/>
+            <a:ext cx="3082442" cy="1051560"/>
+          </a:xfrm>
+          <a:prstGeom prst="rect">
+            <a:avLst/>
+          </a:prstGeom>
+          <a:noFill/>
+          <a:ln/>
+        </p:spPr>
+        <p:txBody>
+          <a:bodyPr wrap="square" lIns="0" tIns="0" rIns="0" bIns="0" rtlCol="0" anchor="t"/>
+          <a:lstStyle/>
+          <a:p>
+            <a:pPr rtl="1" algn="ctr" indent="0" marL="0">
+              <a:lnSpc>
+                <a:spcPct val="118000"/>
+              </a:lnSpc>
+              <a:buNone/>
+            </a:pPr>
+            <a:r>
+              <a:rPr lang="en-US" sz="1250" dirty="0">
+                <a:solidFill>
+                  <a:srgbClr val="31424A"/>
+                </a:solidFill>
+                <a:latin typeface="Arial" pitchFamily="34" charset="0"/>
+                <a:ea typeface="Arial" pitchFamily="34" charset="-122"/>
+                <a:cs typeface="Arial" pitchFamily="34" charset="-120"/>
+              </a:rPr>
+              <a:t>عالمياً في تصدير البرتقال</a:t>
+            </a:r>
+            <a:endParaRPr lang="en-US" sz="1250" dirty="0"/>
+          </a:p>
+        </p:txBody>
+      </p:sp>
+      <p:sp>
+        <p:nvSpPr>
+          <p:cNvPr id="10" name="Shape 8"/>
+          <p:cNvSpPr/>
+          <p:nvPr/>
+        </p:nvSpPr>
+        <p:spPr>
+          <a:xfrm>
+            <a:off x="8112557" y="1874520"/>
+            <a:ext cx="3484778" cy="2514600"/>
+          </a:xfrm>
+          <a:prstGeom prst="roundRect">
+            <a:avLst>
+              <a:gd name="adj" fmla="val 3636"/>
+            </a:avLst>
+          </a:prstGeom>
+          <a:solidFill>
+            <a:srgbClr val="EDF3F5"/>
+          </a:solidFill>
+          <a:ln w="9525">
+            <a:solidFill>
+              <a:srgbClr val="D6E2E7"/>
+            </a:solidFill>
+            <a:prstDash val="solid"/>
+          </a:ln>
+        </p:spPr>
+      </p:sp>
+      <p:sp>
+        <p:nvSpPr>
+          <p:cNvPr id="11" name="Text 9"/>
+          <p:cNvSpPr txBox="1"/>
+          <p:nvPr/>
+        </p:nvSpPr>
+        <p:spPr>
+          <a:xfrm>
+            <a:off x="8295437" y="2148840"/>
+            <a:ext cx="3119018" cy="960120"/>
+          </a:xfrm>
+          <a:prstGeom prst="rect">
+            <a:avLst/>
+          </a:prstGeom>
+          <a:noFill/>
+          <a:ln/>
+        </p:spPr>
+        <p:txBody>
+          <a:bodyPr wrap="square" lIns="0" tIns="0" rIns="0" bIns="0" rtlCol="0" anchor="ctr"/>
+          <a:lstStyle/>
+          <a:p>
+            <a:pPr rtl="1" algn="ctr" indent="0" marL="0">
+              <a:buNone/>
+            </a:pPr>
+            <a:r>
+              <a:rPr lang="en-US" sz="3000" b="1" dirty="0">
+                <a:solidFill>
+                  <a:srgbClr val="1C5A73"/>
+                </a:solidFill>
+                <a:latin typeface="Arial" pitchFamily="34" charset="0"/>
+                <a:ea typeface="Arial" pitchFamily="34" charset="-122"/>
+                <a:cs typeface="Arial" pitchFamily="34" charset="-120"/>
+              </a:rPr>
+              <a:t>≈ 107 مليون</a:t>
+            </a:r>
+            <a:endParaRPr lang="en-US" sz="3000" dirty="0"/>
+          </a:p>
+        </p:txBody>
+      </p:sp>
+      <p:sp>
+        <p:nvSpPr>
+          <p:cNvPr id="12" name="Text 10"/>
+          <p:cNvSpPr txBox="1"/>
+          <p:nvPr/>
+        </p:nvSpPr>
+        <p:spPr>
+          <a:xfrm>
+            <a:off x="8313725" y="3154680"/>
+            <a:ext cx="3082442" cy="1051560"/>
+          </a:xfrm>
+          <a:prstGeom prst="rect">
+            <a:avLst/>
+          </a:prstGeom>
+          <a:noFill/>
+          <a:ln/>
+        </p:spPr>
+        <p:txBody>
+          <a:bodyPr wrap="square" lIns="0" tIns="0" rIns="0" bIns="0" rtlCol="0" anchor="t"/>
+          <a:lstStyle/>
+          <a:p>
+            <a:pPr rtl="1" algn="ctr" indent="0" marL="0">
+              <a:lnSpc>
+                <a:spcPct val="118000"/>
+              </a:lnSpc>
+              <a:buNone/>
+            </a:pPr>
+            <a:r>
+              <a:rPr lang="en-US" sz="1250" dirty="0">
+                <a:solidFill>
+                  <a:srgbClr val="31424A"/>
+                </a:solidFill>
+                <a:latin typeface="Arial" pitchFamily="34" charset="0"/>
+                <a:ea typeface="Arial" pitchFamily="34" charset="-122"/>
+                <a:cs typeface="Arial" pitchFamily="34" charset="-120"/>
+              </a:rPr>
+              <a:t>نسمة يعيشون على نحو 5 % من مساحة البلاد</a:t>
+            </a:r>
+            <a:endParaRPr lang="en-US" sz="1250" dirty="0"/>
+          </a:p>
+        </p:txBody>
+      </p:sp>
+      <p:sp>
+        <p:nvSpPr>
+          <p:cNvPr id="13" name="Text 11"/>
+          <p:cNvSpPr txBox="1"/>
+          <p:nvPr/>
+        </p:nvSpPr>
+        <p:spPr>
+          <a:xfrm>
+            <a:off x="594360" y="4709160"/>
+            <a:ext cx="11002975" cy="1097280"/>
           </a:xfrm>
           <a:prstGeom prst="rect">
             <a:avLst/>
@@ -11854,12 +12600,12 @@
           <a:p>
             <a:pPr rtl="1" algn="r" indent="0" marL="0">
               <a:lnSpc>
-                <a:spcPct val="125000"/>
+                <a:spcPct val="130000"/>
               </a:lnSpc>
               <a:buNone/>
             </a:pPr>
             <a:r>
-              <a:rPr lang="en-US" sz="1200" dirty="0">
+              <a:rPr lang="en-US" sz="1350" dirty="0">
                 <a:solidFill>
                   <a:srgbClr val="31424A"/>
                 </a:solidFill>
@@ -11867,44 +12613,15 @@
                 <a:ea typeface="Arial" pitchFamily="34" charset="-122"/>
                 <a:cs typeface="Arial" pitchFamily="34" charset="-120"/>
               </a:rPr>
-              <a:t>قصب السكر أعلى المحاصيل استهلاكًا للماء لكل هكتار، وهو مركّز في الصعيد.</a:t>
-            </a:r>
-            <a:endParaRPr lang="en-US" sz="1200" dirty="0"/>
-          </a:p>
-          <a:p>
-            <a:pPr rtl="1" algn="r" indent="0" marL="0">
-              <a:lnSpc>
-                <a:spcPct val="125000"/>
-              </a:lnSpc>
-              <a:buNone/>
-            </a:pPr>
-            <a:endParaRPr lang="en-US" sz="1200" dirty="0"/>
-          </a:p>
-          <a:p>
-            <a:pPr rtl="1" algn="r" indent="0" marL="0">
-              <a:lnSpc>
-                <a:spcPct val="125000"/>
-              </a:lnSpc>
-              <a:buNone/>
-            </a:pPr>
-            <a:r>
-              <a:rPr lang="en-US" sz="1200" dirty="0">
-                <a:solidFill>
-                  <a:srgbClr val="31424A"/>
-                </a:solidFill>
-                <a:latin typeface="Arial" pitchFamily="34" charset="0"/>
-                <a:ea typeface="Arial" pitchFamily="34" charset="-122"/>
-                <a:cs typeface="Arial" pitchFamily="34" charset="-120"/>
-              </a:rPr>
-              <a:t>الموالح والطماطم هما محصولا التصدير: أكثر من 1,5 مليون طن من البرتقال تُشحن سنويًا. هنا يتحوّل توفير الماء مباشرة إلى هامش ربح.</a:t>
-            </a:r>
-            <a:endParaRPr lang="en-US" sz="1200" dirty="0"/>
-          </a:p>
-        </p:txBody>
-      </p:sp>
-      <p:sp>
-        <p:nvSpPr>
-          <p:cNvPr id="8" name="Text 5"/>
+              <a:t>يستهلك الخبز المدعوم جزءاً كبيراً من القمح المستورد، ما يربط فاتورة الغذاء مباشرة بسعر الصرف. في المقابل تتوسع صادرات الموالح والبطاطس والعنب والفراولة، ومعظمها يأتي من الأراضي الجديدة المستصلحة المروية بالتنقيط.</a:t>
+            </a:r>
+            <a:endParaRPr lang="en-US" sz="1350" dirty="0"/>
+          </a:p>
+        </p:txBody>
+      </p:sp>
+      <p:sp>
+        <p:nvSpPr>
+          <p:cNvPr id="14" name="Text 12"/>
           <p:cNvSpPr txBox="1"/>
           <p:nvPr/>
         </p:nvSpPr>
@@ -11945,7 +12662,7 @@
       </p:sp>
       <p:sp>
         <p:nvSpPr>
-          <p:cNvPr id="9" name="Text 6"/>
+          <p:cNvPr id="15" name="Text 13"/>
           <p:cNvSpPr txBox="1"/>
           <p:nvPr/>
         </p:nvSpPr>
@@ -12049,7 +12766,7 @@
                 <a:ea typeface="Arial" pitchFamily="34" charset="-122"/>
                 <a:cs typeface="Arial" pitchFamily="34" charset="-120"/>
               </a:rPr>
-              <a:t>القطاع الأول</a:t>
+              <a:t>المحاصيل الرئيسية</a:t>
             </a:r>
             <a:endParaRPr lang="en-US" sz="1150" dirty="0"/>
           </a:p>
@@ -12088,46 +12805,104 @@
                 <a:ea typeface="Arial" pitchFamily="34" charset="-122"/>
                 <a:cs typeface="Arial" pitchFamily="34" charset="-120"/>
               </a:rPr>
-              <a:t>الموالح: ريادة تصديرية على أراضٍ رملية</a:t>
+              <a:t>خمسة محاصيل تحمل عمود الإنتاج</a:t>
             </a:r>
             <a:endParaRPr lang="en-US" sz="3000" dirty="0"/>
           </a:p>
         </p:txBody>
       </p:sp>
-      <p:pic>
-        <p:nvPicPr>
-          <p:cNvPr id="4" name="Image 0" descr="preencoded.png">    </p:cNvPr>
-          <p:cNvPicPr>
-            <a:picLocks noChangeAspect="1"/>
-          </p:cNvPicPr>
-          <p:nvPr/>
-        </p:nvPicPr>
-        <p:blipFill>
-          <a:blip r:embed="rId1"/>
-          <a:stretch>
-            <a:fillRect/>
-          </a:stretch>
-        </p:blipFill>
-        <p:spPr>
-          <a:xfrm>
-            <a:off x="6522415" y="1783080"/>
-            <a:ext cx="5074920" cy="3794760"/>
-          </a:xfrm>
-          <a:prstGeom prst="rect">
-            <a:avLst/>
-          </a:prstGeom>
-        </p:spPr>
-      </p:pic>
-      <p:sp>
-        <p:nvSpPr>
-          <p:cNvPr id="5" name="Text 2"/>
-          <p:cNvSpPr txBox="1"/>
-          <p:nvPr/>
-        </p:nvSpPr>
-        <p:spPr>
-          <a:xfrm>
-            <a:off x="594360" y="1783080"/>
-            <a:ext cx="5379415" cy="4251960"/>
+      <p:graphicFrame>
+        <p:nvGraphicFramePr>
+          <p:cNvPr id="4" name="Chart 0" descr=""/>
+          <p:cNvGraphicFramePr/>
+          <p:nvPr/>
+        </p:nvGraphicFramePr>
+        <p:xfrm>
+          <a:off x="594360" y="1783080"/>
+          <a:ext cx="7360920" cy="3977640"/>
+        </p:xfrm>
+        <a:graphic xmlns:a="http://schemas.openxmlformats.org/drawingml/2006/main">
+          <a:graphicData uri="http://schemas.openxmlformats.org/drawingml/2006/chart">
+            <c:chart xmlns:c="http://schemas.openxmlformats.org/drawingml/2006/chart" r:id="rId1"/>
+          </a:graphicData>
+        </a:graphic>
+      </p:graphicFrame>
+      <p:sp>
+        <p:nvSpPr>
+          <p:cNvPr id="5" name="Shape 2"/>
+          <p:cNvSpPr/>
+          <p:nvPr/>
+        </p:nvSpPr>
+        <p:spPr>
+          <a:xfrm>
+            <a:off x="8275320" y="1783080"/>
+            <a:ext cx="3291840" cy="3977640"/>
+          </a:xfrm>
+          <a:prstGeom prst="roundRect">
+            <a:avLst>
+              <a:gd name="adj" fmla="val 2778"/>
+            </a:avLst>
+          </a:prstGeom>
+          <a:solidFill>
+            <a:srgbClr val="EDF3F5"/>
+          </a:solidFill>
+          <a:ln w="9525">
+            <a:solidFill>
+              <a:srgbClr val="D6E2E7"/>
+            </a:solidFill>
+            <a:prstDash val="solid"/>
+          </a:ln>
+        </p:spPr>
+      </p:sp>
+      <p:sp>
+        <p:nvSpPr>
+          <p:cNvPr id="6" name="Text 3"/>
+          <p:cNvSpPr txBox="1"/>
+          <p:nvPr/>
+        </p:nvSpPr>
+        <p:spPr>
+          <a:xfrm>
+            <a:off x="8503920" y="2011680"/>
+            <a:ext cx="2834640" cy="457200"/>
+          </a:xfrm>
+          <a:prstGeom prst="rect">
+            <a:avLst/>
+          </a:prstGeom>
+          <a:noFill/>
+          <a:ln/>
+        </p:spPr>
+        <p:txBody>
+          <a:bodyPr wrap="square" lIns="0" tIns="0" rIns="0" bIns="0" rtlCol="0" anchor="ctr"/>
+          <a:lstStyle/>
+          <a:p>
+            <a:pPr rtl="1" algn="r" indent="0" marL="0">
+              <a:buNone/>
+            </a:pPr>
+            <a:r>
+              <a:rPr lang="en-US" sz="1300" b="1" dirty="0">
+                <a:solidFill>
+                  <a:srgbClr val="1C5A73"/>
+                </a:solidFill>
+                <a:latin typeface="Arial" pitchFamily="34" charset="0"/>
+                <a:ea typeface="Arial" pitchFamily="34" charset="-122"/>
+                <a:cs typeface="Arial" pitchFamily="34" charset="-120"/>
+              </a:rPr>
+              <a:t>قراءة الرسم</a:t>
+            </a:r>
+            <a:endParaRPr lang="en-US" sz="1300" dirty="0"/>
+          </a:p>
+        </p:txBody>
+      </p:sp>
+      <p:sp>
+        <p:nvSpPr>
+          <p:cNvPr id="7" name="Text 4"/>
+          <p:cNvSpPr txBox="1"/>
+          <p:nvPr/>
+        </p:nvSpPr>
+        <p:spPr>
+          <a:xfrm>
+            <a:off x="8503920" y="2560320"/>
+            <a:ext cx="2834640" cy="3017520"/>
           </a:xfrm>
           <a:prstGeom prst="rect">
             <a:avLst/>
@@ -12139,18 +12914,14 @@
           <a:bodyPr wrap="square" lIns="0" tIns="0" rIns="0" bIns="0" rtlCol="0" anchor="t"/>
           <a:lstStyle/>
           <a:p>
-            <a:pPr algn="r" marL="342900" indent="-342900">
+            <a:pPr rtl="1" algn="r" indent="0" marL="0">
               <a:lnSpc>
-                <a:spcPct val="122000"/>
+                <a:spcPct val="125000"/>
               </a:lnSpc>
-              <a:spcAft>
-                <a:spcPts val="1100"/>
-              </a:spcAft>
-              <a:buSzPct val="100000"/>
-              <a:buChar char="•"/>
-            </a:pPr>
-            <a:r>
-              <a:rPr lang="en-US" sz="1400" dirty="0">
+              <a:buNone/>
+            </a:pPr>
+            <a:r>
+              <a:rPr lang="en-US" sz="1200" dirty="0">
                 <a:solidFill>
                   <a:srgbClr val="31424A"/>
                 </a:solidFill>
@@ -12158,23 +12929,28 @@
                 <a:ea typeface="Arial" pitchFamily="34" charset="-122"/>
                 <a:cs typeface="Arial" pitchFamily="34" charset="-120"/>
               </a:rPr>
-              <a:t>تتركز بساتين البرتقال في النوبارية والبحيرة والإسماعيلية والقليوبية، ويتجه جزء كبير من المحصول إلى التصدير.</a:t>
-            </a:r>
-            <a:endParaRPr lang="en-US" sz="1400" dirty="0"/>
-          </a:p>
-          <a:p>
-            <a:pPr algn="r" marL="342900" indent="-342900">
+              <a:t>قصب السكر أعلى المحاصيل استهلاكًا للماء لكل هكتار، وهو مركّز في الصعيد.</a:t>
+            </a:r>
+            <a:endParaRPr lang="en-US" sz="1200" dirty="0"/>
+          </a:p>
+          <a:p>
+            <a:pPr rtl="1" algn="r" indent="0" marL="0">
               <a:lnSpc>
-                <a:spcPct val="122000"/>
+                <a:spcPct val="125000"/>
               </a:lnSpc>
-              <a:spcAft>
-                <a:spcPts val="1100"/>
-              </a:spcAft>
-              <a:buSzPct val="100000"/>
-              <a:buChar char="•"/>
-            </a:pPr>
-            <a:r>
-              <a:rPr lang="en-US" sz="1400" dirty="0">
+              <a:buNone/>
+            </a:pPr>
+            <a:endParaRPr lang="en-US" sz="1200" dirty="0"/>
+          </a:p>
+          <a:p>
+            <a:pPr rtl="1" algn="r" indent="0" marL="0">
+              <a:lnSpc>
+                <a:spcPct val="125000"/>
+              </a:lnSpc>
+              <a:buNone/>
+            </a:pPr>
+            <a:r>
+              <a:rPr lang="en-US" sz="1200" dirty="0">
                 <a:solidFill>
                   <a:srgbClr val="31424A"/>
                 </a:solidFill>
@@ -12182,87 +12958,15 @@
                 <a:ea typeface="Arial" pitchFamily="34" charset="-122"/>
                 <a:cs typeface="Arial" pitchFamily="34" charset="-120"/>
               </a:rPr>
-              <a:t>الأراضي الجديدة رملية وفقيرة، تفقد ماء الري بسرعة وتحتاج إلى ريّات متقاربة.</a:t>
-            </a:r>
-            <a:endParaRPr lang="en-US" sz="1400" dirty="0"/>
-          </a:p>
-          <a:p>
-            <a:pPr algn="r" marL="342900" indent="-342900">
-              <a:lnSpc>
-                <a:spcPct val="122000"/>
-              </a:lnSpc>
-              <a:spcAft>
-                <a:spcPts val="1100"/>
-              </a:spcAft>
-              <a:buSzPct val="100000"/>
-              <a:buChar char="•"/>
-            </a:pPr>
-            <a:r>
-              <a:rPr lang="en-US" sz="1400" dirty="0">
-                <a:solidFill>
-                  <a:srgbClr val="31424A"/>
-                </a:solidFill>
-                <a:latin typeface="Arial" pitchFamily="34" charset="0"/>
-                <a:ea typeface="Arial" pitchFamily="34" charset="-122"/>
-                <a:cs typeface="Arial" pitchFamily="34" charset="-120"/>
-              </a:rPr>
-              <a:t>مع ارتفاع الحرارة تزداد حاجة الأشجار إلى الماء في الصيف، بينما تبقى الحصص محدودة في أطراف الدلتا.</a:t>
-            </a:r>
-            <a:endParaRPr lang="en-US" sz="1400" dirty="0"/>
-          </a:p>
-          <a:p>
-            <a:pPr algn="r" marL="342900" indent="-342900">
-              <a:lnSpc>
-                <a:spcPct val="122000"/>
-              </a:lnSpc>
-              <a:spcAft>
-                <a:spcPts val="1100"/>
-              </a:spcAft>
-              <a:buSzPct val="100000"/>
-              <a:buChar char="•"/>
-            </a:pPr>
-            <a:r>
-              <a:rPr lang="en-US" sz="1400" dirty="0">
-                <a:solidFill>
-                  <a:srgbClr val="31424A"/>
-                </a:solidFill>
-                <a:latin typeface="Arial" pitchFamily="34" charset="0"/>
-                <a:ea typeface="Arial" pitchFamily="34" charset="-122"/>
-                <a:cs typeface="Arial" pitchFamily="34" charset="-120"/>
-              </a:rPr>
-              <a:t>تشترط أسواق التصدير حدوداً صارمة للمتبقيات: NAPEMA® يعالج الآفات دون أن يترك أثراً.</a:t>
-            </a:r>
-            <a:endParaRPr lang="en-US" sz="1400" dirty="0"/>
-          </a:p>
-          <a:p>
-            <a:pPr algn="r" marL="342900" indent="-342900">
-              <a:lnSpc>
-                <a:spcPct val="122000"/>
-              </a:lnSpc>
-              <a:spcAft>
-                <a:spcPts val="1100"/>
-              </a:spcAft>
-              <a:buSzPct val="100000"/>
-              <a:buChar char="•"/>
-            </a:pPr>
-            <a:r>
-              <a:rPr lang="en-US" sz="1400" dirty="0">
-                <a:solidFill>
-                  <a:srgbClr val="31424A"/>
-                </a:solidFill>
-                <a:latin typeface="Arial" pitchFamily="34" charset="0"/>
-                <a:ea typeface="Arial" pitchFamily="34" charset="-122"/>
-                <a:cs typeface="Arial" pitchFamily="34" charset="-120"/>
-              </a:rPr>
-              <a:t>وضع EVERGREEN® عند الغرس أو في خط التنقيط يطيل بقاء الماء حول الجذور بين الريّات.</a:t>
-            </a:r>
-            <a:endParaRPr lang="en-US" sz="1400" dirty="0"/>
-          </a:p>
-        </p:txBody>
-      </p:sp>
-      <p:sp>
-        <p:nvSpPr>
-          <p:cNvPr id="6" name="Text 3"/>
+              <a:t>الموالح والطماطم هما محصولا التصدير: أكثر من 1,5 مليون طن من البرتقال تُشحن سنويًا. هنا يتحوّل توفير الماء مباشرة إلى هامش ربح.</a:t>
+            </a:r>
+            <a:endParaRPr lang="en-US" sz="1200" dirty="0"/>
+          </a:p>
+        </p:txBody>
+      </p:sp>
+      <p:sp>
+        <p:nvSpPr>
+          <p:cNvPr id="8" name="Text 5"/>
           <p:cNvSpPr txBox="1"/>
           <p:nvPr/>
         </p:nvSpPr>
@@ -12303,7 +13007,7 @@
       </p:sp>
       <p:sp>
         <p:nvSpPr>
-          <p:cNvPr id="7" name="Text 4"/>
+          <p:cNvPr id="9" name="Text 6"/>
           <p:cNvSpPr txBox="1"/>
           <p:nvPr/>
         </p:nvSpPr>
@@ -12407,7 +13111,7 @@
                 <a:ea typeface="Arial" pitchFamily="34" charset="-122"/>
                 <a:cs typeface="Arial" pitchFamily="34" charset="-120"/>
               </a:rPr>
-              <a:t>القطاع الثاني</a:t>
+              <a:t>القطاع الأول</a:t>
             </a:r>
             <a:endParaRPr lang="en-US" sz="1150" dirty="0"/>
           </a:p>
@@ -12446,7 +13150,7 @@
                 <a:ea typeface="Arial" pitchFamily="34" charset="-122"/>
                 <a:cs typeface="Arial" pitchFamily="34" charset="-120"/>
               </a:rPr>
-              <a:t>البطاطس والخضروات: من الدلتا إلى الصحراء المستصلحة</a:t>
+              <a:t>الموالح: ريادة تصديرية على أراضٍ رملية</a:t>
             </a:r>
             <a:endParaRPr lang="en-US" sz="3000" dirty="0"/>
           </a:p>
@@ -12468,23 +13172,23 @@
         </p:blipFill>
         <p:spPr>
           <a:xfrm>
+            <a:off x="6522415" y="1783080"/>
+            <a:ext cx="5074920" cy="3794760"/>
+          </a:xfrm>
+          <a:prstGeom prst="rect">
+            <a:avLst/>
+          </a:prstGeom>
+        </p:spPr>
+      </p:pic>
+      <p:sp>
+        <p:nvSpPr>
+          <p:cNvPr id="5" name="Text 2"/>
+          <p:cNvSpPr txBox="1"/>
+          <p:nvPr/>
+        </p:nvSpPr>
+        <p:spPr>
+          <a:xfrm>
             <a:off x="594360" y="1783080"/>
-            <a:ext cx="5074920" cy="3794760"/>
-          </a:xfrm>
-          <a:prstGeom prst="rect">
-            <a:avLst/>
-          </a:prstGeom>
-        </p:spPr>
-      </p:pic>
-      <p:sp>
-        <p:nvSpPr>
-          <p:cNvPr id="5" name="Text 2"/>
-          <p:cNvSpPr txBox="1"/>
-          <p:nvPr/>
-        </p:nvSpPr>
-        <p:spPr>
-          <a:xfrm>
-            <a:off x="6217920" y="1783080"/>
             <a:ext cx="5379415" cy="4251960"/>
           </a:xfrm>
           <a:prstGeom prst="rect">
@@ -12516,7 +13220,7 @@
                 <a:ea typeface="Arial" pitchFamily="34" charset="-122"/>
                 <a:cs typeface="Arial" pitchFamily="34" charset="-120"/>
               </a:rPr>
-              <a:t>مصر من أكبر منتجي البطاطس في أفريقيا، وتصدّر جزءاً مهماً منها إلى أوروبا والخليج.</a:t>
+              <a:t>تتركز بساتين البرتقال في النوبارية والبحيرة والإسماعيلية والقليوبية، ويتجه جزء كبير من المحصول إلى التصدير.</a:t>
             </a:r>
             <a:endParaRPr lang="en-US" sz="1400" dirty="0"/>
           </a:p>
@@ -12540,7 +13244,7 @@
                 <a:ea typeface="Arial" pitchFamily="34" charset="-122"/>
                 <a:cs typeface="Arial" pitchFamily="34" charset="-120"/>
               </a:rPr>
-              <a:t>تُزرع بطاطس التصدير في المنيا والنوبارية والصالحية، تحت الري المحوري أو بالتنقيط على تربة رملية.</a:t>
+              <a:t>الأراضي الجديدة رملية وفقيرة، تفقد ماء الري بسرعة وتحتاج إلى ريّات متقاربة.</a:t>
             </a:r>
             <a:endParaRPr lang="en-US" sz="1400" dirty="0"/>
           </a:p>
@@ -12564,7 +13268,7 @@
                 <a:ea typeface="Arial" pitchFamily="34" charset="-122"/>
                 <a:cs typeface="Arial" pitchFamily="34" charset="-120"/>
               </a:rPr>
-              <a:t>في الأراضي القديمة بالدلتا ما زال الري بالغمر شائعاً، مع فواقد كبيرة وارتفاع في ملوحة التربة.</a:t>
+              <a:t>مع ارتفاع الحرارة تزداد حاجة الأشجار إلى الماء في الصيف، بينما تبقى الحصص محدودة في أطراف الدلتا.</a:t>
             </a:r>
             <a:endParaRPr lang="en-US" sz="1400" dirty="0"/>
           </a:p>
@@ -12588,7 +13292,7 @@
                 <a:ea typeface="Arial" pitchFamily="34" charset="-122"/>
                 <a:cs typeface="Arial" pitchFamily="34" charset="-120"/>
               </a:rPr>
-              <a:t>تشجع الدولة التحول إلى الري الحديث في الأراضي القديمة لتوفير جزء من حصة النيل.</a:t>
+              <a:t>تشترط أسواق التصدير حدوداً صارمة للمتبقيات: NAPEMA® يعالج الآفات دون أن يترك أثراً.</a:t>
             </a:r>
             <a:endParaRPr lang="en-US" sz="1400" dirty="0"/>
           </a:p>
@@ -12612,7 +13316,7 @@
                 <a:ea typeface="Arial" pitchFamily="34" charset="-122"/>
                 <a:cs typeface="Arial" pitchFamily="34" charset="-120"/>
               </a:rPr>
-              <a:t>تستفيد الطماطم والبطاطس مباشرة من احتباس الماء في منطقة الجذور، خصوصاً على التربة الرملية.</a:t>
+              <a:t>وضع EVERGREEN® عند الغرس أو في خط التنقيط يطيل بقاء الماء حول الجذور بين الريّات.</a:t>
             </a:r>
             <a:endParaRPr lang="en-US" sz="1400" dirty="0"/>
           </a:p>
@@ -12765,7 +13469,7 @@
                 <a:ea typeface="Arial" pitchFamily="34" charset="-122"/>
                 <a:cs typeface="Arial" pitchFamily="34" charset="-120"/>
               </a:rPr>
-              <a:t>إمكانات الإنتاج</a:t>
+              <a:t>القطاع الثاني</a:t>
             </a:r>
             <a:endParaRPr lang="en-US" sz="1150" dirty="0"/>
           </a:p>
@@ -12804,168 +13508,181 @@
                 <a:ea typeface="Arial" pitchFamily="34" charset="-122"/>
                 <a:cs typeface="Arial" pitchFamily="34" charset="-120"/>
               </a:rPr>
-              <a:t>الزيادة المتوقعة في الإنتاج حسب المحصول</a:t>
+              <a:t>البطاطس والخضروات: من الدلتا إلى الصحراء المستصلحة</a:t>
             </a:r>
             <a:endParaRPr lang="en-US" sz="3000" dirty="0"/>
           </a:p>
         </p:txBody>
       </p:sp>
-      <p:graphicFrame>
-        <p:nvGraphicFramePr>
-          <p:cNvPr id="4" name="Chart 0" descr=""/>
-          <p:cNvGraphicFramePr/>
-          <p:nvPr/>
-        </p:nvGraphicFramePr>
-        <p:xfrm>
-          <a:off x="594360" y="1783080"/>
-          <a:ext cx="7360920" cy="3977640"/>
-        </p:xfrm>
-        <a:graphic xmlns:a="http://schemas.openxmlformats.org/drawingml/2006/main">
-          <a:graphicData uri="http://schemas.openxmlformats.org/drawingml/2006/chart">
-            <c:chart xmlns:c="http://schemas.openxmlformats.org/drawingml/2006/chart" r:id="rId1"/>
-          </a:graphicData>
-        </a:graphic>
-      </p:graphicFrame>
-      <p:sp>
-        <p:nvSpPr>
-          <p:cNvPr id="5" name="Shape 2"/>
-          <p:cNvSpPr/>
-          <p:nvPr/>
-        </p:nvSpPr>
-        <p:spPr>
-          <a:xfrm>
-            <a:off x="8275320" y="1783080"/>
-            <a:ext cx="3291840" cy="3977640"/>
-          </a:xfrm>
-          <a:prstGeom prst="roundRect">
-            <a:avLst>
-              <a:gd name="adj" fmla="val 2778"/>
-            </a:avLst>
-          </a:prstGeom>
-          <a:solidFill>
-            <a:srgbClr val="EDF3F5"/>
-          </a:solidFill>
-          <a:ln w="9525">
-            <a:solidFill>
-              <a:srgbClr val="D6E2E7"/>
-            </a:solidFill>
-            <a:prstDash val="solid"/>
-          </a:ln>
-        </p:spPr>
+      <p:pic>
+        <p:nvPicPr>
+          <p:cNvPr id="4" name="Image 0" descr="preencoded.png">    </p:cNvPr>
+          <p:cNvPicPr>
+            <a:picLocks noChangeAspect="1"/>
+          </p:cNvPicPr>
+          <p:nvPr/>
+        </p:nvPicPr>
+        <p:blipFill>
+          <a:blip r:embed="rId1"/>
+          <a:stretch>
+            <a:fillRect/>
+          </a:stretch>
+        </p:blipFill>
+        <p:spPr>
+          <a:xfrm>
+            <a:off x="594360" y="1783080"/>
+            <a:ext cx="5074920" cy="3794760"/>
+          </a:xfrm>
+          <a:prstGeom prst="rect">
+            <a:avLst/>
+          </a:prstGeom>
+        </p:spPr>
+      </p:pic>
+      <p:sp>
+        <p:nvSpPr>
+          <p:cNvPr id="5" name="Text 2"/>
+          <p:cNvSpPr txBox="1"/>
+          <p:nvPr/>
+        </p:nvSpPr>
+        <p:spPr>
+          <a:xfrm>
+            <a:off x="6217920" y="1783080"/>
+            <a:ext cx="5379415" cy="4251960"/>
+          </a:xfrm>
+          <a:prstGeom prst="rect">
+            <a:avLst/>
+          </a:prstGeom>
+          <a:noFill/>
+          <a:ln/>
+        </p:spPr>
+        <p:txBody>
+          <a:bodyPr wrap="square" lIns="0" tIns="0" rIns="0" bIns="0" rtlCol="0" anchor="t"/>
+          <a:lstStyle/>
+          <a:p>
+            <a:pPr algn="r" marL="342900" indent="-342900">
+              <a:lnSpc>
+                <a:spcPct val="122000"/>
+              </a:lnSpc>
+              <a:spcAft>
+                <a:spcPts val="1100"/>
+              </a:spcAft>
+              <a:buSzPct val="100000"/>
+              <a:buChar char="•"/>
+            </a:pPr>
+            <a:r>
+              <a:rPr lang="en-US" sz="1400" dirty="0">
+                <a:solidFill>
+                  <a:srgbClr val="31424A"/>
+                </a:solidFill>
+                <a:latin typeface="Arial" pitchFamily="34" charset="0"/>
+                <a:ea typeface="Arial" pitchFamily="34" charset="-122"/>
+                <a:cs typeface="Arial" pitchFamily="34" charset="-120"/>
+              </a:rPr>
+              <a:t>مصر من أكبر منتجي البطاطس في أفريقيا، وتصدّر جزءاً مهماً منها إلى أوروبا والخليج.</a:t>
+            </a:r>
+            <a:endParaRPr lang="en-US" sz="1400" dirty="0"/>
+          </a:p>
+          <a:p>
+            <a:pPr algn="r" marL="342900" indent="-342900">
+              <a:lnSpc>
+                <a:spcPct val="122000"/>
+              </a:lnSpc>
+              <a:spcAft>
+                <a:spcPts val="1100"/>
+              </a:spcAft>
+              <a:buSzPct val="100000"/>
+              <a:buChar char="•"/>
+            </a:pPr>
+            <a:r>
+              <a:rPr lang="en-US" sz="1400" dirty="0">
+                <a:solidFill>
+                  <a:srgbClr val="31424A"/>
+                </a:solidFill>
+                <a:latin typeface="Arial" pitchFamily="34" charset="0"/>
+                <a:ea typeface="Arial" pitchFamily="34" charset="-122"/>
+                <a:cs typeface="Arial" pitchFamily="34" charset="-120"/>
+              </a:rPr>
+              <a:t>تُزرع بطاطس التصدير في المنيا والنوبارية والصالحية، تحت الري المحوري أو بالتنقيط على تربة رملية.</a:t>
+            </a:r>
+            <a:endParaRPr lang="en-US" sz="1400" dirty="0"/>
+          </a:p>
+          <a:p>
+            <a:pPr algn="r" marL="342900" indent="-342900">
+              <a:lnSpc>
+                <a:spcPct val="122000"/>
+              </a:lnSpc>
+              <a:spcAft>
+                <a:spcPts val="1100"/>
+              </a:spcAft>
+              <a:buSzPct val="100000"/>
+              <a:buChar char="•"/>
+            </a:pPr>
+            <a:r>
+              <a:rPr lang="en-US" sz="1400" dirty="0">
+                <a:solidFill>
+                  <a:srgbClr val="31424A"/>
+                </a:solidFill>
+                <a:latin typeface="Arial" pitchFamily="34" charset="0"/>
+                <a:ea typeface="Arial" pitchFamily="34" charset="-122"/>
+                <a:cs typeface="Arial" pitchFamily="34" charset="-120"/>
+              </a:rPr>
+              <a:t>في الأراضي القديمة بالدلتا ما زال الري بالغمر شائعاً، مع فواقد كبيرة وارتفاع في ملوحة التربة.</a:t>
+            </a:r>
+            <a:endParaRPr lang="en-US" sz="1400" dirty="0"/>
+          </a:p>
+          <a:p>
+            <a:pPr algn="r" marL="342900" indent="-342900">
+              <a:lnSpc>
+                <a:spcPct val="122000"/>
+              </a:lnSpc>
+              <a:spcAft>
+                <a:spcPts val="1100"/>
+              </a:spcAft>
+              <a:buSzPct val="100000"/>
+              <a:buChar char="•"/>
+            </a:pPr>
+            <a:r>
+              <a:rPr lang="en-US" sz="1400" dirty="0">
+                <a:solidFill>
+                  <a:srgbClr val="31424A"/>
+                </a:solidFill>
+                <a:latin typeface="Arial" pitchFamily="34" charset="0"/>
+                <a:ea typeface="Arial" pitchFamily="34" charset="-122"/>
+                <a:cs typeface="Arial" pitchFamily="34" charset="-120"/>
+              </a:rPr>
+              <a:t>تشجع الدولة التحول إلى الري الحديث في الأراضي القديمة لتوفير جزء من حصة النيل.</a:t>
+            </a:r>
+            <a:endParaRPr lang="en-US" sz="1400" dirty="0"/>
+          </a:p>
+          <a:p>
+            <a:pPr algn="r" marL="342900" indent="-342900">
+              <a:lnSpc>
+                <a:spcPct val="122000"/>
+              </a:lnSpc>
+              <a:spcAft>
+                <a:spcPts val="1100"/>
+              </a:spcAft>
+              <a:buSzPct val="100000"/>
+              <a:buChar char="•"/>
+            </a:pPr>
+            <a:r>
+              <a:rPr lang="en-US" sz="1400" dirty="0">
+                <a:solidFill>
+                  <a:srgbClr val="31424A"/>
+                </a:solidFill>
+                <a:latin typeface="Arial" pitchFamily="34" charset="0"/>
+                <a:ea typeface="Arial" pitchFamily="34" charset="-122"/>
+                <a:cs typeface="Arial" pitchFamily="34" charset="-120"/>
+              </a:rPr>
+              <a:t>تستفيد الطماطم والبطاطس مباشرة من احتباس الماء في منطقة الجذور، خصوصاً على التربة الرملية.</a:t>
+            </a:r>
+            <a:endParaRPr lang="en-US" sz="1400" dirty="0"/>
+          </a:p>
+        </p:txBody>
       </p:sp>
       <p:sp>
         <p:nvSpPr>
           <p:cNvPr id="6" name="Text 3"/>
-          <p:cNvSpPr txBox="1"/>
-          <p:nvPr/>
-        </p:nvSpPr>
-        <p:spPr>
-          <a:xfrm>
-            <a:off x="8503920" y="2011680"/>
-            <a:ext cx="2834640" cy="457200"/>
-          </a:xfrm>
-          <a:prstGeom prst="rect">
-            <a:avLst/>
-          </a:prstGeom>
-          <a:noFill/>
-          <a:ln/>
-        </p:spPr>
-        <p:txBody>
-          <a:bodyPr wrap="square" lIns="0" tIns="0" rIns="0" bIns="0" rtlCol="0" anchor="ctr"/>
-          <a:lstStyle/>
-          <a:p>
-            <a:pPr rtl="1" algn="r" indent="0" marL="0">
-              <a:buNone/>
-            </a:pPr>
-            <a:r>
-              <a:rPr lang="en-US" sz="1300" b="1" dirty="0">
-                <a:solidFill>
-                  <a:srgbClr val="1C5A73"/>
-                </a:solidFill>
-                <a:latin typeface="Arial" pitchFamily="34" charset="0"/>
-                <a:ea typeface="Arial" pitchFamily="34" charset="-122"/>
-                <a:cs typeface="Arial" pitchFamily="34" charset="-120"/>
-              </a:rPr>
-              <a:t>تُقرأ بتحفّظ</a:t>
-            </a:r>
-            <a:endParaRPr lang="en-US" sz="1300" dirty="0"/>
-          </a:p>
-        </p:txBody>
-      </p:sp>
-      <p:sp>
-        <p:nvSpPr>
-          <p:cNvPr id="7" name="Text 4"/>
-          <p:cNvSpPr txBox="1"/>
-          <p:nvPr/>
-        </p:nvSpPr>
-        <p:spPr>
-          <a:xfrm>
-            <a:off x="8503920" y="2560320"/>
-            <a:ext cx="2834640" cy="3017520"/>
-          </a:xfrm>
-          <a:prstGeom prst="rect">
-            <a:avLst/>
-          </a:prstGeom>
-          <a:noFill/>
-          <a:ln/>
-        </p:spPr>
-        <p:txBody>
-          <a:bodyPr wrap="square" lIns="0" tIns="0" rIns="0" bIns="0" rtlCol="0" anchor="t"/>
-          <a:lstStyle/>
-          <a:p>
-            <a:pPr rtl="1" algn="r" indent="0" marL="0">
-              <a:lnSpc>
-                <a:spcPct val="125000"/>
-              </a:lnSpc>
-              <a:buNone/>
-            </a:pPr>
-            <a:r>
-              <a:rPr lang="en-US" sz="1200" dirty="0">
-                <a:solidFill>
-                  <a:srgbClr val="31424A"/>
-                </a:solidFill>
-                <a:latin typeface="Arial" pitchFamily="34" charset="0"/>
-                <a:ea typeface="Arial" pitchFamily="34" charset="-122"/>
-                <a:cs typeface="Arial" pitchFamily="34" charset="-120"/>
-              </a:rPr>
-              <a:t>نطاقات يعتمدها حاسب الجرعات على موقعنا، لمحصول يُدار إدارة عادية مع وضع EVERGREEN® عند الزراعة.</a:t>
-            </a:r>
-            <a:endParaRPr lang="en-US" sz="1200" dirty="0"/>
-          </a:p>
-          <a:p>
-            <a:pPr rtl="1" algn="r" indent="0" marL="0">
-              <a:lnSpc>
-                <a:spcPct val="125000"/>
-              </a:lnSpc>
-              <a:buNone/>
-            </a:pPr>
-            <a:endParaRPr lang="en-US" sz="1200" dirty="0"/>
-          </a:p>
-          <a:p>
-            <a:pPr rtl="1" algn="r" indent="0" marL="0">
-              <a:lnSpc>
-                <a:spcPct val="125000"/>
-              </a:lnSpc>
-              <a:buNone/>
-            </a:pPr>
-            <a:r>
-              <a:rPr lang="en-US" sz="1200" dirty="0">
-                <a:solidFill>
-                  <a:srgbClr val="31424A"/>
-                </a:solidFill>
-                <a:latin typeface="Arial" pitchFamily="34" charset="0"/>
-                <a:ea typeface="Arial" pitchFamily="34" charset="-122"/>
-                <a:cs typeface="Arial" pitchFamily="34" charset="-120"/>
-              </a:rPr>
-              <a:t>النتيجة الفعلية تتوقف على التربة والمناخ وأسلوب الإدارة. أما الحبوب فلا نعلن فيها أي زيادة دون تجربة ميدانية.</a:t>
-            </a:r>
-            <a:endParaRPr lang="en-US" sz="1200" dirty="0"/>
-          </a:p>
-        </p:txBody>
-      </p:sp>
-      <p:sp>
-        <p:nvSpPr>
-          <p:cNvPr id="8" name="Text 5"/>
           <p:cNvSpPr txBox="1"/>
           <p:nvPr/>
         </p:nvSpPr>
@@ -13006,7 +13723,7 @@
       </p:sp>
       <p:sp>
         <p:nvSpPr>
-          <p:cNvPr id="9" name="Text 6"/>
+          <p:cNvPr id="7" name="Text 4"/>
           <p:cNvSpPr txBox="1"/>
           <p:nvPr/>
         </p:nvSpPr>

--- a/public/documents/countries/egypte.pptx
+++ b/public/documents/countries/egypte.pptx
@@ -125,7 +125,7 @@
 </p:presentation>
 </file>
 
-<file path=ppt/charts/chart40.xml><?xml version="1.0" encoding="utf-8"?>
+<file path=ppt/charts/chart42.xml><?xml version="1.0" encoding="utf-8"?>
 <c:chartSpace xmlns:c="http://schemas.openxmlformats.org/drawingml/2006/chart" xmlns:a="http://schemas.openxmlformats.org/drawingml/2006/main" xmlns:r="http://schemas.openxmlformats.org/officeDocument/2006/relationships">
   <c:date1904 val="0"/>
   <c:roundedCorners val="1"/>
@@ -384,7 +384,7 @@
 </c:chartSpace>
 </file>
 
-<file path=ppt/charts/chart41.xml><?xml version="1.0" encoding="utf-8"?>
+<file path=ppt/charts/chart43.xml><?xml version="1.0" encoding="utf-8"?>
 <c:chartSpace xmlns:c="http://schemas.openxmlformats.org/drawingml/2006/chart" xmlns:a="http://schemas.openxmlformats.org/drawingml/2006/main" xmlns:r="http://schemas.openxmlformats.org/officeDocument/2006/relationships">
   <c:date1904 val="0"/>
   <c:roundedCorners val="1"/>
@@ -629,7 +629,7 @@
 </c:chartSpace>
 </file>
 
-<file path=ppt/charts/chart42.xml><?xml version="1.0" encoding="utf-8"?>
+<file path=ppt/charts/chart44.xml><?xml version="1.0" encoding="utf-8"?>
 <c:chartSpace xmlns:c="http://schemas.openxmlformats.org/drawingml/2006/chart" xmlns:a="http://schemas.openxmlformats.org/drawingml/2006/main" xmlns:r="http://schemas.openxmlformats.org/officeDocument/2006/relationships">
   <c:date1904 val="0"/>
   <c:roundedCorners val="1"/>
@@ -937,7 +937,7 @@
 </c:chartSpace>
 </file>
 
-<file path=ppt/charts/chart43.xml><?xml version="1.0" encoding="utf-8"?>
+<file path=ppt/charts/chart45.xml><?xml version="1.0" encoding="utf-8"?>
 <c:chartSpace xmlns:c="http://schemas.openxmlformats.org/drawingml/2006/chart" xmlns:a="http://schemas.openxmlformats.org/drawingml/2006/main" xmlns:r="http://schemas.openxmlformats.org/officeDocument/2006/relationships">
   <c:date1904 val="0"/>
   <c:roundedCorners val="1"/>
@@ -1302,7 +1302,7 @@
 </c:chartSpace>
 </file>
 
-<file path=ppt/charts/chart44.xml><?xml version="1.0" encoding="utf-8"?>
+<file path=ppt/charts/chart46.xml><?xml version="1.0" encoding="utf-8"?>
 <c:chartSpace xmlns:c="http://schemas.openxmlformats.org/drawingml/2006/chart" xmlns:a="http://schemas.openxmlformats.org/drawingml/2006/main" xmlns:r="http://schemas.openxmlformats.org/officeDocument/2006/relationships">
   <c:date1904 val="0"/>
   <c:roundedCorners val="1"/>
@@ -4092,7 +4092,7 @@
       </p:sp>
       <p:pic>
         <p:nvPicPr>
-          <p:cNvPr id="5" name="Image 1" descr="/workspace/scratch/50eb4f7d8e13/green-solutions-web/public/images/logo-icon.png">    </p:cNvPr>
+          <p:cNvPr id="5" name="Image 1" descr="/home/claude/green-solutions-web/public/images/logo-icon.png">    </p:cNvPr>
           <p:cNvPicPr>
             <a:picLocks noChangeAspect="1"/>
           </p:cNvPicPr>
@@ -4116,7 +4116,7 @@
       </p:pic>
       <p:pic>
         <p:nvPicPr>
-          <p:cNvPr id="6" name="Image 2" descr="/workspace/scratch/50eb4f7d8e13/green-solutions-web/scripts/dossiers/drapeaux/egypte.png">    </p:cNvPr>
+          <p:cNvPr id="6" name="Image 2" descr="/home/claude/green-solutions-web/scripts/dossiers/drapeaux/egypte.png">    </p:cNvPr>
           <p:cNvPicPr>
             <a:picLocks noChangeAspect="1"/>
           </p:cNvPicPr>
@@ -10276,7 +10276,7 @@
                 <a:ea typeface="Arial" pitchFamily="34" charset="-122"/>
                 <a:cs typeface="Arial" pitchFamily="34" charset="-120"/>
               </a:rPr>
-              <a:t>contact@evergreen-ecosorb.com · Green Solutions Groupe AIM SA, 46, route de la Condémine, 1475 Forel, Switzerland</a:t>
+              <a:t>contact@green-solutions-group.com · Green Solutions Groupe AIM SA, 46, route de la Condémine, 1475 Forel, Switzerland</a:t>
             </a:r>
             <a:endParaRPr lang="en-US" sz="1400" dirty="0"/>
           </a:p>
@@ -10284,7 +10284,7 @@
       </p:sp>
       <p:pic>
         <p:nvPicPr>
-          <p:cNvPr id="6" name="Image 1" descr="/workspace/scratch/50eb4f7d8e13/green-solutions-web/scripts/dossiers/sceau-aim-clair.png">    </p:cNvPr>
+          <p:cNvPr id="6" name="Image 1" descr="/home/claude/green-solutions-web/scripts/dossiers/sceau-aim-clair.png">    </p:cNvPr>
           <p:cNvPicPr>
             <a:picLocks noChangeAspect="1"/>
           </p:cNvPicPr>
